--- a/Calgary_Traffic_Midpoint.pptx
+++ b/Calgary_Traffic_Midpoint.pptx
@@ -3,20 +3,21 @@
 <p:presentation xmlns:a="http://schemas.openxmlformats.org/drawingml/2006/main" xmlns:r="http://schemas.openxmlformats.org/officeDocument/2006/relationships" xmlns:p="http://schemas.openxmlformats.org/presentationml/2006/main" saveSubsetFonts="1" autoCompressPictures="0">
   <p:sldMasterIdLst>
     <p:sldMasterId id="2147483648" r:id="rId1"/>
+    <p:sldMasterId id="2147483654" r:id="rId2"/>
   </p:sldMasterIdLst>
   <p:notesMasterIdLst>
-    <p:notesMasterId r:id="rId11"/>
+    <p:notesMasterId r:id="rId12"/>
   </p:notesMasterIdLst>
   <p:sldIdLst>
-    <p:sldId id="256" r:id="rId2"/>
-    <p:sldId id="257" r:id="rId3"/>
-    <p:sldId id="258" r:id="rId4"/>
-    <p:sldId id="259" r:id="rId5"/>
-    <p:sldId id="260" r:id="rId6"/>
-    <p:sldId id="261" r:id="rId7"/>
-    <p:sldId id="262" r:id="rId8"/>
-    <p:sldId id="263" r:id="rId9"/>
-    <p:sldId id="264" r:id="rId10"/>
+    <p:sldId id="256" r:id="rId3"/>
+    <p:sldId id="257" r:id="rId4"/>
+    <p:sldId id="258" r:id="rId5"/>
+    <p:sldId id="259" r:id="rId6"/>
+    <p:sldId id="265" r:id="rId7"/>
+    <p:sldId id="269" r:id="rId8"/>
+    <p:sldId id="270" r:id="rId9"/>
+    <p:sldId id="263" r:id="rId10"/>
+    <p:sldId id="268" r:id="rId11"/>
   </p:sldIdLst>
   <p:sldSz cx="12192000" cy="6858000"/>
   <p:notesSz cx="6858000" cy="12192000"/>
@@ -129,20 +130,19 @@
         </p14:section>
         <p14:section name="Wrangling" id="{3AE2D310-56C6-B243-413B-9658E54EA91D}">
           <p14:sldIdLst>
-            <p14:sldId id="260"/>
+            <p14:sldId id="265"/>
           </p14:sldIdLst>
         </p14:section>
         <p14:section name="Visualizations and findings" id="{FA1E9DF6-5D12-0988-0309-B8E845309660}">
           <p14:sldIdLst>
-            <p14:sldId id="261"/>
-            <p14:sldId id="262"/>
+            <p14:sldId id="269"/>
+            <p14:sldId id="270"/>
             <p14:sldId id="263"/>
+            <p14:sldId id="268"/>
           </p14:sldIdLst>
         </p14:section>
         <p14:section name="Next steps" id="{75CB5C99-DBEE-01FC-6830-C56481DFBFE8}">
-          <p14:sldIdLst>
-            <p14:sldId id="264"/>
-          </p14:sldIdLst>
+          <p14:sldIdLst/>
         </p14:section>
       </p14:sectionLst>
     </p:ext>
@@ -151,6 +151,192 @@
     </p:ext>
   </p:extLst>
 </p:presentation>
+</file>
+
+<file path=ppt/revisionInfo.xml><?xml version="1.0" encoding="utf-8"?>
+<p1510:revInfo xmlns:a="http://schemas.openxmlformats.org/drawingml/2006/main" xmlns:r="http://schemas.openxmlformats.org/officeDocument/2006/relationships" xmlns:p1510="http://schemas.microsoft.com/office/powerpoint/2015/10/main">
+  <p1510:revLst>
+    <p1510:client id="{15E648FC-B5DA-4ABF-A5C3-560713661624}" v="10" dt="2026-10-20T02:50:19.182"/>
+  </p1510:revLst>
+</p1510:revInfo>
+</file>
+
+<file path=ppt/changesInfos/changesInfo1.xml><?xml version="1.0" encoding="utf-8"?>
+<pc:chgInfo xmlns:a="http://schemas.openxmlformats.org/drawingml/2006/main" xmlns:r="http://schemas.openxmlformats.org/officeDocument/2006/relationships" xmlns:ac="http://schemas.microsoft.com/office/drawing/2013/main/command" xmlns:pc="http://schemas.microsoft.com/office/powerpoint/2013/main/command">
+  <pc:docChgLst>
+    <pc:chgData name="Adrian JULVE" userId="f82b89f4-12eb-4305-aed1-96361a4291e8" providerId="ADAL" clId="{8EB18070-9C82-4FD4-B7E0-EC823B03F851}"/>
+    <pc:docChg chg="undo custSel addSld delSld modSld modSection">
+      <pc:chgData name="Adrian JULVE" userId="f82b89f4-12eb-4305-aed1-96361a4291e8" providerId="ADAL" clId="{8EB18070-9C82-4FD4-B7E0-EC823B03F851}" dt="2026-10-20T02:50:30.364" v="159" actId="20577"/>
+      <pc:docMkLst>
+        <pc:docMk/>
+      </pc:docMkLst>
+      <pc:sldChg chg="modSp mod">
+        <pc:chgData name="Adrian JULVE" userId="f82b89f4-12eb-4305-aed1-96361a4291e8" providerId="ADAL" clId="{8EB18070-9C82-4FD4-B7E0-EC823B03F851}" dt="2026-10-20T02:42:45.986" v="115" actId="20577"/>
+        <pc:sldMkLst>
+          <pc:docMk/>
+          <pc:sldMk cId="0" sldId="256"/>
+        </pc:sldMkLst>
+        <pc:spChg chg="mod">
+          <ac:chgData name="Adrian JULVE" userId="f82b89f4-12eb-4305-aed1-96361a4291e8" providerId="ADAL" clId="{8EB18070-9C82-4FD4-B7E0-EC823B03F851}" dt="2026-10-20T02:42:45.986" v="115" actId="20577"/>
+          <ac:spMkLst>
+            <pc:docMk/>
+            <pc:sldMk cId="0" sldId="256"/>
+            <ac:spMk id="14" creationId="{00000000-0000-0000-0000-000000000000}"/>
+          </ac:spMkLst>
+        </pc:spChg>
+      </pc:sldChg>
+      <pc:sldChg chg="modSp mod">
+        <pc:chgData name="Adrian JULVE" userId="f82b89f4-12eb-4305-aed1-96361a4291e8" providerId="ADAL" clId="{8EB18070-9C82-4FD4-B7E0-EC823B03F851}" dt="2026-10-20T02:23:51.385" v="5" actId="20577"/>
+        <pc:sldMkLst>
+          <pc:docMk/>
+          <pc:sldMk cId="0" sldId="259"/>
+        </pc:sldMkLst>
+        <pc:graphicFrameChg chg="modGraphic">
+          <ac:chgData name="Adrian JULVE" userId="f82b89f4-12eb-4305-aed1-96361a4291e8" providerId="ADAL" clId="{8EB18070-9C82-4FD4-B7E0-EC823B03F851}" dt="2026-10-20T02:23:51.385" v="5" actId="20577"/>
+          <ac:graphicFrameMkLst>
+            <pc:docMk/>
+            <pc:sldMk cId="0" sldId="259"/>
+            <ac:graphicFrameMk id="5" creationId="{00000000-0000-0000-0000-000000000000}"/>
+          </ac:graphicFrameMkLst>
+        </pc:graphicFrameChg>
+      </pc:sldChg>
+      <pc:sldChg chg="del">
+        <pc:chgData name="Adrian JULVE" userId="f82b89f4-12eb-4305-aed1-96361a4291e8" providerId="ADAL" clId="{8EB18070-9C82-4FD4-B7E0-EC823B03F851}" dt="2026-10-20T02:28:55.340" v="7" actId="2696"/>
+        <pc:sldMkLst>
+          <pc:docMk/>
+          <pc:sldMk cId="0" sldId="260"/>
+        </pc:sldMkLst>
+      </pc:sldChg>
+      <pc:sldChg chg="del">
+        <pc:chgData name="Adrian JULVE" userId="f82b89f4-12eb-4305-aed1-96361a4291e8" providerId="ADAL" clId="{8EB18070-9C82-4FD4-B7E0-EC823B03F851}" dt="2026-10-20T02:43:35.697" v="130" actId="2696"/>
+        <pc:sldMkLst>
+          <pc:docMk/>
+          <pc:sldMk cId="0" sldId="261"/>
+        </pc:sldMkLst>
+      </pc:sldChg>
+      <pc:sldChg chg="modSp del mod">
+        <pc:chgData name="Adrian JULVE" userId="f82b89f4-12eb-4305-aed1-96361a4291e8" providerId="ADAL" clId="{8EB18070-9C82-4FD4-B7E0-EC823B03F851}" dt="2026-10-20T02:50:22.823" v="155" actId="2696"/>
+        <pc:sldMkLst>
+          <pc:docMk/>
+          <pc:sldMk cId="0" sldId="262"/>
+        </pc:sldMkLst>
+        <pc:spChg chg="mod">
+          <ac:chgData name="Adrian JULVE" userId="f82b89f4-12eb-4305-aed1-96361a4291e8" providerId="ADAL" clId="{8EB18070-9C82-4FD4-B7E0-EC823B03F851}" dt="2026-10-20T02:45:29.640" v="153" actId="207"/>
+          <ac:spMkLst>
+            <pc:docMk/>
+            <pc:sldMk cId="0" sldId="262"/>
+            <ac:spMk id="8" creationId="{00000000-0000-0000-0000-000000000000}"/>
+          </ac:spMkLst>
+        </pc:spChg>
+      </pc:sldChg>
+      <pc:sldChg chg="addSp delSp mod">
+        <pc:chgData name="Adrian JULVE" userId="f82b89f4-12eb-4305-aed1-96361a4291e8" providerId="ADAL" clId="{8EB18070-9C82-4FD4-B7E0-EC823B03F851}" dt="2026-10-20T02:41:21.020" v="77" actId="22"/>
+        <pc:sldMkLst>
+          <pc:docMk/>
+          <pc:sldMk cId="0" sldId="263"/>
+        </pc:sldMkLst>
+        <pc:spChg chg="add del">
+          <ac:chgData name="Adrian JULVE" userId="f82b89f4-12eb-4305-aed1-96361a4291e8" providerId="ADAL" clId="{8EB18070-9C82-4FD4-B7E0-EC823B03F851}" dt="2026-10-20T02:41:21.020" v="77" actId="22"/>
+          <ac:spMkLst>
+            <pc:docMk/>
+            <pc:sldMk cId="0" sldId="263"/>
+            <ac:spMk id="8" creationId="{D06B2601-7377-F556-DB7A-21DF2EDFACF3}"/>
+          </ac:spMkLst>
+        </pc:spChg>
+      </pc:sldChg>
+      <pc:sldChg chg="del">
+        <pc:chgData name="Adrian JULVE" userId="f82b89f4-12eb-4305-aed1-96361a4291e8" providerId="ADAL" clId="{8EB18070-9C82-4FD4-B7E0-EC823B03F851}" dt="2026-10-20T02:41:08.655" v="75" actId="2696"/>
+        <pc:sldMkLst>
+          <pc:docMk/>
+          <pc:sldMk cId="0" sldId="264"/>
+        </pc:sldMkLst>
+      </pc:sldChg>
+      <pc:sldChg chg="addSp delSp modSp add mod">
+        <pc:chgData name="Adrian JULVE" userId="f82b89f4-12eb-4305-aed1-96361a4291e8" providerId="ADAL" clId="{8EB18070-9C82-4FD4-B7E0-EC823B03F851}" dt="2026-10-20T02:39:17.137" v="74" actId="207"/>
+        <pc:sldMkLst>
+          <pc:docMk/>
+          <pc:sldMk cId="0" sldId="265"/>
+        </pc:sldMkLst>
+        <pc:spChg chg="mod">
+          <ac:chgData name="Adrian JULVE" userId="f82b89f4-12eb-4305-aed1-96361a4291e8" providerId="ADAL" clId="{8EB18070-9C82-4FD4-B7E0-EC823B03F851}" dt="2026-10-20T02:39:17.137" v="74" actId="207"/>
+          <ac:spMkLst>
+            <pc:docMk/>
+            <pc:sldMk cId="0" sldId="265"/>
+            <ac:spMk id="7" creationId="{00000000-0000-0000-0000-000000000000}"/>
+          </ac:spMkLst>
+        </pc:spChg>
+        <pc:spChg chg="add del">
+          <ac:chgData name="Adrian JULVE" userId="f82b89f4-12eb-4305-aed1-96361a4291e8" providerId="ADAL" clId="{8EB18070-9C82-4FD4-B7E0-EC823B03F851}" dt="2026-10-20T02:38:27.239" v="67" actId="22"/>
+          <ac:spMkLst>
+            <pc:docMk/>
+            <pc:sldMk cId="0" sldId="265"/>
+            <ac:spMk id="34" creationId="{53BA30C6-B5F8-FC02-4601-642D46C0E875}"/>
+          </ac:spMkLst>
+        </pc:spChg>
+        <pc:spChg chg="add del">
+          <ac:chgData name="Adrian JULVE" userId="f82b89f4-12eb-4305-aed1-96361a4291e8" providerId="ADAL" clId="{8EB18070-9C82-4FD4-B7E0-EC823B03F851}" dt="2026-10-20T02:38:32.024" v="69" actId="22"/>
+          <ac:spMkLst>
+            <pc:docMk/>
+            <pc:sldMk cId="0" sldId="265"/>
+            <ac:spMk id="36" creationId="{A38438A4-4451-46B4-9A52-30E2E7861E14}"/>
+          </ac:spMkLst>
+        </pc:spChg>
+      </pc:sldChg>
+      <pc:sldChg chg="new del">
+        <pc:chgData name="Adrian JULVE" userId="f82b89f4-12eb-4305-aed1-96361a4291e8" providerId="ADAL" clId="{8EB18070-9C82-4FD4-B7E0-EC823B03F851}" dt="2026-10-20T02:42:08.948" v="82" actId="2696"/>
+        <pc:sldMkLst>
+          <pc:docMk/>
+          <pc:sldMk cId="2913478996" sldId="266"/>
+        </pc:sldMkLst>
+      </pc:sldChg>
+      <pc:sldChg chg="modSp add del mod setBg">
+        <pc:chgData name="Adrian JULVE" userId="f82b89f4-12eb-4305-aed1-96361a4291e8" providerId="ADAL" clId="{8EB18070-9C82-4FD4-B7E0-EC823B03F851}" dt="2026-10-20T02:42:18.465" v="90" actId="20577"/>
+        <pc:sldMkLst>
+          <pc:docMk/>
+          <pc:sldMk cId="0" sldId="268"/>
+        </pc:sldMkLst>
+        <pc:spChg chg="mod">
+          <ac:chgData name="Adrian JULVE" userId="f82b89f4-12eb-4305-aed1-96361a4291e8" providerId="ADAL" clId="{8EB18070-9C82-4FD4-B7E0-EC823B03F851}" dt="2026-10-20T02:42:18.465" v="90" actId="20577"/>
+          <ac:spMkLst>
+            <pc:docMk/>
+            <pc:sldMk cId="0" sldId="268"/>
+            <ac:spMk id="13" creationId="{00000000-0000-0000-0000-000000000000}"/>
+          </ac:spMkLst>
+        </pc:spChg>
+      </pc:sldChg>
+      <pc:sldChg chg="modSp add mod modShow">
+        <pc:chgData name="Adrian JULVE" userId="f82b89f4-12eb-4305-aed1-96361a4291e8" providerId="ADAL" clId="{8EB18070-9C82-4FD4-B7E0-EC823B03F851}" dt="2026-10-20T02:43:29.843" v="129" actId="20577"/>
+        <pc:sldMkLst>
+          <pc:docMk/>
+          <pc:sldMk cId="0" sldId="269"/>
+        </pc:sldMkLst>
+        <pc:spChg chg="mod">
+          <ac:chgData name="Adrian JULVE" userId="f82b89f4-12eb-4305-aed1-96361a4291e8" providerId="ADAL" clId="{8EB18070-9C82-4FD4-B7E0-EC823B03F851}" dt="2026-10-20T02:43:29.843" v="129" actId="20577"/>
+          <ac:spMkLst>
+            <pc:docMk/>
+            <pc:sldMk cId="0" sldId="269"/>
+            <ac:spMk id="3" creationId="{00000000-0000-0000-0000-000000000000}"/>
+          </ac:spMkLst>
+        </pc:spChg>
+      </pc:sldChg>
+      <pc:sldChg chg="modSp add mod">
+        <pc:chgData name="Adrian JULVE" userId="f82b89f4-12eb-4305-aed1-96361a4291e8" providerId="ADAL" clId="{8EB18070-9C82-4FD4-B7E0-EC823B03F851}" dt="2026-10-20T02:50:30.364" v="159" actId="20577"/>
+        <pc:sldMkLst>
+          <pc:docMk/>
+          <pc:sldMk cId="0" sldId="270"/>
+        </pc:sldMkLst>
+        <pc:spChg chg="mod">
+          <ac:chgData name="Adrian JULVE" userId="f82b89f4-12eb-4305-aed1-96361a4291e8" providerId="ADAL" clId="{8EB18070-9C82-4FD4-B7E0-EC823B03F851}" dt="2026-10-20T02:50:30.364" v="159" actId="20577"/>
+          <ac:spMkLst>
+            <pc:docMk/>
+            <pc:sldMk cId="0" sldId="270"/>
+            <ac:spMk id="8" creationId="{00000000-0000-0000-0000-000000000000}"/>
+          </ac:spMkLst>
+        </pc:spChg>
+      </pc:sldChg>
+    </pc:docChg>
+  </pc:docChgLst>
+</pc:chgInfo>
 </file>
 
 <file path=ppt/notesMasters/notesMaster1.xml><?xml version="1.0" encoding="utf-8"?>
@@ -672,7 +858,7 @@
           <a:p>
             <a:r>
               <a:rPr lang="en-US" dirty="0"/>
-              <a:t>Here’s how I prepared the data. First, each incident only had a map point, so I used Python to read every area’s boundary outline and check which outline contains each point. This is called a point-in-polygon test. 785 incidents fall outside every area and stay unassigned. Second, the census file had one row per measure, so I reshaped it to one row per area and cleaned up the number formats. Third, the times were in UTC, so I shifted them to Calgary time, allowing for daylight saving, and built hour, weekday and month columns. Fourth, I set each incident’s type from keywords in its description and flagged highway incidents by street name. Fifth, to compare areas fairly, I divided each area’s incidents by its population and the nine years, using only local roads in residential communities. Finally, I filtered to the nine complete years, which leaves 58,536 incidents.</a:t>
+              <a:t>Here’s how I prepared the data. First, each incident only had a map point, so I used Python to read every area’s boundary outline and check which outline contains each point. This is called a point-in-polygon test. 785 incidents fall outside every area and stay unassigned. Second, the census file had one row per measure, so I reshaped it to one row per area and cleaned up the number formats. Third, I set each incident’s type from keywords in its description and flagged highway incidents by street name. Fourth, I filtered to the nine complete years, which leaves 58,536 incidents. Fifth, to compare areas fairly, I divided each area’s incidents by its population and the nine years, using only local roads in residential communities. Finally, I wrote DAX measures that power the dashboard: each selection’s rate compared with the city average, the busiest hour, a monthly rate that adjusts for missing data, and the correlations between neighbourhood traits and incident rates.</a:t>
             </a:r>
           </a:p>
         </p:txBody>
@@ -759,7 +945,7 @@
           <a:p>
             <a:r>
               <a:rPr lang="en-US" dirty="0"/>
-              <a:t>This is the dashboard as it stands. Across the top are four KPIs that update with the filters. The main visual is a bivariate map: each area is coloured by its median income and its incident rate at the same time, and clicking an area or a legend square fills in the details panel. On the right are the time patterns, and in the bottom right a chart linking incident rates to other neighbourhood traits. Everything responds to the year, incident type and community type filters.</a:t>
+              <a:t>Backup for the live demo, about 2 minutes. Left: the default view, with all 113 areas coloured by income and incident rate, and every chart showing the whole city. Right: the same dashboard after one click on the legend square for lower-income, high incident-rate areas. The map highlights those 16 areas, mostly in the east. The details panel summarises the group: about 14% of Calgary’s population, a median income range of roughly $29,000 to $42,000, and a local incident rate about 2.5 times the city average. The KPIs, heatmap and month chart all filter to those areas, so you can see their busiest hour moves to 4 to 5 PM. If there’s time, open the live report from the link and click an individual area.</a:t>
             </a:r>
           </a:p>
         </p:txBody>
@@ -779,11 +965,71 @@
           <a:bodyPr/>
           <a:lstStyle/>
           <a:p>
+            <a:pPr marL="0" marR="0" lvl="0" indent="0" algn="l" defTabSz="914400" rtl="0" eaLnBrk="1" fontAlgn="auto" latinLnBrk="0" hangingPunct="1">
+              <a:lnSpc>
+                <a:spcPct val="100000"/>
+              </a:lnSpc>
+              <a:spcBef>
+                <a:spcPts val="0"/>
+              </a:spcBef>
+              <a:spcAft>
+                <a:spcPts val="0"/>
+              </a:spcAft>
+              <a:buClrTx/>
+              <a:buSzTx/>
+              <a:buFontTx/>
+              <a:buNone/>
+              <a:tabLst/>
+              <a:defRPr/>
+            </a:pPr>
             <a:fld id="{F7021451-1387-4CA6-816F-3879F97B5CBC}" type="slidenum">
-              <a:rPr lang="en-US"/>
+              <a:rPr kumimoji="0" lang="en-US" sz="1800" b="0" i="0" u="none" strike="noStrike" kern="1200" cap="none" spc="0" normalizeH="0" baseline="0" noProof="0">
+                <a:ln>
+                  <a:noFill/>
+                </a:ln>
+                <a:solidFill>
+                  <a:prstClr val="black"/>
+                </a:solidFill>
+                <a:effectLst/>
+                <a:uLnTx/>
+                <a:uFillTx/>
+                <a:latin typeface="Aptos" panose="02110004020202020204"/>
+                <a:ea typeface="+mn-ea"/>
+                <a:cs typeface="+mn-cs"/>
+              </a:rPr>
+              <a:pPr marL="0" marR="0" lvl="0" indent="0" algn="l" defTabSz="914400" rtl="0" eaLnBrk="1" fontAlgn="auto" latinLnBrk="0" hangingPunct="1">
+                <a:lnSpc>
+                  <a:spcPct val="100000"/>
+                </a:lnSpc>
+                <a:spcBef>
+                  <a:spcPts val="0"/>
+                </a:spcBef>
+                <a:spcAft>
+                  <a:spcPts val="0"/>
+                </a:spcAft>
+                <a:buClrTx/>
+                <a:buSzTx/>
+                <a:buFontTx/>
+                <a:buNone/>
+                <a:tabLst/>
+                <a:defRPr/>
+              </a:pPr>
               <a:t>6</a:t>
             </a:fld>
-            <a:endParaRPr lang="en-US"/>
+            <a:endParaRPr kumimoji="0" lang="en-US" sz="1800" b="0" i="0" u="none" strike="noStrike" kern="1200" cap="none" spc="0" normalizeH="0" baseline="0" noProof="0">
+              <a:ln>
+                <a:noFill/>
+              </a:ln>
+              <a:solidFill>
+                <a:prstClr val="black"/>
+              </a:solidFill>
+              <a:effectLst/>
+              <a:uLnTx/>
+              <a:uFillTx/>
+              <a:latin typeface="Aptos" panose="02110004020202020204"/>
+              <a:ea typeface="+mn-ea"/>
+              <a:cs typeface="+mn-cs"/>
+            </a:endParaRPr>
           </a:p>
         </p:txBody>
       </p:sp>
@@ -846,7 +1092,7 @@
           <a:p>
             <a:r>
               <a:rPr lang="en-US" dirty="0"/>
-              <a:t>Here’s what the data shows so far. Of the 37 lowest-income areas, 16 land in the highest incident-rate group, compared with 11 of the 38 highest-income areas. Grouped into fifths by income, the lowest-income fifth has about 1.7 times the local incident rate of the highest. But income alone is a weak signal: its correlation is only minus 0.22. Renter share, at plus 0.68, and the share of low-income adults and recent movers, both around 0.63, track incident rates much more closely. Car-oriented suburbs of detached homes have the lowest rates. So housing and mobility seem to matter more than income itself.</a:t>
+              <a:t>Here’s what the map itself shows. Each area is coloured by two things at once: its median income and its local incident rate. Two groups stand out, both with 16 areas each. Sixteen lower-income areas have high incident rates, shown in pink, and sixteen higher-income areas have low incident rates, shown in blue. They’re the two largest groups on the map, and mirror images of each other. Geographically, the pink areas line the east side of the city, while the blue areas fill the west and south. The exception is the city centre: 11 higher-income areas still have high rates, shown in dark purple, mostly downtown and in the inner city, where commuters and through-traffic add incidents that resident-based rates don’t account for.</a:t>
             </a:r>
           </a:p>
         </p:txBody>
@@ -866,11 +1112,71 @@
           <a:bodyPr/>
           <a:lstStyle/>
           <a:p>
+            <a:pPr marL="0" marR="0" lvl="0" indent="0" algn="l" defTabSz="914400" rtl="0" eaLnBrk="1" fontAlgn="auto" latinLnBrk="0" hangingPunct="1">
+              <a:lnSpc>
+                <a:spcPct val="100000"/>
+              </a:lnSpc>
+              <a:spcBef>
+                <a:spcPts val="0"/>
+              </a:spcBef>
+              <a:spcAft>
+                <a:spcPts val="0"/>
+              </a:spcAft>
+              <a:buClrTx/>
+              <a:buSzTx/>
+              <a:buFontTx/>
+              <a:buNone/>
+              <a:tabLst/>
+              <a:defRPr/>
+            </a:pPr>
             <a:fld id="{F7021451-1387-4CA6-816F-3879F97B5CBC}" type="slidenum">
-              <a:rPr lang="en-US"/>
+              <a:rPr kumimoji="0" lang="en-US" sz="1800" b="0" i="0" u="none" strike="noStrike" kern="1200" cap="none" spc="0" normalizeH="0" baseline="0" noProof="0">
+                <a:ln>
+                  <a:noFill/>
+                </a:ln>
+                <a:solidFill>
+                  <a:prstClr val="black"/>
+                </a:solidFill>
+                <a:effectLst/>
+                <a:uLnTx/>
+                <a:uFillTx/>
+                <a:latin typeface="Aptos" panose="02110004020202020204"/>
+                <a:ea typeface="+mn-ea"/>
+                <a:cs typeface="+mn-cs"/>
+              </a:rPr>
+              <a:pPr marL="0" marR="0" lvl="0" indent="0" algn="l" defTabSz="914400" rtl="0" eaLnBrk="1" fontAlgn="auto" latinLnBrk="0" hangingPunct="1">
+                <a:lnSpc>
+                  <a:spcPct val="100000"/>
+                </a:lnSpc>
+                <a:spcBef>
+                  <a:spcPts val="0"/>
+                </a:spcBef>
+                <a:spcAft>
+                  <a:spcPts val="0"/>
+                </a:spcAft>
+                <a:buClrTx/>
+                <a:buSzTx/>
+                <a:buFontTx/>
+                <a:buNone/>
+                <a:tabLst/>
+                <a:defRPr/>
+              </a:pPr>
               <a:t>7</a:t>
             </a:fld>
-            <a:endParaRPr lang="en-US"/>
+            <a:endParaRPr kumimoji="0" lang="en-US" sz="1800" b="0" i="0" u="none" strike="noStrike" kern="1200" cap="none" spc="0" normalizeH="0" baseline="0" noProof="0">
+              <a:ln>
+                <a:noFill/>
+              </a:ln>
+              <a:solidFill>
+                <a:prstClr val="black"/>
+              </a:solidFill>
+              <a:effectLst/>
+              <a:uLnTx/>
+              <a:uFillTx/>
+              <a:latin typeface="Aptos" panose="02110004020202020204"/>
+              <a:ea typeface="+mn-ea"/>
+              <a:cs typeface="+mn-cs"/>
+            </a:endParaRPr>
           </a:p>
         </p:txBody>
       </p:sp>
@@ -1020,7 +1326,7 @@
           <a:p>
             <a:r>
               <a:rPr lang="en-US" dirty="0"/>
-              <a:t>For the second half, I have four next steps. First, the rate uses residents, which overstates places like downtown and the industrial east that pull in commuters, so I want to account for traffic volume. Second, I want to look at who is hurt, comparing pedestrian and cyclist incidents across income groups. Third, I’ll test whether the gap between income groups has grown since 2020. And finally, I’ll write up the limits: these are patterns across areas, not individual risk, and correlations don’t show cause. Thanks, and I’m happy to take questions.</a:t>
+              <a:t>[9:45 – 10:00] Thanks for listening. I’m happy to take questions, or to go back into the dashboard to look at any area you’re curious about.</a:t>
             </a:r>
           </a:p>
         </p:txBody>
@@ -1040,11 +1346,71 @@
           <a:bodyPr/>
           <a:lstStyle/>
           <a:p>
+            <a:pPr marL="0" marR="0" lvl="0" indent="0" algn="l" defTabSz="914400" rtl="0" eaLnBrk="1" fontAlgn="auto" latinLnBrk="0" hangingPunct="1">
+              <a:lnSpc>
+                <a:spcPct val="100000"/>
+              </a:lnSpc>
+              <a:spcBef>
+                <a:spcPts val="0"/>
+              </a:spcBef>
+              <a:spcAft>
+                <a:spcPts val="0"/>
+              </a:spcAft>
+              <a:buClrTx/>
+              <a:buSzTx/>
+              <a:buFontTx/>
+              <a:buNone/>
+              <a:tabLst/>
+              <a:defRPr/>
+            </a:pPr>
             <a:fld id="{F7021451-1387-4CA6-816F-3879F97B5CBC}" type="slidenum">
-              <a:rPr lang="en-US"/>
+              <a:rPr kumimoji="0" lang="en-US" sz="1800" b="0" i="0" u="none" strike="noStrike" kern="1200" cap="none" spc="0" normalizeH="0" baseline="0" noProof="0">
+                <a:ln>
+                  <a:noFill/>
+                </a:ln>
+                <a:solidFill>
+                  <a:prstClr val="black"/>
+                </a:solidFill>
+                <a:effectLst/>
+                <a:uLnTx/>
+                <a:uFillTx/>
+                <a:latin typeface="Aptos" panose="02110004020202020204"/>
+                <a:ea typeface="+mn-ea"/>
+                <a:cs typeface="+mn-cs"/>
+              </a:rPr>
+              <a:pPr marL="0" marR="0" lvl="0" indent="0" algn="l" defTabSz="914400" rtl="0" eaLnBrk="1" fontAlgn="auto" latinLnBrk="0" hangingPunct="1">
+                <a:lnSpc>
+                  <a:spcPct val="100000"/>
+                </a:lnSpc>
+                <a:spcBef>
+                  <a:spcPts val="0"/>
+                </a:spcBef>
+                <a:spcAft>
+                  <a:spcPts val="0"/>
+                </a:spcAft>
+                <a:buClrTx/>
+                <a:buSzTx/>
+                <a:buFontTx/>
+                <a:buNone/>
+                <a:tabLst/>
+                <a:defRPr/>
+              </a:pPr>
               <a:t>9</a:t>
             </a:fld>
-            <a:endParaRPr lang="en-US"/>
+            <a:endParaRPr kumimoji="0" lang="en-US" sz="1800" b="0" i="0" u="none" strike="noStrike" kern="1200" cap="none" spc="0" normalizeH="0" baseline="0" noProof="0">
+              <a:ln>
+                <a:noFill/>
+              </a:ln>
+              <a:solidFill>
+                <a:prstClr val="black"/>
+              </a:solidFill>
+              <a:effectLst/>
+              <a:uLnTx/>
+              <a:uFillTx/>
+              <a:latin typeface="Aptos" panose="02110004020202020204"/>
+              <a:ea typeface="+mn-ea"/>
+              <a:cs typeface="+mn-cs"/>
+            </a:endParaRPr>
           </a:p>
         </p:txBody>
       </p:sp>
@@ -1348,6 +1714,144 @@
         </a:xfrm>
       </p:grpSpPr>
     </p:spTree>
+  </p:cSld>
+  <p:clrMapOvr>
+    <a:masterClrMapping/>
+  </p:clrMapOvr>
+</p:sldLayout>
+</file>
+
+<file path=ppt/slideLayouts/slideLayout6.xml><?xml version="1.0" encoding="utf-8"?>
+<p:sldLayout xmlns:a="http://schemas.openxmlformats.org/drawingml/2006/main" xmlns:r="http://schemas.openxmlformats.org/officeDocument/2006/relationships" xmlns:p="http://schemas.openxmlformats.org/presentationml/2006/main">
+  <p:cSld name="Title and body">
+    <p:bg>
+      <p:bgPr>
+        <a:solidFill>
+          <a:srgbClr val="F4EEE3"/>
+        </a:solidFill>
+        <a:effectLst/>
+      </p:bgPr>
+    </p:bg>
+    <p:spTree>
+      <p:nvGrpSpPr>
+        <p:cNvPr id="1" name=""/>
+        <p:cNvGrpSpPr/>
+        <p:nvPr/>
+      </p:nvGrpSpPr>
+      <p:grpSpPr>
+        <a:xfrm>
+          <a:off x="0" y="0"/>
+          <a:ext cx="0" cy="0"/>
+          <a:chOff x="0" y="0"/>
+          <a:chExt cx="0" cy="0"/>
+        </a:xfrm>
+      </p:grpSpPr>
+      <p:sp>
+        <p:nvSpPr>
+          <p:cNvPr id="2" name="Title Placeholder 1"/>
+          <p:cNvSpPr>
+            <a:spLocks noGrp="1"/>
+          </p:cNvSpPr>
+          <p:nvPr>
+            <p:ph type="title"/>
+          </p:nvPr>
+        </p:nvSpPr>
+        <p:spPr>
+          <a:xfrm>
+            <a:off x="812800" y="812800"/>
+            <a:ext cx="10566400" cy="467360"/>
+          </a:xfrm>
+          <a:prstGeom prst="rect">
+            <a:avLst/>
+          </a:prstGeom>
+          <a:noFill/>
+          <a:ln/>
+        </p:spPr>
+        <p:txBody>
+          <a:bodyPr wrap="square" lIns="0" tIns="0" rIns="0" bIns="0" rtlCol="0" anchor="t"/>
+          <a:lstStyle>
+            <a:lvl1pPr marL="0" indent="0" algn="l">
+              <a:lnSpc>
+                <a:spcPct val="115000"/>
+              </a:lnSpc>
+              <a:buNone/>
+              <a:defRPr lang="en-US" sz="3200" dirty="0">
+                <a:solidFill>
+                  <a:srgbClr val="2B2B30"/>
+                </a:solidFill>
+                <a:latin typeface="Libre Baskerville" pitchFamily="34" charset="0"/>
+                <a:ea typeface="Libre Baskerville" pitchFamily="34" charset="-122"/>
+                <a:cs typeface="Libre Baskerville" pitchFamily="34" charset="-120"/>
+              </a:defRPr>
+            </a:lvl1pPr>
+          </a:lstStyle>
+          <a:p>
+            <a:pPr marL="0" indent="0" algn="l">
+              <a:lnSpc>
+                <a:spcPct val="115000"/>
+              </a:lnSpc>
+              <a:buNone/>
+            </a:pPr>
+            <a:endParaRPr lang="en-US" sz="3200" dirty="0"/>
+          </a:p>
+        </p:txBody>
+      </p:sp>
+      <p:sp>
+        <p:nvSpPr>
+          <p:cNvPr id="3" name="Text Placeholder 2"/>
+          <p:cNvSpPr>
+            <a:spLocks noGrp="1"/>
+          </p:cNvSpPr>
+          <p:nvPr>
+            <p:ph type="body" idx="101"/>
+          </p:nvPr>
+        </p:nvSpPr>
+        <p:spPr>
+          <a:xfrm>
+            <a:off x="812800" y="1584960"/>
+            <a:ext cx="10566400" cy="4460240"/>
+          </a:xfrm>
+          <a:prstGeom prst="rect">
+            <a:avLst/>
+          </a:prstGeom>
+          <a:noFill/>
+          <a:ln/>
+        </p:spPr>
+        <p:txBody>
+          <a:bodyPr wrap="square" lIns="0" tIns="0" rIns="0" bIns="0" rtlCol="0" anchor="t"/>
+          <a:lstStyle>
+            <a:lvl1pPr marL="0" indent="0" algn="l">
+              <a:lnSpc>
+                <a:spcPct val="140000"/>
+              </a:lnSpc>
+              <a:buNone/>
+              <a:defRPr lang="en-US" sz="1600" dirty="0">
+                <a:solidFill>
+                  <a:srgbClr val="2B2B30"/>
+                </a:solidFill>
+                <a:latin typeface="Public Sans" pitchFamily="34" charset="0"/>
+                <a:ea typeface="Public Sans" pitchFamily="34" charset="-122"/>
+                <a:cs typeface="Public Sans" pitchFamily="34" charset="-120"/>
+              </a:defRPr>
+            </a:lvl1pPr>
+          </a:lstStyle>
+          <a:p>
+            <a:pPr marL="0" indent="0" algn="l">
+              <a:lnSpc>
+                <a:spcPct val="140000"/>
+              </a:lnSpc>
+              <a:buNone/>
+            </a:pPr>
+            <a:endParaRPr lang="en-US" sz="1600" dirty="0"/>
+          </a:p>
+        </p:txBody>
+      </p:sp>
+    </p:spTree>
+    <p:extLst>
+      <p:ext uri="{BB962C8B-B14F-4D97-AF65-F5344CB8AC3E}">
+        <p14:creationId xmlns:p14="http://schemas.microsoft.com/office/powerpoint/2010/main" val="2314125071"/>
+      </p:ext>
+    </p:extLst>
   </p:cSld>
   <p:clrMapOvr>
     <a:masterClrMapping/>
@@ -1641,6 +2145,396 @@
 </p:sldMaster>
 </file>
 
+<file path=ppt/slideMasters/slideMaster2.xml><?xml version="1.0" encoding="utf-8"?>
+<p:sldMaster xmlns:a="http://schemas.openxmlformats.org/drawingml/2006/main" xmlns:r="http://schemas.openxmlformats.org/officeDocument/2006/relationships" xmlns:p="http://schemas.openxmlformats.org/presentationml/2006/main">
+  <p:cSld>
+    <p:bg>
+      <p:bgPr>
+        <a:solidFill>
+          <a:srgbClr val="F4EEE3"/>
+        </a:solidFill>
+        <a:effectLst/>
+      </p:bgPr>
+    </p:bg>
+    <p:spTree>
+      <p:nvGrpSpPr>
+        <p:cNvPr id="1" name=""/>
+        <p:cNvGrpSpPr/>
+        <p:nvPr/>
+      </p:nvGrpSpPr>
+      <p:grpSpPr>
+        <a:xfrm>
+          <a:off x="0" y="0"/>
+          <a:ext cx="0" cy="0"/>
+          <a:chOff x="0" y="0"/>
+          <a:chExt cx="0" cy="0"/>
+        </a:xfrm>
+      </p:grpSpPr>
+      <p:sp>
+        <p:nvSpPr>
+          <p:cNvPr id="2" name="Title Placeholder 1"/>
+          <p:cNvSpPr>
+            <a:spLocks noGrp="1"/>
+          </p:cNvSpPr>
+          <p:nvPr>
+            <p:ph type="title"/>
+          </p:nvPr>
+        </p:nvSpPr>
+        <p:spPr>
+          <a:xfrm>
+            <a:off x="812800" y="812800"/>
+            <a:ext cx="10566400" cy="467360"/>
+          </a:xfrm>
+          <a:prstGeom prst="rect">
+            <a:avLst/>
+          </a:prstGeom>
+          <a:noFill/>
+          <a:ln/>
+        </p:spPr>
+        <p:txBody>
+          <a:bodyPr wrap="square" lIns="0" tIns="0" rIns="0" bIns="0" rtlCol="0" anchor="t"/>
+          <a:lstStyle>
+            <a:lvl1pPr marL="0" indent="0" algn="l">
+              <a:lnSpc>
+                <a:spcPct val="115000"/>
+              </a:lnSpc>
+              <a:buNone/>
+              <a:defRPr lang="en-US" sz="3200" dirty="0">
+                <a:solidFill>
+                  <a:srgbClr val="2B2B30"/>
+                </a:solidFill>
+                <a:latin typeface="Libre Baskerville" pitchFamily="34" charset="0"/>
+                <a:ea typeface="Libre Baskerville" pitchFamily="34" charset="-122"/>
+                <a:cs typeface="Libre Baskerville" pitchFamily="34" charset="-120"/>
+              </a:defRPr>
+            </a:lvl1pPr>
+          </a:lstStyle>
+          <a:p>
+            <a:pPr marL="0" indent="0" algn="l">
+              <a:lnSpc>
+                <a:spcPct val="115000"/>
+              </a:lnSpc>
+              <a:buNone/>
+            </a:pPr>
+            <a:endParaRPr lang="en-US" sz="3200" dirty="0"/>
+          </a:p>
+        </p:txBody>
+      </p:sp>
+      <p:sp>
+        <p:nvSpPr>
+          <p:cNvPr id="3" name="Text Placeholder 2"/>
+          <p:cNvSpPr>
+            <a:spLocks noGrp="1"/>
+          </p:cNvSpPr>
+          <p:nvPr>
+            <p:ph type="body" idx="101"/>
+          </p:nvPr>
+        </p:nvSpPr>
+        <p:spPr>
+          <a:xfrm>
+            <a:off x="812800" y="1584960"/>
+            <a:ext cx="10566400" cy="4460240"/>
+          </a:xfrm>
+          <a:prstGeom prst="rect">
+            <a:avLst/>
+          </a:prstGeom>
+          <a:noFill/>
+          <a:ln/>
+        </p:spPr>
+        <p:txBody>
+          <a:bodyPr wrap="square" lIns="0" tIns="0" rIns="0" bIns="0" rtlCol="0" anchor="t"/>
+          <a:lstStyle>
+            <a:lvl1pPr marL="0" indent="0" algn="l">
+              <a:lnSpc>
+                <a:spcPct val="140000"/>
+              </a:lnSpc>
+              <a:buNone/>
+              <a:defRPr lang="en-US" sz="1600" dirty="0">
+                <a:solidFill>
+                  <a:srgbClr val="2B2B30"/>
+                </a:solidFill>
+                <a:latin typeface="Public Sans" pitchFamily="34" charset="0"/>
+                <a:ea typeface="Public Sans" pitchFamily="34" charset="-122"/>
+                <a:cs typeface="Public Sans" pitchFamily="34" charset="-120"/>
+              </a:defRPr>
+            </a:lvl1pPr>
+          </a:lstStyle>
+          <a:p>
+            <a:pPr marL="0" indent="0" algn="l">
+              <a:lnSpc>
+                <a:spcPct val="140000"/>
+              </a:lnSpc>
+              <a:buNone/>
+            </a:pPr>
+            <a:endParaRPr lang="en-US" sz="1600" dirty="0"/>
+          </a:p>
+        </p:txBody>
+      </p:sp>
+    </p:spTree>
+    <p:extLst>
+      <p:ext uri="{BB962C8B-B14F-4D97-AF65-F5344CB8AC3E}">
+        <p14:creationId xmlns:p14="http://schemas.microsoft.com/office/powerpoint/2010/main" val="3284996219"/>
+      </p:ext>
+    </p:extLst>
+  </p:cSld>
+  <p:clrMap bg1="lt1" tx1="dk1" bg2="lt2" tx2="dk2" accent1="accent1" accent2="accent2" accent3="accent3" accent4="accent4" accent5="accent5" accent6="accent6" hlink="hlink" folHlink="folHlink"/>
+  <p:sldLayoutIdLst>
+    <p:sldLayoutId id="2147483655" r:id="rId1"/>
+  </p:sldLayoutIdLst>
+  <p:hf sldNum="0" hdr="0" ftr="0" dt="0"/>
+  <p:txStyles>
+    <p:titleStyle>
+      <a:lvl1pPr algn="ctr" defTabSz="914400" rtl="0" eaLnBrk="1" latinLnBrk="0" hangingPunct="1">
+        <a:spcBef>
+          <a:spcPct val="0"/>
+        </a:spcBef>
+        <a:buNone/>
+        <a:defRPr sz="4400" kern="1200">
+          <a:solidFill>
+            <a:schemeClr val="tx1"/>
+          </a:solidFill>
+          <a:latin typeface="+mj-lt"/>
+          <a:ea typeface="+mj-ea"/>
+          <a:cs typeface="+mj-cs"/>
+        </a:defRPr>
+      </a:lvl1pPr>
+    </p:titleStyle>
+    <p:bodyStyle>
+      <a:lvl1pPr marL="342900" indent="-342900" algn="l" defTabSz="914400" rtl="0" eaLnBrk="1" latinLnBrk="0" hangingPunct="1">
+        <a:spcBef>
+          <a:spcPct val="20000"/>
+        </a:spcBef>
+        <a:buFont typeface="Arial" pitchFamily="34" charset="0"/>
+        <a:buChar char="•"/>
+        <a:defRPr sz="3200" kern="1200">
+          <a:solidFill>
+            <a:schemeClr val="tx1"/>
+          </a:solidFill>
+          <a:latin typeface="+mn-lt"/>
+          <a:ea typeface="+mn-ea"/>
+          <a:cs typeface="+mn-cs"/>
+        </a:defRPr>
+      </a:lvl1pPr>
+      <a:lvl2pPr marL="742950" indent="-285750" algn="l" defTabSz="914400" rtl="0" eaLnBrk="1" latinLnBrk="0" hangingPunct="1">
+        <a:spcBef>
+          <a:spcPct val="20000"/>
+        </a:spcBef>
+        <a:buFont typeface="Arial" pitchFamily="34" charset="0"/>
+        <a:buChar char="–"/>
+        <a:defRPr sz="2800" kern="1200">
+          <a:solidFill>
+            <a:schemeClr val="tx1"/>
+          </a:solidFill>
+          <a:latin typeface="+mn-lt"/>
+          <a:ea typeface="+mn-ea"/>
+          <a:cs typeface="+mn-cs"/>
+        </a:defRPr>
+      </a:lvl2pPr>
+      <a:lvl3pPr marL="1143000" indent="-228600" algn="l" defTabSz="914400" rtl="0" eaLnBrk="1" latinLnBrk="0" hangingPunct="1">
+        <a:spcBef>
+          <a:spcPct val="20000"/>
+        </a:spcBef>
+        <a:buFont typeface="Arial" pitchFamily="34" charset="0"/>
+        <a:buChar char="•"/>
+        <a:defRPr sz="2400" kern="1200">
+          <a:solidFill>
+            <a:schemeClr val="tx1"/>
+          </a:solidFill>
+          <a:latin typeface="+mn-lt"/>
+          <a:ea typeface="+mn-ea"/>
+          <a:cs typeface="+mn-cs"/>
+        </a:defRPr>
+      </a:lvl3pPr>
+      <a:lvl4pPr marL="1600200" indent="-228600" algn="l" defTabSz="914400" rtl="0" eaLnBrk="1" latinLnBrk="0" hangingPunct="1">
+        <a:spcBef>
+          <a:spcPct val="20000"/>
+        </a:spcBef>
+        <a:buFont typeface="Arial" pitchFamily="34" charset="0"/>
+        <a:buChar char="–"/>
+        <a:defRPr sz="2000" kern="1200">
+          <a:solidFill>
+            <a:schemeClr val="tx1"/>
+          </a:solidFill>
+          <a:latin typeface="+mn-lt"/>
+          <a:ea typeface="+mn-ea"/>
+          <a:cs typeface="+mn-cs"/>
+        </a:defRPr>
+      </a:lvl4pPr>
+      <a:lvl5pPr marL="2057400" indent="-228600" algn="l" defTabSz="914400" rtl="0" eaLnBrk="1" latinLnBrk="0" hangingPunct="1">
+        <a:spcBef>
+          <a:spcPct val="20000"/>
+        </a:spcBef>
+        <a:buFont typeface="Arial" pitchFamily="34" charset="0"/>
+        <a:buChar char="»"/>
+        <a:defRPr sz="2000" kern="1200">
+          <a:solidFill>
+            <a:schemeClr val="tx1"/>
+          </a:solidFill>
+          <a:latin typeface="+mn-lt"/>
+          <a:ea typeface="+mn-ea"/>
+          <a:cs typeface="+mn-cs"/>
+        </a:defRPr>
+      </a:lvl5pPr>
+      <a:lvl6pPr marL="2514600" indent="-228600" algn="l" defTabSz="914400" rtl="0" eaLnBrk="1" latinLnBrk="0" hangingPunct="1">
+        <a:spcBef>
+          <a:spcPct val="20000"/>
+        </a:spcBef>
+        <a:buFont typeface="Arial" pitchFamily="34" charset="0"/>
+        <a:buChar char="•"/>
+        <a:defRPr sz="2000" kern="1200">
+          <a:solidFill>
+            <a:schemeClr val="tx1"/>
+          </a:solidFill>
+          <a:latin typeface="+mn-lt"/>
+          <a:ea typeface="+mn-ea"/>
+          <a:cs typeface="+mn-cs"/>
+        </a:defRPr>
+      </a:lvl6pPr>
+      <a:lvl7pPr marL="2971800" indent="-228600" algn="l" defTabSz="914400" rtl="0" eaLnBrk="1" latinLnBrk="0" hangingPunct="1">
+        <a:spcBef>
+          <a:spcPct val="20000"/>
+        </a:spcBef>
+        <a:buFont typeface="Arial" pitchFamily="34" charset="0"/>
+        <a:buChar char="•"/>
+        <a:defRPr sz="2000" kern="1200">
+          <a:solidFill>
+            <a:schemeClr val="tx1"/>
+          </a:solidFill>
+          <a:latin typeface="+mn-lt"/>
+          <a:ea typeface="+mn-ea"/>
+          <a:cs typeface="+mn-cs"/>
+        </a:defRPr>
+      </a:lvl7pPr>
+      <a:lvl8pPr marL="3429000" indent="-228600" algn="l" defTabSz="914400" rtl="0" eaLnBrk="1" latinLnBrk="0" hangingPunct="1">
+        <a:spcBef>
+          <a:spcPct val="20000"/>
+        </a:spcBef>
+        <a:buFont typeface="Arial" pitchFamily="34" charset="0"/>
+        <a:buChar char="•"/>
+        <a:defRPr sz="2000" kern="1200">
+          <a:solidFill>
+            <a:schemeClr val="tx1"/>
+          </a:solidFill>
+          <a:latin typeface="+mn-lt"/>
+          <a:ea typeface="+mn-ea"/>
+          <a:cs typeface="+mn-cs"/>
+        </a:defRPr>
+      </a:lvl8pPr>
+      <a:lvl9pPr marL="3886200" indent="-228600" algn="l" defTabSz="914400" rtl="0" eaLnBrk="1" latinLnBrk="0" hangingPunct="1">
+        <a:spcBef>
+          <a:spcPct val="20000"/>
+        </a:spcBef>
+        <a:buFont typeface="Arial" pitchFamily="34" charset="0"/>
+        <a:buChar char="•"/>
+        <a:defRPr sz="2000" kern="1200">
+          <a:solidFill>
+            <a:schemeClr val="tx1"/>
+          </a:solidFill>
+          <a:latin typeface="+mn-lt"/>
+          <a:ea typeface="+mn-ea"/>
+          <a:cs typeface="+mn-cs"/>
+        </a:defRPr>
+      </a:lvl9pPr>
+    </p:bodyStyle>
+    <p:otherStyle>
+      <a:defPPr>
+        <a:defRPr lang="en-US"/>
+      </a:defPPr>
+      <a:lvl1pPr marL="0" algn="l" defTabSz="914400" rtl="0" eaLnBrk="1" latinLnBrk="0" hangingPunct="1">
+        <a:defRPr sz="1800" kern="1200">
+          <a:solidFill>
+            <a:schemeClr val="tx1"/>
+          </a:solidFill>
+          <a:latin typeface="+mn-lt"/>
+          <a:ea typeface="+mn-ea"/>
+          <a:cs typeface="+mn-cs"/>
+        </a:defRPr>
+      </a:lvl1pPr>
+      <a:lvl2pPr marL="457200" algn="l" defTabSz="914400" rtl="0" eaLnBrk="1" latinLnBrk="0" hangingPunct="1">
+        <a:defRPr sz="1800" kern="1200">
+          <a:solidFill>
+            <a:schemeClr val="tx1"/>
+          </a:solidFill>
+          <a:latin typeface="+mn-lt"/>
+          <a:ea typeface="+mn-ea"/>
+          <a:cs typeface="+mn-cs"/>
+        </a:defRPr>
+      </a:lvl2pPr>
+      <a:lvl3pPr marL="914400" algn="l" defTabSz="914400" rtl="0" eaLnBrk="1" latinLnBrk="0" hangingPunct="1">
+        <a:defRPr sz="1800" kern="1200">
+          <a:solidFill>
+            <a:schemeClr val="tx1"/>
+          </a:solidFill>
+          <a:latin typeface="+mn-lt"/>
+          <a:ea typeface="+mn-ea"/>
+          <a:cs typeface="+mn-cs"/>
+        </a:defRPr>
+      </a:lvl3pPr>
+      <a:lvl4pPr marL="1371600" algn="l" defTabSz="914400" rtl="0" eaLnBrk="1" latinLnBrk="0" hangingPunct="1">
+        <a:defRPr sz="1800" kern="1200">
+          <a:solidFill>
+            <a:schemeClr val="tx1"/>
+          </a:solidFill>
+          <a:latin typeface="+mn-lt"/>
+          <a:ea typeface="+mn-ea"/>
+          <a:cs typeface="+mn-cs"/>
+        </a:defRPr>
+      </a:lvl4pPr>
+      <a:lvl5pPr marL="1828800" algn="l" defTabSz="914400" rtl="0" eaLnBrk="1" latinLnBrk="0" hangingPunct="1">
+        <a:defRPr sz="1800" kern="1200">
+          <a:solidFill>
+            <a:schemeClr val="tx1"/>
+          </a:solidFill>
+          <a:latin typeface="+mn-lt"/>
+          <a:ea typeface="+mn-ea"/>
+          <a:cs typeface="+mn-cs"/>
+        </a:defRPr>
+      </a:lvl5pPr>
+      <a:lvl6pPr marL="2286000" algn="l" defTabSz="914400" rtl="0" eaLnBrk="1" latinLnBrk="0" hangingPunct="1">
+        <a:defRPr sz="1800" kern="1200">
+          <a:solidFill>
+            <a:schemeClr val="tx1"/>
+          </a:solidFill>
+          <a:latin typeface="+mn-lt"/>
+          <a:ea typeface="+mn-ea"/>
+          <a:cs typeface="+mn-cs"/>
+        </a:defRPr>
+      </a:lvl6pPr>
+      <a:lvl7pPr marL="2743200" algn="l" defTabSz="914400" rtl="0" eaLnBrk="1" latinLnBrk="0" hangingPunct="1">
+        <a:defRPr sz="1800" kern="1200">
+          <a:solidFill>
+            <a:schemeClr val="tx1"/>
+          </a:solidFill>
+          <a:latin typeface="+mn-lt"/>
+          <a:ea typeface="+mn-ea"/>
+          <a:cs typeface="+mn-cs"/>
+        </a:defRPr>
+      </a:lvl7pPr>
+      <a:lvl8pPr marL="3200400" algn="l" defTabSz="914400" rtl="0" eaLnBrk="1" latinLnBrk="0" hangingPunct="1">
+        <a:defRPr sz="1800" kern="1200">
+          <a:solidFill>
+            <a:schemeClr val="tx1"/>
+          </a:solidFill>
+          <a:latin typeface="+mn-lt"/>
+          <a:ea typeface="+mn-ea"/>
+          <a:cs typeface="+mn-cs"/>
+        </a:defRPr>
+      </a:lvl8pPr>
+      <a:lvl9pPr marL="3657600" algn="l" defTabSz="914400" rtl="0" eaLnBrk="1" latinLnBrk="0" hangingPunct="1">
+        <a:defRPr sz="1800" kern="1200">
+          <a:solidFill>
+            <a:schemeClr val="tx1"/>
+          </a:solidFill>
+          <a:latin typeface="+mn-lt"/>
+          <a:ea typeface="+mn-ea"/>
+          <a:cs typeface="+mn-cs"/>
+        </a:defRPr>
+      </a:lvl9pPr>
+    </p:otherStyle>
+  </p:txStyles>
+</p:sldMaster>
+</file>
+
 <file path=ppt/slides/slide1.xml><?xml version="1.0" encoding="utf-8"?>
 <p:sld xmlns:a="http://schemas.openxmlformats.org/drawingml/2006/main" xmlns:r="http://schemas.openxmlformats.org/officeDocument/2006/relationships" xmlns:p="http://schemas.openxmlformats.org/presentationml/2006/main">
   <p:cSld name="Slide 1">
@@ -2096,7 +2990,29 @@
                 <a:ea typeface="Public Sans" pitchFamily="34" charset="-122"/>
                 <a:cs typeface="Public Sans" pitchFamily="34" charset="-120"/>
               </a:rPr>
-              <a:t>Adrian Julve · Data 201 · [Date]</a:t>
+              <a:t>Adrian Julve · Data 201 · Oct 20</a:t>
+            </a:r>
+            <a:r>
+              <a:rPr lang="en-US" sz="1400" baseline="30000" dirty="0">
+                <a:solidFill>
+                  <a:srgbClr val="C9C7CF"/>
+                </a:solidFill>
+                <a:latin typeface="Public Sans" pitchFamily="34" charset="0"/>
+                <a:ea typeface="Public Sans" pitchFamily="34" charset="-122"/>
+                <a:cs typeface="Public Sans" pitchFamily="34" charset="-120"/>
+              </a:rPr>
+              <a:t>th</a:t>
+            </a:r>
+            <a:r>
+              <a:rPr lang="en-US" sz="1400" dirty="0">
+                <a:solidFill>
+                  <a:srgbClr val="C9C7CF"/>
+                </a:solidFill>
+                <a:latin typeface="Public Sans" pitchFamily="34" charset="0"/>
+                <a:ea typeface="Public Sans" pitchFamily="34" charset="-122"/>
+                <a:cs typeface="Public Sans" pitchFamily="34" charset="-120"/>
+              </a:rPr>
+              <a:t>, 2026</a:t>
             </a:r>
             <a:endParaRPr lang="en-US" sz="1400" dirty="0"/>
           </a:p>
@@ -3168,14 +4084,14 @@
           <p:nvPr>
             <p:extLst>
               <p:ext uri="{D42A27DB-BD31-4B8C-83A1-F6EECF244321}">
-                <p14:modId xmlns:p14="http://schemas.microsoft.com/office/powerpoint/2010/main" val="1579011935"/>
+                <p14:modId xmlns:p14="http://schemas.microsoft.com/office/powerpoint/2010/main" val="4044901852"/>
               </p:ext>
             </p:extLst>
           </p:nvPr>
         </p:nvGraphicFramePr>
         <p:xfrm>
           <a:off x="548640" y="1463040"/>
-          <a:ext cx="11094415" cy="914400"/>
+          <a:ext cx="11091672" cy="3145536"/>
         </p:xfrm>
         <a:graphic>
           <a:graphicData uri="http://schemas.openxmlformats.org/drawingml/2006/table">
@@ -4290,7 +5206,7 @@
 
 <file path=ppt/slides/slide5.xml><?xml version="1.0" encoding="utf-8"?>
 <p:sld xmlns:a="http://schemas.openxmlformats.org/drawingml/2006/main" xmlns:r="http://schemas.openxmlformats.org/officeDocument/2006/relationships" xmlns:p="http://schemas.openxmlformats.org/presentationml/2006/main">
-  <p:cSld name="Slide 5">
+  <p:cSld>
     <p:spTree>
       <p:nvGrpSpPr>
         <p:cNvPr id="1" name=""/>
@@ -4513,24 +5429,47 @@
           <a:bodyPr wrap="square" lIns="0" tIns="0" rIns="0" bIns="0" rtlCol="0" anchor="t"/>
           <a:lstStyle/>
           <a:p>
-            <a:pPr marL="0" indent="0">
-              <a:lnSpc>
-                <a:spcPct val="110000"/>
-              </a:lnSpc>
-              <a:buNone/>
-            </a:pPr>
             <a:r>
-              <a:rPr lang="en-US" sz="1400" dirty="0">
+              <a:rPr lang="en-CA" sz="1400" dirty="0">
                 <a:solidFill>
-                  <a:srgbClr val="4A4A52"/>
+                  <a:schemeClr val="tx1">
+                    <a:lumMod val="75000"/>
+                    <a:lumOff val="25000"/>
+                  </a:schemeClr>
                 </a:solidFill>
-                <a:latin typeface="Public Sans" pitchFamily="34" charset="0"/>
-                <a:ea typeface="Public Sans" pitchFamily="34" charset="-122"/>
-                <a:cs typeface="Public Sans" pitchFamily="34" charset="-120"/>
               </a:rPr>
-              <a:t>Python read each area’s boundary outline and checked which one contains each incident’s map point (a point-in-polygon test). 785 fall outside every area.</a:t>
+              <a:t>Used </a:t>
             </a:r>
-            <a:endParaRPr lang="en-US" sz="1400" dirty="0"/>
+            <a:r>
+              <a:rPr lang="en-CA" sz="1400" dirty="0" err="1">
+                <a:solidFill>
+                  <a:schemeClr val="tx1">
+                    <a:lumMod val="75000"/>
+                    <a:lumOff val="25000"/>
+                  </a:schemeClr>
+                </a:solidFill>
+              </a:rPr>
+              <a:t>GeoPandas</a:t>
+            </a:r>
+            <a:r>
+              <a:rPr lang="en-CA" sz="1400" dirty="0">
+                <a:solidFill>
+                  <a:schemeClr val="tx1">
+                    <a:lumMod val="75000"/>
+                    <a:lumOff val="25000"/>
+                  </a:schemeClr>
+                </a:solidFill>
+              </a:rPr>
+              <a:t> in Python to read each area’s boundary outline and check which one contains each incident’s map point. 785 fall outside every area. The outlines also became the Shape Map.</a:t>
+            </a:r>
+            <a:endParaRPr lang="en-US" sz="1400" dirty="0">
+              <a:solidFill>
+                <a:schemeClr val="tx1">
+                  <a:lumMod val="75000"/>
+                  <a:lumOff val="25000"/>
+                </a:schemeClr>
+              </a:solidFill>
+            </a:endParaRPr>
           </a:p>
         </p:txBody>
       </p:sp>
@@ -4858,192 +5797,6 @@
                 <a:ea typeface="Public Sans" pitchFamily="34" charset="-122"/>
                 <a:cs typeface="Public Sans" pitchFamily="34" charset="-120"/>
               </a:rPr>
-              <a:t>Used local time</a:t>
-            </a:r>
-            <a:endParaRPr lang="en-US" sz="1700" dirty="0"/>
-          </a:p>
-        </p:txBody>
-      </p:sp>
-      <p:sp>
-        <p:nvSpPr>
-          <p:cNvPr id="17" name="Text 15"/>
-          <p:cNvSpPr txBox="1"/>
-          <p:nvPr/>
-        </p:nvSpPr>
-        <p:spPr>
-          <a:xfrm>
-            <a:off x="8357616" y="2103120"/>
-            <a:ext cx="3054096" cy="1463040"/>
-          </a:xfrm>
-          <a:prstGeom prst="rect">
-            <a:avLst/>
-          </a:prstGeom>
-          <a:noFill/>
-          <a:ln/>
-        </p:spPr>
-        <p:txBody>
-          <a:bodyPr wrap="square" lIns="0" tIns="0" rIns="0" bIns="0" rtlCol="0" anchor="t"/>
-          <a:lstStyle/>
-          <a:p>
-            <a:pPr marL="0" indent="0">
-              <a:lnSpc>
-                <a:spcPct val="110000"/>
-              </a:lnSpc>
-              <a:buNone/>
-            </a:pPr>
-            <a:r>
-              <a:rPr lang="en-US" sz="1400" dirty="0">
-                <a:solidFill>
-                  <a:srgbClr val="4A4A52"/>
-                </a:solidFill>
-                <a:latin typeface="Public Sans" pitchFamily="34" charset="0"/>
-                <a:ea typeface="Public Sans" pitchFamily="34" charset="-122"/>
-                <a:cs typeface="Public Sans" pitchFamily="34" charset="-120"/>
-              </a:rPr>
-              <a:t>Shifted timestamps from UTC to Calgary time, 7 hours back in winter and 6 in summer, then built hour, weekday and month columns.</a:t>
-            </a:r>
-            <a:endParaRPr lang="en-US" sz="1400" dirty="0"/>
-          </a:p>
-        </p:txBody>
-      </p:sp>
-      <p:sp>
-        <p:nvSpPr>
-          <p:cNvPr id="18" name="step_card_3"/>
-          <p:cNvSpPr/>
-          <p:nvPr/>
-        </p:nvSpPr>
-        <p:spPr>
-          <a:xfrm>
-            <a:off x="548640" y="3931920"/>
-            <a:ext cx="3511296" cy="2377440"/>
-          </a:xfrm>
-          <a:prstGeom prst="roundRect">
-            <a:avLst>
-              <a:gd name="adj" fmla="val 4615"/>
-            </a:avLst>
-          </a:prstGeom>
-          <a:solidFill>
-            <a:srgbClr val="FFFFFF"/>
-          </a:solidFill>
-          <a:ln w="12700">
-            <a:solidFill>
-              <a:srgbClr val="E2DDD6"/>
-            </a:solidFill>
-            <a:prstDash val="solid"/>
-          </a:ln>
-        </p:spPr>
-        <p:txBody>
-          <a:bodyPr/>
-          <a:lstStyle/>
-          <a:p>
-            <a:endParaRPr lang="en-CA"/>
-          </a:p>
-        </p:txBody>
-      </p:sp>
-      <p:sp>
-        <p:nvSpPr>
-          <p:cNvPr id="19" name="step_num_3"/>
-          <p:cNvSpPr/>
-          <p:nvPr/>
-        </p:nvSpPr>
-        <p:spPr>
-          <a:xfrm>
-            <a:off x="777240" y="4160520"/>
-            <a:ext cx="384048" cy="384048"/>
-          </a:xfrm>
-          <a:prstGeom prst="ellipse">
-            <a:avLst/>
-          </a:prstGeom>
-          <a:solidFill>
-            <a:srgbClr val="4E6596"/>
-          </a:solidFill>
-          <a:ln w="12700">
-            <a:solidFill>
-              <a:srgbClr val="4E6596"/>
-            </a:solidFill>
-            <a:prstDash val="solid"/>
-          </a:ln>
-        </p:spPr>
-        <p:txBody>
-          <a:bodyPr/>
-          <a:lstStyle/>
-          <a:p>
-            <a:endParaRPr lang="en-CA"/>
-          </a:p>
-        </p:txBody>
-      </p:sp>
-      <p:sp>
-        <p:nvSpPr>
-          <p:cNvPr id="20" name="Text 18"/>
-          <p:cNvSpPr txBox="1"/>
-          <p:nvPr/>
-        </p:nvSpPr>
-        <p:spPr>
-          <a:xfrm>
-            <a:off x="777240" y="4160520"/>
-            <a:ext cx="384048" cy="384048"/>
-          </a:xfrm>
-          <a:prstGeom prst="rect">
-            <a:avLst/>
-          </a:prstGeom>
-          <a:noFill/>
-          <a:ln/>
-        </p:spPr>
-        <p:txBody>
-          <a:bodyPr wrap="square" lIns="0" tIns="0" rIns="0" bIns="0" rtlCol="0" anchor="ctr"/>
-          <a:lstStyle/>
-          <a:p>
-            <a:pPr marL="0" indent="0" algn="ctr">
-              <a:buNone/>
-            </a:pPr>
-            <a:r>
-              <a:rPr lang="en-US" sz="1400" b="1" dirty="0">
-                <a:solidFill>
-                  <a:srgbClr val="FFFFFF"/>
-                </a:solidFill>
-                <a:latin typeface="Public Sans" pitchFamily="34" charset="0"/>
-                <a:ea typeface="Public Sans" pitchFamily="34" charset="-122"/>
-                <a:cs typeface="Public Sans" pitchFamily="34" charset="-120"/>
-              </a:rPr>
-              <a:t>4</a:t>
-            </a:r>
-            <a:endParaRPr lang="en-US" sz="1400" dirty="0"/>
-          </a:p>
-        </p:txBody>
-      </p:sp>
-      <p:sp>
-        <p:nvSpPr>
-          <p:cNvPr id="21" name="Text 19"/>
-          <p:cNvSpPr txBox="1"/>
-          <p:nvPr/>
-        </p:nvSpPr>
-        <p:spPr>
-          <a:xfrm>
-            <a:off x="1280160" y="4160520"/>
-            <a:ext cx="2606040" cy="384048"/>
-          </a:xfrm>
-          <a:prstGeom prst="rect">
-            <a:avLst/>
-          </a:prstGeom>
-          <a:noFill/>
-          <a:ln/>
-        </p:spPr>
-        <p:txBody>
-          <a:bodyPr wrap="square" lIns="0" tIns="0" rIns="0" bIns="0" rtlCol="0" anchor="ctr"/>
-          <a:lstStyle/>
-          <a:p>
-            <a:pPr marL="0" indent="0">
-              <a:buNone/>
-            </a:pPr>
-            <a:r>
-              <a:rPr lang="en-US" sz="1700" b="1" dirty="0">
-                <a:solidFill>
-                  <a:srgbClr val="2B2B30"/>
-                </a:solidFill>
-                <a:latin typeface="Public Sans" pitchFamily="34" charset="0"/>
-                <a:ea typeface="Public Sans" pitchFamily="34" charset="-122"/>
-                <a:cs typeface="Public Sans" pitchFamily="34" charset="-120"/>
-              </a:rPr>
               <a:t>Sorted incidents</a:t>
             </a:r>
             <a:endParaRPr lang="en-US" sz="1700" dirty="0"/>
@@ -5052,13 +5805,13 @@
       </p:sp>
       <p:sp>
         <p:nvSpPr>
-          <p:cNvPr id="22" name="Text 20"/>
+          <p:cNvPr id="17" name="Text 15"/>
           <p:cNvSpPr txBox="1"/>
           <p:nvPr/>
         </p:nvSpPr>
         <p:spPr>
           <a:xfrm>
-            <a:off x="777240" y="4709160"/>
+            <a:off x="8357616" y="2103120"/>
             <a:ext cx="3054096" cy="1463040"/>
           </a:xfrm>
           <a:prstGeom prst="rect">
@@ -5094,6 +5847,192 @@
       </p:sp>
       <p:sp>
         <p:nvSpPr>
+          <p:cNvPr id="18" name="step_card_3"/>
+          <p:cNvSpPr/>
+          <p:nvPr/>
+        </p:nvSpPr>
+        <p:spPr>
+          <a:xfrm>
+            <a:off x="548640" y="3931920"/>
+            <a:ext cx="3511296" cy="2377440"/>
+          </a:xfrm>
+          <a:prstGeom prst="roundRect">
+            <a:avLst>
+              <a:gd name="adj" fmla="val 4615"/>
+            </a:avLst>
+          </a:prstGeom>
+          <a:solidFill>
+            <a:srgbClr val="FFFFFF"/>
+          </a:solidFill>
+          <a:ln w="12700">
+            <a:solidFill>
+              <a:srgbClr val="E2DDD6"/>
+            </a:solidFill>
+            <a:prstDash val="solid"/>
+          </a:ln>
+        </p:spPr>
+        <p:txBody>
+          <a:bodyPr/>
+          <a:lstStyle/>
+          <a:p>
+            <a:endParaRPr lang="en-CA"/>
+          </a:p>
+        </p:txBody>
+      </p:sp>
+      <p:sp>
+        <p:nvSpPr>
+          <p:cNvPr id="19" name="step_num_3"/>
+          <p:cNvSpPr/>
+          <p:nvPr/>
+        </p:nvSpPr>
+        <p:spPr>
+          <a:xfrm>
+            <a:off x="777240" y="4160520"/>
+            <a:ext cx="384048" cy="384048"/>
+          </a:xfrm>
+          <a:prstGeom prst="ellipse">
+            <a:avLst/>
+          </a:prstGeom>
+          <a:solidFill>
+            <a:srgbClr val="4E6596"/>
+          </a:solidFill>
+          <a:ln w="12700">
+            <a:solidFill>
+              <a:srgbClr val="4E6596"/>
+            </a:solidFill>
+            <a:prstDash val="solid"/>
+          </a:ln>
+        </p:spPr>
+        <p:txBody>
+          <a:bodyPr/>
+          <a:lstStyle/>
+          <a:p>
+            <a:endParaRPr lang="en-CA"/>
+          </a:p>
+        </p:txBody>
+      </p:sp>
+      <p:sp>
+        <p:nvSpPr>
+          <p:cNvPr id="20" name="Text 18"/>
+          <p:cNvSpPr txBox="1"/>
+          <p:nvPr/>
+        </p:nvSpPr>
+        <p:spPr>
+          <a:xfrm>
+            <a:off x="777240" y="4160520"/>
+            <a:ext cx="384048" cy="384048"/>
+          </a:xfrm>
+          <a:prstGeom prst="rect">
+            <a:avLst/>
+          </a:prstGeom>
+          <a:noFill/>
+          <a:ln/>
+        </p:spPr>
+        <p:txBody>
+          <a:bodyPr wrap="square" lIns="0" tIns="0" rIns="0" bIns="0" rtlCol="0" anchor="ctr"/>
+          <a:lstStyle/>
+          <a:p>
+            <a:pPr marL="0" indent="0" algn="ctr">
+              <a:buNone/>
+            </a:pPr>
+            <a:r>
+              <a:rPr lang="en-US" sz="1400" b="1" dirty="0">
+                <a:solidFill>
+                  <a:srgbClr val="FFFFFF"/>
+                </a:solidFill>
+                <a:latin typeface="Public Sans" pitchFamily="34" charset="0"/>
+                <a:ea typeface="Public Sans" pitchFamily="34" charset="-122"/>
+                <a:cs typeface="Public Sans" pitchFamily="34" charset="-120"/>
+              </a:rPr>
+              <a:t>4</a:t>
+            </a:r>
+            <a:endParaRPr lang="en-US" sz="1400" dirty="0"/>
+          </a:p>
+        </p:txBody>
+      </p:sp>
+      <p:sp>
+        <p:nvSpPr>
+          <p:cNvPr id="21" name="Text 19"/>
+          <p:cNvSpPr txBox="1"/>
+          <p:nvPr/>
+        </p:nvSpPr>
+        <p:spPr>
+          <a:xfrm>
+            <a:off x="1280160" y="4160520"/>
+            <a:ext cx="2606040" cy="384048"/>
+          </a:xfrm>
+          <a:prstGeom prst="rect">
+            <a:avLst/>
+          </a:prstGeom>
+          <a:noFill/>
+          <a:ln/>
+        </p:spPr>
+        <p:txBody>
+          <a:bodyPr wrap="square" lIns="0" tIns="0" rIns="0" bIns="0" rtlCol="0" anchor="ctr"/>
+          <a:lstStyle/>
+          <a:p>
+            <a:pPr marL="0" indent="0">
+              <a:buNone/>
+            </a:pPr>
+            <a:r>
+              <a:rPr lang="en-US" sz="1700" b="1" dirty="0">
+                <a:solidFill>
+                  <a:srgbClr val="2B2B30"/>
+                </a:solidFill>
+                <a:latin typeface="Public Sans" pitchFamily="34" charset="0"/>
+                <a:ea typeface="Public Sans" pitchFamily="34" charset="-122"/>
+                <a:cs typeface="Public Sans" pitchFamily="34" charset="-120"/>
+              </a:rPr>
+              <a:t>Kept full years</a:t>
+            </a:r>
+            <a:endParaRPr lang="en-US" sz="1700" dirty="0"/>
+          </a:p>
+        </p:txBody>
+      </p:sp>
+      <p:sp>
+        <p:nvSpPr>
+          <p:cNvPr id="22" name="Text 20"/>
+          <p:cNvSpPr txBox="1"/>
+          <p:nvPr/>
+        </p:nvSpPr>
+        <p:spPr>
+          <a:xfrm>
+            <a:off x="777240" y="4709160"/>
+            <a:ext cx="3054096" cy="1463040"/>
+          </a:xfrm>
+          <a:prstGeom prst="rect">
+            <a:avLst/>
+          </a:prstGeom>
+          <a:noFill/>
+          <a:ln/>
+        </p:spPr>
+        <p:txBody>
+          <a:bodyPr wrap="square" lIns="0" tIns="0" rIns="0" bIns="0" rtlCol="0" anchor="t"/>
+          <a:lstStyle/>
+          <a:p>
+            <a:pPr marL="0" indent="0">
+              <a:lnSpc>
+                <a:spcPct val="110000"/>
+              </a:lnSpc>
+              <a:buNone/>
+            </a:pPr>
+            <a:r>
+              <a:rPr lang="en-US" sz="1400" dirty="0">
+                <a:solidFill>
+                  <a:srgbClr val="4A4A52"/>
+                </a:solidFill>
+                <a:latin typeface="Public Sans" pitchFamily="34" charset="0"/>
+                <a:ea typeface="Public Sans" pitchFamily="34" charset="-122"/>
+                <a:cs typeface="Public Sans" pitchFamily="34" charset="-120"/>
+              </a:rPr>
+              <a:t>Filtered to 2017–2025 in Power Query, dropping partial 2016 and 2026 data. 58,536 incidents remain; months with missing records are noted.</a:t>
+            </a:r>
+            <a:endParaRPr lang="en-US" sz="1400" dirty="0"/>
+          </a:p>
+        </p:txBody>
+      </p:sp>
+      <p:sp>
+        <p:nvSpPr>
           <p:cNvPr id="23" name="step_card_4"/>
           <p:cNvSpPr/>
           <p:nvPr/>
@@ -5416,7 +6355,7 @@
                 <a:ea typeface="Public Sans" pitchFamily="34" charset="-122"/>
                 <a:cs typeface="Public Sans" pitchFamily="34" charset="-120"/>
               </a:rPr>
-              <a:t>Kept full years</a:t>
+              <a:t>Key measures in DAX</a:t>
             </a:r>
             <a:endParaRPr lang="en-US" sz="1700" dirty="0"/>
           </a:p>
@@ -5458,7 +6397,7 @@
                 <a:ea typeface="Public Sans" pitchFamily="34" charset="-122"/>
                 <a:cs typeface="Public Sans" pitchFamily="34" charset="-120"/>
               </a:rPr>
-              <a:t>Filtered to 2017–2025 in Power Query, dropping partial 2016 and 2026 data. 58,536 incidents remain; months with missing records are noted.</a:t>
+              <a:t>Wrote DAX measures for rate vs. city average, busiest hour, monthly rate and how each neighbourhood trait tracks incident rates.</a:t>
             </a:r>
             <a:endParaRPr lang="en-US" sz="1400" dirty="0"/>
           </a:p>
@@ -5474,7 +6413,15 @@
 
 <file path=ppt/slides/slide6.xml><?xml version="1.0" encoding="utf-8"?>
 <p:sld xmlns:a="http://schemas.openxmlformats.org/drawingml/2006/main" xmlns:r="http://schemas.openxmlformats.org/officeDocument/2006/relationships" xmlns:p="http://schemas.openxmlformats.org/presentationml/2006/main">
-  <p:cSld name="Slide 6">
+  <p:cSld>
+    <p:bg>
+      <p:bgPr>
+        <a:solidFill>
+          <a:srgbClr val="2B2B30"/>
+        </a:solidFill>
+        <a:effectLst/>
+      </p:bgPr>
+    </p:bg>
     <p:spTree>
       <p:nvGrpSpPr>
         <p:cNvPr id="1" name=""/>
@@ -5492,17 +6439,90 @@
       <p:sp>
         <p:nvSpPr>
           <p:cNvPr id="2" name="Text 0"/>
+          <p:cNvSpPr/>
+          <p:nvPr/>
+        </p:nvSpPr>
+        <p:spPr>
+          <a:xfrm>
+            <a:off x="812800" y="812800"/>
+            <a:ext cx="10883392" cy="238760"/>
+          </a:xfrm>
+          <a:prstGeom prst="rect">
+            <a:avLst/>
+          </a:prstGeom>
+          <a:noFill/>
+          <a:ln/>
+        </p:spPr>
+        <p:txBody>
+          <a:bodyPr wrap="square" lIns="0" tIns="0" rIns="0" bIns="0" rtlCol="0" anchor="t">
+            <a:normAutofit/>
+          </a:bodyPr>
+          <a:lstStyle/>
+          <a:p>
+            <a:pPr marL="0" marR="0" lvl="0" indent="0" algn="l" defTabSz="914400" rtl="0" eaLnBrk="1" fontAlgn="auto" latinLnBrk="0" hangingPunct="1">
+              <a:lnSpc>
+                <a:spcPts val="1680"/>
+              </a:lnSpc>
+              <a:spcBef>
+                <a:spcPts val="0"/>
+              </a:spcBef>
+              <a:spcAft>
+                <a:spcPts val="0"/>
+              </a:spcAft>
+              <a:buClrTx/>
+              <a:buSzTx/>
+              <a:buFontTx/>
+              <a:buNone/>
+              <a:tabLst/>
+              <a:defRPr/>
+            </a:pPr>
+            <a:r>
+              <a:rPr kumimoji="0" lang="en-US" sz="1200" b="1" i="0" u="none" strike="noStrike" kern="0" cap="none" spc="150" normalizeH="0" baseline="0" noProof="0" dirty="0">
+                <a:ln>
+                  <a:noFill/>
+                </a:ln>
+                <a:solidFill>
+                  <a:srgbClr val="E39BBE"/>
+                </a:solidFill>
+                <a:effectLst/>
+                <a:uLnTx/>
+                <a:uFillTx/>
+                <a:latin typeface="Public Sans" pitchFamily="34" charset="0"/>
+                <a:ea typeface="Public Sans" pitchFamily="34" charset="-122"/>
+                <a:cs typeface="Public Sans" pitchFamily="34" charset="-120"/>
+              </a:rPr>
+              <a:t>DEMO · WALKTHROUGH</a:t>
+            </a:r>
+            <a:endParaRPr kumimoji="0" lang="en-US" sz="1200" b="0" i="0" u="none" strike="noStrike" kern="1200" cap="none" spc="0" normalizeH="0" baseline="0" noProof="0" dirty="0">
+              <a:ln>
+                <a:noFill/>
+              </a:ln>
+              <a:solidFill>
+                <a:srgbClr val="2B2B30"/>
+              </a:solidFill>
+              <a:effectLst/>
+              <a:uLnTx/>
+              <a:uFillTx/>
+              <a:ea typeface="+mn-ea"/>
+              <a:cs typeface="+mn-cs"/>
+            </a:endParaRPr>
+          </a:p>
+        </p:txBody>
+      </p:sp>
+      <p:sp>
+        <p:nvSpPr>
+          <p:cNvPr id="3" name="Text 1"/>
           <p:cNvSpPr>
             <a:spLocks noGrp="1"/>
           </p:cNvSpPr>
           <p:nvPr>
-            <p:ph type="title" idx="100" hasCustomPrompt="1"/>
+            <p:ph type="title"/>
           </p:nvPr>
         </p:nvSpPr>
         <p:spPr>
           <a:xfrm>
-            <a:off x="548640" y="411480"/>
-            <a:ext cx="11094415" cy="731520"/>
+            <a:off x="812800" y="1102361"/>
+            <a:ext cx="10883392" cy="492760"/>
           </a:xfrm>
           <a:prstGeom prst="rect">
             <a:avLst/>
@@ -5511,20 +6531,25 @@
           <a:ln/>
         </p:spPr>
         <p:txBody>
-          <a:bodyPr wrap="square" lIns="0" tIns="0" rIns="0" bIns="0" rtlCol="0" anchor="ctr"/>
+          <a:bodyPr wrap="square" lIns="0" tIns="0" rIns="0" bIns="0" rtlCol="0" anchor="t">
+            <a:normAutofit/>
+          </a:bodyPr>
           <a:lstStyle/>
           <a:p>
             <a:pPr marL="0" indent="0" algn="l">
+              <a:lnSpc>
+                <a:spcPts val="3680"/>
+              </a:lnSpc>
               <a:buNone/>
             </a:pPr>
             <a:r>
-              <a:rPr lang="en-US" sz="3200" b="1" dirty="0">
+              <a:rPr lang="en-US" sz="3200" b="1" i="0" dirty="0">
                 <a:solidFill>
-                  <a:srgbClr val="F6F4F0"/>
+                  <a:srgbClr val="F4EEE3"/>
                 </a:solidFill>
-                <a:latin typeface="Libre Baskerville" pitchFamily="34" charset="0"/>
-                <a:ea typeface="Libre Baskerville" pitchFamily="34" charset="-122"/>
-                <a:cs typeface="Libre Baskerville" pitchFamily="34" charset="-120"/>
+                <a:latin typeface="Libre Baskerville" pitchFamily="18" charset="0"/>
+                <a:ea typeface="Libre Baskerville" pitchFamily="18" charset="-122"/>
+                <a:cs typeface="Libre Baskerville" pitchFamily="18" charset="-120"/>
               </a:rPr>
               <a:t>The dashboard so far</a:t>
             </a:r>
@@ -5534,7 +6559,7 @@
       </p:sp>
       <p:pic>
         <p:nvPicPr>
-          <p:cNvPr id="3" name="Image 0" descr="Screenshot of the Power BI dashboard: KPI cards, bivariate income and incident-rate map, area details panel, day-by-hour heatmap, monthly chart and neighbourhood-trait correlation chart"/>
+          <p:cNvPr id="4" name="Image 0" descr="Default dashboard view: income and incident-rate map of all 113 areas, empty area details panel, heatmap, monthly chart and neighbourhood-trait chart"/>
           <p:cNvPicPr>
             <a:picLocks noChangeAspect="1"/>
           </p:cNvPicPr>
@@ -5542,30 +6567,92 @@
         </p:nvPicPr>
         <p:blipFill>
           <a:blip r:embed="rId3"/>
-          <a:stretch>
-            <a:fillRect/>
-          </a:stretch>
+          <a:srcRect l="-146" r="-146"/>
+          <a:stretch/>
         </p:blipFill>
         <p:spPr>
           <a:xfrm>
-            <a:off x="548640" y="1371600"/>
-            <a:ext cx="7863840" cy="4411157"/>
-          </a:xfrm>
-          <a:prstGeom prst="rect">
-            <a:avLst/>
+            <a:off x="819150" y="1830071"/>
+            <a:ext cx="5118100" cy="2857500"/>
+          </a:xfrm>
+          <a:prstGeom prst="roundRect">
+            <a:avLst>
+              <a:gd name="adj" fmla="val 2444"/>
+            </a:avLst>
           </a:prstGeom>
         </p:spPr>
       </p:pic>
       <p:sp>
         <p:nvSpPr>
-          <p:cNvPr id="4" name="Text 1"/>
-          <p:cNvSpPr txBox="1"/>
-          <p:nvPr/>
-        </p:nvSpPr>
-        <p:spPr>
-          <a:xfrm>
-            <a:off x="8778240" y="1417320"/>
-            <a:ext cx="2834640" cy="320040"/>
+          <p:cNvPr id="5" name="Shape 2"/>
+          <p:cNvSpPr/>
+          <p:nvPr/>
+        </p:nvSpPr>
+        <p:spPr>
+          <a:xfrm>
+            <a:off x="815975" y="1826896"/>
+            <a:ext cx="5124450" cy="2863850"/>
+          </a:xfrm>
+          <a:prstGeom prst="roundRect">
+            <a:avLst>
+              <a:gd name="adj" fmla="val 2550"/>
+            </a:avLst>
+          </a:prstGeom>
+          <a:noFill/>
+          <a:ln w="6350">
+            <a:solidFill>
+              <a:srgbClr val="4A4A52"/>
+            </a:solidFill>
+            <a:prstDash val="solid"/>
+          </a:ln>
+        </p:spPr>
+        <p:txBody>
+          <a:bodyPr/>
+          <a:lstStyle/>
+          <a:p>
+            <a:pPr marL="0" marR="0" lvl="0" indent="0" algn="l" defTabSz="914400" rtl="0" eaLnBrk="1" fontAlgn="auto" latinLnBrk="0" hangingPunct="1">
+              <a:lnSpc>
+                <a:spcPct val="100000"/>
+              </a:lnSpc>
+              <a:spcBef>
+                <a:spcPts val="0"/>
+              </a:spcBef>
+              <a:spcAft>
+                <a:spcPts val="0"/>
+              </a:spcAft>
+              <a:buClrTx/>
+              <a:buSzTx/>
+              <a:buFontTx/>
+              <a:buNone/>
+              <a:tabLst/>
+              <a:defRPr/>
+            </a:pPr>
+            <a:endParaRPr kumimoji="0" lang="en-CA" sz="1800" b="0" i="0" u="none" strike="noStrike" kern="1200" cap="none" spc="0" normalizeH="0" baseline="0" noProof="0">
+              <a:ln>
+                <a:noFill/>
+              </a:ln>
+              <a:solidFill>
+                <a:srgbClr val="2B2B30"/>
+              </a:solidFill>
+              <a:effectLst/>
+              <a:uLnTx/>
+              <a:uFillTx/>
+              <a:ea typeface="+mn-ea"/>
+              <a:cs typeface="+mn-cs"/>
+            </a:endParaRPr>
+          </a:p>
+        </p:txBody>
+      </p:sp>
+      <p:sp>
+        <p:nvSpPr>
+          <p:cNvPr id="6" name="Text 3"/>
+          <p:cNvSpPr/>
+          <p:nvPr/>
+        </p:nvSpPr>
+        <p:spPr>
+          <a:xfrm>
+            <a:off x="812800" y="4820921"/>
+            <a:ext cx="5284724" cy="265430"/>
           </a:xfrm>
           <a:prstGeom prst="rect">
             <a:avLst/>
@@ -5574,193 +6661,335 @@
           <a:ln/>
         </p:spPr>
         <p:txBody>
-          <a:bodyPr wrap="square" lIns="0" tIns="0" rIns="0" bIns="0" rtlCol="0" anchor="t"/>
-          <a:lstStyle/>
-          <a:p>
-            <a:pPr marL="0" indent="0">
+          <a:bodyPr wrap="square" lIns="0" tIns="0" rIns="0" bIns="0" rtlCol="0" anchor="t">
+            <a:normAutofit/>
+          </a:bodyPr>
+          <a:lstStyle/>
+          <a:p>
+            <a:pPr marL="0" marR="0" lvl="0" indent="0" algn="l" defTabSz="914400" rtl="0" eaLnBrk="1" fontAlgn="auto" latinLnBrk="0" hangingPunct="1">
+              <a:lnSpc>
+                <a:spcPts val="1890"/>
+              </a:lnSpc>
+              <a:spcBef>
+                <a:spcPts val="0"/>
+              </a:spcBef>
+              <a:spcAft>
+                <a:spcPts val="0"/>
+              </a:spcAft>
+              <a:buClrTx/>
+              <a:buSzTx/>
+              <a:buFontTx/>
               <a:buNone/>
+              <a:tabLst/>
+              <a:defRPr/>
             </a:pPr>
             <a:r>
-              <a:rPr lang="en-US" sz="1300" b="1" kern="0" spc="200" dirty="0">
+              <a:rPr kumimoji="0" lang="en-US" sz="1400" b="1" i="0" u="none" strike="noStrike" kern="1200" cap="none" spc="0" normalizeH="0" baseline="0" noProof="0" dirty="0">
+                <a:ln>
+                  <a:noFill/>
+                </a:ln>
                 <a:solidFill>
-                  <a:srgbClr val="E39BBE"/>
+                  <a:srgbClr val="F4EEE3"/>
                 </a:solidFill>
+                <a:effectLst/>
+                <a:uLnTx/>
+                <a:uFillTx/>
                 <a:latin typeface="Public Sans" pitchFamily="34" charset="0"/>
                 <a:ea typeface="Public Sans" pitchFamily="34" charset="-122"/>
                 <a:cs typeface="Public Sans" pitchFamily="34" charset="-120"/>
               </a:rPr>
-              <a:t>BUILT</a:t>
+              <a:t>Default view:</a:t>
             </a:r>
-            <a:endParaRPr lang="en-US" sz="1300" dirty="0"/>
-          </a:p>
-        </p:txBody>
-      </p:sp>
-      <p:sp>
-        <p:nvSpPr>
-          <p:cNvPr id="5" name="Text 2"/>
-          <p:cNvSpPr txBox="1"/>
-          <p:nvPr/>
-        </p:nvSpPr>
-        <p:spPr>
-          <a:xfrm>
-            <a:off x="8778240" y="1874520"/>
-            <a:ext cx="2834640" cy="3840480"/>
-          </a:xfrm>
-          <a:prstGeom prst="rect">
-            <a:avLst/>
-          </a:prstGeom>
-          <a:noFill/>
-          <a:ln/>
-        </p:spPr>
-        <p:txBody>
-          <a:bodyPr wrap="square" lIns="0" tIns="0" rIns="0" bIns="0" rtlCol="0" anchor="t"/>
-          <a:lstStyle/>
-          <a:p>
-            <a:pPr marL="342900" indent="-342900">
-              <a:spcAft>
-                <a:spcPts val="900"/>
-              </a:spcAft>
-              <a:buSzPct val="100000"/>
-              <a:buChar char="•"/>
-            </a:pPr>
             <a:r>
-              <a:rPr lang="en-US" sz="1500" dirty="0">
+              <a:rPr kumimoji="0" lang="en-US" sz="1400" b="0" i="0" u="none" strike="noStrike" kern="1200" cap="none" spc="0" normalizeH="0" baseline="0" noProof="0" dirty="0">
+                <a:ln>
+                  <a:noFill/>
+                </a:ln>
                 <a:solidFill>
-                  <a:srgbClr val="C9C7CF"/>
+                  <a:srgbClr val="CFC8BC"/>
                 </a:solidFill>
+                <a:effectLst/>
+                <a:uLnTx/>
+                <a:uFillTx/>
                 <a:latin typeface="Public Sans" pitchFamily="34" charset="0"/>
                 <a:ea typeface="Public Sans" pitchFamily="34" charset="-122"/>
                 <a:cs typeface="Public Sans" pitchFamily="34" charset="-120"/>
               </a:rPr>
-              <a:t>4 KPIs that follow the filters</a:t>
+              <a:t> all 113 areas, every chart citywide</a:t>
             </a:r>
-            <a:endParaRPr lang="en-US" sz="1500" dirty="0"/>
-          </a:p>
-          <a:p>
-            <a:pPr marL="342900" indent="-342900">
+            <a:endParaRPr kumimoji="0" lang="en-US" sz="1400" b="0" i="0" u="none" strike="noStrike" kern="1200" cap="none" spc="0" normalizeH="0" baseline="0" noProof="0" dirty="0">
+              <a:ln>
+                <a:noFill/>
+              </a:ln>
+              <a:solidFill>
+                <a:srgbClr val="2B2B30"/>
+              </a:solidFill>
+              <a:effectLst/>
+              <a:uLnTx/>
+              <a:uFillTx/>
+              <a:latin typeface="Public Sans"/>
+              <a:ea typeface="+mn-ea"/>
+              <a:cs typeface="+mn-cs"/>
+            </a:endParaRPr>
+          </a:p>
+        </p:txBody>
+      </p:sp>
+      <p:pic>
+        <p:nvPicPr>
+          <p:cNvPr id="7" name="Image 1" descr="Dashboard after selecting the lower-income, high incident-rate legend square: 16 areas highlighted on the map, the details panel summarising the group, and the KPIs and charts filtered to those areas"/>
+          <p:cNvPicPr>
+            <a:picLocks noChangeAspect="1"/>
+          </p:cNvPicPr>
+          <p:nvPr/>
+        </p:nvPicPr>
+        <p:blipFill>
+          <a:blip r:embed="rId4"/>
+          <a:srcRect l="-348" r="-348"/>
+          <a:stretch/>
+        </p:blipFill>
+        <p:spPr>
+          <a:xfrm>
+            <a:off x="6254750" y="1830071"/>
+            <a:ext cx="5118100" cy="2857500"/>
+          </a:xfrm>
+          <a:prstGeom prst="roundRect">
+            <a:avLst>
+              <a:gd name="adj" fmla="val 2444"/>
+            </a:avLst>
+          </a:prstGeom>
+        </p:spPr>
+      </p:pic>
+      <p:sp>
+        <p:nvSpPr>
+          <p:cNvPr id="8" name="Shape 4"/>
+          <p:cNvSpPr/>
+          <p:nvPr/>
+        </p:nvSpPr>
+        <p:spPr>
+          <a:xfrm>
+            <a:off x="6251575" y="1826896"/>
+            <a:ext cx="5124450" cy="2863850"/>
+          </a:xfrm>
+          <a:prstGeom prst="roundRect">
+            <a:avLst>
+              <a:gd name="adj" fmla="val 2550"/>
+            </a:avLst>
+          </a:prstGeom>
+          <a:noFill/>
+          <a:ln w="6350">
+            <a:solidFill>
+              <a:srgbClr val="4A4A52"/>
+            </a:solidFill>
+            <a:prstDash val="solid"/>
+          </a:ln>
+        </p:spPr>
+        <p:txBody>
+          <a:bodyPr/>
+          <a:lstStyle/>
+          <a:p>
+            <a:pPr marL="0" marR="0" lvl="0" indent="0" algn="l" defTabSz="914400" rtl="0" eaLnBrk="1" fontAlgn="auto" latinLnBrk="0" hangingPunct="1">
+              <a:lnSpc>
+                <a:spcPct val="100000"/>
+              </a:lnSpc>
+              <a:spcBef>
+                <a:spcPts val="0"/>
+              </a:spcBef>
               <a:spcAft>
-                <a:spcPts val="900"/>
+                <a:spcPts val="0"/>
               </a:spcAft>
-              <a:buSzPct val="100000"/>
-              <a:buChar char="•"/>
+              <a:buClrTx/>
+              <a:buSzTx/>
+              <a:buFontTx/>
+              <a:buNone/>
+              <a:tabLst/>
+              <a:defRPr/>
+            </a:pPr>
+            <a:endParaRPr kumimoji="0" lang="en-CA" sz="1800" b="0" i="0" u="none" strike="noStrike" kern="1200" cap="none" spc="0" normalizeH="0" baseline="0" noProof="0">
+              <a:ln>
+                <a:noFill/>
+              </a:ln>
+              <a:solidFill>
+                <a:srgbClr val="2B2B30"/>
+              </a:solidFill>
+              <a:effectLst/>
+              <a:uLnTx/>
+              <a:uFillTx/>
+              <a:latin typeface="Public Sans"/>
+              <a:ea typeface="+mn-ea"/>
+              <a:cs typeface="+mn-cs"/>
+            </a:endParaRPr>
+          </a:p>
+        </p:txBody>
+      </p:sp>
+      <p:sp>
+        <p:nvSpPr>
+          <p:cNvPr id="9" name="Text 5"/>
+          <p:cNvSpPr/>
+          <p:nvPr/>
+        </p:nvSpPr>
+        <p:spPr>
+          <a:xfrm>
+            <a:off x="6248400" y="4820921"/>
+            <a:ext cx="5284724" cy="505460"/>
+          </a:xfrm>
+          <a:prstGeom prst="rect">
+            <a:avLst/>
+          </a:prstGeom>
+          <a:noFill/>
+          <a:ln/>
+        </p:spPr>
+        <p:txBody>
+          <a:bodyPr wrap="square" lIns="0" tIns="0" rIns="0" bIns="0" rtlCol="0" anchor="t">
+            <a:normAutofit/>
+          </a:bodyPr>
+          <a:lstStyle/>
+          <a:p>
+            <a:pPr marL="0" marR="0" lvl="0" indent="0" algn="l" defTabSz="914400" rtl="0" eaLnBrk="1" fontAlgn="auto" latinLnBrk="0" hangingPunct="1">
+              <a:lnSpc>
+                <a:spcPts val="1890"/>
+              </a:lnSpc>
+              <a:spcBef>
+                <a:spcPts val="0"/>
+              </a:spcBef>
+              <a:spcAft>
+                <a:spcPts val="0"/>
+              </a:spcAft>
+              <a:buClrTx/>
+              <a:buSzTx/>
+              <a:buFontTx/>
+              <a:buNone/>
+              <a:tabLst/>
+              <a:defRPr/>
             </a:pPr>
             <a:r>
-              <a:rPr lang="en-US" sz="1500" dirty="0">
+              <a:rPr kumimoji="0" lang="en-US" sz="1400" b="1" i="0" u="none" strike="noStrike" kern="1200" cap="none" spc="0" normalizeH="0" baseline="0" noProof="0" dirty="0">
+                <a:ln>
+                  <a:noFill/>
+                </a:ln>
                 <a:solidFill>
-                  <a:srgbClr val="C9C7CF"/>
+                  <a:srgbClr val="F4EEE3"/>
                 </a:solidFill>
+                <a:effectLst/>
+                <a:uLnTx/>
+                <a:uFillTx/>
                 <a:latin typeface="Public Sans" pitchFamily="34" charset="0"/>
                 <a:ea typeface="Public Sans" pitchFamily="34" charset="-122"/>
                 <a:cs typeface="Public Sans" pitchFamily="34" charset="-120"/>
               </a:rPr>
-              <a:t>Income × incident-rate map</a:t>
+              <a:t>One click:</a:t>
             </a:r>
-            <a:endParaRPr lang="en-US" sz="1500" dirty="0"/>
-          </a:p>
-          <a:p>
-            <a:pPr marL="342900" indent="-342900">
-              <a:spcAft>
-                <a:spcPts val="900"/>
-              </a:spcAft>
-              <a:buSzPct val="100000"/>
-              <a:buChar char="•"/>
-            </a:pPr>
             <a:r>
-              <a:rPr lang="en-US" sz="1500" dirty="0">
+              <a:rPr kumimoji="0" lang="en-US" sz="1400" b="0" i="0" u="none" strike="noStrike" kern="1200" cap="none" spc="0" normalizeH="0" baseline="0" noProof="0" dirty="0">
+                <a:ln>
+                  <a:noFill/>
+                </a:ln>
                 <a:solidFill>
-                  <a:srgbClr val="C9C7CF"/>
+                  <a:srgbClr val="CFC8BC"/>
                 </a:solidFill>
+                <a:effectLst/>
+                <a:uLnTx/>
+                <a:uFillTx/>
                 <a:latin typeface="Public Sans" pitchFamily="34" charset="0"/>
                 <a:ea typeface="Public Sans" pitchFamily="34" charset="-122"/>
                 <a:cs typeface="Public Sans" pitchFamily="34" charset="-120"/>
               </a:rPr>
-              <a:t>Click-through area details</a:t>
+              <a:t> 16 lower-income, high-rate areas, at 2.7× the city rate</a:t>
             </a:r>
-            <a:endParaRPr lang="en-US" sz="1500" dirty="0"/>
-          </a:p>
-          <a:p>
-            <a:pPr marL="342900" indent="-342900">
+            <a:endParaRPr kumimoji="0" lang="en-US" sz="1400" b="0" i="0" u="none" strike="noStrike" kern="1200" cap="none" spc="0" normalizeH="0" baseline="0" noProof="0" dirty="0">
+              <a:ln>
+                <a:noFill/>
+              </a:ln>
+              <a:solidFill>
+                <a:srgbClr val="2B2B30"/>
+              </a:solidFill>
+              <a:effectLst/>
+              <a:uLnTx/>
+              <a:uFillTx/>
+              <a:latin typeface="Public Sans"/>
+              <a:ea typeface="+mn-ea"/>
+              <a:cs typeface="+mn-cs"/>
+            </a:endParaRPr>
+          </a:p>
+        </p:txBody>
+      </p:sp>
+      <p:sp>
+        <p:nvSpPr>
+          <p:cNvPr id="10" name="Text 6"/>
+          <p:cNvSpPr/>
+          <p:nvPr/>
+        </p:nvSpPr>
+        <p:spPr>
+          <a:xfrm>
+            <a:off x="812800" y="5554979"/>
+            <a:ext cx="10883392" cy="274320"/>
+          </a:xfrm>
+          <a:prstGeom prst="rect">
+            <a:avLst/>
+          </a:prstGeom>
+          <a:noFill/>
+          <a:ln/>
+        </p:spPr>
+        <p:txBody>
+          <a:bodyPr wrap="square" lIns="0" tIns="0" rIns="0" bIns="0" rtlCol="0" anchor="t">
+            <a:normAutofit/>
+          </a:bodyPr>
+          <a:lstStyle/>
+          <a:p>
+            <a:pPr marL="0" marR="0" lvl="0" indent="0" algn="l" defTabSz="914400" rtl="0" eaLnBrk="1" fontAlgn="auto" latinLnBrk="0" hangingPunct="1">
+              <a:lnSpc>
+                <a:spcPts val="1960"/>
+              </a:lnSpc>
+              <a:spcBef>
+                <a:spcPts val="0"/>
+              </a:spcBef>
               <a:spcAft>
-                <a:spcPts val="900"/>
+                <a:spcPts val="0"/>
               </a:spcAft>
-              <a:buSzPct val="100000"/>
-              <a:buChar char="•"/>
+              <a:buClrTx/>
+              <a:buSzTx/>
+              <a:buFontTx/>
+              <a:buNone/>
+              <a:tabLst/>
+              <a:defRPr/>
             </a:pPr>
             <a:r>
-              <a:rPr lang="en-US" sz="1500" dirty="0">
+              <a:rPr kumimoji="0" lang="en-US" sz="1400" b="0" i="0" u="sng" strike="noStrike" kern="1200" cap="none" spc="0" normalizeH="0" baseline="0" noProof="0" dirty="0">
+                <a:ln>
+                  <a:noFill/>
+                </a:ln>
                 <a:solidFill>
-                  <a:srgbClr val="C9C7CF"/>
+                  <a:srgbClr val="E39BBE"/>
                 </a:solidFill>
+                <a:effectLst/>
+                <a:uLnTx/>
+                <a:uFillTx/>
                 <a:latin typeface="Public Sans" pitchFamily="34" charset="0"/>
                 <a:ea typeface="Public Sans" pitchFamily="34" charset="-122"/>
                 <a:cs typeface="Public Sans" pitchFamily="34" charset="-120"/>
+                <a:hlinkClick r:id="rId5">
+                  <a:extLst>
+                    <a:ext uri="{A12FA001-AC4F-418D-AE19-62706E023703}">
+                      <ahyp:hlinkClr xmlns:ahyp="http://schemas.microsoft.com/office/drawing/2018/hyperlinkcolor" val="tx"/>
+                    </a:ext>
+                  </a:extLst>
+                </a:hlinkClick>
               </a:rPr>
-              <a:t>Day-by-hour heatmap</a:t>
+              <a:t>Open the live report in Power BI</a:t>
             </a:r>
-            <a:endParaRPr lang="en-US" sz="1500" dirty="0"/>
-          </a:p>
-          <a:p>
-            <a:pPr marL="342900" indent="-342900">
-              <a:spcAft>
-                <a:spcPts val="900"/>
-              </a:spcAft>
-              <a:buSzPct val="100000"/>
-              <a:buChar char="•"/>
-            </a:pPr>
-            <a:r>
-              <a:rPr lang="en-US" sz="1500" dirty="0">
-                <a:solidFill>
-                  <a:srgbClr val="C9C7CF"/>
-                </a:solidFill>
-                <a:latin typeface="Public Sans" pitchFamily="34" charset="0"/>
-                <a:ea typeface="Public Sans" pitchFamily="34" charset="-122"/>
-                <a:cs typeface="Public Sans" pitchFamily="34" charset="-120"/>
-              </a:rPr>
-              <a:t>Monthly pattern</a:t>
-            </a:r>
-            <a:endParaRPr lang="en-US" sz="1500" dirty="0"/>
-          </a:p>
-          <a:p>
-            <a:pPr marL="342900" indent="-342900">
-              <a:spcAft>
-                <a:spcPts val="900"/>
-              </a:spcAft>
-              <a:buSzPct val="100000"/>
-              <a:buChar char="•"/>
-            </a:pPr>
-            <a:r>
-              <a:rPr lang="en-US" sz="1500" dirty="0">
-                <a:solidFill>
-                  <a:srgbClr val="C9C7CF"/>
-                </a:solidFill>
-                <a:latin typeface="Public Sans" pitchFamily="34" charset="0"/>
-                <a:ea typeface="Public Sans" pitchFamily="34" charset="-122"/>
-                <a:cs typeface="Public Sans" pitchFamily="34" charset="-120"/>
-              </a:rPr>
-              <a:t>Neighbourhood-trait links</a:t>
-            </a:r>
-            <a:endParaRPr lang="en-US" sz="1500" dirty="0"/>
-          </a:p>
-          <a:p>
-            <a:pPr marL="342900" indent="-342900">
-              <a:spcAft>
-                <a:spcPts val="900"/>
-              </a:spcAft>
-              <a:buSzPct val="100000"/>
-              <a:buChar char="•"/>
-            </a:pPr>
-            <a:r>
-              <a:rPr lang="en-US" sz="1500" dirty="0">
-                <a:solidFill>
-                  <a:srgbClr val="C9C7CF"/>
-                </a:solidFill>
-                <a:latin typeface="Public Sans" pitchFamily="34" charset="0"/>
-                <a:ea typeface="Public Sans" pitchFamily="34" charset="-122"/>
-                <a:cs typeface="Public Sans" pitchFamily="34" charset="-120"/>
-              </a:rPr>
-              <a:t>Year, type and community filters</a:t>
-            </a:r>
-            <a:endParaRPr lang="en-US" sz="1500" dirty="0"/>
+            <a:endParaRPr kumimoji="0" lang="en-US" sz="1400" b="0" i="0" u="none" strike="noStrike" kern="1200" cap="none" spc="0" normalizeH="0" baseline="0" noProof="0" dirty="0">
+              <a:ln>
+                <a:noFill/>
+              </a:ln>
+              <a:solidFill>
+                <a:srgbClr val="2B2B30"/>
+              </a:solidFill>
+              <a:effectLst/>
+              <a:uLnTx/>
+              <a:uFillTx/>
+              <a:latin typeface="Public Sans"/>
+              <a:ea typeface="+mn-ea"/>
+              <a:cs typeface="+mn-cs"/>
+            </a:endParaRPr>
           </a:p>
         </p:txBody>
       </p:sp>
@@ -5774,7 +7003,7 @@
 
 <file path=ppt/slides/slide7.xml><?xml version="1.0" encoding="utf-8"?>
 <p:sld xmlns:a="http://schemas.openxmlformats.org/drawingml/2006/main" xmlns:r="http://schemas.openxmlformats.org/officeDocument/2006/relationships" xmlns:p="http://schemas.openxmlformats.org/presentationml/2006/main">
-  <p:cSld name="Slide 7">
+  <p:cSld>
     <p:spTree>
       <p:nvGrpSpPr>
         <p:cNvPr id="1" name=""/>
@@ -5864,8 +7093,8 @@
         </p:nvSpPr>
         <p:spPr>
           <a:xfrm>
-            <a:off x="5577840" y="1417320"/>
-            <a:ext cx="6035040" cy="640080"/>
+            <a:off x="5577840" y="1371600"/>
+            <a:ext cx="2834640" cy="640080"/>
           </a:xfrm>
           <a:prstGeom prst="rect">
             <a:avLst/>
@@ -5877,21 +7106,54 @@
           <a:bodyPr wrap="square" lIns="0" tIns="0" rIns="0" bIns="0" rtlCol="0" anchor="t"/>
           <a:lstStyle/>
           <a:p>
-            <a:pPr marL="0" indent="0">
+            <a:pPr marL="0" marR="0" lvl="0" indent="0" algn="l" defTabSz="914400" rtl="0" eaLnBrk="1" fontAlgn="auto" latinLnBrk="0" hangingPunct="1">
+              <a:lnSpc>
+                <a:spcPct val="100000"/>
+              </a:lnSpc>
+              <a:spcBef>
+                <a:spcPts val="0"/>
+              </a:spcBef>
+              <a:spcAft>
+                <a:spcPts val="0"/>
+              </a:spcAft>
+              <a:buClrTx/>
+              <a:buSzTx/>
+              <a:buFontTx/>
               <a:buNone/>
+              <a:tabLst/>
+              <a:defRPr/>
             </a:pPr>
             <a:r>
-              <a:rPr lang="en-US" sz="3400" b="1" dirty="0">
+              <a:rPr kumimoji="0" lang="en-US" sz="3400" b="1" i="0" u="none" strike="noStrike" kern="1200" cap="none" spc="0" normalizeH="0" baseline="0" noProof="0" dirty="0">
+                <a:ln>
+                  <a:noFill/>
+                </a:ln>
                 <a:solidFill>
                   <a:srgbClr val="B4467E"/>
                 </a:solidFill>
+                <a:effectLst/>
+                <a:uLnTx/>
+                <a:uFillTx/>
                 <a:latin typeface="Libre Baskerville" pitchFamily="34" charset="0"/>
                 <a:ea typeface="Libre Baskerville" pitchFamily="34" charset="-122"/>
                 <a:cs typeface="Libre Baskerville" pitchFamily="34" charset="-120"/>
               </a:rPr>
-              <a:t>16 of 37</a:t>
+              <a:t>16</a:t>
             </a:r>
-            <a:endParaRPr lang="en-US" sz="3400" dirty="0"/>
+            <a:endParaRPr kumimoji="0" lang="en-US" sz="3400" b="0" i="0" u="none" strike="noStrike" kern="1200" cap="none" spc="0" normalizeH="0" baseline="0" noProof="0" dirty="0">
+              <a:ln>
+                <a:noFill/>
+              </a:ln>
+              <a:solidFill>
+                <a:prstClr val="black"/>
+              </a:solidFill>
+              <a:effectLst/>
+              <a:uLnTx/>
+              <a:uFillTx/>
+              <a:latin typeface="Public Sans"/>
+              <a:ea typeface="+mn-ea"/>
+              <a:cs typeface="+mn-cs"/>
+            </a:endParaRPr>
           </a:p>
         </p:txBody>
       </p:sp>
@@ -5903,8 +7165,8 @@
         </p:nvSpPr>
         <p:spPr>
           <a:xfrm>
-            <a:off x="5577840" y="2075688"/>
-            <a:ext cx="6035040" cy="731520"/>
+            <a:off x="5577840" y="2011680"/>
+            <a:ext cx="2834640" cy="594360"/>
           </a:xfrm>
           <a:prstGeom prst="rect">
             <a:avLst/>
@@ -5916,21 +7178,53 @@
           <a:bodyPr wrap="square" lIns="0" tIns="0" rIns="0" bIns="0" rtlCol="0" anchor="t"/>
           <a:lstStyle/>
           <a:p>
-            <a:pPr marL="0" indent="0">
+            <a:pPr marL="0" marR="0" lvl="0" indent="0" algn="l" defTabSz="914400" rtl="0" eaLnBrk="1" fontAlgn="auto" latinLnBrk="0" hangingPunct="1">
+              <a:lnSpc>
+                <a:spcPct val="100000"/>
+              </a:lnSpc>
+              <a:spcBef>
+                <a:spcPts val="0"/>
+              </a:spcBef>
+              <a:spcAft>
+                <a:spcPts val="0"/>
+              </a:spcAft>
+              <a:buClrTx/>
+              <a:buSzTx/>
+              <a:buFontTx/>
               <a:buNone/>
+              <a:tabLst/>
+              <a:defRPr/>
             </a:pPr>
             <a:r>
-              <a:rPr lang="en-US" sz="1600" dirty="0">
+              <a:rPr kumimoji="0" lang="en-US" sz="1500" b="0" i="0" u="none" strike="noStrike" kern="1200" cap="none" spc="0" normalizeH="0" baseline="0" noProof="0" dirty="0">
+                <a:ln>
+                  <a:noFill/>
+                </a:ln>
                 <a:solidFill>
                   <a:srgbClr val="4A4A52"/>
                 </a:solidFill>
+                <a:effectLst/>
+                <a:uLnTx/>
+                <a:uFillTx/>
                 <a:latin typeface="Public Sans" pitchFamily="34" charset="0"/>
                 <a:ea typeface="Public Sans" pitchFamily="34" charset="-122"/>
                 <a:cs typeface="Public Sans" pitchFamily="34" charset="-120"/>
               </a:rPr>
-              <a:t>lower-income areas fall in the highest incident-rate third, vs. 11 of 38 higher-income areas</a:t>
+              <a:t>lower-income areas have high incident rates (pink)</a:t>
             </a:r>
-            <a:endParaRPr lang="en-US" sz="1600" dirty="0"/>
+            <a:endParaRPr kumimoji="0" lang="en-US" sz="1500" b="0" i="0" u="none" strike="noStrike" kern="1200" cap="none" spc="0" normalizeH="0" baseline="0" noProof="0" dirty="0">
+              <a:ln>
+                <a:noFill/>
+              </a:ln>
+              <a:solidFill>
+                <a:prstClr val="black"/>
+              </a:solidFill>
+              <a:effectLst/>
+              <a:uLnTx/>
+              <a:uFillTx/>
+              <a:ea typeface="+mn-ea"/>
+              <a:cs typeface="+mn-cs"/>
+            </a:endParaRPr>
           </a:p>
         </p:txBody>
       </p:sp>
@@ -5942,8 +7236,8 @@
         </p:nvSpPr>
         <p:spPr>
           <a:xfrm>
-            <a:off x="5577840" y="3017520"/>
-            <a:ext cx="6035040" cy="640080"/>
+            <a:off x="8686800" y="1371600"/>
+            <a:ext cx="2834640" cy="640080"/>
           </a:xfrm>
           <a:prstGeom prst="rect">
             <a:avLst/>
@@ -5955,21 +7249,53 @@
           <a:bodyPr wrap="square" lIns="0" tIns="0" rIns="0" bIns="0" rtlCol="0" anchor="t"/>
           <a:lstStyle/>
           <a:p>
-            <a:pPr marL="0" indent="0">
+            <a:pPr marL="0" marR="0" lvl="0" indent="0" algn="l" defTabSz="914400" rtl="0" eaLnBrk="1" fontAlgn="auto" latinLnBrk="0" hangingPunct="1">
+              <a:lnSpc>
+                <a:spcPct val="100000"/>
+              </a:lnSpc>
+              <a:spcBef>
+                <a:spcPts val="0"/>
+              </a:spcBef>
+              <a:spcAft>
+                <a:spcPts val="0"/>
+              </a:spcAft>
+              <a:buClrTx/>
+              <a:buSzTx/>
+              <a:buFontTx/>
               <a:buNone/>
+              <a:tabLst/>
+              <a:defRPr/>
             </a:pPr>
             <a:r>
-              <a:rPr lang="en-US" sz="3400" b="1" dirty="0">
+              <a:rPr kumimoji="0" lang="en-US" sz="3400" b="1" i="0" u="none" strike="noStrike" kern="1200" cap="none" spc="0" normalizeH="0" baseline="0" noProof="0" dirty="0">
+                <a:ln>
+                  <a:noFill/>
+                </a:ln>
                 <a:solidFill>
-                  <a:srgbClr val="B4467E"/>
+                  <a:srgbClr val="4E6596"/>
                 </a:solidFill>
+                <a:effectLst/>
+                <a:uLnTx/>
+                <a:uFillTx/>
                 <a:latin typeface="Libre Baskerville" pitchFamily="34" charset="0"/>
                 <a:ea typeface="Libre Baskerville" pitchFamily="34" charset="-122"/>
                 <a:cs typeface="Libre Baskerville" pitchFamily="34" charset="-120"/>
               </a:rPr>
-              <a:t>1.7×</a:t>
+              <a:t>16</a:t>
             </a:r>
-            <a:endParaRPr lang="en-US" sz="3400" dirty="0"/>
+            <a:endParaRPr kumimoji="0" lang="en-US" sz="3400" b="0" i="0" u="none" strike="noStrike" kern="1200" cap="none" spc="0" normalizeH="0" baseline="0" noProof="0" dirty="0">
+              <a:ln>
+                <a:noFill/>
+              </a:ln>
+              <a:solidFill>
+                <a:prstClr val="black"/>
+              </a:solidFill>
+              <a:effectLst/>
+              <a:uLnTx/>
+              <a:uFillTx/>
+              <a:ea typeface="+mn-ea"/>
+              <a:cs typeface="+mn-cs"/>
+            </a:endParaRPr>
           </a:p>
         </p:txBody>
       </p:sp>
@@ -5981,8 +7307,8 @@
         </p:nvSpPr>
         <p:spPr>
           <a:xfrm>
-            <a:off x="5577840" y="3675888"/>
-            <a:ext cx="6035040" cy="731520"/>
+            <a:off x="8686800" y="2011680"/>
+            <a:ext cx="2834640" cy="594360"/>
           </a:xfrm>
           <a:prstGeom prst="rect">
             <a:avLst/>
@@ -5994,21 +7320,54 @@
           <a:bodyPr wrap="square" lIns="0" tIns="0" rIns="0" bIns="0" rtlCol="0" anchor="t"/>
           <a:lstStyle/>
           <a:p>
-            <a:pPr marL="0" indent="0">
+            <a:pPr marL="0" marR="0" lvl="0" indent="0" algn="l" defTabSz="914400" rtl="0" eaLnBrk="1" fontAlgn="auto" latinLnBrk="0" hangingPunct="1">
+              <a:lnSpc>
+                <a:spcPct val="100000"/>
+              </a:lnSpc>
+              <a:spcBef>
+                <a:spcPts val="0"/>
+              </a:spcBef>
+              <a:spcAft>
+                <a:spcPts val="0"/>
+              </a:spcAft>
+              <a:buClrTx/>
+              <a:buSzTx/>
+              <a:buFontTx/>
               <a:buNone/>
+              <a:tabLst/>
+              <a:defRPr/>
             </a:pPr>
             <a:r>
-              <a:rPr lang="en-US" sz="1600" dirty="0">
+              <a:rPr kumimoji="0" lang="en-US" sz="1500" b="0" i="0" u="none" strike="noStrike" kern="1200" cap="none" spc="0" normalizeH="0" baseline="0" noProof="0" dirty="0">
+                <a:ln>
+                  <a:noFill/>
+                </a:ln>
                 <a:solidFill>
                   <a:srgbClr val="4A4A52"/>
                 </a:solidFill>
+                <a:effectLst/>
+                <a:uLnTx/>
+                <a:uFillTx/>
                 <a:latin typeface="Public Sans" pitchFamily="34" charset="0"/>
                 <a:ea typeface="Public Sans" pitchFamily="34" charset="-122"/>
                 <a:cs typeface="Public Sans" pitchFamily="34" charset="-120"/>
               </a:rPr>
-              <a:t>the local incident rate in the lowest-income fifth (2.35 vs. 1.38 per 1,000 residents a year)</a:t>
+              <a:t>higher-income areas have low incident rates (blue)</a:t>
             </a:r>
-            <a:endParaRPr lang="en-US" sz="1600" dirty="0"/>
+            <a:endParaRPr kumimoji="0" lang="en-US" sz="1500" b="0" i="0" u="none" strike="noStrike" kern="1200" cap="none" spc="0" normalizeH="0" baseline="0" noProof="0" dirty="0">
+              <a:ln>
+                <a:noFill/>
+              </a:ln>
+              <a:solidFill>
+                <a:prstClr val="black"/>
+              </a:solidFill>
+              <a:effectLst/>
+              <a:uLnTx/>
+              <a:uFillTx/>
+              <a:latin typeface="Public Sans"/>
+              <a:ea typeface="+mn-ea"/>
+              <a:cs typeface="+mn-cs"/>
+            </a:endParaRPr>
           </a:p>
         </p:txBody>
       </p:sp>
@@ -6020,8 +7379,8 @@
         </p:nvSpPr>
         <p:spPr>
           <a:xfrm>
-            <a:off x="5577840" y="4617720"/>
-            <a:ext cx="6035040" cy="640080"/>
+            <a:off x="5577840" y="2697480"/>
+            <a:ext cx="6035040" cy="365760"/>
           </a:xfrm>
           <a:prstGeom prst="rect">
             <a:avLst/>
@@ -6033,34 +7392,156 @@
           <a:bodyPr wrap="square" lIns="0" tIns="0" rIns="0" bIns="0" rtlCol="0" anchor="t"/>
           <a:lstStyle/>
           <a:p>
-            <a:pPr marL="0" indent="0">
+            <a:pPr marL="0" marR="0" lvl="0" indent="0" algn="l" defTabSz="914400" rtl="0" eaLnBrk="1" fontAlgn="auto" latinLnBrk="0" hangingPunct="1">
+              <a:lnSpc>
+                <a:spcPct val="100000"/>
+              </a:lnSpc>
+              <a:spcBef>
+                <a:spcPts val="0"/>
+              </a:spcBef>
+              <a:spcAft>
+                <a:spcPts val="0"/>
+              </a:spcAft>
+              <a:buClrTx/>
+              <a:buSzTx/>
+              <a:buFontTx/>
               <a:buNone/>
+              <a:tabLst/>
+              <a:defRPr/>
             </a:pPr>
             <a:r>
-              <a:rPr lang="en-US" sz="3400" b="1" dirty="0">
+              <a:rPr kumimoji="0" lang="en-US" sz="1500" b="1" i="0" u="none" strike="noStrike" kern="1200" cap="none" spc="0" normalizeH="0" baseline="0" noProof="0" dirty="0">
+                <a:ln>
+                  <a:noFill/>
+                </a:ln>
                 <a:solidFill>
-                  <a:srgbClr val="4E6596"/>
+                  <a:srgbClr val="2B2B30"/>
                 </a:solidFill>
+                <a:effectLst/>
+                <a:uLnTx/>
+                <a:uFillTx/>
+                <a:latin typeface="Public Sans" pitchFamily="34" charset="0"/>
+                <a:ea typeface="Public Sans" pitchFamily="34" charset="-122"/>
+                <a:cs typeface="Public Sans" pitchFamily="34" charset="-120"/>
+              </a:rPr>
+              <a:t>The two largest groups on the map are mirror images of </a:t>
+            </a:r>
+            <a:r>
+              <a:rPr kumimoji="0" lang="en-US" sz="1500" b="1" i="0" u="none" strike="noStrike" kern="1200" cap="none" spc="0" normalizeH="0" baseline="0" noProof="0">
+                <a:ln>
+                  <a:noFill/>
+                </a:ln>
+                <a:solidFill>
+                  <a:srgbClr val="2B2B30"/>
+                </a:solidFill>
+                <a:effectLst/>
+                <a:uLnTx/>
+                <a:uFillTx/>
+                <a:latin typeface="Public Sans" pitchFamily="34" charset="0"/>
+                <a:ea typeface="Public Sans" pitchFamily="34" charset="-122"/>
+                <a:cs typeface="Public Sans" pitchFamily="34" charset="-120"/>
+              </a:rPr>
+              <a:t>each other.</a:t>
+            </a:r>
+            <a:endParaRPr kumimoji="0" lang="en-US" sz="1500" b="0" i="0" u="none" strike="noStrike" kern="1200" cap="none" spc="0" normalizeH="0" baseline="0" noProof="0" dirty="0">
+              <a:ln>
+                <a:noFill/>
+              </a:ln>
+              <a:solidFill>
+                <a:prstClr val="black"/>
+              </a:solidFill>
+              <a:effectLst/>
+              <a:uLnTx/>
+              <a:uFillTx/>
+              <a:latin typeface="Public Sans"/>
+              <a:ea typeface="+mn-ea"/>
+              <a:cs typeface="+mn-cs"/>
+            </a:endParaRPr>
+          </a:p>
+        </p:txBody>
+      </p:sp>
+      <p:sp>
+        <p:nvSpPr>
+          <p:cNvPr id="9" name="Text 6"/>
+          <p:cNvSpPr txBox="1"/>
+          <p:nvPr/>
+        </p:nvSpPr>
+        <p:spPr>
+          <a:xfrm>
+            <a:off x="5577840" y="3337560"/>
+            <a:ext cx="6035040" cy="502920"/>
+          </a:xfrm>
+          <a:prstGeom prst="rect">
+            <a:avLst/>
+          </a:prstGeom>
+          <a:noFill/>
+          <a:ln/>
+        </p:spPr>
+        <p:txBody>
+          <a:bodyPr wrap="square" lIns="0" tIns="0" rIns="0" bIns="0" rtlCol="0" anchor="t"/>
+          <a:lstStyle/>
+          <a:p>
+            <a:pPr marL="0" marR="0" lvl="0" indent="0" algn="l" defTabSz="914400" rtl="0" eaLnBrk="1" fontAlgn="auto" latinLnBrk="0" hangingPunct="1">
+              <a:lnSpc>
+                <a:spcPct val="100000"/>
+              </a:lnSpc>
+              <a:spcBef>
+                <a:spcPts val="0"/>
+              </a:spcBef>
+              <a:spcAft>
+                <a:spcPts val="0"/>
+              </a:spcAft>
+              <a:buClrTx/>
+              <a:buSzTx/>
+              <a:buFontTx/>
+              <a:buNone/>
+              <a:tabLst/>
+              <a:defRPr/>
+            </a:pPr>
+            <a:r>
+              <a:rPr kumimoji="0" lang="en-US" sz="2600" b="1" i="0" u="none" strike="noStrike" kern="1200" cap="none" spc="0" normalizeH="0" baseline="0" noProof="0" dirty="0">
+                <a:ln>
+                  <a:noFill/>
+                </a:ln>
+                <a:solidFill>
+                  <a:srgbClr val="2B2B30"/>
+                </a:solidFill>
+                <a:effectLst/>
+                <a:uLnTx/>
+                <a:uFillTx/>
                 <a:latin typeface="Libre Baskerville" pitchFamily="34" charset="0"/>
                 <a:ea typeface="Libre Baskerville" pitchFamily="34" charset="-122"/>
                 <a:cs typeface="Libre Baskerville" pitchFamily="34" charset="-120"/>
               </a:rPr>
-              <a:t>+0.68 vs. −0.22</a:t>
+              <a:t>East vs. west</a:t>
             </a:r>
-            <a:endParaRPr lang="en-US" sz="3400" dirty="0"/>
-          </a:p>
-        </p:txBody>
-      </p:sp>
-      <p:sp>
-        <p:nvSpPr>
-          <p:cNvPr id="9" name="Text 6"/>
+            <a:endParaRPr kumimoji="0" lang="en-US" sz="2600" b="0" i="0" u="none" strike="noStrike" kern="1200" cap="none" spc="0" normalizeH="0" baseline="0" noProof="0" dirty="0">
+              <a:ln>
+                <a:noFill/>
+              </a:ln>
+              <a:solidFill>
+                <a:prstClr val="black"/>
+              </a:solidFill>
+              <a:effectLst/>
+              <a:uLnTx/>
+              <a:uFillTx/>
+              <a:latin typeface="Public Sans"/>
+              <a:ea typeface="+mn-ea"/>
+              <a:cs typeface="+mn-cs"/>
+            </a:endParaRPr>
+          </a:p>
+        </p:txBody>
+      </p:sp>
+      <p:sp>
+        <p:nvSpPr>
+          <p:cNvPr id="10" name="Text 7"/>
           <p:cNvSpPr txBox="1"/>
           <p:nvPr/>
         </p:nvSpPr>
         <p:spPr>
           <a:xfrm>
-            <a:off x="5577840" y="5276088"/>
-            <a:ext cx="6035040" cy="731520"/>
+            <a:off x="5577840" y="3840480"/>
+            <a:ext cx="6035040" cy="411480"/>
           </a:xfrm>
           <a:prstGeom prst="rect">
             <a:avLst/>
@@ -6072,21 +7553,198 @@
           <a:bodyPr wrap="square" lIns="0" tIns="0" rIns="0" bIns="0" rtlCol="0" anchor="t"/>
           <a:lstStyle/>
           <a:p>
-            <a:pPr marL="0" indent="0">
+            <a:pPr marL="0" marR="0" lvl="0" indent="0" algn="l" defTabSz="914400" rtl="0" eaLnBrk="1" fontAlgn="auto" latinLnBrk="0" hangingPunct="1">
+              <a:lnSpc>
+                <a:spcPct val="100000"/>
+              </a:lnSpc>
+              <a:spcBef>
+                <a:spcPts val="0"/>
+              </a:spcBef>
+              <a:spcAft>
+                <a:spcPts val="0"/>
+              </a:spcAft>
+              <a:buClrTx/>
+              <a:buSzTx/>
+              <a:buFontTx/>
               <a:buNone/>
+              <a:tabLst/>
+              <a:defRPr/>
             </a:pPr>
             <a:r>
-              <a:rPr lang="en-US" sz="1600" dirty="0">
+              <a:rPr kumimoji="0" lang="en-US" sz="1500" b="0" i="0" u="none" strike="noStrike" kern="1200" cap="none" spc="0" normalizeH="0" baseline="0" noProof="0" dirty="0">
+                <a:ln>
+                  <a:noFill/>
+                </a:ln>
                 <a:solidFill>
                   <a:srgbClr val="4A4A52"/>
                 </a:solidFill>
+                <a:effectLst/>
+                <a:uLnTx/>
+                <a:uFillTx/>
                 <a:latin typeface="Public Sans" pitchFamily="34" charset="0"/>
                 <a:ea typeface="Public Sans" pitchFamily="34" charset="-122"/>
                 <a:cs typeface="Public Sans" pitchFamily="34" charset="-120"/>
               </a:rPr>
-              <a:t>renter share tracks incident rates far more closely than median income does</a:t>
+              <a:t>Pink areas line the east side of the city; blue areas fill the west and south.</a:t>
             </a:r>
-            <a:endParaRPr lang="en-US" sz="1600" dirty="0"/>
+            <a:endParaRPr kumimoji="0" lang="en-US" sz="1500" b="0" i="0" u="none" strike="noStrike" kern="1200" cap="none" spc="0" normalizeH="0" baseline="0" noProof="0" dirty="0">
+              <a:ln>
+                <a:noFill/>
+              </a:ln>
+              <a:solidFill>
+                <a:prstClr val="black"/>
+              </a:solidFill>
+              <a:effectLst/>
+              <a:uLnTx/>
+              <a:uFillTx/>
+              <a:latin typeface="Public Sans"/>
+              <a:ea typeface="+mn-ea"/>
+              <a:cs typeface="+mn-cs"/>
+            </a:endParaRPr>
+          </a:p>
+        </p:txBody>
+      </p:sp>
+      <p:sp>
+        <p:nvSpPr>
+          <p:cNvPr id="11" name="Text 8"/>
+          <p:cNvSpPr txBox="1"/>
+          <p:nvPr/>
+        </p:nvSpPr>
+        <p:spPr>
+          <a:xfrm>
+            <a:off x="5577840" y="4526280"/>
+            <a:ext cx="6035040" cy="502920"/>
+          </a:xfrm>
+          <a:prstGeom prst="rect">
+            <a:avLst/>
+          </a:prstGeom>
+          <a:noFill/>
+          <a:ln/>
+        </p:spPr>
+        <p:txBody>
+          <a:bodyPr wrap="square" lIns="0" tIns="0" rIns="0" bIns="0" rtlCol="0" anchor="t"/>
+          <a:lstStyle/>
+          <a:p>
+            <a:pPr marL="0" marR="0" lvl="0" indent="0" algn="l" defTabSz="914400" rtl="0" eaLnBrk="1" fontAlgn="auto" latinLnBrk="0" hangingPunct="1">
+              <a:lnSpc>
+                <a:spcPct val="100000"/>
+              </a:lnSpc>
+              <a:spcBef>
+                <a:spcPts val="0"/>
+              </a:spcBef>
+              <a:spcAft>
+                <a:spcPts val="0"/>
+              </a:spcAft>
+              <a:buClrTx/>
+              <a:buSzTx/>
+              <a:buFontTx/>
+              <a:buNone/>
+              <a:tabLst/>
+              <a:defRPr/>
+            </a:pPr>
+            <a:r>
+              <a:rPr kumimoji="0" lang="en-US" sz="2600" b="1" i="0" u="none" strike="noStrike" kern="1200" cap="none" spc="0" normalizeH="0" baseline="0" noProof="0" dirty="0">
+                <a:ln>
+                  <a:noFill/>
+                </a:ln>
+                <a:solidFill>
+                  <a:srgbClr val="4A4A78"/>
+                </a:solidFill>
+                <a:effectLst/>
+                <a:uLnTx/>
+                <a:uFillTx/>
+                <a:latin typeface="Libre Baskerville" pitchFamily="34" charset="0"/>
+                <a:ea typeface="Libre Baskerville" pitchFamily="34" charset="-122"/>
+                <a:cs typeface="Libre Baskerville" pitchFamily="34" charset="-120"/>
+              </a:rPr>
+              <a:t>11</a:t>
+            </a:r>
+            <a:endParaRPr kumimoji="0" lang="en-US" sz="2600" b="0" i="0" u="none" strike="noStrike" kern="1200" cap="none" spc="0" normalizeH="0" baseline="0" noProof="0" dirty="0">
+              <a:ln>
+                <a:noFill/>
+              </a:ln>
+              <a:solidFill>
+                <a:prstClr val="black"/>
+              </a:solidFill>
+              <a:effectLst/>
+              <a:uLnTx/>
+              <a:uFillTx/>
+              <a:latin typeface="Public Sans"/>
+              <a:ea typeface="+mn-ea"/>
+              <a:cs typeface="+mn-cs"/>
+            </a:endParaRPr>
+          </a:p>
+        </p:txBody>
+      </p:sp>
+      <p:sp>
+        <p:nvSpPr>
+          <p:cNvPr id="12" name="Text 9"/>
+          <p:cNvSpPr txBox="1"/>
+          <p:nvPr/>
+        </p:nvSpPr>
+        <p:spPr>
+          <a:xfrm>
+            <a:off x="5577840" y="5029200"/>
+            <a:ext cx="6035040" cy="594360"/>
+          </a:xfrm>
+          <a:prstGeom prst="rect">
+            <a:avLst/>
+          </a:prstGeom>
+          <a:noFill/>
+          <a:ln/>
+        </p:spPr>
+        <p:txBody>
+          <a:bodyPr wrap="square" lIns="0" tIns="0" rIns="0" bIns="0" rtlCol="0" anchor="t"/>
+          <a:lstStyle/>
+          <a:p>
+            <a:pPr marL="0" marR="0" lvl="0" indent="0" algn="l" defTabSz="914400" rtl="0" eaLnBrk="1" fontAlgn="auto" latinLnBrk="0" hangingPunct="1">
+              <a:lnSpc>
+                <a:spcPct val="100000"/>
+              </a:lnSpc>
+              <a:spcBef>
+                <a:spcPts val="0"/>
+              </a:spcBef>
+              <a:spcAft>
+                <a:spcPts val="0"/>
+              </a:spcAft>
+              <a:buClrTx/>
+              <a:buSzTx/>
+              <a:buFontTx/>
+              <a:buNone/>
+              <a:tabLst/>
+              <a:defRPr/>
+            </a:pPr>
+            <a:r>
+              <a:rPr kumimoji="0" lang="en-US" sz="1500" b="0" i="0" u="none" strike="noStrike" kern="1200" cap="none" spc="0" normalizeH="0" baseline="0" noProof="0" dirty="0">
+                <a:ln>
+                  <a:noFill/>
+                </a:ln>
+                <a:solidFill>
+                  <a:srgbClr val="4A4A52"/>
+                </a:solidFill>
+                <a:effectLst/>
+                <a:uLnTx/>
+                <a:uFillTx/>
+                <a:latin typeface="Public Sans" pitchFamily="34" charset="0"/>
+                <a:ea typeface="Public Sans" pitchFamily="34" charset="-122"/>
+                <a:cs typeface="Public Sans" pitchFamily="34" charset="-120"/>
+              </a:rPr>
+              <a:t>higher-income areas still have high rates (dark purple), mostly in the city centre</a:t>
+            </a:r>
+            <a:endParaRPr kumimoji="0" lang="en-US" sz="1500" b="0" i="0" u="none" strike="noStrike" kern="1200" cap="none" spc="0" normalizeH="0" baseline="0" noProof="0" dirty="0">
+              <a:ln>
+                <a:noFill/>
+              </a:ln>
+              <a:solidFill>
+                <a:prstClr val="black"/>
+              </a:solidFill>
+              <a:effectLst/>
+              <a:uLnTx/>
+              <a:uFillTx/>
+              <a:latin typeface="Public Sans"/>
+              <a:ea typeface="+mn-ea"/>
+              <a:cs typeface="+mn-cs"/>
+            </a:endParaRPr>
           </a:p>
         </p:txBody>
       </p:sp>
@@ -6316,7 +7974,15 @@
 
 <file path=ppt/slides/slide9.xml><?xml version="1.0" encoding="utf-8"?>
 <p:sld xmlns:a="http://schemas.openxmlformats.org/drawingml/2006/main" xmlns:r="http://schemas.openxmlformats.org/officeDocument/2006/relationships" xmlns:p="http://schemas.openxmlformats.org/presentationml/2006/main">
-  <p:cSld name="Slide 9">
+  <p:cSld>
+    <p:bg>
+      <p:bgPr>
+        <a:solidFill>
+          <a:srgbClr val="2B2B30"/>
+        </a:solidFill>
+        <a:effectLst/>
+      </p:bgPr>
+    </p:bg>
     <p:spTree>
       <p:nvGrpSpPr>
         <p:cNvPr id="1" name=""/>
@@ -6333,18 +7999,531 @@
       </p:grpSpPr>
       <p:sp>
         <p:nvSpPr>
-          <p:cNvPr id="2" name="Text 0"/>
+          <p:cNvPr id="2" name="Shape 0"/>
+          <p:cNvSpPr/>
+          <p:nvPr/>
+        </p:nvSpPr>
+        <p:spPr>
+          <a:xfrm>
+            <a:off x="8686800" y="1905000"/>
+            <a:ext cx="863600" cy="863600"/>
+          </a:xfrm>
+          <a:prstGeom prst="rect">
+            <a:avLst/>
+          </a:prstGeom>
+          <a:solidFill>
+            <a:srgbClr val="D47BA3"/>
+          </a:solidFill>
+          <a:ln/>
+        </p:spPr>
+        <p:txBody>
+          <a:bodyPr/>
+          <a:lstStyle/>
+          <a:p>
+            <a:pPr marL="0" marR="0" lvl="0" indent="0" algn="l" defTabSz="914400" rtl="0" eaLnBrk="1" fontAlgn="auto" latinLnBrk="0" hangingPunct="1">
+              <a:lnSpc>
+                <a:spcPct val="100000"/>
+              </a:lnSpc>
+              <a:spcBef>
+                <a:spcPts val="0"/>
+              </a:spcBef>
+              <a:spcAft>
+                <a:spcPts val="0"/>
+              </a:spcAft>
+              <a:buClrTx/>
+              <a:buSzTx/>
+              <a:buFontTx/>
+              <a:buNone/>
+              <a:tabLst/>
+              <a:defRPr/>
+            </a:pPr>
+            <a:endParaRPr kumimoji="0" lang="en-CA" sz="1800" b="0" i="0" u="none" strike="noStrike" kern="1200" cap="none" spc="0" normalizeH="0" baseline="0" noProof="0">
+              <a:ln>
+                <a:noFill/>
+              </a:ln>
+              <a:solidFill>
+                <a:srgbClr val="2B2B30"/>
+              </a:solidFill>
+              <a:effectLst/>
+              <a:uLnTx/>
+              <a:uFillTx/>
+              <a:latin typeface="Public Sans"/>
+              <a:ea typeface="+mn-ea"/>
+              <a:cs typeface="+mn-cs"/>
+            </a:endParaRPr>
+          </a:p>
+        </p:txBody>
+      </p:sp>
+      <p:sp>
+        <p:nvSpPr>
+          <p:cNvPr id="3" name="Shape 1"/>
+          <p:cNvSpPr/>
+          <p:nvPr/>
+        </p:nvSpPr>
+        <p:spPr>
+          <a:xfrm>
+            <a:off x="9601200" y="1905000"/>
+            <a:ext cx="863600" cy="863600"/>
+          </a:xfrm>
+          <a:prstGeom prst="rect">
+            <a:avLst/>
+          </a:prstGeom>
+          <a:solidFill>
+            <a:srgbClr val="9E6B92"/>
+          </a:solidFill>
+          <a:ln/>
+        </p:spPr>
+        <p:txBody>
+          <a:bodyPr/>
+          <a:lstStyle/>
+          <a:p>
+            <a:pPr marL="0" marR="0" lvl="0" indent="0" algn="l" defTabSz="914400" rtl="0" eaLnBrk="1" fontAlgn="auto" latinLnBrk="0" hangingPunct="1">
+              <a:lnSpc>
+                <a:spcPct val="100000"/>
+              </a:lnSpc>
+              <a:spcBef>
+                <a:spcPts val="0"/>
+              </a:spcBef>
+              <a:spcAft>
+                <a:spcPts val="0"/>
+              </a:spcAft>
+              <a:buClrTx/>
+              <a:buSzTx/>
+              <a:buFontTx/>
+              <a:buNone/>
+              <a:tabLst/>
+              <a:defRPr/>
+            </a:pPr>
+            <a:endParaRPr kumimoji="0" lang="en-CA" sz="1800" b="0" i="0" u="none" strike="noStrike" kern="1200" cap="none" spc="0" normalizeH="0" baseline="0" noProof="0">
+              <a:ln>
+                <a:noFill/>
+              </a:ln>
+              <a:solidFill>
+                <a:srgbClr val="2B2B30"/>
+              </a:solidFill>
+              <a:effectLst/>
+              <a:uLnTx/>
+              <a:uFillTx/>
+              <a:latin typeface="Public Sans"/>
+              <a:ea typeface="+mn-ea"/>
+              <a:cs typeface="+mn-cs"/>
+            </a:endParaRPr>
+          </a:p>
+        </p:txBody>
+      </p:sp>
+      <p:sp>
+        <p:nvSpPr>
+          <p:cNvPr id="4" name="Shape 2"/>
+          <p:cNvSpPr/>
+          <p:nvPr/>
+        </p:nvSpPr>
+        <p:spPr>
+          <a:xfrm>
+            <a:off x="10515600" y="1905000"/>
+            <a:ext cx="863600" cy="863600"/>
+          </a:xfrm>
+          <a:prstGeom prst="rect">
+            <a:avLst/>
+          </a:prstGeom>
+          <a:solidFill>
+            <a:srgbClr val="4A4A78"/>
+          </a:solidFill>
+          <a:ln/>
+        </p:spPr>
+        <p:txBody>
+          <a:bodyPr/>
+          <a:lstStyle/>
+          <a:p>
+            <a:pPr marL="0" marR="0" lvl="0" indent="0" algn="l" defTabSz="914400" rtl="0" eaLnBrk="1" fontAlgn="auto" latinLnBrk="0" hangingPunct="1">
+              <a:lnSpc>
+                <a:spcPct val="100000"/>
+              </a:lnSpc>
+              <a:spcBef>
+                <a:spcPts val="0"/>
+              </a:spcBef>
+              <a:spcAft>
+                <a:spcPts val="0"/>
+              </a:spcAft>
+              <a:buClrTx/>
+              <a:buSzTx/>
+              <a:buFontTx/>
+              <a:buNone/>
+              <a:tabLst/>
+              <a:defRPr/>
+            </a:pPr>
+            <a:endParaRPr kumimoji="0" lang="en-CA" sz="1800" b="0" i="0" u="none" strike="noStrike" kern="1200" cap="none" spc="0" normalizeH="0" baseline="0" noProof="0">
+              <a:ln>
+                <a:noFill/>
+              </a:ln>
+              <a:solidFill>
+                <a:srgbClr val="2B2B30"/>
+              </a:solidFill>
+              <a:effectLst/>
+              <a:uLnTx/>
+              <a:uFillTx/>
+              <a:latin typeface="Public Sans"/>
+              <a:ea typeface="+mn-ea"/>
+              <a:cs typeface="+mn-cs"/>
+            </a:endParaRPr>
+          </a:p>
+        </p:txBody>
+      </p:sp>
+      <p:sp>
+        <p:nvSpPr>
+          <p:cNvPr id="5" name="Shape 3"/>
+          <p:cNvSpPr/>
+          <p:nvPr/>
+        </p:nvSpPr>
+        <p:spPr>
+          <a:xfrm>
+            <a:off x="8686800" y="2819400"/>
+            <a:ext cx="863600" cy="863600"/>
+          </a:xfrm>
+          <a:prstGeom prst="rect">
+            <a:avLst/>
+          </a:prstGeom>
+          <a:solidFill>
+            <a:srgbClr val="DBB7CF"/>
+          </a:solidFill>
+          <a:ln/>
+        </p:spPr>
+        <p:txBody>
+          <a:bodyPr/>
+          <a:lstStyle/>
+          <a:p>
+            <a:pPr marL="0" marR="0" lvl="0" indent="0" algn="l" defTabSz="914400" rtl="0" eaLnBrk="1" fontAlgn="auto" latinLnBrk="0" hangingPunct="1">
+              <a:lnSpc>
+                <a:spcPct val="100000"/>
+              </a:lnSpc>
+              <a:spcBef>
+                <a:spcPts val="0"/>
+              </a:spcBef>
+              <a:spcAft>
+                <a:spcPts val="0"/>
+              </a:spcAft>
+              <a:buClrTx/>
+              <a:buSzTx/>
+              <a:buFontTx/>
+              <a:buNone/>
+              <a:tabLst/>
+              <a:defRPr/>
+            </a:pPr>
+            <a:endParaRPr kumimoji="0" lang="en-CA" sz="1800" b="0" i="0" u="none" strike="noStrike" kern="1200" cap="none" spc="0" normalizeH="0" baseline="0" noProof="0">
+              <a:ln>
+                <a:noFill/>
+              </a:ln>
+              <a:solidFill>
+                <a:srgbClr val="2B2B30"/>
+              </a:solidFill>
+              <a:effectLst/>
+              <a:uLnTx/>
+              <a:uFillTx/>
+              <a:latin typeface="Public Sans"/>
+              <a:ea typeface="+mn-ea"/>
+              <a:cs typeface="+mn-cs"/>
+            </a:endParaRPr>
+          </a:p>
+        </p:txBody>
+      </p:sp>
+      <p:sp>
+        <p:nvSpPr>
+          <p:cNvPr id="6" name="Shape 4"/>
+          <p:cNvSpPr/>
+          <p:nvPr/>
+        </p:nvSpPr>
+        <p:spPr>
+          <a:xfrm>
+            <a:off x="9601200" y="2819400"/>
+            <a:ext cx="863600" cy="863600"/>
+          </a:xfrm>
+          <a:prstGeom prst="rect">
+            <a:avLst/>
+          </a:prstGeom>
+          <a:solidFill>
+            <a:srgbClr val="A3A3C8"/>
+          </a:solidFill>
+          <a:ln/>
+        </p:spPr>
+        <p:txBody>
+          <a:bodyPr/>
+          <a:lstStyle/>
+          <a:p>
+            <a:pPr marL="0" marR="0" lvl="0" indent="0" algn="l" defTabSz="914400" rtl="0" eaLnBrk="1" fontAlgn="auto" latinLnBrk="0" hangingPunct="1">
+              <a:lnSpc>
+                <a:spcPct val="100000"/>
+              </a:lnSpc>
+              <a:spcBef>
+                <a:spcPts val="0"/>
+              </a:spcBef>
+              <a:spcAft>
+                <a:spcPts val="0"/>
+              </a:spcAft>
+              <a:buClrTx/>
+              <a:buSzTx/>
+              <a:buFontTx/>
+              <a:buNone/>
+              <a:tabLst/>
+              <a:defRPr/>
+            </a:pPr>
+            <a:endParaRPr kumimoji="0" lang="en-CA" sz="1800" b="0" i="0" u="none" strike="noStrike" kern="1200" cap="none" spc="0" normalizeH="0" baseline="0" noProof="0">
+              <a:ln>
+                <a:noFill/>
+              </a:ln>
+              <a:solidFill>
+                <a:srgbClr val="2B2B30"/>
+              </a:solidFill>
+              <a:effectLst/>
+              <a:uLnTx/>
+              <a:uFillTx/>
+              <a:latin typeface="Public Sans"/>
+              <a:ea typeface="+mn-ea"/>
+              <a:cs typeface="+mn-cs"/>
+            </a:endParaRPr>
+          </a:p>
+        </p:txBody>
+      </p:sp>
+      <p:sp>
+        <p:nvSpPr>
+          <p:cNvPr id="7" name="Shape 5"/>
+          <p:cNvSpPr/>
+          <p:nvPr/>
+        </p:nvSpPr>
+        <p:spPr>
+          <a:xfrm>
+            <a:off x="10515600" y="2819400"/>
+            <a:ext cx="863600" cy="863600"/>
+          </a:xfrm>
+          <a:prstGeom prst="rect">
+            <a:avLst/>
+          </a:prstGeom>
+          <a:solidFill>
+            <a:srgbClr val="56709E"/>
+          </a:solidFill>
+          <a:ln/>
+        </p:spPr>
+        <p:txBody>
+          <a:bodyPr/>
+          <a:lstStyle/>
+          <a:p>
+            <a:pPr marL="0" marR="0" lvl="0" indent="0" algn="l" defTabSz="914400" rtl="0" eaLnBrk="1" fontAlgn="auto" latinLnBrk="0" hangingPunct="1">
+              <a:lnSpc>
+                <a:spcPct val="100000"/>
+              </a:lnSpc>
+              <a:spcBef>
+                <a:spcPts val="0"/>
+              </a:spcBef>
+              <a:spcAft>
+                <a:spcPts val="0"/>
+              </a:spcAft>
+              <a:buClrTx/>
+              <a:buSzTx/>
+              <a:buFontTx/>
+              <a:buNone/>
+              <a:tabLst/>
+              <a:defRPr/>
+            </a:pPr>
+            <a:endParaRPr kumimoji="0" lang="en-CA" sz="1800" b="0" i="0" u="none" strike="noStrike" kern="1200" cap="none" spc="0" normalizeH="0" baseline="0" noProof="0">
+              <a:ln>
+                <a:noFill/>
+              </a:ln>
+              <a:solidFill>
+                <a:srgbClr val="2B2B30"/>
+              </a:solidFill>
+              <a:effectLst/>
+              <a:uLnTx/>
+              <a:uFillTx/>
+              <a:latin typeface="Public Sans"/>
+              <a:ea typeface="+mn-ea"/>
+              <a:cs typeface="+mn-cs"/>
+            </a:endParaRPr>
+          </a:p>
+        </p:txBody>
+      </p:sp>
+      <p:sp>
+        <p:nvSpPr>
+          <p:cNvPr id="8" name="Shape 6"/>
+          <p:cNvSpPr/>
+          <p:nvPr/>
+        </p:nvSpPr>
+        <p:spPr>
+          <a:xfrm>
+            <a:off x="8686800" y="3733800"/>
+            <a:ext cx="863600" cy="863600"/>
+          </a:xfrm>
+          <a:prstGeom prst="rect">
+            <a:avLst/>
+          </a:prstGeom>
+          <a:solidFill>
+            <a:srgbClr val="EAE1D2"/>
+          </a:solidFill>
+          <a:ln/>
+        </p:spPr>
+        <p:txBody>
+          <a:bodyPr/>
+          <a:lstStyle/>
+          <a:p>
+            <a:pPr marL="0" marR="0" lvl="0" indent="0" algn="l" defTabSz="914400" rtl="0" eaLnBrk="1" fontAlgn="auto" latinLnBrk="0" hangingPunct="1">
+              <a:lnSpc>
+                <a:spcPct val="100000"/>
+              </a:lnSpc>
+              <a:spcBef>
+                <a:spcPts val="0"/>
+              </a:spcBef>
+              <a:spcAft>
+                <a:spcPts val="0"/>
+              </a:spcAft>
+              <a:buClrTx/>
+              <a:buSzTx/>
+              <a:buFontTx/>
+              <a:buNone/>
+              <a:tabLst/>
+              <a:defRPr/>
+            </a:pPr>
+            <a:endParaRPr kumimoji="0" lang="en-CA" sz="1800" b="0" i="0" u="none" strike="noStrike" kern="1200" cap="none" spc="0" normalizeH="0" baseline="0" noProof="0">
+              <a:ln>
+                <a:noFill/>
+              </a:ln>
+              <a:solidFill>
+                <a:srgbClr val="2B2B30"/>
+              </a:solidFill>
+              <a:effectLst/>
+              <a:uLnTx/>
+              <a:uFillTx/>
+              <a:latin typeface="Public Sans"/>
+              <a:ea typeface="+mn-ea"/>
+              <a:cs typeface="+mn-cs"/>
+            </a:endParaRPr>
+          </a:p>
+        </p:txBody>
+      </p:sp>
+      <p:sp>
+        <p:nvSpPr>
+          <p:cNvPr id="9" name="Shape 7"/>
+          <p:cNvSpPr/>
+          <p:nvPr/>
+        </p:nvSpPr>
+        <p:spPr>
+          <a:xfrm>
+            <a:off x="9601200" y="3733800"/>
+            <a:ext cx="863600" cy="863600"/>
+          </a:xfrm>
+          <a:prstGeom prst="rect">
+            <a:avLst/>
+          </a:prstGeom>
+          <a:solidFill>
+            <a:srgbClr val="B5C0DA"/>
+          </a:solidFill>
+          <a:ln/>
+        </p:spPr>
+        <p:txBody>
+          <a:bodyPr/>
+          <a:lstStyle/>
+          <a:p>
+            <a:pPr marL="0" marR="0" lvl="0" indent="0" algn="l" defTabSz="914400" rtl="0" eaLnBrk="1" fontAlgn="auto" latinLnBrk="0" hangingPunct="1">
+              <a:lnSpc>
+                <a:spcPct val="100000"/>
+              </a:lnSpc>
+              <a:spcBef>
+                <a:spcPts val="0"/>
+              </a:spcBef>
+              <a:spcAft>
+                <a:spcPts val="0"/>
+              </a:spcAft>
+              <a:buClrTx/>
+              <a:buSzTx/>
+              <a:buFontTx/>
+              <a:buNone/>
+              <a:tabLst/>
+              <a:defRPr/>
+            </a:pPr>
+            <a:endParaRPr kumimoji="0" lang="en-CA" sz="1800" b="0" i="0" u="none" strike="noStrike" kern="1200" cap="none" spc="0" normalizeH="0" baseline="0" noProof="0">
+              <a:ln>
+                <a:noFill/>
+              </a:ln>
+              <a:solidFill>
+                <a:srgbClr val="2B2B30"/>
+              </a:solidFill>
+              <a:effectLst/>
+              <a:uLnTx/>
+              <a:uFillTx/>
+              <a:latin typeface="Public Sans"/>
+              <a:ea typeface="+mn-ea"/>
+              <a:cs typeface="+mn-cs"/>
+            </a:endParaRPr>
+          </a:p>
+        </p:txBody>
+      </p:sp>
+      <p:sp>
+        <p:nvSpPr>
+          <p:cNvPr id="10" name="Shape 8"/>
+          <p:cNvSpPr/>
+          <p:nvPr/>
+        </p:nvSpPr>
+        <p:spPr>
+          <a:xfrm>
+            <a:off x="10515600" y="3733800"/>
+            <a:ext cx="863600" cy="863600"/>
+          </a:xfrm>
+          <a:prstGeom prst="rect">
+            <a:avLst/>
+          </a:prstGeom>
+          <a:solidFill>
+            <a:srgbClr val="6C83B5"/>
+          </a:solidFill>
+          <a:ln/>
+        </p:spPr>
+        <p:txBody>
+          <a:bodyPr/>
+          <a:lstStyle/>
+          <a:p>
+            <a:pPr marL="0" marR="0" lvl="0" indent="0" algn="l" defTabSz="914400" rtl="0" eaLnBrk="1" fontAlgn="auto" latinLnBrk="0" hangingPunct="1">
+              <a:lnSpc>
+                <a:spcPct val="100000"/>
+              </a:lnSpc>
+              <a:spcBef>
+                <a:spcPts val="0"/>
+              </a:spcBef>
+              <a:spcAft>
+                <a:spcPts val="0"/>
+              </a:spcAft>
+              <a:buClrTx/>
+              <a:buSzTx/>
+              <a:buFontTx/>
+              <a:buNone/>
+              <a:tabLst/>
+              <a:defRPr/>
+            </a:pPr>
+            <a:endParaRPr kumimoji="0" lang="en-CA" sz="1800" b="0" i="0" u="none" strike="noStrike" kern="1200" cap="none" spc="0" normalizeH="0" baseline="0" noProof="0">
+              <a:ln>
+                <a:noFill/>
+              </a:ln>
+              <a:solidFill>
+                <a:srgbClr val="2B2B30"/>
+              </a:solidFill>
+              <a:effectLst/>
+              <a:uLnTx/>
+              <a:uFillTx/>
+              <a:latin typeface="Public Sans"/>
+              <a:ea typeface="+mn-ea"/>
+              <a:cs typeface="+mn-cs"/>
+            </a:endParaRPr>
+          </a:p>
+        </p:txBody>
+      </p:sp>
+      <p:sp>
+        <p:nvSpPr>
+          <p:cNvPr id="11" name="Text 9"/>
           <p:cNvSpPr>
             <a:spLocks noGrp="1"/>
           </p:cNvSpPr>
           <p:nvPr>
-            <p:ph type="title" idx="100" hasCustomPrompt="1"/>
+            <p:ph type="title"/>
           </p:nvPr>
         </p:nvSpPr>
         <p:spPr>
           <a:xfrm>
-            <a:off x="548640" y="411480"/>
-            <a:ext cx="11094415" cy="731520"/>
+            <a:off x="812800" y="2771142"/>
+            <a:ext cx="7194550" cy="695960"/>
           </a:xfrm>
           <a:prstGeom prst="rect">
             <a:avLst/>
@@ -6353,71 +8532,42 @@
           <a:ln/>
         </p:spPr>
         <p:txBody>
-          <a:bodyPr wrap="square" lIns="0" tIns="0" rIns="0" bIns="0" rtlCol="0" anchor="ctr"/>
+          <a:bodyPr wrap="square" lIns="0" tIns="0" rIns="0" bIns="0" rtlCol="0" anchor="t">
+            <a:normAutofit/>
+          </a:bodyPr>
           <a:lstStyle/>
           <a:p>
             <a:pPr marL="0" indent="0" algn="l">
+              <a:lnSpc>
+                <a:spcPts val="5280"/>
+              </a:lnSpc>
               <a:buNone/>
             </a:pPr>
             <a:r>
-              <a:rPr lang="en-US" sz="3200" b="1" dirty="0">
+              <a:rPr lang="en-US" sz="4800" b="1" i="0" dirty="0">
                 <a:solidFill>
-                  <a:srgbClr val="F6F4F0"/>
+                  <a:srgbClr val="F4EEE3"/>
                 </a:solidFill>
-                <a:latin typeface="Libre Baskerville" pitchFamily="34" charset="0"/>
-                <a:ea typeface="Libre Baskerville" pitchFamily="34" charset="-122"/>
-                <a:cs typeface="Libre Baskerville" pitchFamily="34" charset="-120"/>
+                <a:latin typeface="Libre Baskerville" pitchFamily="18" charset="0"/>
+                <a:ea typeface="Libre Baskerville" pitchFamily="18" charset="-122"/>
+                <a:cs typeface="Libre Baskerville" pitchFamily="18" charset="-120"/>
               </a:rPr>
-              <a:t>Next steps</a:t>
+              <a:t>Thank you</a:t>
             </a:r>
-            <a:endParaRPr lang="en-US" sz="3200" dirty="0"/>
-          </a:p>
-        </p:txBody>
-      </p:sp>
-      <p:sp>
-        <p:nvSpPr>
-          <p:cNvPr id="3" name="next_card_0"/>
+            <a:endParaRPr lang="en-US" sz="4800" dirty="0"/>
+          </a:p>
+        </p:txBody>
+      </p:sp>
+      <p:sp>
+        <p:nvSpPr>
+          <p:cNvPr id="12" name="Text 10"/>
           <p:cNvSpPr/>
           <p:nvPr/>
         </p:nvSpPr>
         <p:spPr>
           <a:xfrm>
-            <a:off x="548640" y="1371600"/>
-            <a:ext cx="5396332" cy="1783080"/>
-          </a:xfrm>
-          <a:prstGeom prst="roundRect">
-            <a:avLst>
-              <a:gd name="adj" fmla="val 6154"/>
-            </a:avLst>
-          </a:prstGeom>
-          <a:solidFill>
-            <a:srgbClr val="36363C"/>
-          </a:solidFill>
-          <a:ln w="12700">
-            <a:solidFill>
-              <a:srgbClr val="36363C"/>
-            </a:solidFill>
-            <a:prstDash val="solid"/>
-          </a:ln>
-        </p:spPr>
-        <p:txBody>
-          <a:bodyPr/>
-          <a:lstStyle/>
-          <a:p>
-            <a:endParaRPr lang="en-CA"/>
-          </a:p>
-        </p:txBody>
-      </p:sp>
-      <p:sp>
-        <p:nvSpPr>
-          <p:cNvPr id="4" name="Text 2"/>
-          <p:cNvSpPr txBox="1"/>
-          <p:nvPr/>
-        </p:nvSpPr>
-        <p:spPr>
-          <a:xfrm>
-            <a:off x="868680" y="1645920"/>
-            <a:ext cx="4756252" cy="457200"/>
+            <a:off x="812800" y="3695700"/>
+            <a:ext cx="7194550" cy="416560"/>
           </a:xfrm>
           <a:prstGeom prst="rect">
             <a:avLst/>
@@ -6426,37 +8576,71 @@
           <a:ln/>
         </p:spPr>
         <p:txBody>
-          <a:bodyPr wrap="square" lIns="0" tIns="0" rIns="0" bIns="0" rtlCol="0" anchor="t"/>
-          <a:lstStyle/>
-          <a:p>
-            <a:pPr marL="0" indent="0">
+          <a:bodyPr wrap="square" lIns="0" tIns="0" rIns="0" bIns="0" rtlCol="0" anchor="t">
+            <a:normAutofit/>
+          </a:bodyPr>
+          <a:lstStyle/>
+          <a:p>
+            <a:pPr marL="0" marR="0" lvl="0" indent="0" algn="l" defTabSz="914400" rtl="0" eaLnBrk="1" fontAlgn="auto" latinLnBrk="0" hangingPunct="1">
+              <a:lnSpc>
+                <a:spcPts val="3080"/>
+              </a:lnSpc>
+              <a:spcBef>
+                <a:spcPts val="0"/>
+              </a:spcBef>
+              <a:spcAft>
+                <a:spcPts val="0"/>
+              </a:spcAft>
+              <a:buClrTx/>
+              <a:buSzTx/>
+              <a:buFontTx/>
               <a:buNone/>
+              <a:tabLst/>
+              <a:defRPr/>
             </a:pPr>
             <a:r>
-              <a:rPr lang="en-US" sz="2000" b="1" dirty="0">
+              <a:rPr kumimoji="0" lang="en-US" sz="2200" b="0" i="0" u="none" strike="noStrike" kern="1200" cap="none" spc="0" normalizeH="0" baseline="0" noProof="0" dirty="0">
+                <a:ln>
+                  <a:noFill/>
+                </a:ln>
                 <a:solidFill>
                   <a:srgbClr val="E39BBE"/>
                 </a:solidFill>
+                <a:effectLst/>
+                <a:uLnTx/>
+                <a:uFillTx/>
                 <a:latin typeface="Public Sans" pitchFamily="34" charset="0"/>
                 <a:ea typeface="Public Sans" pitchFamily="34" charset="-122"/>
                 <a:cs typeface="Public Sans" pitchFamily="34" charset="-120"/>
               </a:rPr>
-              <a:t>Account for traffic, not just residents</a:t>
+              <a:t>Questions?</a:t>
             </a:r>
-            <a:endParaRPr lang="en-US" sz="2000" dirty="0"/>
-          </a:p>
-        </p:txBody>
-      </p:sp>
-      <p:sp>
-        <p:nvSpPr>
-          <p:cNvPr id="5" name="Text 3"/>
-          <p:cNvSpPr txBox="1"/>
-          <p:nvPr/>
-        </p:nvSpPr>
-        <p:spPr>
-          <a:xfrm>
-            <a:off x="868680" y="2176272"/>
-            <a:ext cx="4756252" cy="777240"/>
+            <a:endParaRPr kumimoji="0" lang="en-US" sz="2200" b="0" i="0" u="none" strike="noStrike" kern="1200" cap="none" spc="0" normalizeH="0" baseline="0" noProof="0" dirty="0">
+              <a:ln>
+                <a:noFill/>
+              </a:ln>
+              <a:solidFill>
+                <a:srgbClr val="2B2B30"/>
+              </a:solidFill>
+              <a:effectLst/>
+              <a:uLnTx/>
+              <a:uFillTx/>
+              <a:ea typeface="+mn-ea"/>
+              <a:cs typeface="+mn-cs"/>
+            </a:endParaRPr>
+          </a:p>
+        </p:txBody>
+      </p:sp>
+      <p:sp>
+        <p:nvSpPr>
+          <p:cNvPr id="13" name="Text 11"/>
+          <p:cNvSpPr/>
+          <p:nvPr/>
+        </p:nvSpPr>
+        <p:spPr>
+          <a:xfrm>
+            <a:off x="812800" y="5999479"/>
+            <a:ext cx="7194550" cy="274320"/>
           </a:xfrm>
           <a:prstGeom prst="rect">
             <a:avLst/>
@@ -6465,399 +8649,42 @@
           <a:ln/>
         </p:spPr>
         <p:txBody>
-          <a:bodyPr wrap="square" lIns="0" tIns="0" rIns="0" bIns="0" rtlCol="0" anchor="t"/>
-          <a:lstStyle/>
-          <a:p>
-            <a:pPr marL="0" indent="0">
+          <a:bodyPr wrap="square" lIns="0" tIns="0" rIns="0" bIns="0" rtlCol="0" anchor="t">
+            <a:normAutofit/>
+          </a:bodyPr>
+          <a:lstStyle/>
+          <a:p>
+            <a:pPr marL="0" marR="0" lvl="0" indent="0" algn="l" defTabSz="914400" rtl="0" eaLnBrk="1" fontAlgn="auto" latinLnBrk="0" hangingPunct="1">
+              <a:lnSpc>
+                <a:spcPts val="1960"/>
+              </a:lnSpc>
+              <a:spcBef>
+                <a:spcPts val="0"/>
+              </a:spcBef>
+              <a:spcAft>
+                <a:spcPts val="0"/>
+              </a:spcAft>
+              <a:buClrTx/>
+              <a:buSzTx/>
+              <a:buFontTx/>
               <a:buNone/>
+              <a:tabLst/>
+              <a:defRPr/>
             </a:pPr>
-            <a:r>
-              <a:rPr lang="en-US" sz="1600" dirty="0">
-                <a:solidFill>
-                  <a:srgbClr val="C9C7CF"/>
-                </a:solidFill>
-                <a:latin typeface="Public Sans" pitchFamily="34" charset="0"/>
-                <a:ea typeface="Public Sans" pitchFamily="34" charset="-122"/>
-                <a:cs typeface="Public Sans" pitchFamily="34" charset="-120"/>
-              </a:rPr>
-              <a:t>Downtown and industrial areas draw commuters, so a resident-based rate overstates them.</a:t>
-            </a:r>
-            <a:endParaRPr lang="en-US" sz="1600" dirty="0"/>
-          </a:p>
-        </p:txBody>
-      </p:sp>
-      <p:sp>
-        <p:nvSpPr>
-          <p:cNvPr id="6" name="next_card_1"/>
-          <p:cNvSpPr/>
-          <p:nvPr/>
-        </p:nvSpPr>
-        <p:spPr>
-          <a:xfrm>
-            <a:off x="6246724" y="1371600"/>
-            <a:ext cx="5396332" cy="1783080"/>
-          </a:xfrm>
-          <a:prstGeom prst="roundRect">
-            <a:avLst>
-              <a:gd name="adj" fmla="val 6154"/>
-            </a:avLst>
-          </a:prstGeom>
-          <a:solidFill>
-            <a:srgbClr val="36363C"/>
-          </a:solidFill>
-          <a:ln w="12700">
-            <a:solidFill>
-              <a:srgbClr val="36363C"/>
-            </a:solidFill>
-            <a:prstDash val="solid"/>
-          </a:ln>
-        </p:spPr>
-        <p:txBody>
-          <a:bodyPr/>
-          <a:lstStyle/>
-          <a:p>
-            <a:endParaRPr lang="en-CA"/>
-          </a:p>
-        </p:txBody>
-      </p:sp>
-      <p:sp>
-        <p:nvSpPr>
-          <p:cNvPr id="7" name="Text 5"/>
-          <p:cNvSpPr txBox="1"/>
-          <p:nvPr/>
-        </p:nvSpPr>
-        <p:spPr>
-          <a:xfrm>
-            <a:off x="6566764" y="1645920"/>
-            <a:ext cx="4756252" cy="457200"/>
-          </a:xfrm>
-          <a:prstGeom prst="rect">
-            <a:avLst/>
-          </a:prstGeom>
-          <a:noFill/>
-          <a:ln/>
-        </p:spPr>
-        <p:txBody>
-          <a:bodyPr wrap="square" lIns="0" tIns="0" rIns="0" bIns="0" rtlCol="0" anchor="t"/>
-          <a:lstStyle/>
-          <a:p>
-            <a:pPr marL="0" indent="0">
-              <a:buNone/>
-            </a:pPr>
-            <a:r>
-              <a:rPr lang="en-US" sz="2000" b="1" dirty="0">
-                <a:solidFill>
-                  <a:srgbClr val="E39BBE"/>
-                </a:solidFill>
-                <a:latin typeface="Public Sans" pitchFamily="34" charset="0"/>
-                <a:ea typeface="Public Sans" pitchFamily="34" charset="-122"/>
-                <a:cs typeface="Public Sans" pitchFamily="34" charset="-120"/>
-              </a:rPr>
-              <a:t>Look at who gets hurt</a:t>
-            </a:r>
-            <a:endParaRPr lang="en-US" sz="2000" dirty="0"/>
-          </a:p>
-        </p:txBody>
-      </p:sp>
-      <p:sp>
-        <p:nvSpPr>
-          <p:cNvPr id="8" name="Text 6"/>
-          <p:cNvSpPr txBox="1"/>
-          <p:nvPr/>
-        </p:nvSpPr>
-        <p:spPr>
-          <a:xfrm>
-            <a:off x="6566764" y="2176272"/>
-            <a:ext cx="4756252" cy="777240"/>
-          </a:xfrm>
-          <a:prstGeom prst="rect">
-            <a:avLst/>
-          </a:prstGeom>
-          <a:noFill/>
-          <a:ln/>
-        </p:spPr>
-        <p:txBody>
-          <a:bodyPr wrap="square" lIns="0" tIns="0" rIns="0" bIns="0" rtlCol="0" anchor="t"/>
-          <a:lstStyle/>
-          <a:p>
-            <a:pPr marL="0" indent="0">
-              <a:buNone/>
-            </a:pPr>
-            <a:r>
-              <a:rPr lang="en-US" sz="1600" dirty="0">
-                <a:solidFill>
-                  <a:srgbClr val="C9C7CF"/>
-                </a:solidFill>
-                <a:latin typeface="Public Sans" pitchFamily="34" charset="0"/>
-                <a:ea typeface="Public Sans" pitchFamily="34" charset="-122"/>
-                <a:cs typeface="Public Sans" pitchFamily="34" charset="-120"/>
-              </a:rPr>
-              <a:t>Compare pedestrian and cyclist incidents across income groups.</a:t>
-            </a:r>
-            <a:endParaRPr lang="en-US" sz="1600" dirty="0"/>
-          </a:p>
-        </p:txBody>
-      </p:sp>
-      <p:sp>
-        <p:nvSpPr>
-          <p:cNvPr id="9" name="next_card_2"/>
-          <p:cNvSpPr/>
-          <p:nvPr/>
-        </p:nvSpPr>
-        <p:spPr>
-          <a:xfrm>
-            <a:off x="548640" y="3383280"/>
-            <a:ext cx="5396332" cy="1783080"/>
-          </a:xfrm>
-          <a:prstGeom prst="roundRect">
-            <a:avLst>
-              <a:gd name="adj" fmla="val 6154"/>
-            </a:avLst>
-          </a:prstGeom>
-          <a:solidFill>
-            <a:srgbClr val="36363C"/>
-          </a:solidFill>
-          <a:ln w="12700">
-            <a:solidFill>
-              <a:srgbClr val="36363C"/>
-            </a:solidFill>
-            <a:prstDash val="solid"/>
-          </a:ln>
-        </p:spPr>
-        <p:txBody>
-          <a:bodyPr/>
-          <a:lstStyle/>
-          <a:p>
-            <a:endParaRPr lang="en-CA"/>
-          </a:p>
-        </p:txBody>
-      </p:sp>
-      <p:sp>
-        <p:nvSpPr>
-          <p:cNvPr id="10" name="Text 8"/>
-          <p:cNvSpPr txBox="1"/>
-          <p:nvPr/>
-        </p:nvSpPr>
-        <p:spPr>
-          <a:xfrm>
-            <a:off x="868680" y="3657600"/>
-            <a:ext cx="4756252" cy="457200"/>
-          </a:xfrm>
-          <a:prstGeom prst="rect">
-            <a:avLst/>
-          </a:prstGeom>
-          <a:noFill/>
-          <a:ln/>
-        </p:spPr>
-        <p:txBody>
-          <a:bodyPr wrap="square" lIns="0" tIns="0" rIns="0" bIns="0" rtlCol="0" anchor="t"/>
-          <a:lstStyle/>
-          <a:p>
-            <a:pPr marL="0" indent="0">
-              <a:buNone/>
-            </a:pPr>
-            <a:r>
-              <a:rPr lang="en-US" sz="2000" b="1" dirty="0">
-                <a:solidFill>
-                  <a:srgbClr val="9DB0DA"/>
-                </a:solidFill>
-                <a:latin typeface="Public Sans" pitchFamily="34" charset="0"/>
-                <a:ea typeface="Public Sans" pitchFamily="34" charset="-122"/>
-                <a:cs typeface="Public Sans" pitchFamily="34" charset="-120"/>
-              </a:rPr>
-              <a:t>Track the gap over time</a:t>
-            </a:r>
-            <a:endParaRPr lang="en-US" sz="2000" dirty="0"/>
-          </a:p>
-        </p:txBody>
-      </p:sp>
-      <p:sp>
-        <p:nvSpPr>
-          <p:cNvPr id="11" name="Text 9"/>
-          <p:cNvSpPr txBox="1"/>
-          <p:nvPr/>
-        </p:nvSpPr>
-        <p:spPr>
-          <a:xfrm>
-            <a:off x="868680" y="4187952"/>
-            <a:ext cx="4756252" cy="777240"/>
-          </a:xfrm>
-          <a:prstGeom prst="rect">
-            <a:avLst/>
-          </a:prstGeom>
-          <a:noFill/>
-          <a:ln/>
-        </p:spPr>
-        <p:txBody>
-          <a:bodyPr wrap="square" lIns="0" tIns="0" rIns="0" bIns="0" rtlCol="0" anchor="t"/>
-          <a:lstStyle/>
-          <a:p>
-            <a:pPr marL="0" indent="0">
-              <a:buNone/>
-            </a:pPr>
-            <a:r>
-              <a:rPr lang="en-US" sz="1600" dirty="0">
-                <a:solidFill>
-                  <a:srgbClr val="C9C7CF"/>
-                </a:solidFill>
-                <a:latin typeface="Public Sans" pitchFamily="34" charset="0"/>
-                <a:ea typeface="Public Sans" pitchFamily="34" charset="-122"/>
-                <a:cs typeface="Public Sans" pitchFamily="34" charset="-120"/>
-              </a:rPr>
-              <a:t>Test whether the difference between income groups has grown since 2020.</a:t>
-            </a:r>
-            <a:endParaRPr lang="en-US" sz="1600" dirty="0"/>
-          </a:p>
-        </p:txBody>
-      </p:sp>
-      <p:sp>
-        <p:nvSpPr>
-          <p:cNvPr id="12" name="next_card_3"/>
-          <p:cNvSpPr/>
-          <p:nvPr/>
-        </p:nvSpPr>
-        <p:spPr>
-          <a:xfrm>
-            <a:off x="6246724" y="3383280"/>
-            <a:ext cx="5396332" cy="1783080"/>
-          </a:xfrm>
-          <a:prstGeom prst="roundRect">
-            <a:avLst>
-              <a:gd name="adj" fmla="val 6154"/>
-            </a:avLst>
-          </a:prstGeom>
-          <a:solidFill>
-            <a:srgbClr val="36363C"/>
-          </a:solidFill>
-          <a:ln w="12700">
-            <a:solidFill>
-              <a:srgbClr val="36363C"/>
-            </a:solidFill>
-            <a:prstDash val="solid"/>
-          </a:ln>
-        </p:spPr>
-        <p:txBody>
-          <a:bodyPr/>
-          <a:lstStyle/>
-          <a:p>
-            <a:endParaRPr lang="en-CA"/>
-          </a:p>
-        </p:txBody>
-      </p:sp>
-      <p:sp>
-        <p:nvSpPr>
-          <p:cNvPr id="13" name="Text 11"/>
-          <p:cNvSpPr txBox="1"/>
-          <p:nvPr/>
-        </p:nvSpPr>
-        <p:spPr>
-          <a:xfrm>
-            <a:off x="6566764" y="3657600"/>
-            <a:ext cx="4756252" cy="457200"/>
-          </a:xfrm>
-          <a:prstGeom prst="rect">
-            <a:avLst/>
-          </a:prstGeom>
-          <a:noFill/>
-          <a:ln/>
-        </p:spPr>
-        <p:txBody>
-          <a:bodyPr wrap="square" lIns="0" tIns="0" rIns="0" bIns="0" rtlCol="0" anchor="t"/>
-          <a:lstStyle/>
-          <a:p>
-            <a:pPr marL="0" indent="0">
-              <a:buNone/>
-            </a:pPr>
-            <a:r>
-              <a:rPr lang="en-US" sz="2000" b="1" dirty="0">
-                <a:solidFill>
-                  <a:srgbClr val="9DB0DA"/>
-                </a:solidFill>
-                <a:latin typeface="Public Sans" pitchFamily="34" charset="0"/>
-                <a:ea typeface="Public Sans" pitchFamily="34" charset="-122"/>
-                <a:cs typeface="Public Sans" pitchFamily="34" charset="-120"/>
-              </a:rPr>
-              <a:t>Write up the limits</a:t>
-            </a:r>
-            <a:endParaRPr lang="en-US" sz="2000" dirty="0"/>
-          </a:p>
-        </p:txBody>
-      </p:sp>
-      <p:sp>
-        <p:nvSpPr>
-          <p:cNvPr id="14" name="Text 12"/>
-          <p:cNvSpPr txBox="1"/>
-          <p:nvPr/>
-        </p:nvSpPr>
-        <p:spPr>
-          <a:xfrm>
-            <a:off x="6566764" y="4187952"/>
-            <a:ext cx="4756252" cy="777240"/>
-          </a:xfrm>
-          <a:prstGeom prst="rect">
-            <a:avLst/>
-          </a:prstGeom>
-          <a:noFill/>
-          <a:ln/>
-        </p:spPr>
-        <p:txBody>
-          <a:bodyPr wrap="square" lIns="0" tIns="0" rIns="0" bIns="0" rtlCol="0" anchor="t"/>
-          <a:lstStyle/>
-          <a:p>
-            <a:pPr marL="0" indent="0">
-              <a:buNone/>
-            </a:pPr>
-            <a:r>
-              <a:rPr lang="en-US" sz="1600" dirty="0">
-                <a:solidFill>
-                  <a:srgbClr val="C9C7CF"/>
-                </a:solidFill>
-                <a:latin typeface="Public Sans" pitchFamily="34" charset="0"/>
-                <a:ea typeface="Public Sans" pitchFamily="34" charset="-122"/>
-                <a:cs typeface="Public Sans" pitchFamily="34" charset="-120"/>
-              </a:rPr>
-              <a:t>These are area-level patterns, not individual risk, and correlation, not cause.</a:t>
-            </a:r>
-            <a:endParaRPr lang="en-US" sz="1600" dirty="0"/>
-          </a:p>
-        </p:txBody>
-      </p:sp>
-      <p:sp>
-        <p:nvSpPr>
-          <p:cNvPr id="15" name="Text 13"/>
-          <p:cNvSpPr txBox="1"/>
-          <p:nvPr/>
-        </p:nvSpPr>
-        <p:spPr>
-          <a:xfrm>
-            <a:off x="548640" y="5623560"/>
-            <a:ext cx="5486400" cy="548640"/>
-          </a:xfrm>
-          <a:prstGeom prst="rect">
-            <a:avLst/>
-          </a:prstGeom>
-          <a:noFill/>
-          <a:ln/>
-        </p:spPr>
-        <p:txBody>
-          <a:bodyPr wrap="square" lIns="0" tIns="0" rIns="0" bIns="0" rtlCol="0" anchor="t"/>
-          <a:lstStyle/>
-          <a:p>
-            <a:pPr marL="0" indent="0">
-              <a:buNone/>
-            </a:pPr>
-            <a:r>
-              <a:rPr lang="en-US" sz="2600" dirty="0">
-                <a:solidFill>
-                  <a:srgbClr val="F6F4F0"/>
-                </a:solidFill>
-                <a:latin typeface="Libre Baskerville" pitchFamily="34" charset="0"/>
-                <a:ea typeface="Libre Baskerville" pitchFamily="34" charset="-122"/>
-                <a:cs typeface="Libre Baskerville" pitchFamily="34" charset="-120"/>
-              </a:rPr>
-              <a:t>Questions?</a:t>
-            </a:r>
-            <a:endParaRPr lang="en-US" sz="2600" dirty="0"/>
+            <a:endParaRPr kumimoji="0" lang="en-US" sz="1400" b="0" i="0" u="none" strike="noStrike" kern="1200" cap="none" spc="0" normalizeH="0" baseline="0" noProof="0" dirty="0">
+              <a:ln>
+                <a:noFill/>
+              </a:ln>
+              <a:solidFill>
+                <a:srgbClr val="2B2B30"/>
+              </a:solidFill>
+              <a:effectLst/>
+              <a:uLnTx/>
+              <a:uFillTx/>
+              <a:latin typeface="Public Sans"/>
+              <a:ea typeface="+mn-ea"/>
+              <a:cs typeface="+mn-cs"/>
+            </a:endParaRPr>
           </a:p>
         </p:txBody>
       </p:sp>
@@ -7165,6 +8992,296 @@
 </file>
 
 <file path=ppt/theme/theme2.xml><?xml version="1.0" encoding="utf-8"?>
+<a:theme xmlns:a="http://schemas.openxmlformats.org/drawingml/2006/main" name="Calgary Traffic Incidents – Project Showcase">
+  <a:themeElements>
+    <a:clrScheme name="Calgary Traffic Incidents – Project Showcase">
+      <a:dk1>
+        <a:srgbClr val="2B2B30"/>
+      </a:dk1>
+      <a:lt1>
+        <a:srgbClr val="F4EEE3"/>
+      </a:lt1>
+      <a:dk2>
+        <a:srgbClr val="5D5C5D"/>
+      </a:dk2>
+      <a:lt2>
+        <a:srgbClr val="E0DBD1"/>
+      </a:lt2>
+      <a:accent1>
+        <a:srgbClr val="A63E74"/>
+      </a:accent1>
+      <a:accent2>
+        <a:srgbClr val="E39BBE"/>
+      </a:accent2>
+      <a:accent3>
+        <a:srgbClr val="4E6596"/>
+      </a:accent3>
+      <a:accent4>
+        <a:srgbClr val="D47BA3"/>
+      </a:accent4>
+      <a:accent5>
+        <a:srgbClr val="9E6B92"/>
+      </a:accent5>
+      <a:accent6>
+        <a:srgbClr val="4A4A78"/>
+      </a:accent6>
+      <a:hlink>
+        <a:srgbClr val="0563C1"/>
+      </a:hlink>
+      <a:folHlink>
+        <a:srgbClr val="954F72"/>
+      </a:folHlink>
+    </a:clrScheme>
+    <a:fontScheme name="Calgary Traffic Incidents – Project Showcase">
+      <a:majorFont>
+        <a:latin typeface="Libre Baskerville"/>
+        <a:ea typeface=""/>
+        <a:cs typeface=""/>
+        <a:font script="Jpan" typeface="游ゴシック Light"/>
+        <a:font script="Hang" typeface="맑은 고딕"/>
+        <a:font script="Hans" typeface="等线 Light"/>
+        <a:font script="Hant" typeface="新細明體"/>
+        <a:font script="Arab" typeface="Times New Roman"/>
+        <a:font script="Hebr" typeface="Times New Roman"/>
+        <a:font script="Thai" typeface="Angsana New"/>
+        <a:font script="Ethi" typeface="Nyala"/>
+        <a:font script="Beng" typeface="Vrinda"/>
+        <a:font script="Gujr" typeface="Shruti"/>
+        <a:font script="Khmr" typeface="MoolBoran"/>
+        <a:font script="Knda" typeface="Tunga"/>
+        <a:font script="Guru" typeface="Raavi"/>
+        <a:font script="Cans" typeface="Euphemia"/>
+        <a:font script="Cher" typeface="Plantagenet Cherokee"/>
+        <a:font script="Yiii" typeface="Microsoft Yi Baiti"/>
+        <a:font script="Tibt" typeface="Microsoft Himalaya"/>
+        <a:font script="Thaa" typeface="MV Boli"/>
+        <a:font script="Deva" typeface="Mangal"/>
+        <a:font script="Telu" typeface="Gautami"/>
+        <a:font script="Taml" typeface="Latha"/>
+        <a:font script="Syrc" typeface="Estrangelo Edessa"/>
+        <a:font script="Orya" typeface="Kalinga"/>
+        <a:font script="Mlym" typeface="Kartika"/>
+        <a:font script="Laoo" typeface="DokChampa"/>
+        <a:font script="Sinh" typeface="Iskoola Pota"/>
+        <a:font script="Mong" typeface="Mongolian Baiti"/>
+        <a:font script="Viet" typeface="Times New Roman"/>
+        <a:font script="Uigh" typeface="Microsoft Uighur"/>
+        <a:font script="Geor" typeface="Sylfaen"/>
+        <a:font script="Armn" typeface="Arial"/>
+        <a:font script="Bugi" typeface="Leelawadee UI"/>
+        <a:font script="Bopo" typeface="Microsoft JhengHei"/>
+        <a:font script="Java" typeface="Javanese Text"/>
+        <a:font script="Lisu" typeface="Segoe UI"/>
+        <a:font script="Mymr" typeface="Myanmar Text"/>
+        <a:font script="Nkoo" typeface="Ebrima"/>
+        <a:font script="Olck" typeface="Nirmala UI"/>
+        <a:font script="Osma" typeface="Ebrima"/>
+        <a:font script="Phag" typeface="Phagspa"/>
+        <a:font script="Syrn" typeface="Estrangelo Edessa"/>
+        <a:font script="Syrj" typeface="Estrangelo Edessa"/>
+        <a:font script="Syre" typeface="Estrangelo Edessa"/>
+        <a:font script="Sora" typeface="Nirmala UI"/>
+        <a:font script="Tale" typeface="Microsoft Tai Le"/>
+        <a:font script="Talu" typeface="Microsoft New Tai Lue"/>
+        <a:font script="Tfng" typeface="Ebrima"/>
+      </a:majorFont>
+      <a:minorFont>
+        <a:latin typeface="Public Sans"/>
+        <a:ea typeface=""/>
+        <a:cs typeface=""/>
+        <a:font script="Jpan" typeface="游ゴシック"/>
+        <a:font script="Hang" typeface="맑은 고딕"/>
+        <a:font script="Hans" typeface="等线"/>
+        <a:font script="Hant" typeface="新細明體"/>
+        <a:font script="Arab" typeface="Arial"/>
+        <a:font script="Hebr" typeface="Arial"/>
+        <a:font script="Thai" typeface="Cordia New"/>
+        <a:font script="Ethi" typeface="Nyala"/>
+        <a:font script="Beng" typeface="Vrinda"/>
+        <a:font script="Gujr" typeface="Shruti"/>
+        <a:font script="Khmr" typeface="DaunPenh"/>
+        <a:font script="Knda" typeface="Tunga"/>
+        <a:font script="Guru" typeface="Raavi"/>
+        <a:font script="Cans" typeface="Euphemia"/>
+        <a:font script="Cher" typeface="Plantagenet Cherokee"/>
+        <a:font script="Yiii" typeface="Microsoft Yi Baiti"/>
+        <a:font script="Tibt" typeface="Microsoft Himalaya"/>
+        <a:font script="Thaa" typeface="MV Boli"/>
+        <a:font script="Deva" typeface="Mangal"/>
+        <a:font script="Telu" typeface="Gautami"/>
+        <a:font script="Taml" typeface="Latha"/>
+        <a:font script="Syrc" typeface="Estrangelo Edessa"/>
+        <a:font script="Orya" typeface="Kalinga"/>
+        <a:font script="Mlym" typeface="Kartika"/>
+        <a:font script="Laoo" typeface="DokChampa"/>
+        <a:font script="Sinh" typeface="Iskoola Pota"/>
+        <a:font script="Mong" typeface="Mongolian Baiti"/>
+        <a:font script="Viet" typeface="Arial"/>
+        <a:font script="Uigh" typeface="Microsoft Uighur"/>
+        <a:font script="Geor" typeface="Sylfaen"/>
+        <a:font script="Armn" typeface="Arial"/>
+        <a:font script="Bugi" typeface="Leelawadee UI"/>
+        <a:font script="Bopo" typeface="Microsoft JhengHei"/>
+        <a:font script="Java" typeface="Javanese Text"/>
+        <a:font script="Lisu" typeface="Segoe UI"/>
+        <a:font script="Mymr" typeface="Myanmar Text"/>
+        <a:font script="Nkoo" typeface="Ebrima"/>
+        <a:font script="Olck" typeface="Nirmala UI"/>
+        <a:font script="Osma" typeface="Ebrima"/>
+        <a:font script="Phag" typeface="Phagspa"/>
+        <a:font script="Syrn" typeface="Estrangelo Edessa"/>
+        <a:font script="Syrj" typeface="Estrangelo Edessa"/>
+        <a:font script="Syre" typeface="Estrangelo Edessa"/>
+        <a:font script="Sora" typeface="Nirmala UI"/>
+        <a:font script="Tale" typeface="Microsoft Tai Le"/>
+        <a:font script="Talu" typeface="Microsoft New Tai Lue"/>
+        <a:font script="Tfng" typeface="Ebrima"/>
+      </a:minorFont>
+    </a:fontScheme>
+    <a:fmtScheme name="Office">
+      <a:fillStyleLst>
+        <a:solidFill>
+          <a:schemeClr val="phClr"/>
+        </a:solidFill>
+        <a:gradFill rotWithShape="1">
+          <a:gsLst>
+            <a:gs pos="0">
+              <a:schemeClr val="phClr">
+                <a:lumMod val="110000"/>
+                <a:satMod val="105000"/>
+                <a:tint val="67000"/>
+              </a:schemeClr>
+            </a:gs>
+            <a:gs pos="50000">
+              <a:schemeClr val="phClr">
+                <a:lumMod val="105000"/>
+                <a:satMod val="103000"/>
+                <a:tint val="73000"/>
+              </a:schemeClr>
+            </a:gs>
+            <a:gs pos="100000">
+              <a:schemeClr val="phClr">
+                <a:lumMod val="105000"/>
+                <a:satMod val="109000"/>
+                <a:tint val="81000"/>
+              </a:schemeClr>
+            </a:gs>
+          </a:gsLst>
+          <a:lin ang="5400000" scaled="0"/>
+        </a:gradFill>
+        <a:gradFill rotWithShape="1">
+          <a:gsLst>
+            <a:gs pos="0">
+              <a:schemeClr val="phClr">
+                <a:satMod val="103000"/>
+                <a:lumMod val="102000"/>
+                <a:tint val="94000"/>
+              </a:schemeClr>
+            </a:gs>
+            <a:gs pos="50000">
+              <a:schemeClr val="phClr">
+                <a:satMod val="110000"/>
+                <a:lumMod val="100000"/>
+                <a:shade val="100000"/>
+              </a:schemeClr>
+            </a:gs>
+            <a:gs pos="100000">
+              <a:schemeClr val="phClr">
+                <a:lumMod val="99000"/>
+                <a:satMod val="120000"/>
+                <a:shade val="78000"/>
+              </a:schemeClr>
+            </a:gs>
+          </a:gsLst>
+          <a:lin ang="5400000" scaled="0"/>
+        </a:gradFill>
+      </a:fillStyleLst>
+      <a:lnStyleLst>
+        <a:ln w="6350" cap="flat" cmpd="sng" algn="ctr">
+          <a:solidFill>
+            <a:schemeClr val="phClr"/>
+          </a:solidFill>
+          <a:prstDash val="solid"/>
+          <a:miter lim="800000"/>
+        </a:ln>
+        <a:ln w="12700" cap="flat" cmpd="sng" algn="ctr">
+          <a:solidFill>
+            <a:schemeClr val="phClr"/>
+          </a:solidFill>
+          <a:prstDash val="solid"/>
+          <a:miter lim="800000"/>
+        </a:ln>
+        <a:ln w="19050" cap="flat" cmpd="sng" algn="ctr">
+          <a:solidFill>
+            <a:schemeClr val="phClr"/>
+          </a:solidFill>
+          <a:prstDash val="solid"/>
+          <a:miter lim="800000"/>
+        </a:ln>
+      </a:lnStyleLst>
+      <a:effectStyleLst>
+        <a:effectStyle>
+          <a:effectLst/>
+        </a:effectStyle>
+        <a:effectStyle>
+          <a:effectLst/>
+        </a:effectStyle>
+        <a:effectStyle>
+          <a:effectLst>
+            <a:outerShdw blurRad="57150" dist="19050" dir="5400000" algn="ctr" rotWithShape="0">
+              <a:srgbClr val="000000">
+                <a:alpha val="63000"/>
+              </a:srgbClr>
+            </a:outerShdw>
+          </a:effectLst>
+        </a:effectStyle>
+      </a:effectStyleLst>
+      <a:bgFillStyleLst>
+        <a:solidFill>
+          <a:schemeClr val="phClr"/>
+        </a:solidFill>
+        <a:solidFill>
+          <a:schemeClr val="phClr">
+            <a:tint val="95000"/>
+            <a:satMod val="170000"/>
+          </a:schemeClr>
+        </a:solidFill>
+        <a:gradFill rotWithShape="1">
+          <a:gsLst>
+            <a:gs pos="0">
+              <a:schemeClr val="phClr">
+                <a:tint val="93000"/>
+                <a:satMod val="150000"/>
+                <a:shade val="98000"/>
+                <a:lumMod val="102000"/>
+              </a:schemeClr>
+            </a:gs>
+            <a:gs pos="50000">
+              <a:schemeClr val="phClr">
+                <a:tint val="98000"/>
+                <a:satMod val="130000"/>
+                <a:shade val="90000"/>
+                <a:lumMod val="103000"/>
+              </a:schemeClr>
+            </a:gs>
+            <a:gs pos="100000">
+              <a:schemeClr val="phClr">
+                <a:shade val="63000"/>
+                <a:satMod val="120000"/>
+              </a:schemeClr>
+            </a:gs>
+          </a:gsLst>
+          <a:lin ang="5400000" scaled="0"/>
+        </a:gradFill>
+      </a:bgFillStyleLst>
+    </a:fmtScheme>
+  </a:themeElements>
+  <a:objectDefaults/>
+  <a:extraClrSchemeLst/>
+</a:theme>
+</file>
+
+<file path=ppt/theme/theme3.xml><?xml version="1.0" encoding="utf-8"?>
 <a:theme xmlns:a="http://schemas.openxmlformats.org/drawingml/2006/main" name="Office Theme">
   <a:themeElements>
     <a:clrScheme name="Office">

--- a/Calgary_Traffic_Midpoint.pptx
+++ b/Calgary_Traffic_Midpoint.pptx
@@ -2990,7 +2990,51 @@
                 <a:ea typeface="Public Sans" pitchFamily="34" charset="-122"/>
                 <a:cs typeface="Public Sans" pitchFamily="34" charset="-120"/>
               </a:rPr>
-              <a:t>Adrian Julve · Data 201 · Oct 20</a:t>
+              <a:t>Adrian </a:t>
+            </a:r>
+            <a:r>
+              <a:rPr lang="en-US" sz="1400" dirty="0" err="1">
+                <a:solidFill>
+                  <a:srgbClr val="C9C7CF"/>
+                </a:solidFill>
+                <a:latin typeface="Public Sans" pitchFamily="34" charset="0"/>
+                <a:ea typeface="Public Sans" pitchFamily="34" charset="-122"/>
+                <a:cs typeface="Public Sans" pitchFamily="34" charset="-120"/>
+              </a:rPr>
+              <a:t>Julve</a:t>
+            </a:r>
+            <a:r>
+              <a:rPr lang="en-US" sz="1400" dirty="0">
+                <a:solidFill>
+                  <a:srgbClr val="C9C7CF"/>
+                </a:solidFill>
+                <a:latin typeface="Public Sans" pitchFamily="34" charset="0"/>
+                <a:ea typeface="Public Sans" pitchFamily="34" charset="-122"/>
+                <a:cs typeface="Public Sans" pitchFamily="34" charset="-120"/>
+              </a:rPr>
+              <a:t>, Kein </a:t>
+            </a:r>
+            <a:r>
+              <a:rPr lang="en-US" sz="1400" dirty="0" err="1">
+                <a:solidFill>
+                  <a:srgbClr val="C9C7CF"/>
+                </a:solidFill>
+                <a:latin typeface="Public Sans" pitchFamily="34" charset="0"/>
+                <a:ea typeface="Public Sans" pitchFamily="34" charset="-122"/>
+                <a:cs typeface="Public Sans" pitchFamily="34" charset="-120"/>
+              </a:rPr>
+              <a:t>Ritarita</a:t>
+            </a:r>
+            <a:r>
+              <a:rPr lang="en-US" sz="1400" dirty="0">
+                <a:solidFill>
+                  <a:srgbClr val="C9C7CF"/>
+                </a:solidFill>
+                <a:latin typeface="Public Sans" pitchFamily="34" charset="0"/>
+                <a:ea typeface="Public Sans" pitchFamily="34" charset="-122"/>
+                <a:cs typeface="Public Sans" pitchFamily="34" charset="-120"/>
+              </a:rPr>
+              <a:t> · DATA 201 · Oct 20</a:t>
             </a:r>
             <a:r>
               <a:rPr lang="en-US" sz="1400" baseline="30000" dirty="0">

--- a/Calgary_Traffic_Midpoint.pptx
+++ b/Calgary_Traffic_Midpoint.pptx
@@ -2873,7 +2873,7 @@
                 <a:ea typeface="Public Sans" pitchFamily="34" charset="-122"/>
                 <a:cs typeface="Public Sans" pitchFamily="34" charset="-120"/>
               </a:rPr>
-              <a:t>DATA PROJECT · MIDPOINT REPORT</a:t>
+              <a:t>DATA 201 · MIDPOINT REPORT</a:t>
             </a:r>
             <a:endParaRPr lang="en-US" sz="1400" dirty="0"/>
           </a:p>
@@ -6397,7 +6397,7 @@
                 <a:ea typeface="Public Sans" pitchFamily="34" charset="-122"/>
                 <a:cs typeface="Public Sans" pitchFamily="34" charset="-120"/>
               </a:rPr>
-              <a:t>Wrote DAX measures for rate vs. city average, busiest hour, monthly rate and how each neighbourhood trait tracks incident rates.</a:t>
+              <a:t>Wrote Key measures in DAX, such as rate vs. city average, busiest hour, monthly rate and how each neighbourhood trait tracks incident rates.</a:t>
             </a:r>
             <a:endParaRPr lang="en-US" sz="1400" dirty="0"/>
           </a:p>
@@ -6444,7 +6444,7 @@
         </p:nvSpPr>
         <p:spPr>
           <a:xfrm>
-            <a:off x="812800" y="812800"/>
+            <a:off x="198787" y="830579"/>
             <a:ext cx="10883392" cy="238760"/>
           </a:xfrm>
           <a:prstGeom prst="rect">
@@ -6521,7 +6521,7 @@
         </p:nvSpPr>
         <p:spPr>
           <a:xfrm>
-            <a:off x="812800" y="1102361"/>
+            <a:off x="198787" y="1135379"/>
             <a:ext cx="10883392" cy="492760"/>
           </a:xfrm>
           <a:prstGeom prst="rect">
@@ -6572,8 +6572,8 @@
         </p:blipFill>
         <p:spPr>
           <a:xfrm>
-            <a:off x="819150" y="1830071"/>
-            <a:ext cx="5118100" cy="2857500"/>
+            <a:off x="87418" y="1781176"/>
+            <a:ext cx="5950641" cy="3322318"/>
           </a:xfrm>
           <a:prstGeom prst="roundRect">
             <a:avLst>
@@ -6584,74 +6584,13 @@
       </p:pic>
       <p:sp>
         <p:nvSpPr>
-          <p:cNvPr id="5" name="Shape 2"/>
-          <p:cNvSpPr/>
-          <p:nvPr/>
-        </p:nvSpPr>
-        <p:spPr>
-          <a:xfrm>
-            <a:off x="815975" y="1826896"/>
-            <a:ext cx="5124450" cy="2863850"/>
-          </a:xfrm>
-          <a:prstGeom prst="roundRect">
-            <a:avLst>
-              <a:gd name="adj" fmla="val 2550"/>
-            </a:avLst>
-          </a:prstGeom>
-          <a:noFill/>
-          <a:ln w="6350">
-            <a:solidFill>
-              <a:srgbClr val="4A4A52"/>
-            </a:solidFill>
-            <a:prstDash val="solid"/>
-          </a:ln>
-        </p:spPr>
-        <p:txBody>
-          <a:bodyPr/>
-          <a:lstStyle/>
-          <a:p>
-            <a:pPr marL="0" marR="0" lvl="0" indent="0" algn="l" defTabSz="914400" rtl="0" eaLnBrk="1" fontAlgn="auto" latinLnBrk="0" hangingPunct="1">
-              <a:lnSpc>
-                <a:spcPct val="100000"/>
-              </a:lnSpc>
-              <a:spcBef>
-                <a:spcPts val="0"/>
-              </a:spcBef>
-              <a:spcAft>
-                <a:spcPts val="0"/>
-              </a:spcAft>
-              <a:buClrTx/>
-              <a:buSzTx/>
-              <a:buFontTx/>
-              <a:buNone/>
-              <a:tabLst/>
-              <a:defRPr/>
-            </a:pPr>
-            <a:endParaRPr kumimoji="0" lang="en-CA" sz="1800" b="0" i="0" u="none" strike="noStrike" kern="1200" cap="none" spc="0" normalizeH="0" baseline="0" noProof="0">
-              <a:ln>
-                <a:noFill/>
-              </a:ln>
-              <a:solidFill>
-                <a:srgbClr val="2B2B30"/>
-              </a:solidFill>
-              <a:effectLst/>
-              <a:uLnTx/>
-              <a:uFillTx/>
-              <a:ea typeface="+mn-ea"/>
-              <a:cs typeface="+mn-cs"/>
-            </a:endParaRPr>
-          </a:p>
-        </p:txBody>
-      </p:sp>
-      <p:sp>
-        <p:nvSpPr>
           <p:cNvPr id="6" name="Text 3"/>
           <p:cNvSpPr/>
           <p:nvPr/>
         </p:nvSpPr>
         <p:spPr>
           <a:xfrm>
-            <a:off x="812800" y="4820921"/>
+            <a:off x="146033" y="5152874"/>
             <a:ext cx="5284724" cy="265430"/>
           </a:xfrm>
           <a:prstGeom prst="rect">
@@ -6749,8 +6688,8 @@
         </p:blipFill>
         <p:spPr>
           <a:xfrm>
-            <a:off x="6254750" y="1830071"/>
-            <a:ext cx="5118100" cy="2857500"/>
+            <a:off x="6153943" y="1781176"/>
+            <a:ext cx="5950641" cy="3322318"/>
           </a:xfrm>
           <a:prstGeom prst="roundRect">
             <a:avLst>
@@ -6761,75 +6700,13 @@
       </p:pic>
       <p:sp>
         <p:nvSpPr>
-          <p:cNvPr id="8" name="Shape 4"/>
-          <p:cNvSpPr/>
-          <p:nvPr/>
-        </p:nvSpPr>
-        <p:spPr>
-          <a:xfrm>
-            <a:off x="6251575" y="1826896"/>
-            <a:ext cx="5124450" cy="2863850"/>
-          </a:xfrm>
-          <a:prstGeom prst="roundRect">
-            <a:avLst>
-              <a:gd name="adj" fmla="val 2550"/>
-            </a:avLst>
-          </a:prstGeom>
-          <a:noFill/>
-          <a:ln w="6350">
-            <a:solidFill>
-              <a:srgbClr val="4A4A52"/>
-            </a:solidFill>
-            <a:prstDash val="solid"/>
-          </a:ln>
-        </p:spPr>
-        <p:txBody>
-          <a:bodyPr/>
-          <a:lstStyle/>
-          <a:p>
-            <a:pPr marL="0" marR="0" lvl="0" indent="0" algn="l" defTabSz="914400" rtl="0" eaLnBrk="1" fontAlgn="auto" latinLnBrk="0" hangingPunct="1">
-              <a:lnSpc>
-                <a:spcPct val="100000"/>
-              </a:lnSpc>
-              <a:spcBef>
-                <a:spcPts val="0"/>
-              </a:spcBef>
-              <a:spcAft>
-                <a:spcPts val="0"/>
-              </a:spcAft>
-              <a:buClrTx/>
-              <a:buSzTx/>
-              <a:buFontTx/>
-              <a:buNone/>
-              <a:tabLst/>
-              <a:defRPr/>
-            </a:pPr>
-            <a:endParaRPr kumimoji="0" lang="en-CA" sz="1800" b="0" i="0" u="none" strike="noStrike" kern="1200" cap="none" spc="0" normalizeH="0" baseline="0" noProof="0">
-              <a:ln>
-                <a:noFill/>
-              </a:ln>
-              <a:solidFill>
-                <a:srgbClr val="2B2B30"/>
-              </a:solidFill>
-              <a:effectLst/>
-              <a:uLnTx/>
-              <a:uFillTx/>
-              <a:latin typeface="Public Sans"/>
-              <a:ea typeface="+mn-ea"/>
-              <a:cs typeface="+mn-cs"/>
-            </a:endParaRPr>
-          </a:p>
-        </p:txBody>
-      </p:sp>
-      <p:sp>
-        <p:nvSpPr>
           <p:cNvPr id="9" name="Text 5"/>
           <p:cNvSpPr/>
           <p:nvPr/>
         </p:nvSpPr>
         <p:spPr>
           <a:xfrm>
-            <a:off x="6248400" y="4820921"/>
+            <a:off x="6248400" y="5169534"/>
             <a:ext cx="5284724" cy="505460"/>
           </a:xfrm>
           <a:prstGeom prst="rect">
@@ -6920,7 +6797,7 @@
         </p:nvSpPr>
         <p:spPr>
           <a:xfrm>
-            <a:off x="812800" y="5554979"/>
+            <a:off x="198787" y="6256652"/>
             <a:ext cx="10883392" cy="274320"/>
           </a:xfrm>
           <a:prstGeom prst="rect">

--- a/Calgary_Traffic_Midpoint.pptx
+++ b/Calgary_Traffic_Midpoint.pptx
@@ -2978,9 +2978,6 @@
           <a:bodyPr wrap="square" lIns="0" tIns="0" rIns="0" bIns="0" rtlCol="0" anchor="t"/>
           <a:lstStyle/>
           <a:p>
-            <a:pPr marL="0" indent="0">
-              <a:buNone/>
-            </a:pPr>
             <a:r>
               <a:rPr lang="en-US" sz="1400" dirty="0">
                 <a:solidFill>
@@ -2990,7 +2987,40 @@
                 <a:ea typeface="Public Sans" pitchFamily="34" charset="-122"/>
                 <a:cs typeface="Public Sans" pitchFamily="34" charset="-120"/>
               </a:rPr>
-              <a:t>Adrian Julve · Data 201 · Oct 20</a:t>
+              <a:t>Adrian </a:t>
+            </a:r>
+            <a:r>
+              <a:rPr lang="en-US" sz="1400">
+                <a:solidFill>
+                  <a:srgbClr val="C9C7CF"/>
+                </a:solidFill>
+                <a:latin typeface="Public Sans" pitchFamily="34" charset="0"/>
+                <a:ea typeface="Public Sans" pitchFamily="34" charset="-122"/>
+                <a:cs typeface="Public Sans" pitchFamily="34" charset="-120"/>
+              </a:rPr>
+              <a:t>Julve, Kein </a:t>
+            </a:r>
+            <a:r>
+              <a:rPr lang="en-US" sz="1400" dirty="0" err="1">
+                <a:solidFill>
+                  <a:srgbClr val="C9C7CF"/>
+                </a:solidFill>
+                <a:latin typeface="Public Sans" pitchFamily="34" charset="0"/>
+                <a:ea typeface="Public Sans" pitchFamily="34" charset="-122"/>
+                <a:cs typeface="Public Sans" pitchFamily="34" charset="-120"/>
+              </a:rPr>
+              <a:t>Ritarita</a:t>
+            </a:r>
+            <a:r>
+              <a:rPr lang="en-US" sz="1400" dirty="0">
+                <a:solidFill>
+                  <a:srgbClr val="C9C7CF"/>
+                </a:solidFill>
+                <a:latin typeface="Public Sans" pitchFamily="34" charset="0"/>
+                <a:ea typeface="Public Sans" pitchFamily="34" charset="-122"/>
+                <a:cs typeface="Public Sans" pitchFamily="34" charset="-120"/>
+              </a:rPr>
+              <a:t> · Data 201 · Oct 20</a:t>
             </a:r>
             <a:r>
               <a:rPr lang="en-US" sz="1400" baseline="30000" dirty="0">

--- a/Calgary_Traffic_Midpoint.pptx
+++ b/Calgary_Traffic_Midpoint.pptx
@@ -3009,7 +3009,7 @@
                 <a:ea typeface="Public Sans" pitchFamily="34" charset="-122"/>
                 <a:cs typeface="Public Sans" pitchFamily="34" charset="-120"/>
               </a:rPr>
-              <a:t>Ritarita</a:t>
+              <a:t>Ritarita, Xinqi Zha</a:t>
             </a:r>
             <a:r>
               <a:rPr lang="en-US" sz="1400" dirty="0">

--- a/Calgary_Traffic_Midpoint.pptx
+++ b/Calgary_Traffic_Midpoint.pptx
@@ -6,7 +6,7 @@
     <p:sldMasterId id="2147483654" r:id="rId2"/>
   </p:sldMasterIdLst>
   <p:notesMasterIdLst>
-    <p:notesMasterId r:id="rId12"/>
+    <p:notesMasterId r:id="rId13"/>
   </p:notesMasterIdLst>
   <p:sldIdLst>
     <p:sldId id="256" r:id="rId3"/>
@@ -14,10 +14,11 @@
     <p:sldId id="258" r:id="rId5"/>
     <p:sldId id="259" r:id="rId6"/>
     <p:sldId id="265" r:id="rId7"/>
-    <p:sldId id="269" r:id="rId8"/>
-    <p:sldId id="270" r:id="rId9"/>
-    <p:sldId id="263" r:id="rId10"/>
-    <p:sldId id="268" r:id="rId11"/>
+    <p:sldId id="260" r:id="rId8"/>
+    <p:sldId id="269" r:id="rId9"/>
+    <p:sldId id="270" r:id="rId10"/>
+    <p:sldId id="263" r:id="rId11"/>
+    <p:sldId id="268" r:id="rId12"/>
   </p:sldIdLst>
   <p:sldSz cx="12192000" cy="6858000"/>
   <p:notesSz cx="6858000" cy="12192000"/>
@@ -131,6 +132,7 @@
         <p14:section name="Wrangling" id="{3AE2D310-56C6-B243-413B-9658E54EA91D}">
           <p14:sldIdLst>
             <p14:sldId id="265"/>
+            <p14:sldId id="260"/>
           </p14:sldIdLst>
         </p14:section>
         <p14:section name="Visualizations and findings" id="{FA1E9DF6-5D12-0988-0309-B8E845309660}">
@@ -551,7 +553,7 @@
 </p:notes>
 </file>
 
-<file path=ppt/notesSlides/notesSlide2.xml><?xml version="1.0" encoding="utf-8"?>
+<file path=ppt/notesSlides/notesSlide10.xml><?xml version="1.0" encoding="utf-8"?>
 <p:notes xmlns:a="http://schemas.openxmlformats.org/drawingml/2006/main" xmlns:r="http://schemas.openxmlformats.org/officeDocument/2006/relationships" xmlns:p="http://schemas.openxmlformats.org/presentationml/2006/main">
   <p:cSld>
     <p:spTree>
@@ -597,355 +599,7 @@
           <a:p>
             <a:r>
               <a:rPr lang="en-US" dirty="0"/>
-              <a:t>Traffic incidents aren’t random. They cluster on certain roads, at certain times, and in certain parts of the city. My project uses City of Calgary open data to ask whether neighbourhood income and related conditions, like renting, low income and how people commute, line up with where incidents happen. The study area is the whole city, split into 113 community service areas. I use nine complete years, 2017 to 2025, and the result is an interactive Power BI dashboard.</a:t>
-            </a:r>
-          </a:p>
-        </p:txBody>
-      </p:sp>
-      <p:sp>
-        <p:nvSpPr>
-          <p:cNvPr id="4" name="Slide Number Placeholder 3"/>
-          <p:cNvSpPr>
-            <a:spLocks noGrp="1"/>
-          </p:cNvSpPr>
-          <p:nvPr>
-            <p:ph type="sldNum" sz="quarter" idx="10"/>
-          </p:nvPr>
-        </p:nvSpPr>
-        <p:spPr/>
-        <p:txBody>
-          <a:bodyPr/>
-          <a:lstStyle/>
-          <a:p>
-            <a:fld id="{F7021451-1387-4CA6-816F-3879F97B5CBC}" type="slidenum">
-              <a:rPr lang="en-US"/>
-              <a:t>2</a:t>
-            </a:fld>
-            <a:endParaRPr lang="en-US"/>
-          </a:p>
-        </p:txBody>
-      </p:sp>
-    </p:spTree>
-    <p:extLst>
-      <p:ext uri="{BB962C8B-B14F-4D97-AF65-F5344CB8AC3E}">
-        <p14:creationId xmlns:p14="http://schemas.microsoft.com/office/powerpoint/2010/main" val="1024086991"/>
-      </p:ext>
-    </p:extLst>
-  </p:cSld>
-  <p:clrMapOvr>
-    <a:masterClrMapping/>
-  </p:clrMapOvr>
-</p:notes>
-</file>
-
-<file path=ppt/notesSlides/notesSlide3.xml><?xml version="1.0" encoding="utf-8"?>
-<p:notes xmlns:a="http://schemas.openxmlformats.org/drawingml/2006/main" xmlns:r="http://schemas.openxmlformats.org/officeDocument/2006/relationships" xmlns:p="http://schemas.openxmlformats.org/presentationml/2006/main">
-  <p:cSld>
-    <p:spTree>
-      <p:nvGrpSpPr>
-        <p:cNvPr id="1" name=""/>
-        <p:cNvGrpSpPr/>
-        <p:nvPr/>
-      </p:nvGrpSpPr>
-      <p:grpSpPr>
-        <a:xfrm>
-          <a:off x="0" y="0"/>
-          <a:ext cx="0" cy="0"/>
-          <a:chOff x="0" y="0"/>
-          <a:chExt cx="0" cy="0"/>
-        </a:xfrm>
-      </p:grpSpPr>
-      <p:sp>
-        <p:nvSpPr>
-          <p:cNvPr id="2" name="Slide Image Placeholder 1"/>
-          <p:cNvSpPr>
-            <a:spLocks noGrp="1" noRot="1" noChangeAspect="1"/>
-          </p:cNvSpPr>
-          <p:nvPr>
-            <p:ph type="sldImg"/>
-          </p:nvPr>
-        </p:nvSpPr>
-        <p:spPr/>
-      </p:sp>
-      <p:sp>
-        <p:nvSpPr>
-          <p:cNvPr id="3" name="Notes Placeholder 2"/>
-          <p:cNvSpPr>
-            <a:spLocks noGrp="1"/>
-          </p:cNvSpPr>
-          <p:nvPr>
-            <p:ph type="body" idx="1"/>
-          </p:nvPr>
-        </p:nvSpPr>
-        <p:spPr/>
-        <p:txBody>
-          <a:bodyPr/>
-          <a:lstStyle/>
-          <a:p>
-            <a:r>
-              <a:rPr lang="en-US" dirty="0"/>
-              <a:t>I have three questions. First, where: once we account for how many people live in an area, where do incidents concentrate, and does that match neighbourhood income? Second, who: beyond income, which neighbourhood traits, like renting, low income or commuting by car, go along with higher incident rates? Third, when: what times of day, days of the week and months of the year see the most incidents? Each question maps to a part of the dashboard.</a:t>
-            </a:r>
-          </a:p>
-        </p:txBody>
-      </p:sp>
-      <p:sp>
-        <p:nvSpPr>
-          <p:cNvPr id="4" name="Slide Number Placeholder 3"/>
-          <p:cNvSpPr>
-            <a:spLocks noGrp="1"/>
-          </p:cNvSpPr>
-          <p:nvPr>
-            <p:ph type="sldNum" sz="quarter" idx="10"/>
-          </p:nvPr>
-        </p:nvSpPr>
-        <p:spPr/>
-        <p:txBody>
-          <a:bodyPr/>
-          <a:lstStyle/>
-          <a:p>
-            <a:fld id="{F7021451-1387-4CA6-816F-3879F97B5CBC}" type="slidenum">
-              <a:rPr lang="en-US"/>
-              <a:t>3</a:t>
-            </a:fld>
-            <a:endParaRPr lang="en-US"/>
-          </a:p>
-        </p:txBody>
-      </p:sp>
-    </p:spTree>
-    <p:extLst>
-      <p:ext uri="{BB962C8B-B14F-4D97-AF65-F5344CB8AC3E}">
-        <p14:creationId xmlns:p14="http://schemas.microsoft.com/office/powerpoint/2010/main" val="1024086991"/>
-      </p:ext>
-    </p:extLst>
-  </p:cSld>
-  <p:clrMapOvr>
-    <a:masterClrMapping/>
-  </p:clrMapOvr>
-</p:notes>
-</file>
-
-<file path=ppt/notesSlides/notesSlide4.xml><?xml version="1.0" encoding="utf-8"?>
-<p:notes xmlns:a="http://schemas.openxmlformats.org/drawingml/2006/main" xmlns:r="http://schemas.openxmlformats.org/officeDocument/2006/relationships" xmlns:p="http://schemas.openxmlformats.org/presentationml/2006/main">
-  <p:cSld>
-    <p:spTree>
-      <p:nvGrpSpPr>
-        <p:cNvPr id="1" name=""/>
-        <p:cNvGrpSpPr/>
-        <p:nvPr/>
-      </p:nvGrpSpPr>
-      <p:grpSpPr>
-        <a:xfrm>
-          <a:off x="0" y="0"/>
-          <a:ext cx="0" cy="0"/>
-          <a:chOff x="0" y="0"/>
-          <a:chExt cx="0" cy="0"/>
-        </a:xfrm>
-      </p:grpSpPr>
-      <p:sp>
-        <p:nvSpPr>
-          <p:cNvPr id="2" name="Slide Image Placeholder 1"/>
-          <p:cNvSpPr>
-            <a:spLocks noGrp="1" noRot="1" noChangeAspect="1"/>
-          </p:cNvSpPr>
-          <p:nvPr>
-            <p:ph type="sldImg"/>
-          </p:nvPr>
-        </p:nvSpPr>
-        <p:spPr/>
-      </p:sp>
-      <p:sp>
-        <p:nvSpPr>
-          <p:cNvPr id="3" name="Notes Placeholder 2"/>
-          <p:cNvSpPr>
-            <a:spLocks noGrp="1"/>
-          </p:cNvSpPr>
-          <p:nvPr>
-            <p:ph type="body" idx="1"/>
-          </p:nvPr>
-        </p:nvSpPr>
-        <p:spPr/>
-        <p:txBody>
-          <a:bodyPr/>
-          <a:lstStyle/>
-          <a:p>
-            <a:r>
-              <a:rPr lang="en-US" dirty="0"/>
-              <a:t>All three datasets come from the City of Calgary’s open data portal, and all are obtained. Traffic Incidents is the core: 65,138 records, each with a location, description and timestamp. The Equity Index file covers 113 community service areas with population, median income and 16 other census measures, plus their boundaries. Community District Boundaries adds 313 communities with their land-use class, which lets me separate residential areas from industrial ones.</a:t>
-            </a:r>
-          </a:p>
-        </p:txBody>
-      </p:sp>
-      <p:sp>
-        <p:nvSpPr>
-          <p:cNvPr id="4" name="Slide Number Placeholder 3"/>
-          <p:cNvSpPr>
-            <a:spLocks noGrp="1"/>
-          </p:cNvSpPr>
-          <p:nvPr>
-            <p:ph type="sldNum" sz="quarter" idx="10"/>
-          </p:nvPr>
-        </p:nvSpPr>
-        <p:spPr/>
-        <p:txBody>
-          <a:bodyPr/>
-          <a:lstStyle/>
-          <a:p>
-            <a:fld id="{F7021451-1387-4CA6-816F-3879F97B5CBC}" type="slidenum">
-              <a:rPr lang="en-US"/>
-              <a:t>4</a:t>
-            </a:fld>
-            <a:endParaRPr lang="en-US"/>
-          </a:p>
-        </p:txBody>
-      </p:sp>
-    </p:spTree>
-    <p:extLst>
-      <p:ext uri="{BB962C8B-B14F-4D97-AF65-F5344CB8AC3E}">
-        <p14:creationId xmlns:p14="http://schemas.microsoft.com/office/powerpoint/2010/main" val="1024086991"/>
-      </p:ext>
-    </p:extLst>
-  </p:cSld>
-  <p:clrMapOvr>
-    <a:masterClrMapping/>
-  </p:clrMapOvr>
-</p:notes>
-</file>
-
-<file path=ppt/notesSlides/notesSlide5.xml><?xml version="1.0" encoding="utf-8"?>
-<p:notes xmlns:a="http://schemas.openxmlformats.org/drawingml/2006/main" xmlns:r="http://schemas.openxmlformats.org/officeDocument/2006/relationships" xmlns:p="http://schemas.openxmlformats.org/presentationml/2006/main">
-  <p:cSld>
-    <p:spTree>
-      <p:nvGrpSpPr>
-        <p:cNvPr id="1" name=""/>
-        <p:cNvGrpSpPr/>
-        <p:nvPr/>
-      </p:nvGrpSpPr>
-      <p:grpSpPr>
-        <a:xfrm>
-          <a:off x="0" y="0"/>
-          <a:ext cx="0" cy="0"/>
-          <a:chOff x="0" y="0"/>
-          <a:chExt cx="0" cy="0"/>
-        </a:xfrm>
-      </p:grpSpPr>
-      <p:sp>
-        <p:nvSpPr>
-          <p:cNvPr id="2" name="Slide Image Placeholder 1"/>
-          <p:cNvSpPr>
-            <a:spLocks noGrp="1" noRot="1" noChangeAspect="1"/>
-          </p:cNvSpPr>
-          <p:nvPr>
-            <p:ph type="sldImg"/>
-          </p:nvPr>
-        </p:nvSpPr>
-        <p:spPr/>
-      </p:sp>
-      <p:sp>
-        <p:nvSpPr>
-          <p:cNvPr id="3" name="Notes Placeholder 2"/>
-          <p:cNvSpPr>
-            <a:spLocks noGrp="1"/>
-          </p:cNvSpPr>
-          <p:nvPr>
-            <p:ph type="body" idx="1"/>
-          </p:nvPr>
-        </p:nvSpPr>
-        <p:spPr/>
-        <p:txBody>
-          <a:bodyPr/>
-          <a:lstStyle/>
-          <a:p>
-            <a:r>
-              <a:rPr lang="en-US" dirty="0"/>
-              <a:t>Here’s how I prepared the data. First, each incident only had a map point, so I used Python to read every area’s boundary outline and check which outline contains each point. This is called a point-in-polygon test. 785 incidents fall outside every area and stay unassigned. Second, the census file had one row per measure, so I reshaped it to one row per area and cleaned up the number formats. Third, I set each incident’s type from keywords in its description and flagged highway incidents by street name. Fourth, I filtered to the nine complete years, which leaves 58,536 incidents. Fifth, to compare areas fairly, I divided each area’s incidents by its population and the nine years, using only local roads in residential communities. Finally, I wrote DAX measures that power the dashboard: each selection’s rate compared with the city average, the busiest hour, a monthly rate that adjusts for missing data, and the correlations between neighbourhood traits and incident rates.</a:t>
-            </a:r>
-          </a:p>
-        </p:txBody>
-      </p:sp>
-      <p:sp>
-        <p:nvSpPr>
-          <p:cNvPr id="4" name="Slide Number Placeholder 3"/>
-          <p:cNvSpPr>
-            <a:spLocks noGrp="1"/>
-          </p:cNvSpPr>
-          <p:nvPr>
-            <p:ph type="sldNum" sz="quarter" idx="10"/>
-          </p:nvPr>
-        </p:nvSpPr>
-        <p:spPr/>
-        <p:txBody>
-          <a:bodyPr/>
-          <a:lstStyle/>
-          <a:p>
-            <a:fld id="{F7021451-1387-4CA6-816F-3879F97B5CBC}" type="slidenum">
-              <a:rPr lang="en-US"/>
-              <a:t>5</a:t>
-            </a:fld>
-            <a:endParaRPr lang="en-US"/>
-          </a:p>
-        </p:txBody>
-      </p:sp>
-    </p:spTree>
-    <p:extLst>
-      <p:ext uri="{BB962C8B-B14F-4D97-AF65-F5344CB8AC3E}">
-        <p14:creationId xmlns:p14="http://schemas.microsoft.com/office/powerpoint/2010/main" val="1024086991"/>
-      </p:ext>
-    </p:extLst>
-  </p:cSld>
-  <p:clrMapOvr>
-    <a:masterClrMapping/>
-  </p:clrMapOvr>
-</p:notes>
-</file>
-
-<file path=ppt/notesSlides/notesSlide6.xml><?xml version="1.0" encoding="utf-8"?>
-<p:notes xmlns:a="http://schemas.openxmlformats.org/drawingml/2006/main" xmlns:r="http://schemas.openxmlformats.org/officeDocument/2006/relationships" xmlns:p="http://schemas.openxmlformats.org/presentationml/2006/main">
-  <p:cSld>
-    <p:spTree>
-      <p:nvGrpSpPr>
-        <p:cNvPr id="1" name=""/>
-        <p:cNvGrpSpPr/>
-        <p:nvPr/>
-      </p:nvGrpSpPr>
-      <p:grpSpPr>
-        <a:xfrm>
-          <a:off x="0" y="0"/>
-          <a:ext cx="0" cy="0"/>
-          <a:chOff x="0" y="0"/>
-          <a:chExt cx="0" cy="0"/>
-        </a:xfrm>
-      </p:grpSpPr>
-      <p:sp>
-        <p:nvSpPr>
-          <p:cNvPr id="2" name="Slide Image Placeholder 1"/>
-          <p:cNvSpPr>
-            <a:spLocks noGrp="1" noRot="1" noChangeAspect="1"/>
-          </p:cNvSpPr>
-          <p:nvPr>
-            <p:ph type="sldImg"/>
-          </p:nvPr>
-        </p:nvSpPr>
-        <p:spPr/>
-      </p:sp>
-      <p:sp>
-        <p:nvSpPr>
-          <p:cNvPr id="3" name="Notes Placeholder 2"/>
-          <p:cNvSpPr>
-            <a:spLocks noGrp="1"/>
-          </p:cNvSpPr>
-          <p:nvPr>
-            <p:ph type="body" idx="1"/>
-          </p:nvPr>
-        </p:nvSpPr>
-        <p:spPr/>
-        <p:txBody>
-          <a:bodyPr/>
-          <a:lstStyle/>
-          <a:p>
-            <a:r>
-              <a:rPr lang="en-US" dirty="0"/>
-              <a:t>Backup for the live demo, about 2 minutes. Left: the default view, with all 113 areas coloured by income and incident rate, and every chart showing the whole city. Right: the same dashboard after one click on the legend square for lower-income, high incident-rate areas. The map highlights those 16 areas, mostly in the east. The details panel summarises the group: about 14% of Calgary’s population, a median income range of roughly $29,000 to $42,000, and a local incident rate about 2.5 times the city average. The KPIs, heatmap and month chart all filter to those areas, so you can see their busiest hour moves to 4 to 5 PM. If there’s time, open the live report from the link and click an individual area.</a:t>
+              <a:t>[9:45 – 10:00] Thanks for listening. I’m happy to take questions, or to go back into the dashboard to look at any area you’re curious about.</a:t>
             </a:r>
           </a:p>
         </p:txBody>
@@ -1014,7 +668,7 @@
                 <a:tabLst/>
                 <a:defRPr/>
               </a:pPr>
-              <a:t>6</a:t>
+              <a:t>10</a:t>
             </a:fld>
             <a:endParaRPr kumimoji="0" lang="en-US" sz="1800" b="0" i="0" u="none" strike="noStrike" kern="1200" cap="none" spc="0" normalizeH="0" baseline="0" noProof="0">
               <a:ln>
@@ -1030,6 +684,441 @@
               <a:ea typeface="+mn-ea"/>
               <a:cs typeface="+mn-cs"/>
             </a:endParaRPr>
+          </a:p>
+        </p:txBody>
+      </p:sp>
+    </p:spTree>
+    <p:extLst>
+      <p:ext uri="{BB962C8B-B14F-4D97-AF65-F5344CB8AC3E}">
+        <p14:creationId xmlns:p14="http://schemas.microsoft.com/office/powerpoint/2010/main" val="1024086991"/>
+      </p:ext>
+    </p:extLst>
+  </p:cSld>
+  <p:clrMapOvr>
+    <a:masterClrMapping/>
+  </p:clrMapOvr>
+</p:notes>
+</file>
+
+<file path=ppt/notesSlides/notesSlide2.xml><?xml version="1.0" encoding="utf-8"?>
+<p:notes xmlns:a="http://schemas.openxmlformats.org/drawingml/2006/main" xmlns:r="http://schemas.openxmlformats.org/officeDocument/2006/relationships" xmlns:p="http://schemas.openxmlformats.org/presentationml/2006/main">
+  <p:cSld>
+    <p:spTree>
+      <p:nvGrpSpPr>
+        <p:cNvPr id="1" name=""/>
+        <p:cNvGrpSpPr/>
+        <p:nvPr/>
+      </p:nvGrpSpPr>
+      <p:grpSpPr>
+        <a:xfrm>
+          <a:off x="0" y="0"/>
+          <a:ext cx="0" cy="0"/>
+          <a:chOff x="0" y="0"/>
+          <a:chExt cx="0" cy="0"/>
+        </a:xfrm>
+      </p:grpSpPr>
+      <p:sp>
+        <p:nvSpPr>
+          <p:cNvPr id="2" name="Slide Image Placeholder 1"/>
+          <p:cNvSpPr>
+            <a:spLocks noGrp="1" noRot="1" noChangeAspect="1"/>
+          </p:cNvSpPr>
+          <p:nvPr>
+            <p:ph type="sldImg"/>
+          </p:nvPr>
+        </p:nvSpPr>
+        <p:spPr/>
+      </p:sp>
+      <p:sp>
+        <p:nvSpPr>
+          <p:cNvPr id="3" name="Notes Placeholder 2"/>
+          <p:cNvSpPr>
+            <a:spLocks noGrp="1"/>
+          </p:cNvSpPr>
+          <p:nvPr>
+            <p:ph type="body" idx="1"/>
+          </p:nvPr>
+        </p:nvSpPr>
+        <p:spPr/>
+        <p:txBody>
+          <a:bodyPr/>
+          <a:lstStyle/>
+          <a:p>
+            <a:r>
+              <a:rPr lang="en-US" dirty="0"/>
+              <a:t>Traffic incidents aren’t random. They cluster on certain roads, at certain times, and in certain parts of the city. My project uses City of Calgary open data to ask whether neighbourhood income and related conditions, like renting, low income and how people commute, line up with where incidents happen. The study area is the whole city, split into 113 community service areas. I use nine complete years, 2017 to 2025, and the result is an interactive Power BI dashboard.</a:t>
+            </a:r>
+          </a:p>
+        </p:txBody>
+      </p:sp>
+      <p:sp>
+        <p:nvSpPr>
+          <p:cNvPr id="4" name="Slide Number Placeholder 3"/>
+          <p:cNvSpPr>
+            <a:spLocks noGrp="1"/>
+          </p:cNvSpPr>
+          <p:nvPr>
+            <p:ph type="sldNum" sz="quarter" idx="10"/>
+          </p:nvPr>
+        </p:nvSpPr>
+        <p:spPr/>
+        <p:txBody>
+          <a:bodyPr/>
+          <a:lstStyle/>
+          <a:p>
+            <a:fld id="{F7021451-1387-4CA6-816F-3879F97B5CBC}" type="slidenum">
+              <a:rPr lang="en-US"/>
+              <a:t>2</a:t>
+            </a:fld>
+            <a:endParaRPr lang="en-US"/>
+          </a:p>
+        </p:txBody>
+      </p:sp>
+    </p:spTree>
+    <p:extLst>
+      <p:ext uri="{BB962C8B-B14F-4D97-AF65-F5344CB8AC3E}">
+        <p14:creationId xmlns:p14="http://schemas.microsoft.com/office/powerpoint/2010/main" val="1024086991"/>
+      </p:ext>
+    </p:extLst>
+  </p:cSld>
+  <p:clrMapOvr>
+    <a:masterClrMapping/>
+  </p:clrMapOvr>
+</p:notes>
+</file>
+
+<file path=ppt/notesSlides/notesSlide3.xml><?xml version="1.0" encoding="utf-8"?>
+<p:notes xmlns:a="http://schemas.openxmlformats.org/drawingml/2006/main" xmlns:r="http://schemas.openxmlformats.org/officeDocument/2006/relationships" xmlns:p="http://schemas.openxmlformats.org/presentationml/2006/main">
+  <p:cSld>
+    <p:spTree>
+      <p:nvGrpSpPr>
+        <p:cNvPr id="1" name=""/>
+        <p:cNvGrpSpPr/>
+        <p:nvPr/>
+      </p:nvGrpSpPr>
+      <p:grpSpPr>
+        <a:xfrm>
+          <a:off x="0" y="0"/>
+          <a:ext cx="0" cy="0"/>
+          <a:chOff x="0" y="0"/>
+          <a:chExt cx="0" cy="0"/>
+        </a:xfrm>
+      </p:grpSpPr>
+      <p:sp>
+        <p:nvSpPr>
+          <p:cNvPr id="2" name="Slide Image Placeholder 1"/>
+          <p:cNvSpPr>
+            <a:spLocks noGrp="1" noRot="1" noChangeAspect="1"/>
+          </p:cNvSpPr>
+          <p:nvPr>
+            <p:ph type="sldImg"/>
+          </p:nvPr>
+        </p:nvSpPr>
+        <p:spPr/>
+      </p:sp>
+      <p:sp>
+        <p:nvSpPr>
+          <p:cNvPr id="3" name="Notes Placeholder 2"/>
+          <p:cNvSpPr>
+            <a:spLocks noGrp="1"/>
+          </p:cNvSpPr>
+          <p:nvPr>
+            <p:ph type="body" idx="1"/>
+          </p:nvPr>
+        </p:nvSpPr>
+        <p:spPr/>
+        <p:txBody>
+          <a:bodyPr/>
+          <a:lstStyle/>
+          <a:p>
+            <a:r>
+              <a:rPr lang="en-US" dirty="0"/>
+              <a:t>I have three questions. First, where: once we account for how many people live in an area, where do incidents concentrate, and does that match neighbourhood income? Second, who: beyond income, which neighbourhood traits, like renting, low income or commuting by car, go along with higher incident rates? Third, when: what times of day, days of the week and months of the year see the most incidents? Each question maps to a part of the dashboard.</a:t>
+            </a:r>
+          </a:p>
+        </p:txBody>
+      </p:sp>
+      <p:sp>
+        <p:nvSpPr>
+          <p:cNvPr id="4" name="Slide Number Placeholder 3"/>
+          <p:cNvSpPr>
+            <a:spLocks noGrp="1"/>
+          </p:cNvSpPr>
+          <p:nvPr>
+            <p:ph type="sldNum" sz="quarter" idx="10"/>
+          </p:nvPr>
+        </p:nvSpPr>
+        <p:spPr/>
+        <p:txBody>
+          <a:bodyPr/>
+          <a:lstStyle/>
+          <a:p>
+            <a:fld id="{F7021451-1387-4CA6-816F-3879F97B5CBC}" type="slidenum">
+              <a:rPr lang="en-US"/>
+              <a:t>3</a:t>
+            </a:fld>
+            <a:endParaRPr lang="en-US"/>
+          </a:p>
+        </p:txBody>
+      </p:sp>
+    </p:spTree>
+    <p:extLst>
+      <p:ext uri="{BB962C8B-B14F-4D97-AF65-F5344CB8AC3E}">
+        <p14:creationId xmlns:p14="http://schemas.microsoft.com/office/powerpoint/2010/main" val="1024086991"/>
+      </p:ext>
+    </p:extLst>
+  </p:cSld>
+  <p:clrMapOvr>
+    <a:masterClrMapping/>
+  </p:clrMapOvr>
+</p:notes>
+</file>
+
+<file path=ppt/notesSlides/notesSlide4.xml><?xml version="1.0" encoding="utf-8"?>
+<p:notes xmlns:a="http://schemas.openxmlformats.org/drawingml/2006/main" xmlns:r="http://schemas.openxmlformats.org/officeDocument/2006/relationships" xmlns:p="http://schemas.openxmlformats.org/presentationml/2006/main">
+  <p:cSld>
+    <p:spTree>
+      <p:nvGrpSpPr>
+        <p:cNvPr id="1" name=""/>
+        <p:cNvGrpSpPr/>
+        <p:nvPr/>
+      </p:nvGrpSpPr>
+      <p:grpSpPr>
+        <a:xfrm>
+          <a:off x="0" y="0"/>
+          <a:ext cx="0" cy="0"/>
+          <a:chOff x="0" y="0"/>
+          <a:chExt cx="0" cy="0"/>
+        </a:xfrm>
+      </p:grpSpPr>
+      <p:sp>
+        <p:nvSpPr>
+          <p:cNvPr id="2" name="Slide Image Placeholder 1"/>
+          <p:cNvSpPr>
+            <a:spLocks noGrp="1" noRot="1" noChangeAspect="1"/>
+          </p:cNvSpPr>
+          <p:nvPr>
+            <p:ph type="sldImg"/>
+          </p:nvPr>
+        </p:nvSpPr>
+        <p:spPr/>
+      </p:sp>
+      <p:sp>
+        <p:nvSpPr>
+          <p:cNvPr id="3" name="Notes Placeholder 2"/>
+          <p:cNvSpPr>
+            <a:spLocks noGrp="1"/>
+          </p:cNvSpPr>
+          <p:nvPr>
+            <p:ph type="body" idx="1"/>
+          </p:nvPr>
+        </p:nvSpPr>
+        <p:spPr/>
+        <p:txBody>
+          <a:bodyPr/>
+          <a:lstStyle/>
+          <a:p>
+            <a:r>
+              <a:rPr lang="en-US" dirty="0"/>
+              <a:t>All three datasets come from the City of Calgary’s open data portal, and all are obtained. Traffic Incidents is the core: 65,138 records, each with a location, description and timestamp. The Equity Index file covers 113 community service areas with population, median income and 16 other census measures, plus their boundaries. Community District Boundaries adds 313 communities with their land-use class, which lets me separate residential areas from industrial ones.</a:t>
+            </a:r>
+          </a:p>
+        </p:txBody>
+      </p:sp>
+      <p:sp>
+        <p:nvSpPr>
+          <p:cNvPr id="4" name="Slide Number Placeholder 3"/>
+          <p:cNvSpPr>
+            <a:spLocks noGrp="1"/>
+          </p:cNvSpPr>
+          <p:nvPr>
+            <p:ph type="sldNum" sz="quarter" idx="10"/>
+          </p:nvPr>
+        </p:nvSpPr>
+        <p:spPr/>
+        <p:txBody>
+          <a:bodyPr/>
+          <a:lstStyle/>
+          <a:p>
+            <a:fld id="{F7021451-1387-4CA6-816F-3879F97B5CBC}" type="slidenum">
+              <a:rPr lang="en-US"/>
+              <a:t>4</a:t>
+            </a:fld>
+            <a:endParaRPr lang="en-US"/>
+          </a:p>
+        </p:txBody>
+      </p:sp>
+    </p:spTree>
+    <p:extLst>
+      <p:ext uri="{BB962C8B-B14F-4D97-AF65-F5344CB8AC3E}">
+        <p14:creationId xmlns:p14="http://schemas.microsoft.com/office/powerpoint/2010/main" val="1024086991"/>
+      </p:ext>
+    </p:extLst>
+  </p:cSld>
+  <p:clrMapOvr>
+    <a:masterClrMapping/>
+  </p:clrMapOvr>
+</p:notes>
+</file>
+
+<file path=ppt/notesSlides/notesSlide5.xml><?xml version="1.0" encoding="utf-8"?>
+<p:notes xmlns:a="http://schemas.openxmlformats.org/drawingml/2006/main" xmlns:r="http://schemas.openxmlformats.org/officeDocument/2006/relationships" xmlns:p="http://schemas.openxmlformats.org/presentationml/2006/main">
+  <p:cSld>
+    <p:spTree>
+      <p:nvGrpSpPr>
+        <p:cNvPr id="1" name=""/>
+        <p:cNvGrpSpPr/>
+        <p:nvPr/>
+      </p:nvGrpSpPr>
+      <p:grpSpPr>
+        <a:xfrm>
+          <a:off x="0" y="0"/>
+          <a:ext cx="0" cy="0"/>
+          <a:chOff x="0" y="0"/>
+          <a:chExt cx="0" cy="0"/>
+        </a:xfrm>
+      </p:grpSpPr>
+      <p:sp>
+        <p:nvSpPr>
+          <p:cNvPr id="2" name="Slide Image Placeholder 1"/>
+          <p:cNvSpPr>
+            <a:spLocks noGrp="1" noRot="1" noChangeAspect="1"/>
+          </p:cNvSpPr>
+          <p:nvPr>
+            <p:ph type="sldImg"/>
+          </p:nvPr>
+        </p:nvSpPr>
+        <p:spPr/>
+      </p:sp>
+      <p:sp>
+        <p:nvSpPr>
+          <p:cNvPr id="3" name="Notes Placeholder 2"/>
+          <p:cNvSpPr>
+            <a:spLocks noGrp="1"/>
+          </p:cNvSpPr>
+          <p:nvPr>
+            <p:ph type="body" idx="1"/>
+          </p:nvPr>
+        </p:nvSpPr>
+        <p:spPr/>
+        <p:txBody>
+          <a:bodyPr/>
+          <a:lstStyle/>
+          <a:p>
+            <a:r>
+              <a:rPr lang="en-US" dirty="0"/>
+              <a:t>Here’s how I prepared the data. First, each incident only had a map point, so I used Python to read every area’s boundary outline and check which outline contains each point. This is called a point-in-polygon test. 785 incidents fall outside every area and stay unassigned. Second, the census file had one row per measure, so I reshaped it to one row per area and cleaned up the number formats. Third, I set each incident’s type from keywords in its description and flagged highway incidents by street name. Fourth, I filtered to the nine complete years, which leaves 58,536 incidents. Fifth, to compare areas fairly, I divided each area’s incidents by its population and the nine years, using only local roads in residential communities. Finally, I wrote DAX measures that power the dashboard: each selection’s rate compared with the city average, the busiest hour, a monthly rate that adjusts for missing data, and the correlations between neighbourhood traits and incident rates.</a:t>
+            </a:r>
+          </a:p>
+        </p:txBody>
+      </p:sp>
+      <p:sp>
+        <p:nvSpPr>
+          <p:cNvPr id="4" name="Slide Number Placeholder 3"/>
+          <p:cNvSpPr>
+            <a:spLocks noGrp="1"/>
+          </p:cNvSpPr>
+          <p:nvPr>
+            <p:ph type="sldNum" sz="quarter" idx="10"/>
+          </p:nvPr>
+        </p:nvSpPr>
+        <p:spPr/>
+        <p:txBody>
+          <a:bodyPr/>
+          <a:lstStyle/>
+          <a:p>
+            <a:fld id="{F7021451-1387-4CA6-816F-3879F97B5CBC}" type="slidenum">
+              <a:rPr lang="en-US"/>
+              <a:t>5</a:t>
+            </a:fld>
+            <a:endParaRPr lang="en-US"/>
+          </a:p>
+        </p:txBody>
+      </p:sp>
+    </p:spTree>
+    <p:extLst>
+      <p:ext uri="{BB962C8B-B14F-4D97-AF65-F5344CB8AC3E}">
+        <p14:creationId xmlns:p14="http://schemas.microsoft.com/office/powerpoint/2010/main" val="1024086991"/>
+      </p:ext>
+    </p:extLst>
+  </p:cSld>
+  <p:clrMapOvr>
+    <a:masterClrMapping/>
+  </p:clrMapOvr>
+</p:notes>
+</file>
+
+<file path=ppt/notesSlides/notesSlide6.xml><?xml version="1.0" encoding="utf-8"?>
+<p:notes xmlns:a="http://schemas.openxmlformats.org/drawingml/2006/main" xmlns:r="http://schemas.openxmlformats.org/officeDocument/2006/relationships" xmlns:p="http://schemas.openxmlformats.org/presentationml/2006/main">
+  <p:cSld>
+    <p:spTree>
+      <p:nvGrpSpPr>
+        <p:cNvPr id="1" name=""/>
+        <p:cNvGrpSpPr/>
+        <p:nvPr/>
+      </p:nvGrpSpPr>
+      <p:grpSpPr>
+        <a:xfrm>
+          <a:off x="0" y="0"/>
+          <a:ext cx="0" cy="0"/>
+          <a:chOff x="0" y="0"/>
+          <a:chExt cx="0" cy="0"/>
+        </a:xfrm>
+      </p:grpSpPr>
+      <p:sp>
+        <p:nvSpPr>
+          <p:cNvPr id="2" name="Slide Image Placeholder 1"/>
+          <p:cNvSpPr>
+            <a:spLocks noGrp="1" noRot="1" noChangeAspect="1"/>
+          </p:cNvSpPr>
+          <p:nvPr>
+            <p:ph type="sldImg"/>
+          </p:nvPr>
+        </p:nvSpPr>
+        <p:spPr/>
+      </p:sp>
+      <p:sp>
+        <p:nvSpPr>
+          <p:cNvPr id="3" name="Notes Placeholder 2"/>
+          <p:cNvSpPr>
+            <a:spLocks noGrp="1"/>
+          </p:cNvSpPr>
+          <p:nvPr>
+            <p:ph type="body" idx="1"/>
+          </p:nvPr>
+        </p:nvSpPr>
+        <p:spPr/>
+        <p:txBody>
+          <a:bodyPr/>
+          <a:lstStyle/>
+          <a:p>
+            <a:r>
+              <a:rPr lang="en-US" dirty="0"/>
+              <a:t>Each card shows what the data looked like before and after one step. First, I kept only full years: the raw file has 65,138 incidents from December 2016 to 2026, and keeping 2017 to 2025 leaves 58,536. Second, each incident only had a map point, so I used GeoPandas in Python to check which area outline each point falls inside. 639 fall outside every area, and the same outlines became the Shape Map. Third, I turned the free-text description into five incident types using keywords, which powers the incident type filter, and flagged highways like Deerfoot and Glenmore by street name, so the map’s rates only count local roads. Fourth, the census file had one row for every area and trait, 2,091 rows, so I reshaped it to one row per area, 113 rows, with each trait as its own column. Fifth, every incident carries both its community and its area, which links the 307 communities to the 113 areas, and I then rated each area by incidents per 1,000 residents a year. Finally, DAX measures turn those rows into the numbers on the dashboard, like rate versus the city average and the busiest hour, and they update with every click.</a:t>
+            </a:r>
+          </a:p>
+        </p:txBody>
+      </p:sp>
+      <p:sp>
+        <p:nvSpPr>
+          <p:cNvPr id="4" name="Slide Number Placeholder 3"/>
+          <p:cNvSpPr>
+            <a:spLocks noGrp="1"/>
+          </p:cNvSpPr>
+          <p:nvPr>
+            <p:ph type="sldNum" sz="quarter" idx="10"/>
+          </p:nvPr>
+        </p:nvSpPr>
+        <p:spPr/>
+        <p:txBody>
+          <a:bodyPr/>
+          <a:lstStyle/>
+          <a:p>
+            <a:fld id="{F7021451-1387-4CA6-816F-3879F97B5CBC}" type="slidenum">
+              <a:rPr lang="en-US"/>
+              <a:t>6</a:t>
+            </a:fld>
+            <a:endParaRPr lang="en-US"/>
           </a:p>
         </p:txBody>
       </p:sp>
@@ -1092,7 +1181,7 @@
           <a:p>
             <a:r>
               <a:rPr lang="en-US" dirty="0"/>
-              <a:t>Here’s what the map itself shows. Each area is coloured by two things at once: its median income and its local incident rate. Two groups stand out, both with 16 areas each. Sixteen lower-income areas have high incident rates, shown in pink, and sixteen higher-income areas have low incident rates, shown in blue. They’re the two largest groups on the map, and mirror images of each other. Geographically, the pink areas line the east side of the city, while the blue areas fill the west and south. The exception is the city centre: 11 higher-income areas still have high rates, shown in dark purple, mostly downtown and in the inner city, where commuters and through-traffic add incidents that resident-based rates don’t account for.</a:t>
+              <a:t>Backup for the live demo, about 2 minutes. Left: the default view, with all 113 areas coloured by income and incident rate, and every chart showing the whole city. Right: the same dashboard after one click on the legend square for lower-income, high incident-rate areas. The map highlights those 16 areas, mostly in the east. The details panel summarises the group: about 14% of Calgary’s population, a median income range of roughly $29,000 to $42,000, and a local incident rate about 2.5 times the city average. The KPIs, heatmap and month chart all filter to those areas, so you can see their busiest hour moves to 4 to 5 PM. If there’s time, open the live report from the link and click an individual area.</a:t>
             </a:r>
           </a:p>
         </p:txBody>
@@ -1239,94 +1328,7 @@
           <a:p>
             <a:r>
               <a:rPr lang="en-US" dirty="0"/>
-              <a:t>The time patterns are clear. The heatmap shows incidents concentrate on weekday afternoons: about a quarter of all incidents happen between 3 and 6 PM, and 5 to 6 PM is the single busiest hour, which lines up with the evening commute. Weekends are much quieter; Sunday has about half as many incidents as Wednesday. By month, the rate climbs through fall and peaks in November and December, at about 1.6 times April’s rate, which points to winter driving conditions and shorter daylight.</a:t>
-            </a:r>
-          </a:p>
-        </p:txBody>
-      </p:sp>
-      <p:sp>
-        <p:nvSpPr>
-          <p:cNvPr id="4" name="Slide Number Placeholder 3"/>
-          <p:cNvSpPr>
-            <a:spLocks noGrp="1"/>
-          </p:cNvSpPr>
-          <p:nvPr>
-            <p:ph type="sldNum" sz="quarter" idx="10"/>
-          </p:nvPr>
-        </p:nvSpPr>
-        <p:spPr/>
-        <p:txBody>
-          <a:bodyPr/>
-          <a:lstStyle/>
-          <a:p>
-            <a:fld id="{F7021451-1387-4CA6-816F-3879F97B5CBC}" type="slidenum">
-              <a:rPr lang="en-US"/>
-              <a:t>8</a:t>
-            </a:fld>
-            <a:endParaRPr lang="en-US"/>
-          </a:p>
-        </p:txBody>
-      </p:sp>
-    </p:spTree>
-    <p:extLst>
-      <p:ext uri="{BB962C8B-B14F-4D97-AF65-F5344CB8AC3E}">
-        <p14:creationId xmlns:p14="http://schemas.microsoft.com/office/powerpoint/2010/main" val="1024086991"/>
-      </p:ext>
-    </p:extLst>
-  </p:cSld>
-  <p:clrMapOvr>
-    <a:masterClrMapping/>
-  </p:clrMapOvr>
-</p:notes>
-</file>
-
-<file path=ppt/notesSlides/notesSlide9.xml><?xml version="1.0" encoding="utf-8"?>
-<p:notes xmlns:a="http://schemas.openxmlformats.org/drawingml/2006/main" xmlns:r="http://schemas.openxmlformats.org/officeDocument/2006/relationships" xmlns:p="http://schemas.openxmlformats.org/presentationml/2006/main">
-  <p:cSld>
-    <p:spTree>
-      <p:nvGrpSpPr>
-        <p:cNvPr id="1" name=""/>
-        <p:cNvGrpSpPr/>
-        <p:nvPr/>
-      </p:nvGrpSpPr>
-      <p:grpSpPr>
-        <a:xfrm>
-          <a:off x="0" y="0"/>
-          <a:ext cx="0" cy="0"/>
-          <a:chOff x="0" y="0"/>
-          <a:chExt cx="0" cy="0"/>
-        </a:xfrm>
-      </p:grpSpPr>
-      <p:sp>
-        <p:nvSpPr>
-          <p:cNvPr id="2" name="Slide Image Placeholder 1"/>
-          <p:cNvSpPr>
-            <a:spLocks noGrp="1" noRot="1" noChangeAspect="1"/>
-          </p:cNvSpPr>
-          <p:nvPr>
-            <p:ph type="sldImg"/>
-          </p:nvPr>
-        </p:nvSpPr>
-        <p:spPr/>
-      </p:sp>
-      <p:sp>
-        <p:nvSpPr>
-          <p:cNvPr id="3" name="Notes Placeholder 2"/>
-          <p:cNvSpPr>
-            <a:spLocks noGrp="1"/>
-          </p:cNvSpPr>
-          <p:nvPr>
-            <p:ph type="body" idx="1"/>
-          </p:nvPr>
-        </p:nvSpPr>
-        <p:spPr/>
-        <p:txBody>
-          <a:bodyPr/>
-          <a:lstStyle/>
-          <a:p>
-            <a:r>
-              <a:rPr lang="en-US" dirty="0"/>
-              <a:t>[9:45 – 10:00] Thanks for listening. I’m happy to take questions, or to go back into the dashboard to look at any area you’re curious about.</a:t>
+              <a:t>Here’s what the map itself shows. Each area is coloured by two things at once: its median income and its local incident rate. Two groups stand out, both with 16 areas each. Sixteen lower-income areas have high incident rates, shown in pink, and sixteen higher-income areas have low incident rates, shown in blue. They’re the two largest groups on the map, and mirror images of each other. Geographically, the pink areas line the east side of the city, while the blue areas fill the west and south. The exception is the city centre: 11 higher-income areas still have high rates, shown in dark purple, mostly downtown and in the inner city, where commuters and through-traffic add incidents that resident-based rates don’t account for.</a:t>
             </a:r>
           </a:p>
         </p:txBody>
@@ -1395,7 +1397,7 @@
                 <a:tabLst/>
                 <a:defRPr/>
               </a:pPr>
-              <a:t>9</a:t>
+              <a:t>8</a:t>
             </a:fld>
             <a:endParaRPr kumimoji="0" lang="en-US" sz="1800" b="0" i="0" u="none" strike="noStrike" kern="1200" cap="none" spc="0" normalizeH="0" baseline="0" noProof="0">
               <a:ln>
@@ -1411,6 +1413,93 @@
               <a:ea typeface="+mn-ea"/>
               <a:cs typeface="+mn-cs"/>
             </a:endParaRPr>
+          </a:p>
+        </p:txBody>
+      </p:sp>
+    </p:spTree>
+    <p:extLst>
+      <p:ext uri="{BB962C8B-B14F-4D97-AF65-F5344CB8AC3E}">
+        <p14:creationId xmlns:p14="http://schemas.microsoft.com/office/powerpoint/2010/main" val="1024086991"/>
+      </p:ext>
+    </p:extLst>
+  </p:cSld>
+  <p:clrMapOvr>
+    <a:masterClrMapping/>
+  </p:clrMapOvr>
+</p:notes>
+</file>
+
+<file path=ppt/notesSlides/notesSlide9.xml><?xml version="1.0" encoding="utf-8"?>
+<p:notes xmlns:a="http://schemas.openxmlformats.org/drawingml/2006/main" xmlns:r="http://schemas.openxmlformats.org/officeDocument/2006/relationships" xmlns:p="http://schemas.openxmlformats.org/presentationml/2006/main">
+  <p:cSld>
+    <p:spTree>
+      <p:nvGrpSpPr>
+        <p:cNvPr id="1" name=""/>
+        <p:cNvGrpSpPr/>
+        <p:nvPr/>
+      </p:nvGrpSpPr>
+      <p:grpSpPr>
+        <a:xfrm>
+          <a:off x="0" y="0"/>
+          <a:ext cx="0" cy="0"/>
+          <a:chOff x="0" y="0"/>
+          <a:chExt cx="0" cy="0"/>
+        </a:xfrm>
+      </p:grpSpPr>
+      <p:sp>
+        <p:nvSpPr>
+          <p:cNvPr id="2" name="Slide Image Placeholder 1"/>
+          <p:cNvSpPr>
+            <a:spLocks noGrp="1" noRot="1" noChangeAspect="1"/>
+          </p:cNvSpPr>
+          <p:nvPr>
+            <p:ph type="sldImg"/>
+          </p:nvPr>
+        </p:nvSpPr>
+        <p:spPr/>
+      </p:sp>
+      <p:sp>
+        <p:nvSpPr>
+          <p:cNvPr id="3" name="Notes Placeholder 2"/>
+          <p:cNvSpPr>
+            <a:spLocks noGrp="1"/>
+          </p:cNvSpPr>
+          <p:nvPr>
+            <p:ph type="body" idx="1"/>
+          </p:nvPr>
+        </p:nvSpPr>
+        <p:spPr/>
+        <p:txBody>
+          <a:bodyPr/>
+          <a:lstStyle/>
+          <a:p>
+            <a:r>
+              <a:rPr lang="en-US" dirty="0"/>
+              <a:t>The time patterns are clear. The heatmap shows incidents concentrate on weekday afternoons: about a quarter of all incidents happen between 3 and 6 PM, and 5 to 6 PM is the single busiest hour, which lines up with the evening commute. Weekends are much quieter; Sunday has about half as many incidents as Wednesday. By month, the rate climbs through fall and peaks in November and December, at about 1.6 times April’s rate, which points to winter driving conditions and shorter daylight.</a:t>
+            </a:r>
+          </a:p>
+        </p:txBody>
+      </p:sp>
+      <p:sp>
+        <p:nvSpPr>
+          <p:cNvPr id="4" name="Slide Number Placeholder 3"/>
+          <p:cNvSpPr>
+            <a:spLocks noGrp="1"/>
+          </p:cNvSpPr>
+          <p:nvPr>
+            <p:ph type="sldNum" sz="quarter" idx="10"/>
+          </p:nvPr>
+        </p:nvSpPr>
+        <p:spPr/>
+        <p:txBody>
+          <a:bodyPr/>
+          <a:lstStyle/>
+          <a:p>
+            <a:fld id="{F7021451-1387-4CA6-816F-3879F97B5CBC}" type="slidenum">
+              <a:rPr lang="en-US"/>
+              <a:t>9</a:t>
+            </a:fld>
+            <a:endParaRPr lang="en-US"/>
           </a:p>
         </p:txBody>
       </p:sp>
@@ -1727,6 +1816,144 @@
     <p:bg>
       <p:bgPr>
         <a:solidFill>
+          <a:srgbClr val="F6F4F0"/>
+        </a:solidFill>
+        <a:effectLst/>
+      </p:bgPr>
+    </p:bg>
+    <p:spTree>
+      <p:nvGrpSpPr>
+        <p:cNvPr id="1" name=""/>
+        <p:cNvGrpSpPr/>
+        <p:nvPr/>
+      </p:nvGrpSpPr>
+      <p:grpSpPr>
+        <a:xfrm>
+          <a:off x="0" y="0"/>
+          <a:ext cx="0" cy="0"/>
+          <a:chOff x="0" y="0"/>
+          <a:chExt cx="0" cy="0"/>
+        </a:xfrm>
+      </p:grpSpPr>
+      <p:sp>
+        <p:nvSpPr>
+          <p:cNvPr id="2" name="Title Placeholder 1"/>
+          <p:cNvSpPr>
+            <a:spLocks noGrp="1"/>
+          </p:cNvSpPr>
+          <p:nvPr>
+            <p:ph type="title"/>
+          </p:nvPr>
+        </p:nvSpPr>
+        <p:spPr>
+          <a:xfrm>
+            <a:off x="812800" y="812800"/>
+            <a:ext cx="10566400" cy="467320"/>
+          </a:xfrm>
+          <a:prstGeom prst="rect">
+            <a:avLst/>
+          </a:prstGeom>
+          <a:noFill/>
+          <a:ln/>
+        </p:spPr>
+        <p:txBody>
+          <a:bodyPr wrap="square" lIns="0" tIns="0" rIns="0" bIns="0" rtlCol="0" anchor="t"/>
+          <a:lstStyle>
+            <a:lvl1pPr marL="0" indent="0" algn="l">
+              <a:lnSpc>
+                <a:spcPct val="115000"/>
+              </a:lnSpc>
+              <a:buNone/>
+              <a:defRPr lang="en-US" sz="3200" dirty="0">
+                <a:solidFill>
+                  <a:srgbClr val="2B2B30"/>
+                </a:solidFill>
+                <a:latin typeface="Libre Baskerville" pitchFamily="34" charset="0"/>
+                <a:ea typeface="Libre Baskerville" pitchFamily="34" charset="-122"/>
+                <a:cs typeface="Libre Baskerville" pitchFamily="34" charset="-120"/>
+              </a:defRPr>
+            </a:lvl1pPr>
+          </a:lstStyle>
+          <a:p>
+            <a:pPr marL="0" indent="0" algn="l">
+              <a:lnSpc>
+                <a:spcPct val="115000"/>
+              </a:lnSpc>
+              <a:buNone/>
+            </a:pPr>
+            <a:endParaRPr lang="en-US" sz="3200" dirty="0"/>
+          </a:p>
+        </p:txBody>
+      </p:sp>
+      <p:sp>
+        <p:nvSpPr>
+          <p:cNvPr id="3" name="Text Placeholder 2"/>
+          <p:cNvSpPr>
+            <a:spLocks noGrp="1"/>
+          </p:cNvSpPr>
+          <p:nvPr>
+            <p:ph type="body" idx="101"/>
+          </p:nvPr>
+        </p:nvSpPr>
+        <p:spPr>
+          <a:xfrm>
+            <a:off x="812800" y="1584920"/>
+            <a:ext cx="10566400" cy="4460280"/>
+          </a:xfrm>
+          <a:prstGeom prst="rect">
+            <a:avLst/>
+          </a:prstGeom>
+          <a:noFill/>
+          <a:ln/>
+        </p:spPr>
+        <p:txBody>
+          <a:bodyPr wrap="square" lIns="0" tIns="0" rIns="0" bIns="0" rtlCol="0" anchor="t"/>
+          <a:lstStyle>
+            <a:lvl1pPr marL="0" indent="0" algn="l">
+              <a:lnSpc>
+                <a:spcPct val="140000"/>
+              </a:lnSpc>
+              <a:buNone/>
+              <a:defRPr lang="en-US" sz="1600" dirty="0">
+                <a:solidFill>
+                  <a:srgbClr val="2B2B30"/>
+                </a:solidFill>
+                <a:latin typeface="Public Sans" pitchFamily="34" charset="0"/>
+                <a:ea typeface="Public Sans" pitchFamily="34" charset="-122"/>
+                <a:cs typeface="Public Sans" pitchFamily="34" charset="-120"/>
+              </a:defRPr>
+            </a:lvl1pPr>
+          </a:lstStyle>
+          <a:p>
+            <a:pPr marL="0" indent="0" algn="l">
+              <a:lnSpc>
+                <a:spcPct val="140000"/>
+              </a:lnSpc>
+              <a:buNone/>
+            </a:pPr>
+            <a:endParaRPr lang="en-US" sz="1600" dirty="0"/>
+          </a:p>
+        </p:txBody>
+      </p:sp>
+    </p:spTree>
+    <p:extLst>
+      <p:ext uri="{BB962C8B-B14F-4D97-AF65-F5344CB8AC3E}">
+        <p14:creationId xmlns:p14="http://schemas.microsoft.com/office/powerpoint/2010/main" val="1742836407"/>
+      </p:ext>
+    </p:extLst>
+  </p:cSld>
+  <p:clrMapOvr>
+    <a:masterClrMapping/>
+  </p:clrMapOvr>
+</p:sldLayout>
+</file>
+
+<file path=ppt/slideLayouts/slideLayout7.xml><?xml version="1.0" encoding="utf-8"?>
+<p:sldLayout xmlns:a="http://schemas.openxmlformats.org/drawingml/2006/main" xmlns:r="http://schemas.openxmlformats.org/officeDocument/2006/relationships" xmlns:p="http://schemas.openxmlformats.org/presentationml/2006/main">
+  <p:cSld name="Title and body">
+    <p:bg>
+      <p:bgPr>
+        <a:solidFill>
           <a:srgbClr val="F4EEE3"/>
         </a:solidFill>
         <a:effectLst/>
@@ -1890,6 +2117,7 @@
     <p:sldLayoutId id="2147483651" r:id="rId3"/>
     <p:sldLayoutId id="2147483652" r:id="rId4"/>
     <p:sldLayoutId id="2147483653" r:id="rId5"/>
+    <p:sldLayoutId id="2147483656" r:id="rId6"/>
   </p:sldLayoutIdLst>
   <p:hf sldNum="0" hdr="0" ftr="0" dt="0"/>
   <p:txStyles>
@@ -3045,6 +3273,730 @@
               <a:t>, 2026</a:t>
             </a:r>
             <a:endParaRPr lang="en-US" sz="1400" dirty="0"/>
+          </a:p>
+        </p:txBody>
+      </p:sp>
+    </p:spTree>
+  </p:cSld>
+  <p:clrMapOvr>
+    <a:masterClrMapping/>
+  </p:clrMapOvr>
+</p:sld>
+</file>
+
+<file path=ppt/slides/slide10.xml><?xml version="1.0" encoding="utf-8"?>
+<p:sld xmlns:a="http://schemas.openxmlformats.org/drawingml/2006/main" xmlns:r="http://schemas.openxmlformats.org/officeDocument/2006/relationships" xmlns:p="http://schemas.openxmlformats.org/presentationml/2006/main">
+  <p:cSld>
+    <p:bg>
+      <p:bgPr>
+        <a:solidFill>
+          <a:srgbClr val="2B2B30"/>
+        </a:solidFill>
+        <a:effectLst/>
+      </p:bgPr>
+    </p:bg>
+    <p:spTree>
+      <p:nvGrpSpPr>
+        <p:cNvPr id="1" name=""/>
+        <p:cNvGrpSpPr/>
+        <p:nvPr/>
+      </p:nvGrpSpPr>
+      <p:grpSpPr>
+        <a:xfrm>
+          <a:off x="0" y="0"/>
+          <a:ext cx="0" cy="0"/>
+          <a:chOff x="0" y="0"/>
+          <a:chExt cx="0" cy="0"/>
+        </a:xfrm>
+      </p:grpSpPr>
+      <p:sp>
+        <p:nvSpPr>
+          <p:cNvPr id="2" name="Shape 0"/>
+          <p:cNvSpPr/>
+          <p:nvPr/>
+        </p:nvSpPr>
+        <p:spPr>
+          <a:xfrm>
+            <a:off x="8686800" y="1905000"/>
+            <a:ext cx="863600" cy="863600"/>
+          </a:xfrm>
+          <a:prstGeom prst="rect">
+            <a:avLst/>
+          </a:prstGeom>
+          <a:solidFill>
+            <a:srgbClr val="D47BA3"/>
+          </a:solidFill>
+          <a:ln/>
+        </p:spPr>
+        <p:txBody>
+          <a:bodyPr/>
+          <a:lstStyle/>
+          <a:p>
+            <a:pPr marL="0" marR="0" lvl="0" indent="0" algn="l" defTabSz="914400" rtl="0" eaLnBrk="1" fontAlgn="auto" latinLnBrk="0" hangingPunct="1">
+              <a:lnSpc>
+                <a:spcPct val="100000"/>
+              </a:lnSpc>
+              <a:spcBef>
+                <a:spcPts val="0"/>
+              </a:spcBef>
+              <a:spcAft>
+                <a:spcPts val="0"/>
+              </a:spcAft>
+              <a:buClrTx/>
+              <a:buSzTx/>
+              <a:buFontTx/>
+              <a:buNone/>
+              <a:tabLst/>
+              <a:defRPr/>
+            </a:pPr>
+            <a:endParaRPr kumimoji="0" lang="en-CA" sz="1800" b="0" i="0" u="none" strike="noStrike" kern="1200" cap="none" spc="0" normalizeH="0" baseline="0" noProof="0">
+              <a:ln>
+                <a:noFill/>
+              </a:ln>
+              <a:solidFill>
+                <a:srgbClr val="2B2B30"/>
+              </a:solidFill>
+              <a:effectLst/>
+              <a:uLnTx/>
+              <a:uFillTx/>
+              <a:latin typeface="Public Sans"/>
+              <a:ea typeface="+mn-ea"/>
+              <a:cs typeface="+mn-cs"/>
+            </a:endParaRPr>
+          </a:p>
+        </p:txBody>
+      </p:sp>
+      <p:sp>
+        <p:nvSpPr>
+          <p:cNvPr id="3" name="Shape 1"/>
+          <p:cNvSpPr/>
+          <p:nvPr/>
+        </p:nvSpPr>
+        <p:spPr>
+          <a:xfrm>
+            <a:off x="9601200" y="1905000"/>
+            <a:ext cx="863600" cy="863600"/>
+          </a:xfrm>
+          <a:prstGeom prst="rect">
+            <a:avLst/>
+          </a:prstGeom>
+          <a:solidFill>
+            <a:srgbClr val="9E6B92"/>
+          </a:solidFill>
+          <a:ln/>
+        </p:spPr>
+        <p:txBody>
+          <a:bodyPr/>
+          <a:lstStyle/>
+          <a:p>
+            <a:pPr marL="0" marR="0" lvl="0" indent="0" algn="l" defTabSz="914400" rtl="0" eaLnBrk="1" fontAlgn="auto" latinLnBrk="0" hangingPunct="1">
+              <a:lnSpc>
+                <a:spcPct val="100000"/>
+              </a:lnSpc>
+              <a:spcBef>
+                <a:spcPts val="0"/>
+              </a:spcBef>
+              <a:spcAft>
+                <a:spcPts val="0"/>
+              </a:spcAft>
+              <a:buClrTx/>
+              <a:buSzTx/>
+              <a:buFontTx/>
+              <a:buNone/>
+              <a:tabLst/>
+              <a:defRPr/>
+            </a:pPr>
+            <a:endParaRPr kumimoji="0" lang="en-CA" sz="1800" b="0" i="0" u="none" strike="noStrike" kern="1200" cap="none" spc="0" normalizeH="0" baseline="0" noProof="0">
+              <a:ln>
+                <a:noFill/>
+              </a:ln>
+              <a:solidFill>
+                <a:srgbClr val="2B2B30"/>
+              </a:solidFill>
+              <a:effectLst/>
+              <a:uLnTx/>
+              <a:uFillTx/>
+              <a:latin typeface="Public Sans"/>
+              <a:ea typeface="+mn-ea"/>
+              <a:cs typeface="+mn-cs"/>
+            </a:endParaRPr>
+          </a:p>
+        </p:txBody>
+      </p:sp>
+      <p:sp>
+        <p:nvSpPr>
+          <p:cNvPr id="4" name="Shape 2"/>
+          <p:cNvSpPr/>
+          <p:nvPr/>
+        </p:nvSpPr>
+        <p:spPr>
+          <a:xfrm>
+            <a:off x="10515600" y="1905000"/>
+            <a:ext cx="863600" cy="863600"/>
+          </a:xfrm>
+          <a:prstGeom prst="rect">
+            <a:avLst/>
+          </a:prstGeom>
+          <a:solidFill>
+            <a:srgbClr val="4A4A78"/>
+          </a:solidFill>
+          <a:ln/>
+        </p:spPr>
+        <p:txBody>
+          <a:bodyPr/>
+          <a:lstStyle/>
+          <a:p>
+            <a:pPr marL="0" marR="0" lvl="0" indent="0" algn="l" defTabSz="914400" rtl="0" eaLnBrk="1" fontAlgn="auto" latinLnBrk="0" hangingPunct="1">
+              <a:lnSpc>
+                <a:spcPct val="100000"/>
+              </a:lnSpc>
+              <a:spcBef>
+                <a:spcPts val="0"/>
+              </a:spcBef>
+              <a:spcAft>
+                <a:spcPts val="0"/>
+              </a:spcAft>
+              <a:buClrTx/>
+              <a:buSzTx/>
+              <a:buFontTx/>
+              <a:buNone/>
+              <a:tabLst/>
+              <a:defRPr/>
+            </a:pPr>
+            <a:endParaRPr kumimoji="0" lang="en-CA" sz="1800" b="0" i="0" u="none" strike="noStrike" kern="1200" cap="none" spc="0" normalizeH="0" baseline="0" noProof="0">
+              <a:ln>
+                <a:noFill/>
+              </a:ln>
+              <a:solidFill>
+                <a:srgbClr val="2B2B30"/>
+              </a:solidFill>
+              <a:effectLst/>
+              <a:uLnTx/>
+              <a:uFillTx/>
+              <a:latin typeface="Public Sans"/>
+              <a:ea typeface="+mn-ea"/>
+              <a:cs typeface="+mn-cs"/>
+            </a:endParaRPr>
+          </a:p>
+        </p:txBody>
+      </p:sp>
+      <p:sp>
+        <p:nvSpPr>
+          <p:cNvPr id="5" name="Shape 3"/>
+          <p:cNvSpPr/>
+          <p:nvPr/>
+        </p:nvSpPr>
+        <p:spPr>
+          <a:xfrm>
+            <a:off x="8686800" y="2819400"/>
+            <a:ext cx="863600" cy="863600"/>
+          </a:xfrm>
+          <a:prstGeom prst="rect">
+            <a:avLst/>
+          </a:prstGeom>
+          <a:solidFill>
+            <a:srgbClr val="DBB7CF"/>
+          </a:solidFill>
+          <a:ln/>
+        </p:spPr>
+        <p:txBody>
+          <a:bodyPr/>
+          <a:lstStyle/>
+          <a:p>
+            <a:pPr marL="0" marR="0" lvl="0" indent="0" algn="l" defTabSz="914400" rtl="0" eaLnBrk="1" fontAlgn="auto" latinLnBrk="0" hangingPunct="1">
+              <a:lnSpc>
+                <a:spcPct val="100000"/>
+              </a:lnSpc>
+              <a:spcBef>
+                <a:spcPts val="0"/>
+              </a:spcBef>
+              <a:spcAft>
+                <a:spcPts val="0"/>
+              </a:spcAft>
+              <a:buClrTx/>
+              <a:buSzTx/>
+              <a:buFontTx/>
+              <a:buNone/>
+              <a:tabLst/>
+              <a:defRPr/>
+            </a:pPr>
+            <a:endParaRPr kumimoji="0" lang="en-CA" sz="1800" b="0" i="0" u="none" strike="noStrike" kern="1200" cap="none" spc="0" normalizeH="0" baseline="0" noProof="0">
+              <a:ln>
+                <a:noFill/>
+              </a:ln>
+              <a:solidFill>
+                <a:srgbClr val="2B2B30"/>
+              </a:solidFill>
+              <a:effectLst/>
+              <a:uLnTx/>
+              <a:uFillTx/>
+              <a:latin typeface="Public Sans"/>
+              <a:ea typeface="+mn-ea"/>
+              <a:cs typeface="+mn-cs"/>
+            </a:endParaRPr>
+          </a:p>
+        </p:txBody>
+      </p:sp>
+      <p:sp>
+        <p:nvSpPr>
+          <p:cNvPr id="6" name="Shape 4"/>
+          <p:cNvSpPr/>
+          <p:nvPr/>
+        </p:nvSpPr>
+        <p:spPr>
+          <a:xfrm>
+            <a:off x="9601200" y="2819400"/>
+            <a:ext cx="863600" cy="863600"/>
+          </a:xfrm>
+          <a:prstGeom prst="rect">
+            <a:avLst/>
+          </a:prstGeom>
+          <a:solidFill>
+            <a:srgbClr val="A3A3C8"/>
+          </a:solidFill>
+          <a:ln/>
+        </p:spPr>
+        <p:txBody>
+          <a:bodyPr/>
+          <a:lstStyle/>
+          <a:p>
+            <a:pPr marL="0" marR="0" lvl="0" indent="0" algn="l" defTabSz="914400" rtl="0" eaLnBrk="1" fontAlgn="auto" latinLnBrk="0" hangingPunct="1">
+              <a:lnSpc>
+                <a:spcPct val="100000"/>
+              </a:lnSpc>
+              <a:spcBef>
+                <a:spcPts val="0"/>
+              </a:spcBef>
+              <a:spcAft>
+                <a:spcPts val="0"/>
+              </a:spcAft>
+              <a:buClrTx/>
+              <a:buSzTx/>
+              <a:buFontTx/>
+              <a:buNone/>
+              <a:tabLst/>
+              <a:defRPr/>
+            </a:pPr>
+            <a:endParaRPr kumimoji="0" lang="en-CA" sz="1800" b="0" i="0" u="none" strike="noStrike" kern="1200" cap="none" spc="0" normalizeH="0" baseline="0" noProof="0">
+              <a:ln>
+                <a:noFill/>
+              </a:ln>
+              <a:solidFill>
+                <a:srgbClr val="2B2B30"/>
+              </a:solidFill>
+              <a:effectLst/>
+              <a:uLnTx/>
+              <a:uFillTx/>
+              <a:latin typeface="Public Sans"/>
+              <a:ea typeface="+mn-ea"/>
+              <a:cs typeface="+mn-cs"/>
+            </a:endParaRPr>
+          </a:p>
+        </p:txBody>
+      </p:sp>
+      <p:sp>
+        <p:nvSpPr>
+          <p:cNvPr id="7" name="Shape 5"/>
+          <p:cNvSpPr/>
+          <p:nvPr/>
+        </p:nvSpPr>
+        <p:spPr>
+          <a:xfrm>
+            <a:off x="10515600" y="2819400"/>
+            <a:ext cx="863600" cy="863600"/>
+          </a:xfrm>
+          <a:prstGeom prst="rect">
+            <a:avLst/>
+          </a:prstGeom>
+          <a:solidFill>
+            <a:srgbClr val="56709E"/>
+          </a:solidFill>
+          <a:ln/>
+        </p:spPr>
+        <p:txBody>
+          <a:bodyPr/>
+          <a:lstStyle/>
+          <a:p>
+            <a:pPr marL="0" marR="0" lvl="0" indent="0" algn="l" defTabSz="914400" rtl="0" eaLnBrk="1" fontAlgn="auto" latinLnBrk="0" hangingPunct="1">
+              <a:lnSpc>
+                <a:spcPct val="100000"/>
+              </a:lnSpc>
+              <a:spcBef>
+                <a:spcPts val="0"/>
+              </a:spcBef>
+              <a:spcAft>
+                <a:spcPts val="0"/>
+              </a:spcAft>
+              <a:buClrTx/>
+              <a:buSzTx/>
+              <a:buFontTx/>
+              <a:buNone/>
+              <a:tabLst/>
+              <a:defRPr/>
+            </a:pPr>
+            <a:endParaRPr kumimoji="0" lang="en-CA" sz="1800" b="0" i="0" u="none" strike="noStrike" kern="1200" cap="none" spc="0" normalizeH="0" baseline="0" noProof="0">
+              <a:ln>
+                <a:noFill/>
+              </a:ln>
+              <a:solidFill>
+                <a:srgbClr val="2B2B30"/>
+              </a:solidFill>
+              <a:effectLst/>
+              <a:uLnTx/>
+              <a:uFillTx/>
+              <a:latin typeface="Public Sans"/>
+              <a:ea typeface="+mn-ea"/>
+              <a:cs typeface="+mn-cs"/>
+            </a:endParaRPr>
+          </a:p>
+        </p:txBody>
+      </p:sp>
+      <p:sp>
+        <p:nvSpPr>
+          <p:cNvPr id="8" name="Shape 6"/>
+          <p:cNvSpPr/>
+          <p:nvPr/>
+        </p:nvSpPr>
+        <p:spPr>
+          <a:xfrm>
+            <a:off x="8686800" y="3733800"/>
+            <a:ext cx="863600" cy="863600"/>
+          </a:xfrm>
+          <a:prstGeom prst="rect">
+            <a:avLst/>
+          </a:prstGeom>
+          <a:solidFill>
+            <a:srgbClr val="EAE1D2"/>
+          </a:solidFill>
+          <a:ln/>
+        </p:spPr>
+        <p:txBody>
+          <a:bodyPr/>
+          <a:lstStyle/>
+          <a:p>
+            <a:pPr marL="0" marR="0" lvl="0" indent="0" algn="l" defTabSz="914400" rtl="0" eaLnBrk="1" fontAlgn="auto" latinLnBrk="0" hangingPunct="1">
+              <a:lnSpc>
+                <a:spcPct val="100000"/>
+              </a:lnSpc>
+              <a:spcBef>
+                <a:spcPts val="0"/>
+              </a:spcBef>
+              <a:spcAft>
+                <a:spcPts val="0"/>
+              </a:spcAft>
+              <a:buClrTx/>
+              <a:buSzTx/>
+              <a:buFontTx/>
+              <a:buNone/>
+              <a:tabLst/>
+              <a:defRPr/>
+            </a:pPr>
+            <a:endParaRPr kumimoji="0" lang="en-CA" sz="1800" b="0" i="0" u="none" strike="noStrike" kern="1200" cap="none" spc="0" normalizeH="0" baseline="0" noProof="0">
+              <a:ln>
+                <a:noFill/>
+              </a:ln>
+              <a:solidFill>
+                <a:srgbClr val="2B2B30"/>
+              </a:solidFill>
+              <a:effectLst/>
+              <a:uLnTx/>
+              <a:uFillTx/>
+              <a:latin typeface="Public Sans"/>
+              <a:ea typeface="+mn-ea"/>
+              <a:cs typeface="+mn-cs"/>
+            </a:endParaRPr>
+          </a:p>
+        </p:txBody>
+      </p:sp>
+      <p:sp>
+        <p:nvSpPr>
+          <p:cNvPr id="9" name="Shape 7"/>
+          <p:cNvSpPr/>
+          <p:nvPr/>
+        </p:nvSpPr>
+        <p:spPr>
+          <a:xfrm>
+            <a:off x="9601200" y="3733800"/>
+            <a:ext cx="863600" cy="863600"/>
+          </a:xfrm>
+          <a:prstGeom prst="rect">
+            <a:avLst/>
+          </a:prstGeom>
+          <a:solidFill>
+            <a:srgbClr val="B5C0DA"/>
+          </a:solidFill>
+          <a:ln/>
+        </p:spPr>
+        <p:txBody>
+          <a:bodyPr/>
+          <a:lstStyle/>
+          <a:p>
+            <a:pPr marL="0" marR="0" lvl="0" indent="0" algn="l" defTabSz="914400" rtl="0" eaLnBrk="1" fontAlgn="auto" latinLnBrk="0" hangingPunct="1">
+              <a:lnSpc>
+                <a:spcPct val="100000"/>
+              </a:lnSpc>
+              <a:spcBef>
+                <a:spcPts val="0"/>
+              </a:spcBef>
+              <a:spcAft>
+                <a:spcPts val="0"/>
+              </a:spcAft>
+              <a:buClrTx/>
+              <a:buSzTx/>
+              <a:buFontTx/>
+              <a:buNone/>
+              <a:tabLst/>
+              <a:defRPr/>
+            </a:pPr>
+            <a:endParaRPr kumimoji="0" lang="en-CA" sz="1800" b="0" i="0" u="none" strike="noStrike" kern="1200" cap="none" spc="0" normalizeH="0" baseline="0" noProof="0">
+              <a:ln>
+                <a:noFill/>
+              </a:ln>
+              <a:solidFill>
+                <a:srgbClr val="2B2B30"/>
+              </a:solidFill>
+              <a:effectLst/>
+              <a:uLnTx/>
+              <a:uFillTx/>
+              <a:latin typeface="Public Sans"/>
+              <a:ea typeface="+mn-ea"/>
+              <a:cs typeface="+mn-cs"/>
+            </a:endParaRPr>
+          </a:p>
+        </p:txBody>
+      </p:sp>
+      <p:sp>
+        <p:nvSpPr>
+          <p:cNvPr id="10" name="Shape 8"/>
+          <p:cNvSpPr/>
+          <p:nvPr/>
+        </p:nvSpPr>
+        <p:spPr>
+          <a:xfrm>
+            <a:off x="10515600" y="3733800"/>
+            <a:ext cx="863600" cy="863600"/>
+          </a:xfrm>
+          <a:prstGeom prst="rect">
+            <a:avLst/>
+          </a:prstGeom>
+          <a:solidFill>
+            <a:srgbClr val="6C83B5"/>
+          </a:solidFill>
+          <a:ln/>
+        </p:spPr>
+        <p:txBody>
+          <a:bodyPr/>
+          <a:lstStyle/>
+          <a:p>
+            <a:pPr marL="0" marR="0" lvl="0" indent="0" algn="l" defTabSz="914400" rtl="0" eaLnBrk="1" fontAlgn="auto" latinLnBrk="0" hangingPunct="1">
+              <a:lnSpc>
+                <a:spcPct val="100000"/>
+              </a:lnSpc>
+              <a:spcBef>
+                <a:spcPts val="0"/>
+              </a:spcBef>
+              <a:spcAft>
+                <a:spcPts val="0"/>
+              </a:spcAft>
+              <a:buClrTx/>
+              <a:buSzTx/>
+              <a:buFontTx/>
+              <a:buNone/>
+              <a:tabLst/>
+              <a:defRPr/>
+            </a:pPr>
+            <a:endParaRPr kumimoji="0" lang="en-CA" sz="1800" b="0" i="0" u="none" strike="noStrike" kern="1200" cap="none" spc="0" normalizeH="0" baseline="0" noProof="0">
+              <a:ln>
+                <a:noFill/>
+              </a:ln>
+              <a:solidFill>
+                <a:srgbClr val="2B2B30"/>
+              </a:solidFill>
+              <a:effectLst/>
+              <a:uLnTx/>
+              <a:uFillTx/>
+              <a:latin typeface="Public Sans"/>
+              <a:ea typeface="+mn-ea"/>
+              <a:cs typeface="+mn-cs"/>
+            </a:endParaRPr>
+          </a:p>
+        </p:txBody>
+      </p:sp>
+      <p:sp>
+        <p:nvSpPr>
+          <p:cNvPr id="11" name="Text 9"/>
+          <p:cNvSpPr>
+            <a:spLocks noGrp="1"/>
+          </p:cNvSpPr>
+          <p:nvPr>
+            <p:ph type="title"/>
+          </p:nvPr>
+        </p:nvSpPr>
+        <p:spPr>
+          <a:xfrm>
+            <a:off x="812800" y="2771142"/>
+            <a:ext cx="7194550" cy="695960"/>
+          </a:xfrm>
+          <a:prstGeom prst="rect">
+            <a:avLst/>
+          </a:prstGeom>
+          <a:noFill/>
+          <a:ln/>
+        </p:spPr>
+        <p:txBody>
+          <a:bodyPr wrap="square" lIns="0" tIns="0" rIns="0" bIns="0" rtlCol="0" anchor="t">
+            <a:normAutofit/>
+          </a:bodyPr>
+          <a:lstStyle/>
+          <a:p>
+            <a:pPr marL="0" indent="0" algn="l">
+              <a:lnSpc>
+                <a:spcPts val="5280"/>
+              </a:lnSpc>
+              <a:buNone/>
+            </a:pPr>
+            <a:r>
+              <a:rPr lang="en-US" sz="4800" b="1" i="0" dirty="0">
+                <a:solidFill>
+                  <a:srgbClr val="F4EEE3"/>
+                </a:solidFill>
+                <a:latin typeface="Libre Baskerville" pitchFamily="18" charset="0"/>
+                <a:ea typeface="Libre Baskerville" pitchFamily="18" charset="-122"/>
+                <a:cs typeface="Libre Baskerville" pitchFamily="18" charset="-120"/>
+              </a:rPr>
+              <a:t>Thank you</a:t>
+            </a:r>
+            <a:endParaRPr lang="en-US" sz="4800" dirty="0"/>
+          </a:p>
+        </p:txBody>
+      </p:sp>
+      <p:sp>
+        <p:nvSpPr>
+          <p:cNvPr id="12" name="Text 10"/>
+          <p:cNvSpPr/>
+          <p:nvPr/>
+        </p:nvSpPr>
+        <p:spPr>
+          <a:xfrm>
+            <a:off x="812800" y="3695700"/>
+            <a:ext cx="7194550" cy="416560"/>
+          </a:xfrm>
+          <a:prstGeom prst="rect">
+            <a:avLst/>
+          </a:prstGeom>
+          <a:noFill/>
+          <a:ln/>
+        </p:spPr>
+        <p:txBody>
+          <a:bodyPr wrap="square" lIns="0" tIns="0" rIns="0" bIns="0" rtlCol="0" anchor="t">
+            <a:normAutofit/>
+          </a:bodyPr>
+          <a:lstStyle/>
+          <a:p>
+            <a:pPr marL="0" marR="0" lvl="0" indent="0" algn="l" defTabSz="914400" rtl="0" eaLnBrk="1" fontAlgn="auto" latinLnBrk="0" hangingPunct="1">
+              <a:lnSpc>
+                <a:spcPts val="3080"/>
+              </a:lnSpc>
+              <a:spcBef>
+                <a:spcPts val="0"/>
+              </a:spcBef>
+              <a:spcAft>
+                <a:spcPts val="0"/>
+              </a:spcAft>
+              <a:buClrTx/>
+              <a:buSzTx/>
+              <a:buFontTx/>
+              <a:buNone/>
+              <a:tabLst/>
+              <a:defRPr/>
+            </a:pPr>
+            <a:r>
+              <a:rPr kumimoji="0" lang="en-US" sz="2200" b="0" i="0" u="none" strike="noStrike" kern="1200" cap="none" spc="0" normalizeH="0" baseline="0" noProof="0" dirty="0">
+                <a:ln>
+                  <a:noFill/>
+                </a:ln>
+                <a:solidFill>
+                  <a:srgbClr val="E39BBE"/>
+                </a:solidFill>
+                <a:effectLst/>
+                <a:uLnTx/>
+                <a:uFillTx/>
+                <a:latin typeface="Public Sans" pitchFamily="34" charset="0"/>
+                <a:ea typeface="Public Sans" pitchFamily="34" charset="-122"/>
+                <a:cs typeface="Public Sans" pitchFamily="34" charset="-120"/>
+              </a:rPr>
+              <a:t>Questions?</a:t>
+            </a:r>
+            <a:endParaRPr kumimoji="0" lang="en-US" sz="2200" b="0" i="0" u="none" strike="noStrike" kern="1200" cap="none" spc="0" normalizeH="0" baseline="0" noProof="0" dirty="0">
+              <a:ln>
+                <a:noFill/>
+              </a:ln>
+              <a:solidFill>
+                <a:srgbClr val="2B2B30"/>
+              </a:solidFill>
+              <a:effectLst/>
+              <a:uLnTx/>
+              <a:uFillTx/>
+              <a:ea typeface="+mn-ea"/>
+              <a:cs typeface="+mn-cs"/>
+            </a:endParaRPr>
+          </a:p>
+        </p:txBody>
+      </p:sp>
+      <p:sp>
+        <p:nvSpPr>
+          <p:cNvPr id="13" name="Text 11"/>
+          <p:cNvSpPr/>
+          <p:nvPr/>
+        </p:nvSpPr>
+        <p:spPr>
+          <a:xfrm>
+            <a:off x="812800" y="5999479"/>
+            <a:ext cx="7194550" cy="274320"/>
+          </a:xfrm>
+          <a:prstGeom prst="rect">
+            <a:avLst/>
+          </a:prstGeom>
+          <a:noFill/>
+          <a:ln/>
+        </p:spPr>
+        <p:txBody>
+          <a:bodyPr wrap="square" lIns="0" tIns="0" rIns="0" bIns="0" rtlCol="0" anchor="t">
+            <a:normAutofit/>
+          </a:bodyPr>
+          <a:lstStyle/>
+          <a:p>
+            <a:pPr marL="0" marR="0" lvl="0" indent="0" algn="l" defTabSz="914400" rtl="0" eaLnBrk="1" fontAlgn="auto" latinLnBrk="0" hangingPunct="1">
+              <a:lnSpc>
+                <a:spcPts val="1960"/>
+              </a:lnSpc>
+              <a:spcBef>
+                <a:spcPts val="0"/>
+              </a:spcBef>
+              <a:spcAft>
+                <a:spcPts val="0"/>
+              </a:spcAft>
+              <a:buClrTx/>
+              <a:buSzTx/>
+              <a:buFontTx/>
+              <a:buNone/>
+              <a:tabLst/>
+              <a:defRPr/>
+            </a:pPr>
+            <a:endParaRPr kumimoji="0" lang="en-US" sz="1400" b="0" i="0" u="none" strike="noStrike" kern="1200" cap="none" spc="0" normalizeH="0" baseline="0" noProof="0" dirty="0">
+              <a:ln>
+                <a:noFill/>
+              </a:ln>
+              <a:solidFill>
+                <a:srgbClr val="2B2B30"/>
+              </a:solidFill>
+              <a:effectLst/>
+              <a:uLnTx/>
+              <a:uFillTx/>
+              <a:latin typeface="Public Sans"/>
+              <a:ea typeface="+mn-ea"/>
+              <a:cs typeface="+mn-cs"/>
+            </a:endParaRPr>
           </a:p>
         </p:txBody>
       </p:sp>
@@ -6444,6 +7396,1374 @@
 <file path=ppt/slides/slide6.xml><?xml version="1.0" encoding="utf-8"?>
 <p:sld xmlns:a="http://schemas.openxmlformats.org/drawingml/2006/main" xmlns:r="http://schemas.openxmlformats.org/officeDocument/2006/relationships" xmlns:p="http://schemas.openxmlformats.org/presentationml/2006/main">
   <p:cSld>
+    <p:spTree>
+      <p:nvGrpSpPr>
+        <p:cNvPr id="1" name=""/>
+        <p:cNvGrpSpPr/>
+        <p:nvPr/>
+      </p:nvGrpSpPr>
+      <p:grpSpPr>
+        <a:xfrm>
+          <a:off x="0" y="0"/>
+          <a:ext cx="0" cy="0"/>
+          <a:chOff x="0" y="0"/>
+          <a:chExt cx="0" cy="0"/>
+        </a:xfrm>
+      </p:grpSpPr>
+      <p:sp>
+        <p:nvSpPr>
+          <p:cNvPr id="2" name="Text 0"/>
+          <p:cNvSpPr>
+            <a:spLocks noGrp="1"/>
+          </p:cNvSpPr>
+          <p:nvPr>
+            <p:ph type="title"/>
+          </p:nvPr>
+        </p:nvSpPr>
+        <p:spPr>
+          <a:xfrm>
+            <a:off x="812800" y="812800"/>
+            <a:ext cx="10883392" cy="492720"/>
+          </a:xfrm>
+          <a:prstGeom prst="rect">
+            <a:avLst/>
+          </a:prstGeom>
+          <a:noFill/>
+          <a:ln/>
+        </p:spPr>
+        <p:txBody>
+          <a:bodyPr wrap="square" lIns="0" tIns="0" rIns="0" bIns="0" rtlCol="0" anchor="t">
+            <a:normAutofit/>
+          </a:bodyPr>
+          <a:lstStyle/>
+          <a:p>
+            <a:pPr marL="0" indent="0" algn="l">
+              <a:lnSpc>
+                <a:spcPts val="3680"/>
+              </a:lnSpc>
+              <a:buNone/>
+            </a:pPr>
+            <a:r>
+              <a:rPr lang="en-US" sz="3200" b="1" i="0" dirty="0">
+                <a:solidFill>
+                  <a:srgbClr val="2B2B30"/>
+                </a:solidFill>
+                <a:latin typeface="Libre Baskerville" pitchFamily="18" charset="0"/>
+                <a:ea typeface="Libre Baskerville" pitchFamily="18" charset="-122"/>
+                <a:cs typeface="Libre Baskerville" pitchFamily="18" charset="-120"/>
+              </a:rPr>
+              <a:t>Data wrangling and cleaning</a:t>
+            </a:r>
+            <a:endParaRPr lang="en-US" sz="3200" dirty="0"/>
+          </a:p>
+        </p:txBody>
+      </p:sp>
+      <p:sp>
+        <p:nvSpPr>
+          <p:cNvPr id="3" name="Shape 1"/>
+          <p:cNvSpPr/>
+          <p:nvPr/>
+        </p:nvSpPr>
+        <p:spPr>
+          <a:xfrm>
+            <a:off x="812800" y="1534120"/>
+            <a:ext cx="3386634" cy="1878211"/>
+          </a:xfrm>
+          <a:prstGeom prst="roundRect">
+            <a:avLst>
+              <a:gd name="adj" fmla="val 4057"/>
+            </a:avLst>
+          </a:prstGeom>
+          <a:solidFill>
+            <a:srgbClr val="FFFFFF"/>
+          </a:solidFill>
+          <a:ln/>
+        </p:spPr>
+        <p:txBody>
+          <a:bodyPr/>
+          <a:lstStyle/>
+          <a:p>
+            <a:endParaRPr lang="en-US"/>
+          </a:p>
+        </p:txBody>
+      </p:sp>
+      <p:sp>
+        <p:nvSpPr>
+          <p:cNvPr id="4" name="Shape 2"/>
+          <p:cNvSpPr/>
+          <p:nvPr/>
+        </p:nvSpPr>
+        <p:spPr>
+          <a:xfrm>
+            <a:off x="812800" y="1534120"/>
+            <a:ext cx="3386634" cy="1878211"/>
+          </a:xfrm>
+          <a:custGeom>
+            <a:avLst/>
+            <a:gdLst/>
+            <a:ahLst/>
+            <a:cxnLst/>
+            <a:rect l="l" t="t" r="r" b="b"/>
+            <a:pathLst>
+              <a:path w="3386634" h="1878211">
+                <a:moveTo>
+                  <a:pt x="0" y="76200"/>
+                </a:moveTo>
+                <a:lnTo>
+                  <a:pt x="0" y="76200"/>
+                </a:lnTo>
+                <a:arcTo wR="76200" hR="76200" stAng="10800000" swAng="5400000"/>
+                <a:lnTo>
+                  <a:pt x="3310434" y="0"/>
+                </a:lnTo>
+                <a:arcTo wR="76200" hR="76200" stAng="16200000" swAng="5400000"/>
+                <a:lnTo>
+                  <a:pt x="3386634" y="76200"/>
+                </a:lnTo>
+                <a:arcTo wR="76200" hR="38100" stAng="0" swAng="-5400000"/>
+                <a:lnTo>
+                  <a:pt x="76200" y="38100"/>
+                </a:lnTo>
+                <a:arcTo wR="76200" hR="38100" stAng="16200000" swAng="-5400000"/>
+                <a:close/>
+              </a:path>
+            </a:pathLst>
+          </a:custGeom>
+          <a:solidFill>
+            <a:srgbClr val="B4467E"/>
+          </a:solidFill>
+          <a:ln/>
+        </p:spPr>
+        <p:txBody>
+          <a:bodyPr/>
+          <a:lstStyle/>
+          <a:p>
+            <a:endParaRPr lang="en-US"/>
+          </a:p>
+        </p:txBody>
+      </p:sp>
+      <p:sp>
+        <p:nvSpPr>
+          <p:cNvPr id="5" name="Text 3"/>
+          <p:cNvSpPr/>
+          <p:nvPr/>
+        </p:nvSpPr>
+        <p:spPr>
+          <a:xfrm>
+            <a:off x="1041400" y="1750020"/>
+            <a:ext cx="3017317" cy="238720"/>
+          </a:xfrm>
+          <a:prstGeom prst="rect">
+            <a:avLst/>
+          </a:prstGeom>
+          <a:noFill/>
+          <a:ln/>
+        </p:spPr>
+        <p:txBody>
+          <a:bodyPr wrap="square" lIns="0" tIns="0" rIns="0" bIns="0" rtlCol="0" anchor="t">
+            <a:normAutofit/>
+          </a:bodyPr>
+          <a:lstStyle/>
+          <a:p>
+            <a:pPr marL="0" indent="0" algn="l">
+              <a:lnSpc>
+                <a:spcPts val="1680"/>
+              </a:lnSpc>
+              <a:buNone/>
+            </a:pPr>
+            <a:r>
+              <a:rPr lang="en-US" sz="1400" b="1" dirty="0">
+                <a:solidFill>
+                  <a:srgbClr val="2B2B30"/>
+                </a:solidFill>
+                <a:latin typeface="Public Sans" pitchFamily="34" charset="0"/>
+                <a:ea typeface="Public Sans" pitchFamily="34" charset="-122"/>
+                <a:cs typeface="Public Sans" pitchFamily="34" charset="-120"/>
+              </a:rPr>
+              <a:t>1 · Kept full years</a:t>
+            </a:r>
+            <a:endParaRPr lang="en-US" sz="1400" dirty="0"/>
+          </a:p>
+        </p:txBody>
+      </p:sp>
+      <p:sp>
+        <p:nvSpPr>
+          <p:cNvPr id="6" name="Text 4"/>
+          <p:cNvSpPr/>
+          <p:nvPr/>
+        </p:nvSpPr>
+        <p:spPr>
+          <a:xfrm>
+            <a:off x="1041400" y="2026841"/>
+            <a:ext cx="3017317" cy="346670"/>
+          </a:xfrm>
+          <a:prstGeom prst="rect">
+            <a:avLst/>
+          </a:prstGeom>
+          <a:noFill/>
+          <a:ln/>
+        </p:spPr>
+        <p:txBody>
+          <a:bodyPr wrap="square" lIns="0" tIns="0" rIns="0" bIns="0" rtlCol="0" anchor="t">
+            <a:normAutofit/>
+          </a:bodyPr>
+          <a:lstStyle/>
+          <a:p>
+            <a:pPr marL="0" indent="0" algn="l">
+              <a:lnSpc>
+                <a:spcPts val="2530"/>
+              </a:lnSpc>
+              <a:buNone/>
+            </a:pPr>
+            <a:r>
+              <a:rPr lang="en-US" sz="2200" b="1" dirty="0">
+                <a:solidFill>
+                  <a:srgbClr val="B4467E"/>
+                </a:solidFill>
+                <a:latin typeface="Libre Baskerville" pitchFamily="18" charset="0"/>
+                <a:ea typeface="Libre Baskerville" pitchFamily="18" charset="-122"/>
+                <a:cs typeface="Libre Baskerville" pitchFamily="18" charset="-120"/>
+              </a:rPr>
+              <a:t>65,138 → 58,536</a:t>
+            </a:r>
+            <a:endParaRPr lang="en-US" sz="2200" dirty="0"/>
+          </a:p>
+        </p:txBody>
+      </p:sp>
+      <p:sp>
+        <p:nvSpPr>
+          <p:cNvPr id="7" name="Text 5"/>
+          <p:cNvSpPr/>
+          <p:nvPr/>
+        </p:nvSpPr>
+        <p:spPr>
+          <a:xfrm>
+            <a:off x="1041400" y="2411611"/>
+            <a:ext cx="3017317" cy="436860"/>
+          </a:xfrm>
+          <a:prstGeom prst="rect">
+            <a:avLst/>
+          </a:prstGeom>
+          <a:noFill/>
+          <a:ln/>
+        </p:spPr>
+        <p:txBody>
+          <a:bodyPr wrap="square" lIns="0" tIns="0" rIns="0" bIns="0" rtlCol="0" anchor="t">
+            <a:normAutofit/>
+          </a:bodyPr>
+          <a:lstStyle/>
+          <a:p>
+            <a:pPr marL="0" indent="0" algn="l">
+              <a:lnSpc>
+                <a:spcPts val="1620"/>
+              </a:lnSpc>
+              <a:buNone/>
+            </a:pPr>
+            <a:r>
+              <a:rPr lang="en-US" sz="1200" dirty="0">
+                <a:solidFill>
+                  <a:srgbClr val="4A4A52"/>
+                </a:solidFill>
+                <a:latin typeface="Public Sans" pitchFamily="34" charset="0"/>
+                <a:ea typeface="Public Sans" pitchFamily="34" charset="-122"/>
+                <a:cs typeface="Public Sans" pitchFamily="34" charset="-120"/>
+              </a:rPr>
+              <a:t>Dropped the partial years at each end (Dec 2016 and 2026), leaving 2017–2025.</a:t>
+            </a:r>
+            <a:endParaRPr lang="en-US" sz="1200" dirty="0"/>
+          </a:p>
+        </p:txBody>
+      </p:sp>
+      <p:sp>
+        <p:nvSpPr>
+          <p:cNvPr id="8" name="Shape 6"/>
+          <p:cNvSpPr/>
+          <p:nvPr/>
+        </p:nvSpPr>
+        <p:spPr>
+          <a:xfrm>
+            <a:off x="4402634" y="1534120"/>
+            <a:ext cx="3386683" cy="1878211"/>
+          </a:xfrm>
+          <a:prstGeom prst="roundRect">
+            <a:avLst>
+              <a:gd name="adj" fmla="val 4057"/>
+            </a:avLst>
+          </a:prstGeom>
+          <a:solidFill>
+            <a:srgbClr val="FFFFFF"/>
+          </a:solidFill>
+          <a:ln/>
+        </p:spPr>
+        <p:txBody>
+          <a:bodyPr/>
+          <a:lstStyle/>
+          <a:p>
+            <a:endParaRPr lang="en-US"/>
+          </a:p>
+        </p:txBody>
+      </p:sp>
+      <p:sp>
+        <p:nvSpPr>
+          <p:cNvPr id="9" name="Shape 7"/>
+          <p:cNvSpPr/>
+          <p:nvPr/>
+        </p:nvSpPr>
+        <p:spPr>
+          <a:xfrm>
+            <a:off x="4402634" y="1534120"/>
+            <a:ext cx="3386683" cy="1878211"/>
+          </a:xfrm>
+          <a:custGeom>
+            <a:avLst/>
+            <a:gdLst/>
+            <a:ahLst/>
+            <a:cxnLst/>
+            <a:rect l="l" t="t" r="r" b="b"/>
+            <a:pathLst>
+              <a:path w="3386683" h="1878211">
+                <a:moveTo>
+                  <a:pt x="0" y="76200"/>
+                </a:moveTo>
+                <a:lnTo>
+                  <a:pt x="0" y="76200"/>
+                </a:lnTo>
+                <a:arcTo wR="76200" hR="76200" stAng="10800000" swAng="5400000"/>
+                <a:lnTo>
+                  <a:pt x="3310483" y="0"/>
+                </a:lnTo>
+                <a:arcTo wR="76200" hR="76200" stAng="16200000" swAng="5400000"/>
+                <a:lnTo>
+                  <a:pt x="3386683" y="76200"/>
+                </a:lnTo>
+                <a:arcTo wR="76200" hR="38100" stAng="0" swAng="-5400000"/>
+                <a:lnTo>
+                  <a:pt x="76200" y="38100"/>
+                </a:lnTo>
+                <a:arcTo wR="76200" hR="38100" stAng="16200000" swAng="-5400000"/>
+                <a:close/>
+              </a:path>
+            </a:pathLst>
+          </a:custGeom>
+          <a:solidFill>
+            <a:srgbClr val="B4467E"/>
+          </a:solidFill>
+          <a:ln/>
+        </p:spPr>
+        <p:txBody>
+          <a:bodyPr/>
+          <a:lstStyle/>
+          <a:p>
+            <a:endParaRPr lang="en-US"/>
+          </a:p>
+        </p:txBody>
+      </p:sp>
+      <p:sp>
+        <p:nvSpPr>
+          <p:cNvPr id="10" name="Text 8"/>
+          <p:cNvSpPr/>
+          <p:nvPr/>
+        </p:nvSpPr>
+        <p:spPr>
+          <a:xfrm>
+            <a:off x="4631234" y="1750020"/>
+            <a:ext cx="3017368" cy="238720"/>
+          </a:xfrm>
+          <a:prstGeom prst="rect">
+            <a:avLst/>
+          </a:prstGeom>
+          <a:noFill/>
+          <a:ln/>
+        </p:spPr>
+        <p:txBody>
+          <a:bodyPr wrap="square" lIns="0" tIns="0" rIns="0" bIns="0" rtlCol="0" anchor="t">
+            <a:normAutofit/>
+          </a:bodyPr>
+          <a:lstStyle/>
+          <a:p>
+            <a:pPr marL="0" indent="0" algn="l">
+              <a:lnSpc>
+                <a:spcPts val="1680"/>
+              </a:lnSpc>
+              <a:buNone/>
+            </a:pPr>
+            <a:r>
+              <a:rPr lang="en-US" sz="1400" b="1" dirty="0">
+                <a:solidFill>
+                  <a:srgbClr val="2B2B30"/>
+                </a:solidFill>
+                <a:latin typeface="Public Sans" pitchFamily="34" charset="0"/>
+                <a:ea typeface="Public Sans" pitchFamily="34" charset="-122"/>
+                <a:cs typeface="Public Sans" pitchFamily="34" charset="-120"/>
+              </a:rPr>
+              <a:t>2 · Located each incident</a:t>
+            </a:r>
+            <a:endParaRPr lang="en-US" sz="1400" dirty="0"/>
+          </a:p>
+        </p:txBody>
+      </p:sp>
+      <p:sp>
+        <p:nvSpPr>
+          <p:cNvPr id="11" name="Text 9"/>
+          <p:cNvSpPr/>
+          <p:nvPr/>
+        </p:nvSpPr>
+        <p:spPr>
+          <a:xfrm>
+            <a:off x="4631234" y="2026841"/>
+            <a:ext cx="3017368" cy="346670"/>
+          </a:xfrm>
+          <a:prstGeom prst="rect">
+            <a:avLst/>
+          </a:prstGeom>
+          <a:noFill/>
+          <a:ln/>
+        </p:spPr>
+        <p:txBody>
+          <a:bodyPr wrap="square" lIns="0" tIns="0" rIns="0" bIns="0" rtlCol="0" anchor="t">
+            <a:normAutofit/>
+          </a:bodyPr>
+          <a:lstStyle/>
+          <a:p>
+            <a:pPr marL="0" indent="0" algn="l">
+              <a:lnSpc>
+                <a:spcPts val="2530"/>
+              </a:lnSpc>
+              <a:buNone/>
+            </a:pPr>
+            <a:r>
+              <a:rPr lang="en-US" sz="2200" b="1" dirty="0">
+                <a:solidFill>
+                  <a:srgbClr val="B4467E"/>
+                </a:solidFill>
+                <a:latin typeface="Libre Baskerville" pitchFamily="18" charset="0"/>
+                <a:ea typeface="Libre Baskerville" pitchFamily="18" charset="-122"/>
+                <a:cs typeface="Libre Baskerville" pitchFamily="18" charset="-120"/>
+              </a:rPr>
+              <a:t>Point → area</a:t>
+            </a:r>
+            <a:endParaRPr lang="en-US" sz="2200" dirty="0"/>
+          </a:p>
+        </p:txBody>
+      </p:sp>
+      <p:sp>
+        <p:nvSpPr>
+          <p:cNvPr id="12" name="Text 10"/>
+          <p:cNvSpPr/>
+          <p:nvPr/>
+        </p:nvSpPr>
+        <p:spPr>
+          <a:xfrm>
+            <a:off x="4631234" y="2411611"/>
+            <a:ext cx="3017368" cy="848320"/>
+          </a:xfrm>
+          <a:prstGeom prst="rect">
+            <a:avLst/>
+          </a:prstGeom>
+          <a:noFill/>
+          <a:ln/>
+        </p:spPr>
+        <p:txBody>
+          <a:bodyPr wrap="square" lIns="0" tIns="0" rIns="0" bIns="0" rtlCol="0" anchor="t">
+            <a:normAutofit/>
+          </a:bodyPr>
+          <a:lstStyle/>
+          <a:p>
+            <a:pPr marL="0" indent="0" algn="l">
+              <a:lnSpc>
+                <a:spcPts val="1620"/>
+              </a:lnSpc>
+              <a:buNone/>
+            </a:pPr>
+            <a:r>
+              <a:rPr lang="en-US" sz="1200" dirty="0">
+                <a:solidFill>
+                  <a:srgbClr val="4A4A52"/>
+                </a:solidFill>
+                <a:latin typeface="Public Sans" pitchFamily="34" charset="0"/>
+                <a:ea typeface="Public Sans" pitchFamily="34" charset="-122"/>
+                <a:cs typeface="Public Sans" pitchFamily="34" charset="-120"/>
+              </a:rPr>
+              <a:t>GeoPandas in Python checked which area outline each point falls inside. 639 fall outside. The outlines also became the Shape Map.</a:t>
+            </a:r>
+            <a:endParaRPr lang="en-US" sz="1200" dirty="0"/>
+          </a:p>
+        </p:txBody>
+      </p:sp>
+      <p:sp>
+        <p:nvSpPr>
+          <p:cNvPr id="13" name="Shape 11"/>
+          <p:cNvSpPr/>
+          <p:nvPr/>
+        </p:nvSpPr>
+        <p:spPr>
+          <a:xfrm>
+            <a:off x="7992517" y="1534120"/>
+            <a:ext cx="3386634" cy="1878211"/>
+          </a:xfrm>
+          <a:prstGeom prst="roundRect">
+            <a:avLst>
+              <a:gd name="adj" fmla="val 4057"/>
+            </a:avLst>
+          </a:prstGeom>
+          <a:solidFill>
+            <a:srgbClr val="FFFFFF"/>
+          </a:solidFill>
+          <a:ln/>
+        </p:spPr>
+        <p:txBody>
+          <a:bodyPr/>
+          <a:lstStyle/>
+          <a:p>
+            <a:endParaRPr lang="en-US"/>
+          </a:p>
+        </p:txBody>
+      </p:sp>
+      <p:sp>
+        <p:nvSpPr>
+          <p:cNvPr id="14" name="Shape 12"/>
+          <p:cNvSpPr/>
+          <p:nvPr/>
+        </p:nvSpPr>
+        <p:spPr>
+          <a:xfrm>
+            <a:off x="7992517" y="1534120"/>
+            <a:ext cx="3386634" cy="1878211"/>
+          </a:xfrm>
+          <a:custGeom>
+            <a:avLst/>
+            <a:gdLst/>
+            <a:ahLst/>
+            <a:cxnLst/>
+            <a:rect l="l" t="t" r="r" b="b"/>
+            <a:pathLst>
+              <a:path w="3386634" h="1878211">
+                <a:moveTo>
+                  <a:pt x="0" y="76200"/>
+                </a:moveTo>
+                <a:lnTo>
+                  <a:pt x="0" y="76200"/>
+                </a:lnTo>
+                <a:arcTo wR="76200" hR="76200" stAng="10800000" swAng="5400000"/>
+                <a:lnTo>
+                  <a:pt x="3310434" y="0"/>
+                </a:lnTo>
+                <a:arcTo wR="76200" hR="76200" stAng="16200000" swAng="5400000"/>
+                <a:lnTo>
+                  <a:pt x="3386634" y="76200"/>
+                </a:lnTo>
+                <a:arcTo wR="76200" hR="38100" stAng="0" swAng="-5400000"/>
+                <a:lnTo>
+                  <a:pt x="76200" y="38100"/>
+                </a:lnTo>
+                <a:arcTo wR="76200" hR="38100" stAng="16200000" swAng="-5400000"/>
+                <a:close/>
+              </a:path>
+            </a:pathLst>
+          </a:custGeom>
+          <a:solidFill>
+            <a:srgbClr val="B4467E"/>
+          </a:solidFill>
+          <a:ln/>
+        </p:spPr>
+        <p:txBody>
+          <a:bodyPr/>
+          <a:lstStyle/>
+          <a:p>
+            <a:endParaRPr lang="en-US"/>
+          </a:p>
+        </p:txBody>
+      </p:sp>
+      <p:sp>
+        <p:nvSpPr>
+          <p:cNvPr id="15" name="Text 13"/>
+          <p:cNvSpPr/>
+          <p:nvPr/>
+        </p:nvSpPr>
+        <p:spPr>
+          <a:xfrm>
+            <a:off x="8221117" y="1750020"/>
+            <a:ext cx="3017317" cy="238720"/>
+          </a:xfrm>
+          <a:prstGeom prst="rect">
+            <a:avLst/>
+          </a:prstGeom>
+          <a:noFill/>
+          <a:ln/>
+        </p:spPr>
+        <p:txBody>
+          <a:bodyPr wrap="square" lIns="0" tIns="0" rIns="0" bIns="0" rtlCol="0" anchor="t">
+            <a:normAutofit/>
+          </a:bodyPr>
+          <a:lstStyle/>
+          <a:p>
+            <a:pPr marL="0" indent="0" algn="l">
+              <a:lnSpc>
+                <a:spcPts val="1680"/>
+              </a:lnSpc>
+              <a:buNone/>
+            </a:pPr>
+            <a:r>
+              <a:rPr lang="en-US" sz="1400" b="1" dirty="0">
+                <a:solidFill>
+                  <a:srgbClr val="2B2B30"/>
+                </a:solidFill>
+                <a:latin typeface="Public Sans" pitchFamily="34" charset="0"/>
+                <a:ea typeface="Public Sans" pitchFamily="34" charset="-122"/>
+                <a:cs typeface="Public Sans" pitchFamily="34" charset="-120"/>
+              </a:rPr>
+              <a:t>3 · Sorted incidents</a:t>
+            </a:r>
+            <a:endParaRPr lang="en-US" sz="1400" dirty="0"/>
+          </a:p>
+        </p:txBody>
+      </p:sp>
+      <p:sp>
+        <p:nvSpPr>
+          <p:cNvPr id="16" name="Text 14"/>
+          <p:cNvSpPr/>
+          <p:nvPr/>
+        </p:nvSpPr>
+        <p:spPr>
+          <a:xfrm>
+            <a:off x="8221117" y="2026841"/>
+            <a:ext cx="3017317" cy="346670"/>
+          </a:xfrm>
+          <a:prstGeom prst="rect">
+            <a:avLst/>
+          </a:prstGeom>
+          <a:noFill/>
+          <a:ln/>
+        </p:spPr>
+        <p:txBody>
+          <a:bodyPr wrap="square" lIns="0" tIns="0" rIns="0" bIns="0" rtlCol="0" anchor="t">
+            <a:normAutofit/>
+          </a:bodyPr>
+          <a:lstStyle/>
+          <a:p>
+            <a:pPr marL="0" indent="0" algn="l">
+              <a:lnSpc>
+                <a:spcPts val="2530"/>
+              </a:lnSpc>
+              <a:buNone/>
+            </a:pPr>
+            <a:r>
+              <a:rPr lang="en-US" sz="2200" b="1" dirty="0">
+                <a:solidFill>
+                  <a:srgbClr val="B4467E"/>
+                </a:solidFill>
+                <a:latin typeface="Libre Baskerville" pitchFamily="18" charset="0"/>
+                <a:ea typeface="Libre Baskerville" pitchFamily="18" charset="-122"/>
+                <a:cs typeface="Libre Baskerville" pitchFamily="18" charset="-120"/>
+              </a:rPr>
+              <a:t>Text → 5 types</a:t>
+            </a:r>
+            <a:endParaRPr lang="en-US" sz="2200" dirty="0"/>
+          </a:p>
+        </p:txBody>
+      </p:sp>
+      <p:sp>
+        <p:nvSpPr>
+          <p:cNvPr id="17" name="Text 15"/>
+          <p:cNvSpPr/>
+          <p:nvPr/>
+        </p:nvSpPr>
+        <p:spPr>
+          <a:xfrm>
+            <a:off x="8221117" y="2411611"/>
+            <a:ext cx="3017317" cy="848320"/>
+          </a:xfrm>
+          <a:prstGeom prst="rect">
+            <a:avLst/>
+          </a:prstGeom>
+          <a:noFill/>
+          <a:ln/>
+        </p:spPr>
+        <p:txBody>
+          <a:bodyPr wrap="square" lIns="0" tIns="0" rIns="0" bIns="0" rtlCol="0" anchor="t">
+            <a:normAutofit/>
+          </a:bodyPr>
+          <a:lstStyle/>
+          <a:p>
+            <a:pPr marL="0" indent="0" algn="l">
+              <a:lnSpc>
+                <a:spcPts val="1620"/>
+              </a:lnSpc>
+              <a:buNone/>
+            </a:pPr>
+            <a:r>
+              <a:rPr lang="en-US" sz="1200" dirty="0">
+                <a:solidFill>
+                  <a:srgbClr val="4A4A52"/>
+                </a:solidFill>
+                <a:latin typeface="Public Sans" pitchFamily="34" charset="0"/>
+                <a:ea typeface="Public Sans" pitchFamily="34" charset="-122"/>
+                <a:cs typeface="Public Sans" pitchFamily="34" charset="-120"/>
+              </a:rPr>
+              <a:t>Keywords in each description set the incident type. Street names flag highways, so area rates only count local roads.</a:t>
+            </a:r>
+            <a:endParaRPr lang="en-US" sz="1200" dirty="0"/>
+          </a:p>
+        </p:txBody>
+      </p:sp>
+      <p:sp>
+        <p:nvSpPr>
+          <p:cNvPr id="18" name="Shape 16"/>
+          <p:cNvSpPr/>
+          <p:nvPr/>
+        </p:nvSpPr>
+        <p:spPr>
+          <a:xfrm>
+            <a:off x="812800" y="3615531"/>
+            <a:ext cx="3386634" cy="1878211"/>
+          </a:xfrm>
+          <a:prstGeom prst="roundRect">
+            <a:avLst>
+              <a:gd name="adj" fmla="val 4057"/>
+            </a:avLst>
+          </a:prstGeom>
+          <a:solidFill>
+            <a:srgbClr val="FFFFFF"/>
+          </a:solidFill>
+          <a:ln/>
+        </p:spPr>
+        <p:txBody>
+          <a:bodyPr/>
+          <a:lstStyle/>
+          <a:p>
+            <a:endParaRPr lang="en-US"/>
+          </a:p>
+        </p:txBody>
+      </p:sp>
+      <p:sp>
+        <p:nvSpPr>
+          <p:cNvPr id="19" name="Shape 17"/>
+          <p:cNvSpPr/>
+          <p:nvPr/>
+        </p:nvSpPr>
+        <p:spPr>
+          <a:xfrm>
+            <a:off x="812800" y="3615531"/>
+            <a:ext cx="3386634" cy="1878211"/>
+          </a:xfrm>
+          <a:custGeom>
+            <a:avLst/>
+            <a:gdLst/>
+            <a:ahLst/>
+            <a:cxnLst/>
+            <a:rect l="l" t="t" r="r" b="b"/>
+            <a:pathLst>
+              <a:path w="3386634" h="1878211">
+                <a:moveTo>
+                  <a:pt x="0" y="76200"/>
+                </a:moveTo>
+                <a:lnTo>
+                  <a:pt x="0" y="76200"/>
+                </a:lnTo>
+                <a:arcTo wR="76200" hR="76200" stAng="10800000" swAng="5400000"/>
+                <a:lnTo>
+                  <a:pt x="3310434" y="0"/>
+                </a:lnTo>
+                <a:arcTo wR="76200" hR="76200" stAng="16200000" swAng="5400000"/>
+                <a:lnTo>
+                  <a:pt x="3386634" y="76200"/>
+                </a:lnTo>
+                <a:arcTo wR="76200" hR="38100" stAng="0" swAng="-5400000"/>
+                <a:lnTo>
+                  <a:pt x="76200" y="38100"/>
+                </a:lnTo>
+                <a:arcTo wR="76200" hR="38100" stAng="16200000" swAng="-5400000"/>
+                <a:close/>
+              </a:path>
+            </a:pathLst>
+          </a:custGeom>
+          <a:solidFill>
+            <a:srgbClr val="4E6596"/>
+          </a:solidFill>
+          <a:ln/>
+        </p:spPr>
+        <p:txBody>
+          <a:bodyPr/>
+          <a:lstStyle/>
+          <a:p>
+            <a:endParaRPr lang="en-US"/>
+          </a:p>
+        </p:txBody>
+      </p:sp>
+      <p:sp>
+        <p:nvSpPr>
+          <p:cNvPr id="20" name="Text 18"/>
+          <p:cNvSpPr/>
+          <p:nvPr/>
+        </p:nvSpPr>
+        <p:spPr>
+          <a:xfrm>
+            <a:off x="1041400" y="3831431"/>
+            <a:ext cx="3017317" cy="238720"/>
+          </a:xfrm>
+          <a:prstGeom prst="rect">
+            <a:avLst/>
+          </a:prstGeom>
+          <a:noFill/>
+          <a:ln/>
+        </p:spPr>
+        <p:txBody>
+          <a:bodyPr wrap="square" lIns="0" tIns="0" rIns="0" bIns="0" rtlCol="0" anchor="t">
+            <a:normAutofit/>
+          </a:bodyPr>
+          <a:lstStyle/>
+          <a:p>
+            <a:pPr marL="0" indent="0" algn="l">
+              <a:lnSpc>
+                <a:spcPts val="1680"/>
+              </a:lnSpc>
+              <a:buNone/>
+            </a:pPr>
+            <a:r>
+              <a:rPr lang="en-US" sz="1400" b="1" dirty="0">
+                <a:solidFill>
+                  <a:srgbClr val="2B2B30"/>
+                </a:solidFill>
+                <a:latin typeface="Public Sans" pitchFamily="34" charset="0"/>
+                <a:ea typeface="Public Sans" pitchFamily="34" charset="-122"/>
+                <a:cs typeface="Public Sans" pitchFamily="34" charset="-120"/>
+              </a:rPr>
+              <a:t>4 · Reshaped census data</a:t>
+            </a:r>
+            <a:endParaRPr lang="en-US" sz="1400" dirty="0"/>
+          </a:p>
+        </p:txBody>
+      </p:sp>
+      <p:sp>
+        <p:nvSpPr>
+          <p:cNvPr id="21" name="Text 19"/>
+          <p:cNvSpPr/>
+          <p:nvPr/>
+        </p:nvSpPr>
+        <p:spPr>
+          <a:xfrm>
+            <a:off x="1041400" y="4108252"/>
+            <a:ext cx="3017317" cy="346670"/>
+          </a:xfrm>
+          <a:prstGeom prst="rect">
+            <a:avLst/>
+          </a:prstGeom>
+          <a:noFill/>
+          <a:ln/>
+        </p:spPr>
+        <p:txBody>
+          <a:bodyPr wrap="square" lIns="0" tIns="0" rIns="0" bIns="0" rtlCol="0" anchor="t">
+            <a:normAutofit/>
+          </a:bodyPr>
+          <a:lstStyle/>
+          <a:p>
+            <a:pPr marL="0" indent="0" algn="l">
+              <a:lnSpc>
+                <a:spcPts val="2530"/>
+              </a:lnSpc>
+              <a:buNone/>
+            </a:pPr>
+            <a:r>
+              <a:rPr lang="en-US" sz="2200" b="1" dirty="0">
+                <a:solidFill>
+                  <a:srgbClr val="4E6596"/>
+                </a:solidFill>
+                <a:latin typeface="Libre Baskerville" pitchFamily="18" charset="0"/>
+                <a:ea typeface="Libre Baskerville" pitchFamily="18" charset="-122"/>
+                <a:cs typeface="Libre Baskerville" pitchFamily="18" charset="-120"/>
+              </a:rPr>
+              <a:t>2,091 → 113 rows</a:t>
+            </a:r>
+            <a:endParaRPr lang="en-US" sz="2200" dirty="0"/>
+          </a:p>
+        </p:txBody>
+      </p:sp>
+      <p:sp>
+        <p:nvSpPr>
+          <p:cNvPr id="22" name="Text 20"/>
+          <p:cNvSpPr/>
+          <p:nvPr/>
+        </p:nvSpPr>
+        <p:spPr>
+          <a:xfrm>
+            <a:off x="1041400" y="4493022"/>
+            <a:ext cx="3017317" cy="642590"/>
+          </a:xfrm>
+          <a:prstGeom prst="rect">
+            <a:avLst/>
+          </a:prstGeom>
+          <a:noFill/>
+          <a:ln/>
+        </p:spPr>
+        <p:txBody>
+          <a:bodyPr wrap="square" lIns="0" tIns="0" rIns="0" bIns="0" rtlCol="0" anchor="t">
+            <a:normAutofit/>
+          </a:bodyPr>
+          <a:lstStyle/>
+          <a:p>
+            <a:pPr marL="0" indent="0" algn="l">
+              <a:lnSpc>
+                <a:spcPts val="1620"/>
+              </a:lnSpc>
+              <a:buNone/>
+            </a:pPr>
+            <a:r>
+              <a:rPr lang="en-US" sz="1200" dirty="0">
+                <a:solidFill>
+                  <a:srgbClr val="4A4A52"/>
+                </a:solidFill>
+                <a:latin typeface="Public Sans" pitchFamily="34" charset="0"/>
+                <a:ea typeface="Public Sans" pitchFamily="34" charset="-122"/>
+                <a:cs typeface="Public Sans" pitchFamily="34" charset="-120"/>
+              </a:rPr>
+              <a:t>Used Python to give each area one row, with each trait as its own column, and fixed the number formats.</a:t>
+            </a:r>
+            <a:endParaRPr lang="en-US" sz="1200" dirty="0"/>
+          </a:p>
+        </p:txBody>
+      </p:sp>
+      <p:sp>
+        <p:nvSpPr>
+          <p:cNvPr id="23" name="Shape 21"/>
+          <p:cNvSpPr/>
+          <p:nvPr/>
+        </p:nvSpPr>
+        <p:spPr>
+          <a:xfrm>
+            <a:off x="4402634" y="3615531"/>
+            <a:ext cx="3386683" cy="1878211"/>
+          </a:xfrm>
+          <a:prstGeom prst="roundRect">
+            <a:avLst>
+              <a:gd name="adj" fmla="val 4057"/>
+            </a:avLst>
+          </a:prstGeom>
+          <a:solidFill>
+            <a:srgbClr val="FFFFFF"/>
+          </a:solidFill>
+          <a:ln/>
+        </p:spPr>
+        <p:txBody>
+          <a:bodyPr/>
+          <a:lstStyle/>
+          <a:p>
+            <a:endParaRPr lang="en-US"/>
+          </a:p>
+        </p:txBody>
+      </p:sp>
+      <p:sp>
+        <p:nvSpPr>
+          <p:cNvPr id="24" name="Shape 22"/>
+          <p:cNvSpPr/>
+          <p:nvPr/>
+        </p:nvSpPr>
+        <p:spPr>
+          <a:xfrm>
+            <a:off x="4402634" y="3615531"/>
+            <a:ext cx="3386683" cy="1878211"/>
+          </a:xfrm>
+          <a:custGeom>
+            <a:avLst/>
+            <a:gdLst/>
+            <a:ahLst/>
+            <a:cxnLst/>
+            <a:rect l="l" t="t" r="r" b="b"/>
+            <a:pathLst>
+              <a:path w="3386683" h="1878211">
+                <a:moveTo>
+                  <a:pt x="0" y="76200"/>
+                </a:moveTo>
+                <a:lnTo>
+                  <a:pt x="0" y="76200"/>
+                </a:lnTo>
+                <a:arcTo wR="76200" hR="76200" stAng="10800000" swAng="5400000"/>
+                <a:lnTo>
+                  <a:pt x="3310483" y="0"/>
+                </a:lnTo>
+                <a:arcTo wR="76200" hR="76200" stAng="16200000" swAng="5400000"/>
+                <a:lnTo>
+                  <a:pt x="3386683" y="76200"/>
+                </a:lnTo>
+                <a:arcTo wR="76200" hR="38100" stAng="0" swAng="-5400000"/>
+                <a:lnTo>
+                  <a:pt x="76200" y="38100"/>
+                </a:lnTo>
+                <a:arcTo wR="76200" hR="38100" stAng="16200000" swAng="-5400000"/>
+                <a:close/>
+              </a:path>
+            </a:pathLst>
+          </a:custGeom>
+          <a:solidFill>
+            <a:srgbClr val="4E6596"/>
+          </a:solidFill>
+          <a:ln/>
+        </p:spPr>
+        <p:txBody>
+          <a:bodyPr/>
+          <a:lstStyle/>
+          <a:p>
+            <a:endParaRPr lang="en-US"/>
+          </a:p>
+        </p:txBody>
+      </p:sp>
+      <p:sp>
+        <p:nvSpPr>
+          <p:cNvPr id="25" name="Text 23"/>
+          <p:cNvSpPr/>
+          <p:nvPr/>
+        </p:nvSpPr>
+        <p:spPr>
+          <a:xfrm>
+            <a:off x="4631234" y="3831431"/>
+            <a:ext cx="3017368" cy="238720"/>
+          </a:xfrm>
+          <a:prstGeom prst="rect">
+            <a:avLst/>
+          </a:prstGeom>
+          <a:noFill/>
+          <a:ln/>
+        </p:spPr>
+        <p:txBody>
+          <a:bodyPr wrap="square" lIns="0" tIns="0" rIns="0" bIns="0" rtlCol="0" anchor="t">
+            <a:normAutofit/>
+          </a:bodyPr>
+          <a:lstStyle/>
+          <a:p>
+            <a:pPr marL="0" indent="0" algn="l">
+              <a:lnSpc>
+                <a:spcPts val="1680"/>
+              </a:lnSpc>
+              <a:buNone/>
+            </a:pPr>
+            <a:r>
+              <a:rPr lang="en-US" sz="1400" b="1" dirty="0">
+                <a:solidFill>
+                  <a:srgbClr val="2B2B30"/>
+                </a:solidFill>
+                <a:latin typeface="Public Sans" pitchFamily="34" charset="0"/>
+                <a:ea typeface="Public Sans" pitchFamily="34" charset="-122"/>
+                <a:cs typeface="Public Sans" pitchFamily="34" charset="-120"/>
+              </a:rPr>
+              <a:t>5 · Linked and rated areas</a:t>
+            </a:r>
+            <a:endParaRPr lang="en-US" sz="1400" dirty="0"/>
+          </a:p>
+        </p:txBody>
+      </p:sp>
+      <p:sp>
+        <p:nvSpPr>
+          <p:cNvPr id="26" name="Text 24"/>
+          <p:cNvSpPr/>
+          <p:nvPr/>
+        </p:nvSpPr>
+        <p:spPr>
+          <a:xfrm>
+            <a:off x="4631234" y="4108252"/>
+            <a:ext cx="3017368" cy="346670"/>
+          </a:xfrm>
+          <a:prstGeom prst="rect">
+            <a:avLst/>
+          </a:prstGeom>
+          <a:noFill/>
+          <a:ln/>
+        </p:spPr>
+        <p:txBody>
+          <a:bodyPr wrap="square" lIns="0" tIns="0" rIns="0" bIns="0" rtlCol="0" anchor="t">
+            <a:normAutofit/>
+          </a:bodyPr>
+          <a:lstStyle/>
+          <a:p>
+            <a:pPr>
+              <a:lnSpc>
+                <a:spcPts val="2530"/>
+              </a:lnSpc>
+            </a:pPr>
+            <a:r>
+              <a:rPr lang="en-US" sz="2200" b="1" dirty="0">
+                <a:solidFill>
+                  <a:srgbClr val="4E6596"/>
+                </a:solidFill>
+                <a:latin typeface="Libre Baskerville" pitchFamily="18" charset="0"/>
+                <a:ea typeface="Libre Baskerville" pitchFamily="18" charset="-122"/>
+                <a:cs typeface="Libre Baskerville" pitchFamily="18" charset="-120"/>
+              </a:rPr>
+              <a:t>307 → 113</a:t>
+            </a:r>
+            <a:endParaRPr lang="en-US" sz="2200" dirty="0"/>
+          </a:p>
+        </p:txBody>
+      </p:sp>
+      <p:sp>
+        <p:nvSpPr>
+          <p:cNvPr id="27" name="Text 25"/>
+          <p:cNvSpPr/>
+          <p:nvPr/>
+        </p:nvSpPr>
+        <p:spPr>
+          <a:xfrm>
+            <a:off x="4631234" y="4493022"/>
+            <a:ext cx="3017368" cy="848320"/>
+          </a:xfrm>
+          <a:prstGeom prst="rect">
+            <a:avLst/>
+          </a:prstGeom>
+          <a:noFill/>
+          <a:ln/>
+        </p:spPr>
+        <p:txBody>
+          <a:bodyPr wrap="square" lIns="0" tIns="0" rIns="0" bIns="0" rtlCol="0" anchor="t">
+            <a:normAutofit/>
+          </a:bodyPr>
+          <a:lstStyle/>
+          <a:p>
+            <a:pPr marL="0" indent="0" algn="l">
+              <a:lnSpc>
+                <a:spcPts val="1620"/>
+              </a:lnSpc>
+              <a:buNone/>
+            </a:pPr>
+            <a:r>
+              <a:rPr lang="en-US" sz="1200" dirty="0">
+                <a:solidFill>
+                  <a:srgbClr val="4A4A52"/>
+                </a:solidFill>
+                <a:latin typeface="Public Sans" pitchFamily="34" charset="0"/>
+                <a:ea typeface="Public Sans" pitchFamily="34" charset="-122"/>
+                <a:cs typeface="Public Sans" pitchFamily="34" charset="-120"/>
+              </a:rPr>
+              <a:t>Each incident has both its community (307) and its area (113), which links the two. Then: incidents per 1,000 residents a year.</a:t>
+            </a:r>
+            <a:endParaRPr lang="en-US" sz="1200" dirty="0"/>
+          </a:p>
+        </p:txBody>
+      </p:sp>
+      <p:sp>
+        <p:nvSpPr>
+          <p:cNvPr id="28" name="Shape 26"/>
+          <p:cNvSpPr/>
+          <p:nvPr/>
+        </p:nvSpPr>
+        <p:spPr>
+          <a:xfrm>
+            <a:off x="7992517" y="3615531"/>
+            <a:ext cx="3386634" cy="1878211"/>
+          </a:xfrm>
+          <a:prstGeom prst="roundRect">
+            <a:avLst>
+              <a:gd name="adj" fmla="val 4057"/>
+            </a:avLst>
+          </a:prstGeom>
+          <a:solidFill>
+            <a:srgbClr val="FFFFFF"/>
+          </a:solidFill>
+          <a:ln/>
+        </p:spPr>
+        <p:txBody>
+          <a:bodyPr/>
+          <a:lstStyle/>
+          <a:p>
+            <a:endParaRPr lang="en-US"/>
+          </a:p>
+        </p:txBody>
+      </p:sp>
+      <p:sp>
+        <p:nvSpPr>
+          <p:cNvPr id="29" name="Shape 27"/>
+          <p:cNvSpPr/>
+          <p:nvPr/>
+        </p:nvSpPr>
+        <p:spPr>
+          <a:xfrm>
+            <a:off x="7992517" y="3615531"/>
+            <a:ext cx="3386634" cy="1878211"/>
+          </a:xfrm>
+          <a:custGeom>
+            <a:avLst/>
+            <a:gdLst/>
+            <a:ahLst/>
+            <a:cxnLst/>
+            <a:rect l="l" t="t" r="r" b="b"/>
+            <a:pathLst>
+              <a:path w="3386634" h="1878211">
+                <a:moveTo>
+                  <a:pt x="0" y="76200"/>
+                </a:moveTo>
+                <a:lnTo>
+                  <a:pt x="0" y="76200"/>
+                </a:lnTo>
+                <a:arcTo wR="76200" hR="76200" stAng="10800000" swAng="5400000"/>
+                <a:lnTo>
+                  <a:pt x="3310434" y="0"/>
+                </a:lnTo>
+                <a:arcTo wR="76200" hR="76200" stAng="16200000" swAng="5400000"/>
+                <a:lnTo>
+                  <a:pt x="3386634" y="76200"/>
+                </a:lnTo>
+                <a:arcTo wR="76200" hR="38100" stAng="0" swAng="-5400000"/>
+                <a:lnTo>
+                  <a:pt x="76200" y="38100"/>
+                </a:lnTo>
+                <a:arcTo wR="76200" hR="38100" stAng="16200000" swAng="-5400000"/>
+                <a:close/>
+              </a:path>
+            </a:pathLst>
+          </a:custGeom>
+          <a:solidFill>
+            <a:srgbClr val="4E6596"/>
+          </a:solidFill>
+          <a:ln/>
+        </p:spPr>
+        <p:txBody>
+          <a:bodyPr/>
+          <a:lstStyle/>
+          <a:p>
+            <a:endParaRPr lang="en-US"/>
+          </a:p>
+        </p:txBody>
+      </p:sp>
+      <p:sp>
+        <p:nvSpPr>
+          <p:cNvPr id="30" name="Text 28"/>
+          <p:cNvSpPr/>
+          <p:nvPr/>
+        </p:nvSpPr>
+        <p:spPr>
+          <a:xfrm>
+            <a:off x="8221117" y="3831431"/>
+            <a:ext cx="3017317" cy="238720"/>
+          </a:xfrm>
+          <a:prstGeom prst="rect">
+            <a:avLst/>
+          </a:prstGeom>
+          <a:noFill/>
+          <a:ln/>
+        </p:spPr>
+        <p:txBody>
+          <a:bodyPr wrap="square" lIns="0" tIns="0" rIns="0" bIns="0" rtlCol="0" anchor="t">
+            <a:normAutofit/>
+          </a:bodyPr>
+          <a:lstStyle/>
+          <a:p>
+            <a:pPr marL="0" indent="0" algn="l">
+              <a:lnSpc>
+                <a:spcPts val="1680"/>
+              </a:lnSpc>
+              <a:buNone/>
+            </a:pPr>
+            <a:r>
+              <a:rPr lang="en-US" sz="1400" b="1" dirty="0">
+                <a:solidFill>
+                  <a:srgbClr val="2B2B30"/>
+                </a:solidFill>
+                <a:latin typeface="Public Sans" pitchFamily="34" charset="0"/>
+                <a:ea typeface="Public Sans" pitchFamily="34" charset="-122"/>
+                <a:cs typeface="Public Sans" pitchFamily="34" charset="-120"/>
+              </a:rPr>
+              <a:t>6 · Key measures in DAX</a:t>
+            </a:r>
+            <a:endParaRPr lang="en-US" sz="1400" dirty="0"/>
+          </a:p>
+        </p:txBody>
+      </p:sp>
+      <p:sp>
+        <p:nvSpPr>
+          <p:cNvPr id="31" name="Text 29"/>
+          <p:cNvSpPr/>
+          <p:nvPr/>
+        </p:nvSpPr>
+        <p:spPr>
+          <a:xfrm>
+            <a:off x="8221117" y="4108252"/>
+            <a:ext cx="3017317" cy="346670"/>
+          </a:xfrm>
+          <a:prstGeom prst="rect">
+            <a:avLst/>
+          </a:prstGeom>
+          <a:noFill/>
+          <a:ln/>
+        </p:spPr>
+        <p:txBody>
+          <a:bodyPr wrap="square" lIns="0" tIns="0" rIns="0" bIns="0" rtlCol="0" anchor="t">
+            <a:normAutofit/>
+          </a:bodyPr>
+          <a:lstStyle/>
+          <a:p>
+            <a:pPr marL="0" indent="0" algn="l">
+              <a:lnSpc>
+                <a:spcPts val="2530"/>
+              </a:lnSpc>
+              <a:buNone/>
+            </a:pPr>
+            <a:r>
+              <a:rPr lang="en-US" sz="2200" b="1" dirty="0">
+                <a:solidFill>
+                  <a:srgbClr val="4E6596"/>
+                </a:solidFill>
+                <a:latin typeface="Libre Baskerville" pitchFamily="18" charset="0"/>
+                <a:ea typeface="Libre Baskerville" pitchFamily="18" charset="-122"/>
+                <a:cs typeface="Libre Baskerville" pitchFamily="18" charset="-120"/>
+              </a:rPr>
+              <a:t>Rows → measures</a:t>
+            </a:r>
+            <a:endParaRPr lang="en-US" sz="2200" dirty="0"/>
+          </a:p>
+        </p:txBody>
+      </p:sp>
+      <p:sp>
+        <p:nvSpPr>
+          <p:cNvPr id="32" name="Text 30"/>
+          <p:cNvSpPr/>
+          <p:nvPr/>
+        </p:nvSpPr>
+        <p:spPr>
+          <a:xfrm>
+            <a:off x="8221117" y="4493022"/>
+            <a:ext cx="3017317" cy="642590"/>
+          </a:xfrm>
+          <a:prstGeom prst="rect">
+            <a:avLst/>
+          </a:prstGeom>
+          <a:noFill/>
+          <a:ln/>
+        </p:spPr>
+        <p:txBody>
+          <a:bodyPr wrap="square" lIns="0" tIns="0" rIns="0" bIns="0" rtlCol="0" anchor="t">
+            <a:normAutofit/>
+          </a:bodyPr>
+          <a:lstStyle/>
+          <a:p>
+            <a:pPr marL="0" indent="0" algn="l">
+              <a:lnSpc>
+                <a:spcPts val="1620"/>
+              </a:lnSpc>
+              <a:buNone/>
+            </a:pPr>
+            <a:r>
+              <a:rPr lang="en-US" sz="1200" dirty="0">
+                <a:solidFill>
+                  <a:srgbClr val="4A4A52"/>
+                </a:solidFill>
+                <a:latin typeface="Public Sans" pitchFamily="34" charset="0"/>
+                <a:ea typeface="Public Sans" pitchFamily="34" charset="-122"/>
+                <a:cs typeface="Public Sans" pitchFamily="34" charset="-120"/>
+              </a:rPr>
+              <a:t>DAX turns raw rows into numbers that update with every click, like rate vs. city average and the busiest hour.</a:t>
+            </a:r>
+            <a:endParaRPr lang="en-US" sz="1200" dirty="0"/>
+          </a:p>
+        </p:txBody>
+      </p:sp>
+    </p:spTree>
+  </p:cSld>
+  <p:clrMapOvr>
+    <a:masterClrMapping/>
+  </p:clrMapOvr>
+</p:sld>
+</file>
+
+<file path=ppt/slides/slide7.xml><?xml version="1.0" encoding="utf-8"?>
+<p:sld xmlns:a="http://schemas.openxmlformats.org/drawingml/2006/main" xmlns:r="http://schemas.openxmlformats.org/officeDocument/2006/relationships" xmlns:p="http://schemas.openxmlformats.org/presentationml/2006/main">
+  <p:cSld>
     <p:bg>
       <p:bgPr>
         <a:solidFill>
@@ -6908,7 +9228,7 @@
 </p:sld>
 </file>
 
-<file path=ppt/slides/slide7.xml><?xml version="1.0" encoding="utf-8"?>
+<file path=ppt/slides/slide8.xml><?xml version="1.0" encoding="utf-8"?>
 <p:sld xmlns:a="http://schemas.openxmlformats.org/drawingml/2006/main" xmlns:r="http://schemas.openxmlformats.org/officeDocument/2006/relationships" xmlns:p="http://schemas.openxmlformats.org/presentationml/2006/main">
   <p:cSld>
     <p:spTree>
@@ -7663,7 +9983,7 @@
 </p:sld>
 </file>
 
-<file path=ppt/slides/slide8.xml><?xml version="1.0" encoding="utf-8"?>
+<file path=ppt/slides/slide9.xml><?xml version="1.0" encoding="utf-8"?>
 <p:sld xmlns:a="http://schemas.openxmlformats.org/drawingml/2006/main" xmlns:r="http://schemas.openxmlformats.org/officeDocument/2006/relationships" xmlns:p="http://schemas.openxmlformats.org/presentationml/2006/main">
   <p:cSld name="Slide 8">
     <p:spTree>
@@ -7868,730 +10188,6 @@
               <a:t> (55.5 vs. 35.0 per 100,000 residents a month). Fall and winter sit above average.</a:t>
             </a:r>
             <a:endParaRPr lang="en-US" sz="1700" dirty="0"/>
-          </a:p>
-        </p:txBody>
-      </p:sp>
-    </p:spTree>
-  </p:cSld>
-  <p:clrMapOvr>
-    <a:masterClrMapping/>
-  </p:clrMapOvr>
-</p:sld>
-</file>
-
-<file path=ppt/slides/slide9.xml><?xml version="1.0" encoding="utf-8"?>
-<p:sld xmlns:a="http://schemas.openxmlformats.org/drawingml/2006/main" xmlns:r="http://schemas.openxmlformats.org/officeDocument/2006/relationships" xmlns:p="http://schemas.openxmlformats.org/presentationml/2006/main">
-  <p:cSld>
-    <p:bg>
-      <p:bgPr>
-        <a:solidFill>
-          <a:srgbClr val="2B2B30"/>
-        </a:solidFill>
-        <a:effectLst/>
-      </p:bgPr>
-    </p:bg>
-    <p:spTree>
-      <p:nvGrpSpPr>
-        <p:cNvPr id="1" name=""/>
-        <p:cNvGrpSpPr/>
-        <p:nvPr/>
-      </p:nvGrpSpPr>
-      <p:grpSpPr>
-        <a:xfrm>
-          <a:off x="0" y="0"/>
-          <a:ext cx="0" cy="0"/>
-          <a:chOff x="0" y="0"/>
-          <a:chExt cx="0" cy="0"/>
-        </a:xfrm>
-      </p:grpSpPr>
-      <p:sp>
-        <p:nvSpPr>
-          <p:cNvPr id="2" name="Shape 0"/>
-          <p:cNvSpPr/>
-          <p:nvPr/>
-        </p:nvSpPr>
-        <p:spPr>
-          <a:xfrm>
-            <a:off x="8686800" y="1905000"/>
-            <a:ext cx="863600" cy="863600"/>
-          </a:xfrm>
-          <a:prstGeom prst="rect">
-            <a:avLst/>
-          </a:prstGeom>
-          <a:solidFill>
-            <a:srgbClr val="D47BA3"/>
-          </a:solidFill>
-          <a:ln/>
-        </p:spPr>
-        <p:txBody>
-          <a:bodyPr/>
-          <a:lstStyle/>
-          <a:p>
-            <a:pPr marL="0" marR="0" lvl="0" indent="0" algn="l" defTabSz="914400" rtl="0" eaLnBrk="1" fontAlgn="auto" latinLnBrk="0" hangingPunct="1">
-              <a:lnSpc>
-                <a:spcPct val="100000"/>
-              </a:lnSpc>
-              <a:spcBef>
-                <a:spcPts val="0"/>
-              </a:spcBef>
-              <a:spcAft>
-                <a:spcPts val="0"/>
-              </a:spcAft>
-              <a:buClrTx/>
-              <a:buSzTx/>
-              <a:buFontTx/>
-              <a:buNone/>
-              <a:tabLst/>
-              <a:defRPr/>
-            </a:pPr>
-            <a:endParaRPr kumimoji="0" lang="en-CA" sz="1800" b="0" i="0" u="none" strike="noStrike" kern="1200" cap="none" spc="0" normalizeH="0" baseline="0" noProof="0">
-              <a:ln>
-                <a:noFill/>
-              </a:ln>
-              <a:solidFill>
-                <a:srgbClr val="2B2B30"/>
-              </a:solidFill>
-              <a:effectLst/>
-              <a:uLnTx/>
-              <a:uFillTx/>
-              <a:latin typeface="Public Sans"/>
-              <a:ea typeface="+mn-ea"/>
-              <a:cs typeface="+mn-cs"/>
-            </a:endParaRPr>
-          </a:p>
-        </p:txBody>
-      </p:sp>
-      <p:sp>
-        <p:nvSpPr>
-          <p:cNvPr id="3" name="Shape 1"/>
-          <p:cNvSpPr/>
-          <p:nvPr/>
-        </p:nvSpPr>
-        <p:spPr>
-          <a:xfrm>
-            <a:off x="9601200" y="1905000"/>
-            <a:ext cx="863600" cy="863600"/>
-          </a:xfrm>
-          <a:prstGeom prst="rect">
-            <a:avLst/>
-          </a:prstGeom>
-          <a:solidFill>
-            <a:srgbClr val="9E6B92"/>
-          </a:solidFill>
-          <a:ln/>
-        </p:spPr>
-        <p:txBody>
-          <a:bodyPr/>
-          <a:lstStyle/>
-          <a:p>
-            <a:pPr marL="0" marR="0" lvl="0" indent="0" algn="l" defTabSz="914400" rtl="0" eaLnBrk="1" fontAlgn="auto" latinLnBrk="0" hangingPunct="1">
-              <a:lnSpc>
-                <a:spcPct val="100000"/>
-              </a:lnSpc>
-              <a:spcBef>
-                <a:spcPts val="0"/>
-              </a:spcBef>
-              <a:spcAft>
-                <a:spcPts val="0"/>
-              </a:spcAft>
-              <a:buClrTx/>
-              <a:buSzTx/>
-              <a:buFontTx/>
-              <a:buNone/>
-              <a:tabLst/>
-              <a:defRPr/>
-            </a:pPr>
-            <a:endParaRPr kumimoji="0" lang="en-CA" sz="1800" b="0" i="0" u="none" strike="noStrike" kern="1200" cap="none" spc="0" normalizeH="0" baseline="0" noProof="0">
-              <a:ln>
-                <a:noFill/>
-              </a:ln>
-              <a:solidFill>
-                <a:srgbClr val="2B2B30"/>
-              </a:solidFill>
-              <a:effectLst/>
-              <a:uLnTx/>
-              <a:uFillTx/>
-              <a:latin typeface="Public Sans"/>
-              <a:ea typeface="+mn-ea"/>
-              <a:cs typeface="+mn-cs"/>
-            </a:endParaRPr>
-          </a:p>
-        </p:txBody>
-      </p:sp>
-      <p:sp>
-        <p:nvSpPr>
-          <p:cNvPr id="4" name="Shape 2"/>
-          <p:cNvSpPr/>
-          <p:nvPr/>
-        </p:nvSpPr>
-        <p:spPr>
-          <a:xfrm>
-            <a:off x="10515600" y="1905000"/>
-            <a:ext cx="863600" cy="863600"/>
-          </a:xfrm>
-          <a:prstGeom prst="rect">
-            <a:avLst/>
-          </a:prstGeom>
-          <a:solidFill>
-            <a:srgbClr val="4A4A78"/>
-          </a:solidFill>
-          <a:ln/>
-        </p:spPr>
-        <p:txBody>
-          <a:bodyPr/>
-          <a:lstStyle/>
-          <a:p>
-            <a:pPr marL="0" marR="0" lvl="0" indent="0" algn="l" defTabSz="914400" rtl="0" eaLnBrk="1" fontAlgn="auto" latinLnBrk="0" hangingPunct="1">
-              <a:lnSpc>
-                <a:spcPct val="100000"/>
-              </a:lnSpc>
-              <a:spcBef>
-                <a:spcPts val="0"/>
-              </a:spcBef>
-              <a:spcAft>
-                <a:spcPts val="0"/>
-              </a:spcAft>
-              <a:buClrTx/>
-              <a:buSzTx/>
-              <a:buFontTx/>
-              <a:buNone/>
-              <a:tabLst/>
-              <a:defRPr/>
-            </a:pPr>
-            <a:endParaRPr kumimoji="0" lang="en-CA" sz="1800" b="0" i="0" u="none" strike="noStrike" kern="1200" cap="none" spc="0" normalizeH="0" baseline="0" noProof="0">
-              <a:ln>
-                <a:noFill/>
-              </a:ln>
-              <a:solidFill>
-                <a:srgbClr val="2B2B30"/>
-              </a:solidFill>
-              <a:effectLst/>
-              <a:uLnTx/>
-              <a:uFillTx/>
-              <a:latin typeface="Public Sans"/>
-              <a:ea typeface="+mn-ea"/>
-              <a:cs typeface="+mn-cs"/>
-            </a:endParaRPr>
-          </a:p>
-        </p:txBody>
-      </p:sp>
-      <p:sp>
-        <p:nvSpPr>
-          <p:cNvPr id="5" name="Shape 3"/>
-          <p:cNvSpPr/>
-          <p:nvPr/>
-        </p:nvSpPr>
-        <p:spPr>
-          <a:xfrm>
-            <a:off x="8686800" y="2819400"/>
-            <a:ext cx="863600" cy="863600"/>
-          </a:xfrm>
-          <a:prstGeom prst="rect">
-            <a:avLst/>
-          </a:prstGeom>
-          <a:solidFill>
-            <a:srgbClr val="DBB7CF"/>
-          </a:solidFill>
-          <a:ln/>
-        </p:spPr>
-        <p:txBody>
-          <a:bodyPr/>
-          <a:lstStyle/>
-          <a:p>
-            <a:pPr marL="0" marR="0" lvl="0" indent="0" algn="l" defTabSz="914400" rtl="0" eaLnBrk="1" fontAlgn="auto" latinLnBrk="0" hangingPunct="1">
-              <a:lnSpc>
-                <a:spcPct val="100000"/>
-              </a:lnSpc>
-              <a:spcBef>
-                <a:spcPts val="0"/>
-              </a:spcBef>
-              <a:spcAft>
-                <a:spcPts val="0"/>
-              </a:spcAft>
-              <a:buClrTx/>
-              <a:buSzTx/>
-              <a:buFontTx/>
-              <a:buNone/>
-              <a:tabLst/>
-              <a:defRPr/>
-            </a:pPr>
-            <a:endParaRPr kumimoji="0" lang="en-CA" sz="1800" b="0" i="0" u="none" strike="noStrike" kern="1200" cap="none" spc="0" normalizeH="0" baseline="0" noProof="0">
-              <a:ln>
-                <a:noFill/>
-              </a:ln>
-              <a:solidFill>
-                <a:srgbClr val="2B2B30"/>
-              </a:solidFill>
-              <a:effectLst/>
-              <a:uLnTx/>
-              <a:uFillTx/>
-              <a:latin typeface="Public Sans"/>
-              <a:ea typeface="+mn-ea"/>
-              <a:cs typeface="+mn-cs"/>
-            </a:endParaRPr>
-          </a:p>
-        </p:txBody>
-      </p:sp>
-      <p:sp>
-        <p:nvSpPr>
-          <p:cNvPr id="6" name="Shape 4"/>
-          <p:cNvSpPr/>
-          <p:nvPr/>
-        </p:nvSpPr>
-        <p:spPr>
-          <a:xfrm>
-            <a:off x="9601200" y="2819400"/>
-            <a:ext cx="863600" cy="863600"/>
-          </a:xfrm>
-          <a:prstGeom prst="rect">
-            <a:avLst/>
-          </a:prstGeom>
-          <a:solidFill>
-            <a:srgbClr val="A3A3C8"/>
-          </a:solidFill>
-          <a:ln/>
-        </p:spPr>
-        <p:txBody>
-          <a:bodyPr/>
-          <a:lstStyle/>
-          <a:p>
-            <a:pPr marL="0" marR="0" lvl="0" indent="0" algn="l" defTabSz="914400" rtl="0" eaLnBrk="1" fontAlgn="auto" latinLnBrk="0" hangingPunct="1">
-              <a:lnSpc>
-                <a:spcPct val="100000"/>
-              </a:lnSpc>
-              <a:spcBef>
-                <a:spcPts val="0"/>
-              </a:spcBef>
-              <a:spcAft>
-                <a:spcPts val="0"/>
-              </a:spcAft>
-              <a:buClrTx/>
-              <a:buSzTx/>
-              <a:buFontTx/>
-              <a:buNone/>
-              <a:tabLst/>
-              <a:defRPr/>
-            </a:pPr>
-            <a:endParaRPr kumimoji="0" lang="en-CA" sz="1800" b="0" i="0" u="none" strike="noStrike" kern="1200" cap="none" spc="0" normalizeH="0" baseline="0" noProof="0">
-              <a:ln>
-                <a:noFill/>
-              </a:ln>
-              <a:solidFill>
-                <a:srgbClr val="2B2B30"/>
-              </a:solidFill>
-              <a:effectLst/>
-              <a:uLnTx/>
-              <a:uFillTx/>
-              <a:latin typeface="Public Sans"/>
-              <a:ea typeface="+mn-ea"/>
-              <a:cs typeface="+mn-cs"/>
-            </a:endParaRPr>
-          </a:p>
-        </p:txBody>
-      </p:sp>
-      <p:sp>
-        <p:nvSpPr>
-          <p:cNvPr id="7" name="Shape 5"/>
-          <p:cNvSpPr/>
-          <p:nvPr/>
-        </p:nvSpPr>
-        <p:spPr>
-          <a:xfrm>
-            <a:off x="10515600" y="2819400"/>
-            <a:ext cx="863600" cy="863600"/>
-          </a:xfrm>
-          <a:prstGeom prst="rect">
-            <a:avLst/>
-          </a:prstGeom>
-          <a:solidFill>
-            <a:srgbClr val="56709E"/>
-          </a:solidFill>
-          <a:ln/>
-        </p:spPr>
-        <p:txBody>
-          <a:bodyPr/>
-          <a:lstStyle/>
-          <a:p>
-            <a:pPr marL="0" marR="0" lvl="0" indent="0" algn="l" defTabSz="914400" rtl="0" eaLnBrk="1" fontAlgn="auto" latinLnBrk="0" hangingPunct="1">
-              <a:lnSpc>
-                <a:spcPct val="100000"/>
-              </a:lnSpc>
-              <a:spcBef>
-                <a:spcPts val="0"/>
-              </a:spcBef>
-              <a:spcAft>
-                <a:spcPts val="0"/>
-              </a:spcAft>
-              <a:buClrTx/>
-              <a:buSzTx/>
-              <a:buFontTx/>
-              <a:buNone/>
-              <a:tabLst/>
-              <a:defRPr/>
-            </a:pPr>
-            <a:endParaRPr kumimoji="0" lang="en-CA" sz="1800" b="0" i="0" u="none" strike="noStrike" kern="1200" cap="none" spc="0" normalizeH="0" baseline="0" noProof="0">
-              <a:ln>
-                <a:noFill/>
-              </a:ln>
-              <a:solidFill>
-                <a:srgbClr val="2B2B30"/>
-              </a:solidFill>
-              <a:effectLst/>
-              <a:uLnTx/>
-              <a:uFillTx/>
-              <a:latin typeface="Public Sans"/>
-              <a:ea typeface="+mn-ea"/>
-              <a:cs typeface="+mn-cs"/>
-            </a:endParaRPr>
-          </a:p>
-        </p:txBody>
-      </p:sp>
-      <p:sp>
-        <p:nvSpPr>
-          <p:cNvPr id="8" name="Shape 6"/>
-          <p:cNvSpPr/>
-          <p:nvPr/>
-        </p:nvSpPr>
-        <p:spPr>
-          <a:xfrm>
-            <a:off x="8686800" y="3733800"/>
-            <a:ext cx="863600" cy="863600"/>
-          </a:xfrm>
-          <a:prstGeom prst="rect">
-            <a:avLst/>
-          </a:prstGeom>
-          <a:solidFill>
-            <a:srgbClr val="EAE1D2"/>
-          </a:solidFill>
-          <a:ln/>
-        </p:spPr>
-        <p:txBody>
-          <a:bodyPr/>
-          <a:lstStyle/>
-          <a:p>
-            <a:pPr marL="0" marR="0" lvl="0" indent="0" algn="l" defTabSz="914400" rtl="0" eaLnBrk="1" fontAlgn="auto" latinLnBrk="0" hangingPunct="1">
-              <a:lnSpc>
-                <a:spcPct val="100000"/>
-              </a:lnSpc>
-              <a:spcBef>
-                <a:spcPts val="0"/>
-              </a:spcBef>
-              <a:spcAft>
-                <a:spcPts val="0"/>
-              </a:spcAft>
-              <a:buClrTx/>
-              <a:buSzTx/>
-              <a:buFontTx/>
-              <a:buNone/>
-              <a:tabLst/>
-              <a:defRPr/>
-            </a:pPr>
-            <a:endParaRPr kumimoji="0" lang="en-CA" sz="1800" b="0" i="0" u="none" strike="noStrike" kern="1200" cap="none" spc="0" normalizeH="0" baseline="0" noProof="0">
-              <a:ln>
-                <a:noFill/>
-              </a:ln>
-              <a:solidFill>
-                <a:srgbClr val="2B2B30"/>
-              </a:solidFill>
-              <a:effectLst/>
-              <a:uLnTx/>
-              <a:uFillTx/>
-              <a:latin typeface="Public Sans"/>
-              <a:ea typeface="+mn-ea"/>
-              <a:cs typeface="+mn-cs"/>
-            </a:endParaRPr>
-          </a:p>
-        </p:txBody>
-      </p:sp>
-      <p:sp>
-        <p:nvSpPr>
-          <p:cNvPr id="9" name="Shape 7"/>
-          <p:cNvSpPr/>
-          <p:nvPr/>
-        </p:nvSpPr>
-        <p:spPr>
-          <a:xfrm>
-            <a:off x="9601200" y="3733800"/>
-            <a:ext cx="863600" cy="863600"/>
-          </a:xfrm>
-          <a:prstGeom prst="rect">
-            <a:avLst/>
-          </a:prstGeom>
-          <a:solidFill>
-            <a:srgbClr val="B5C0DA"/>
-          </a:solidFill>
-          <a:ln/>
-        </p:spPr>
-        <p:txBody>
-          <a:bodyPr/>
-          <a:lstStyle/>
-          <a:p>
-            <a:pPr marL="0" marR="0" lvl="0" indent="0" algn="l" defTabSz="914400" rtl="0" eaLnBrk="1" fontAlgn="auto" latinLnBrk="0" hangingPunct="1">
-              <a:lnSpc>
-                <a:spcPct val="100000"/>
-              </a:lnSpc>
-              <a:spcBef>
-                <a:spcPts val="0"/>
-              </a:spcBef>
-              <a:spcAft>
-                <a:spcPts val="0"/>
-              </a:spcAft>
-              <a:buClrTx/>
-              <a:buSzTx/>
-              <a:buFontTx/>
-              <a:buNone/>
-              <a:tabLst/>
-              <a:defRPr/>
-            </a:pPr>
-            <a:endParaRPr kumimoji="0" lang="en-CA" sz="1800" b="0" i="0" u="none" strike="noStrike" kern="1200" cap="none" spc="0" normalizeH="0" baseline="0" noProof="0">
-              <a:ln>
-                <a:noFill/>
-              </a:ln>
-              <a:solidFill>
-                <a:srgbClr val="2B2B30"/>
-              </a:solidFill>
-              <a:effectLst/>
-              <a:uLnTx/>
-              <a:uFillTx/>
-              <a:latin typeface="Public Sans"/>
-              <a:ea typeface="+mn-ea"/>
-              <a:cs typeface="+mn-cs"/>
-            </a:endParaRPr>
-          </a:p>
-        </p:txBody>
-      </p:sp>
-      <p:sp>
-        <p:nvSpPr>
-          <p:cNvPr id="10" name="Shape 8"/>
-          <p:cNvSpPr/>
-          <p:nvPr/>
-        </p:nvSpPr>
-        <p:spPr>
-          <a:xfrm>
-            <a:off x="10515600" y="3733800"/>
-            <a:ext cx="863600" cy="863600"/>
-          </a:xfrm>
-          <a:prstGeom prst="rect">
-            <a:avLst/>
-          </a:prstGeom>
-          <a:solidFill>
-            <a:srgbClr val="6C83B5"/>
-          </a:solidFill>
-          <a:ln/>
-        </p:spPr>
-        <p:txBody>
-          <a:bodyPr/>
-          <a:lstStyle/>
-          <a:p>
-            <a:pPr marL="0" marR="0" lvl="0" indent="0" algn="l" defTabSz="914400" rtl="0" eaLnBrk="1" fontAlgn="auto" latinLnBrk="0" hangingPunct="1">
-              <a:lnSpc>
-                <a:spcPct val="100000"/>
-              </a:lnSpc>
-              <a:spcBef>
-                <a:spcPts val="0"/>
-              </a:spcBef>
-              <a:spcAft>
-                <a:spcPts val="0"/>
-              </a:spcAft>
-              <a:buClrTx/>
-              <a:buSzTx/>
-              <a:buFontTx/>
-              <a:buNone/>
-              <a:tabLst/>
-              <a:defRPr/>
-            </a:pPr>
-            <a:endParaRPr kumimoji="0" lang="en-CA" sz="1800" b="0" i="0" u="none" strike="noStrike" kern="1200" cap="none" spc="0" normalizeH="0" baseline="0" noProof="0">
-              <a:ln>
-                <a:noFill/>
-              </a:ln>
-              <a:solidFill>
-                <a:srgbClr val="2B2B30"/>
-              </a:solidFill>
-              <a:effectLst/>
-              <a:uLnTx/>
-              <a:uFillTx/>
-              <a:latin typeface="Public Sans"/>
-              <a:ea typeface="+mn-ea"/>
-              <a:cs typeface="+mn-cs"/>
-            </a:endParaRPr>
-          </a:p>
-        </p:txBody>
-      </p:sp>
-      <p:sp>
-        <p:nvSpPr>
-          <p:cNvPr id="11" name="Text 9"/>
-          <p:cNvSpPr>
-            <a:spLocks noGrp="1"/>
-          </p:cNvSpPr>
-          <p:nvPr>
-            <p:ph type="title"/>
-          </p:nvPr>
-        </p:nvSpPr>
-        <p:spPr>
-          <a:xfrm>
-            <a:off x="812800" y="2771142"/>
-            <a:ext cx="7194550" cy="695960"/>
-          </a:xfrm>
-          <a:prstGeom prst="rect">
-            <a:avLst/>
-          </a:prstGeom>
-          <a:noFill/>
-          <a:ln/>
-        </p:spPr>
-        <p:txBody>
-          <a:bodyPr wrap="square" lIns="0" tIns="0" rIns="0" bIns="0" rtlCol="0" anchor="t">
-            <a:normAutofit/>
-          </a:bodyPr>
-          <a:lstStyle/>
-          <a:p>
-            <a:pPr marL="0" indent="0" algn="l">
-              <a:lnSpc>
-                <a:spcPts val="5280"/>
-              </a:lnSpc>
-              <a:buNone/>
-            </a:pPr>
-            <a:r>
-              <a:rPr lang="en-US" sz="4800" b="1" i="0" dirty="0">
-                <a:solidFill>
-                  <a:srgbClr val="F4EEE3"/>
-                </a:solidFill>
-                <a:latin typeface="Libre Baskerville" pitchFamily="18" charset="0"/>
-                <a:ea typeface="Libre Baskerville" pitchFamily="18" charset="-122"/>
-                <a:cs typeface="Libre Baskerville" pitchFamily="18" charset="-120"/>
-              </a:rPr>
-              <a:t>Thank you</a:t>
-            </a:r>
-            <a:endParaRPr lang="en-US" sz="4800" dirty="0"/>
-          </a:p>
-        </p:txBody>
-      </p:sp>
-      <p:sp>
-        <p:nvSpPr>
-          <p:cNvPr id="12" name="Text 10"/>
-          <p:cNvSpPr/>
-          <p:nvPr/>
-        </p:nvSpPr>
-        <p:spPr>
-          <a:xfrm>
-            <a:off x="812800" y="3695700"/>
-            <a:ext cx="7194550" cy="416560"/>
-          </a:xfrm>
-          <a:prstGeom prst="rect">
-            <a:avLst/>
-          </a:prstGeom>
-          <a:noFill/>
-          <a:ln/>
-        </p:spPr>
-        <p:txBody>
-          <a:bodyPr wrap="square" lIns="0" tIns="0" rIns="0" bIns="0" rtlCol="0" anchor="t">
-            <a:normAutofit/>
-          </a:bodyPr>
-          <a:lstStyle/>
-          <a:p>
-            <a:pPr marL="0" marR="0" lvl="0" indent="0" algn="l" defTabSz="914400" rtl="0" eaLnBrk="1" fontAlgn="auto" latinLnBrk="0" hangingPunct="1">
-              <a:lnSpc>
-                <a:spcPts val="3080"/>
-              </a:lnSpc>
-              <a:spcBef>
-                <a:spcPts val="0"/>
-              </a:spcBef>
-              <a:spcAft>
-                <a:spcPts val="0"/>
-              </a:spcAft>
-              <a:buClrTx/>
-              <a:buSzTx/>
-              <a:buFontTx/>
-              <a:buNone/>
-              <a:tabLst/>
-              <a:defRPr/>
-            </a:pPr>
-            <a:r>
-              <a:rPr kumimoji="0" lang="en-US" sz="2200" b="0" i="0" u="none" strike="noStrike" kern="1200" cap="none" spc="0" normalizeH="0" baseline="0" noProof="0" dirty="0">
-                <a:ln>
-                  <a:noFill/>
-                </a:ln>
-                <a:solidFill>
-                  <a:srgbClr val="E39BBE"/>
-                </a:solidFill>
-                <a:effectLst/>
-                <a:uLnTx/>
-                <a:uFillTx/>
-                <a:latin typeface="Public Sans" pitchFamily="34" charset="0"/>
-                <a:ea typeface="Public Sans" pitchFamily="34" charset="-122"/>
-                <a:cs typeface="Public Sans" pitchFamily="34" charset="-120"/>
-              </a:rPr>
-              <a:t>Questions?</a:t>
-            </a:r>
-            <a:endParaRPr kumimoji="0" lang="en-US" sz="2200" b="0" i="0" u="none" strike="noStrike" kern="1200" cap="none" spc="0" normalizeH="0" baseline="0" noProof="0" dirty="0">
-              <a:ln>
-                <a:noFill/>
-              </a:ln>
-              <a:solidFill>
-                <a:srgbClr val="2B2B30"/>
-              </a:solidFill>
-              <a:effectLst/>
-              <a:uLnTx/>
-              <a:uFillTx/>
-              <a:ea typeface="+mn-ea"/>
-              <a:cs typeface="+mn-cs"/>
-            </a:endParaRPr>
-          </a:p>
-        </p:txBody>
-      </p:sp>
-      <p:sp>
-        <p:nvSpPr>
-          <p:cNvPr id="13" name="Text 11"/>
-          <p:cNvSpPr/>
-          <p:nvPr/>
-        </p:nvSpPr>
-        <p:spPr>
-          <a:xfrm>
-            <a:off x="812800" y="5999479"/>
-            <a:ext cx="7194550" cy="274320"/>
-          </a:xfrm>
-          <a:prstGeom prst="rect">
-            <a:avLst/>
-          </a:prstGeom>
-          <a:noFill/>
-          <a:ln/>
-        </p:spPr>
-        <p:txBody>
-          <a:bodyPr wrap="square" lIns="0" tIns="0" rIns="0" bIns="0" rtlCol="0" anchor="t">
-            <a:normAutofit/>
-          </a:bodyPr>
-          <a:lstStyle/>
-          <a:p>
-            <a:pPr marL="0" marR="0" lvl="0" indent="0" algn="l" defTabSz="914400" rtl="0" eaLnBrk="1" fontAlgn="auto" latinLnBrk="0" hangingPunct="1">
-              <a:lnSpc>
-                <a:spcPts val="1960"/>
-              </a:lnSpc>
-              <a:spcBef>
-                <a:spcPts val="0"/>
-              </a:spcBef>
-              <a:spcAft>
-                <a:spcPts val="0"/>
-              </a:spcAft>
-              <a:buClrTx/>
-              <a:buSzTx/>
-              <a:buFontTx/>
-              <a:buNone/>
-              <a:tabLst/>
-              <a:defRPr/>
-            </a:pPr>
-            <a:endParaRPr kumimoji="0" lang="en-US" sz="1400" b="0" i="0" u="none" strike="noStrike" kern="1200" cap="none" spc="0" normalizeH="0" baseline="0" noProof="0" dirty="0">
-              <a:ln>
-                <a:noFill/>
-              </a:ln>
-              <a:solidFill>
-                <a:srgbClr val="2B2B30"/>
-              </a:solidFill>
-              <a:effectLst/>
-              <a:uLnTx/>
-              <a:uFillTx/>
-              <a:latin typeface="Public Sans"/>
-              <a:ea typeface="+mn-ea"/>
-              <a:cs typeface="+mn-cs"/>
-            </a:endParaRPr>
           </a:p>
         </p:txBody>
       </p:sp>

--- a/Calgary_Traffic_Midpoint.pptx
+++ b/Calgary_Traffic_Midpoint.pptx
@@ -6,19 +6,18 @@
     <p:sldMasterId id="2147483654" r:id="rId2"/>
   </p:sldMasterIdLst>
   <p:notesMasterIdLst>
-    <p:notesMasterId r:id="rId13"/>
+    <p:notesMasterId r:id="rId12"/>
   </p:notesMasterIdLst>
   <p:sldIdLst>
     <p:sldId id="256" r:id="rId3"/>
     <p:sldId id="257" r:id="rId4"/>
     <p:sldId id="258" r:id="rId5"/>
     <p:sldId id="259" r:id="rId6"/>
-    <p:sldId id="265" r:id="rId7"/>
-    <p:sldId id="260" r:id="rId8"/>
-    <p:sldId id="269" r:id="rId9"/>
-    <p:sldId id="270" r:id="rId10"/>
-    <p:sldId id="263" r:id="rId11"/>
-    <p:sldId id="268" r:id="rId12"/>
+    <p:sldId id="260" r:id="rId7"/>
+    <p:sldId id="269" r:id="rId8"/>
+    <p:sldId id="270" r:id="rId9"/>
+    <p:sldId id="263" r:id="rId10"/>
+    <p:sldId id="268" r:id="rId11"/>
   </p:sldIdLst>
   <p:sldSz cx="12192000" cy="6858000"/>
   <p:notesSz cx="6858000" cy="12192000"/>
@@ -131,7 +130,6 @@
         </p14:section>
         <p14:section name="Wrangling" id="{3AE2D310-56C6-B243-413B-9658E54EA91D}">
           <p14:sldIdLst>
-            <p14:sldId id="265"/>
             <p14:sldId id="260"/>
           </p14:sldIdLst>
         </p14:section>
@@ -553,7 +551,7 @@
 </p:notes>
 </file>
 
-<file path=ppt/notesSlides/notesSlide10.xml><?xml version="1.0" encoding="utf-8"?>
+<file path=ppt/notesSlides/notesSlide2.xml><?xml version="1.0" encoding="utf-8"?>
 <p:notes xmlns:a="http://schemas.openxmlformats.org/drawingml/2006/main" xmlns:r="http://schemas.openxmlformats.org/officeDocument/2006/relationships" xmlns:p="http://schemas.openxmlformats.org/presentationml/2006/main">
   <p:cSld>
     <p:spTree>
@@ -599,7 +597,355 @@
           <a:p>
             <a:r>
               <a:rPr lang="en-US" dirty="0"/>
-              <a:t>[9:45 – 10:00] Thanks for listening. I’m happy to take questions, or to go back into the dashboard to look at any area you’re curious about.</a:t>
+              <a:t>Traffic incidents aren’t random. They cluster on certain roads, at certain times, and in certain parts of the city. My project uses City of Calgary open data to ask whether neighbourhood income and related conditions, like renting, low income and how people commute, line up with where incidents happen. The study area is the whole city, split into 113 community service areas. I use nine complete years, 2017 to 2025, and the result is an interactive Power BI dashboard.</a:t>
+            </a:r>
+          </a:p>
+        </p:txBody>
+      </p:sp>
+      <p:sp>
+        <p:nvSpPr>
+          <p:cNvPr id="4" name="Slide Number Placeholder 3"/>
+          <p:cNvSpPr>
+            <a:spLocks noGrp="1"/>
+          </p:cNvSpPr>
+          <p:nvPr>
+            <p:ph type="sldNum" sz="quarter" idx="10"/>
+          </p:nvPr>
+        </p:nvSpPr>
+        <p:spPr/>
+        <p:txBody>
+          <a:bodyPr/>
+          <a:lstStyle/>
+          <a:p>
+            <a:fld id="{F7021451-1387-4CA6-816F-3879F97B5CBC}" type="slidenum">
+              <a:rPr lang="en-US"/>
+              <a:t>2</a:t>
+            </a:fld>
+            <a:endParaRPr lang="en-US"/>
+          </a:p>
+        </p:txBody>
+      </p:sp>
+    </p:spTree>
+    <p:extLst>
+      <p:ext uri="{BB962C8B-B14F-4D97-AF65-F5344CB8AC3E}">
+        <p14:creationId xmlns:p14="http://schemas.microsoft.com/office/powerpoint/2010/main" val="1024086991"/>
+      </p:ext>
+    </p:extLst>
+  </p:cSld>
+  <p:clrMapOvr>
+    <a:masterClrMapping/>
+  </p:clrMapOvr>
+</p:notes>
+</file>
+
+<file path=ppt/notesSlides/notesSlide3.xml><?xml version="1.0" encoding="utf-8"?>
+<p:notes xmlns:a="http://schemas.openxmlformats.org/drawingml/2006/main" xmlns:r="http://schemas.openxmlformats.org/officeDocument/2006/relationships" xmlns:p="http://schemas.openxmlformats.org/presentationml/2006/main">
+  <p:cSld>
+    <p:spTree>
+      <p:nvGrpSpPr>
+        <p:cNvPr id="1" name=""/>
+        <p:cNvGrpSpPr/>
+        <p:nvPr/>
+      </p:nvGrpSpPr>
+      <p:grpSpPr>
+        <a:xfrm>
+          <a:off x="0" y="0"/>
+          <a:ext cx="0" cy="0"/>
+          <a:chOff x="0" y="0"/>
+          <a:chExt cx="0" cy="0"/>
+        </a:xfrm>
+      </p:grpSpPr>
+      <p:sp>
+        <p:nvSpPr>
+          <p:cNvPr id="2" name="Slide Image Placeholder 1"/>
+          <p:cNvSpPr>
+            <a:spLocks noGrp="1" noRot="1" noChangeAspect="1"/>
+          </p:cNvSpPr>
+          <p:nvPr>
+            <p:ph type="sldImg"/>
+          </p:nvPr>
+        </p:nvSpPr>
+        <p:spPr/>
+      </p:sp>
+      <p:sp>
+        <p:nvSpPr>
+          <p:cNvPr id="3" name="Notes Placeholder 2"/>
+          <p:cNvSpPr>
+            <a:spLocks noGrp="1"/>
+          </p:cNvSpPr>
+          <p:nvPr>
+            <p:ph type="body" idx="1"/>
+          </p:nvPr>
+        </p:nvSpPr>
+        <p:spPr/>
+        <p:txBody>
+          <a:bodyPr/>
+          <a:lstStyle/>
+          <a:p>
+            <a:r>
+              <a:rPr lang="en-US" dirty="0"/>
+              <a:t>I have three questions. First, where: once we account for how many people live in an area, where do incidents concentrate, and does that match neighbourhood income? Second, who: beyond income, which neighbourhood traits, like renting, low income or commuting by car, go along with higher incident rates? Third, when: what times of day, days of the week and months of the year see the most incidents? Each question maps to a part of the dashboard.</a:t>
+            </a:r>
+          </a:p>
+        </p:txBody>
+      </p:sp>
+      <p:sp>
+        <p:nvSpPr>
+          <p:cNvPr id="4" name="Slide Number Placeholder 3"/>
+          <p:cNvSpPr>
+            <a:spLocks noGrp="1"/>
+          </p:cNvSpPr>
+          <p:nvPr>
+            <p:ph type="sldNum" sz="quarter" idx="10"/>
+          </p:nvPr>
+        </p:nvSpPr>
+        <p:spPr/>
+        <p:txBody>
+          <a:bodyPr/>
+          <a:lstStyle/>
+          <a:p>
+            <a:fld id="{F7021451-1387-4CA6-816F-3879F97B5CBC}" type="slidenum">
+              <a:rPr lang="en-US"/>
+              <a:t>3</a:t>
+            </a:fld>
+            <a:endParaRPr lang="en-US"/>
+          </a:p>
+        </p:txBody>
+      </p:sp>
+    </p:spTree>
+    <p:extLst>
+      <p:ext uri="{BB962C8B-B14F-4D97-AF65-F5344CB8AC3E}">
+        <p14:creationId xmlns:p14="http://schemas.microsoft.com/office/powerpoint/2010/main" val="1024086991"/>
+      </p:ext>
+    </p:extLst>
+  </p:cSld>
+  <p:clrMapOvr>
+    <a:masterClrMapping/>
+  </p:clrMapOvr>
+</p:notes>
+</file>
+
+<file path=ppt/notesSlides/notesSlide4.xml><?xml version="1.0" encoding="utf-8"?>
+<p:notes xmlns:a="http://schemas.openxmlformats.org/drawingml/2006/main" xmlns:r="http://schemas.openxmlformats.org/officeDocument/2006/relationships" xmlns:p="http://schemas.openxmlformats.org/presentationml/2006/main">
+  <p:cSld>
+    <p:spTree>
+      <p:nvGrpSpPr>
+        <p:cNvPr id="1" name=""/>
+        <p:cNvGrpSpPr/>
+        <p:nvPr/>
+      </p:nvGrpSpPr>
+      <p:grpSpPr>
+        <a:xfrm>
+          <a:off x="0" y="0"/>
+          <a:ext cx="0" cy="0"/>
+          <a:chOff x="0" y="0"/>
+          <a:chExt cx="0" cy="0"/>
+        </a:xfrm>
+      </p:grpSpPr>
+      <p:sp>
+        <p:nvSpPr>
+          <p:cNvPr id="2" name="Slide Image Placeholder 1"/>
+          <p:cNvSpPr>
+            <a:spLocks noGrp="1" noRot="1" noChangeAspect="1"/>
+          </p:cNvSpPr>
+          <p:nvPr>
+            <p:ph type="sldImg"/>
+          </p:nvPr>
+        </p:nvSpPr>
+        <p:spPr/>
+      </p:sp>
+      <p:sp>
+        <p:nvSpPr>
+          <p:cNvPr id="3" name="Notes Placeholder 2"/>
+          <p:cNvSpPr>
+            <a:spLocks noGrp="1"/>
+          </p:cNvSpPr>
+          <p:nvPr>
+            <p:ph type="body" idx="1"/>
+          </p:nvPr>
+        </p:nvSpPr>
+        <p:spPr/>
+        <p:txBody>
+          <a:bodyPr/>
+          <a:lstStyle/>
+          <a:p>
+            <a:r>
+              <a:rPr lang="en-US" dirty="0"/>
+              <a:t>All three datasets come from the City of Calgary’s open data portal, and all are obtained. Traffic Incidents is the core: 65,138 records, each with a location, description and timestamp. The Equity Index file covers 113 community service areas with population, median income and 16 other census measures, plus their boundaries. Community District Boundaries adds 313 communities with their land-use class, which lets me separate residential areas from industrial ones.</a:t>
+            </a:r>
+          </a:p>
+        </p:txBody>
+      </p:sp>
+      <p:sp>
+        <p:nvSpPr>
+          <p:cNvPr id="4" name="Slide Number Placeholder 3"/>
+          <p:cNvSpPr>
+            <a:spLocks noGrp="1"/>
+          </p:cNvSpPr>
+          <p:nvPr>
+            <p:ph type="sldNum" sz="quarter" idx="10"/>
+          </p:nvPr>
+        </p:nvSpPr>
+        <p:spPr/>
+        <p:txBody>
+          <a:bodyPr/>
+          <a:lstStyle/>
+          <a:p>
+            <a:fld id="{F7021451-1387-4CA6-816F-3879F97B5CBC}" type="slidenum">
+              <a:rPr lang="en-US"/>
+              <a:t>4</a:t>
+            </a:fld>
+            <a:endParaRPr lang="en-US"/>
+          </a:p>
+        </p:txBody>
+      </p:sp>
+    </p:spTree>
+    <p:extLst>
+      <p:ext uri="{BB962C8B-B14F-4D97-AF65-F5344CB8AC3E}">
+        <p14:creationId xmlns:p14="http://schemas.microsoft.com/office/powerpoint/2010/main" val="1024086991"/>
+      </p:ext>
+    </p:extLst>
+  </p:cSld>
+  <p:clrMapOvr>
+    <a:masterClrMapping/>
+  </p:clrMapOvr>
+</p:notes>
+</file>
+
+<file path=ppt/notesSlides/notesSlide5.xml><?xml version="1.0" encoding="utf-8"?>
+<p:notes xmlns:a="http://schemas.openxmlformats.org/drawingml/2006/main" xmlns:r="http://schemas.openxmlformats.org/officeDocument/2006/relationships" xmlns:p="http://schemas.openxmlformats.org/presentationml/2006/main">
+  <p:cSld>
+    <p:spTree>
+      <p:nvGrpSpPr>
+        <p:cNvPr id="1" name=""/>
+        <p:cNvGrpSpPr/>
+        <p:nvPr/>
+      </p:nvGrpSpPr>
+      <p:grpSpPr>
+        <a:xfrm>
+          <a:off x="0" y="0"/>
+          <a:ext cx="0" cy="0"/>
+          <a:chOff x="0" y="0"/>
+          <a:chExt cx="0" cy="0"/>
+        </a:xfrm>
+      </p:grpSpPr>
+      <p:sp>
+        <p:nvSpPr>
+          <p:cNvPr id="2" name="Slide Image Placeholder 1"/>
+          <p:cNvSpPr>
+            <a:spLocks noGrp="1" noRot="1" noChangeAspect="1"/>
+          </p:cNvSpPr>
+          <p:nvPr>
+            <p:ph type="sldImg"/>
+          </p:nvPr>
+        </p:nvSpPr>
+        <p:spPr/>
+      </p:sp>
+      <p:sp>
+        <p:nvSpPr>
+          <p:cNvPr id="3" name="Notes Placeholder 2"/>
+          <p:cNvSpPr>
+            <a:spLocks noGrp="1"/>
+          </p:cNvSpPr>
+          <p:nvPr>
+            <p:ph type="body" idx="1"/>
+          </p:nvPr>
+        </p:nvSpPr>
+        <p:spPr/>
+        <p:txBody>
+          <a:bodyPr/>
+          <a:lstStyle/>
+          <a:p>
+            <a:r>
+              <a:rPr lang="en-US" dirty="0"/>
+              <a:t>Each card shows what the data looked like before and after one step. First, I kept only full years: the raw file has 65,138 incidents from December 2016 to 2026, and keeping 2017 to 2025 leaves 58,536. Second, each incident only had a map point, so I used GeoPandas in Python to check which area outline each point falls inside. 639 fall outside every area, and the same outlines became the Shape Map. Third, I turned the free-text description into five incident types using keywords, which powers the incident type filter, and flagged highways like Deerfoot and Glenmore by street name, so the map’s rates only count local roads. Fourth, the census file had one row for every area and trait, 2,091 rows, so I reshaped it to one row per area, 113 rows, with each trait as its own column. Fifth, every incident carries both its community and its area, which links the 307 communities to the 113 areas, and I then rated each area by incidents per 1,000 residents a year. Finally, DAX measures turn those rows into the numbers on the dashboard, like rate versus the city average and the busiest hour, and they update with every click.</a:t>
+            </a:r>
+          </a:p>
+        </p:txBody>
+      </p:sp>
+      <p:sp>
+        <p:nvSpPr>
+          <p:cNvPr id="4" name="Slide Number Placeholder 3"/>
+          <p:cNvSpPr>
+            <a:spLocks noGrp="1"/>
+          </p:cNvSpPr>
+          <p:nvPr>
+            <p:ph type="sldNum" sz="quarter" idx="10"/>
+          </p:nvPr>
+        </p:nvSpPr>
+        <p:spPr/>
+        <p:txBody>
+          <a:bodyPr/>
+          <a:lstStyle/>
+          <a:p>
+            <a:fld id="{F7021451-1387-4CA6-816F-3879F97B5CBC}" type="slidenum">
+              <a:rPr lang="en-US"/>
+              <a:t>5</a:t>
+            </a:fld>
+            <a:endParaRPr lang="en-US"/>
+          </a:p>
+        </p:txBody>
+      </p:sp>
+    </p:spTree>
+    <p:extLst>
+      <p:ext uri="{BB962C8B-B14F-4D97-AF65-F5344CB8AC3E}">
+        <p14:creationId xmlns:p14="http://schemas.microsoft.com/office/powerpoint/2010/main" val="1024086991"/>
+      </p:ext>
+    </p:extLst>
+  </p:cSld>
+  <p:clrMapOvr>
+    <a:masterClrMapping/>
+  </p:clrMapOvr>
+</p:notes>
+</file>
+
+<file path=ppt/notesSlides/notesSlide6.xml><?xml version="1.0" encoding="utf-8"?>
+<p:notes xmlns:a="http://schemas.openxmlformats.org/drawingml/2006/main" xmlns:r="http://schemas.openxmlformats.org/officeDocument/2006/relationships" xmlns:p="http://schemas.openxmlformats.org/presentationml/2006/main">
+  <p:cSld>
+    <p:spTree>
+      <p:nvGrpSpPr>
+        <p:cNvPr id="1" name=""/>
+        <p:cNvGrpSpPr/>
+        <p:nvPr/>
+      </p:nvGrpSpPr>
+      <p:grpSpPr>
+        <a:xfrm>
+          <a:off x="0" y="0"/>
+          <a:ext cx="0" cy="0"/>
+          <a:chOff x="0" y="0"/>
+          <a:chExt cx="0" cy="0"/>
+        </a:xfrm>
+      </p:grpSpPr>
+      <p:sp>
+        <p:nvSpPr>
+          <p:cNvPr id="2" name="Slide Image Placeholder 1"/>
+          <p:cNvSpPr>
+            <a:spLocks noGrp="1" noRot="1" noChangeAspect="1"/>
+          </p:cNvSpPr>
+          <p:nvPr>
+            <p:ph type="sldImg"/>
+          </p:nvPr>
+        </p:nvSpPr>
+        <p:spPr/>
+      </p:sp>
+      <p:sp>
+        <p:nvSpPr>
+          <p:cNvPr id="3" name="Notes Placeholder 2"/>
+          <p:cNvSpPr>
+            <a:spLocks noGrp="1"/>
+          </p:cNvSpPr>
+          <p:nvPr>
+            <p:ph type="body" idx="1"/>
+          </p:nvPr>
+        </p:nvSpPr>
+        <p:spPr/>
+        <p:txBody>
+          <a:bodyPr/>
+          <a:lstStyle/>
+          <a:p>
+            <a:r>
+              <a:rPr lang="en-US" dirty="0"/>
+              <a:t>Backup for the live demo, about 2 minutes. Left: the default view, with all 113 areas coloured by income and incident rate, and every chart showing the whole city. Right: the same dashboard after one click on the legend square for lower-income, high incident-rate areas. The map highlights those 16 areas, mostly in the east. The details panel summarises the group: about 14% of Calgary’s population, a median income range of roughly $29,000 to $42,000, and a local incident rate about 2.5 times the city average. The KPIs, heatmap and month chart all filter to those areas, so you can see their busiest hour moves to 4 to 5 PM. If there’s time, open the live report from the link and click an individual area.</a:t>
             </a:r>
           </a:p>
         </p:txBody>
@@ -668,7 +1014,7 @@
                 <a:tabLst/>
                 <a:defRPr/>
               </a:pPr>
-              <a:t>10</a:t>
+              <a:t>6</a:t>
             </a:fld>
             <a:endParaRPr kumimoji="0" lang="en-US" sz="1800" b="0" i="0" u="none" strike="noStrike" kern="1200" cap="none" spc="0" normalizeH="0" baseline="0" noProof="0">
               <a:ln>
@@ -684,441 +1030,6 @@
               <a:ea typeface="+mn-ea"/>
               <a:cs typeface="+mn-cs"/>
             </a:endParaRPr>
-          </a:p>
-        </p:txBody>
-      </p:sp>
-    </p:spTree>
-    <p:extLst>
-      <p:ext uri="{BB962C8B-B14F-4D97-AF65-F5344CB8AC3E}">
-        <p14:creationId xmlns:p14="http://schemas.microsoft.com/office/powerpoint/2010/main" val="1024086991"/>
-      </p:ext>
-    </p:extLst>
-  </p:cSld>
-  <p:clrMapOvr>
-    <a:masterClrMapping/>
-  </p:clrMapOvr>
-</p:notes>
-</file>
-
-<file path=ppt/notesSlides/notesSlide2.xml><?xml version="1.0" encoding="utf-8"?>
-<p:notes xmlns:a="http://schemas.openxmlformats.org/drawingml/2006/main" xmlns:r="http://schemas.openxmlformats.org/officeDocument/2006/relationships" xmlns:p="http://schemas.openxmlformats.org/presentationml/2006/main">
-  <p:cSld>
-    <p:spTree>
-      <p:nvGrpSpPr>
-        <p:cNvPr id="1" name=""/>
-        <p:cNvGrpSpPr/>
-        <p:nvPr/>
-      </p:nvGrpSpPr>
-      <p:grpSpPr>
-        <a:xfrm>
-          <a:off x="0" y="0"/>
-          <a:ext cx="0" cy="0"/>
-          <a:chOff x="0" y="0"/>
-          <a:chExt cx="0" cy="0"/>
-        </a:xfrm>
-      </p:grpSpPr>
-      <p:sp>
-        <p:nvSpPr>
-          <p:cNvPr id="2" name="Slide Image Placeholder 1"/>
-          <p:cNvSpPr>
-            <a:spLocks noGrp="1" noRot="1" noChangeAspect="1"/>
-          </p:cNvSpPr>
-          <p:nvPr>
-            <p:ph type="sldImg"/>
-          </p:nvPr>
-        </p:nvSpPr>
-        <p:spPr/>
-      </p:sp>
-      <p:sp>
-        <p:nvSpPr>
-          <p:cNvPr id="3" name="Notes Placeholder 2"/>
-          <p:cNvSpPr>
-            <a:spLocks noGrp="1"/>
-          </p:cNvSpPr>
-          <p:nvPr>
-            <p:ph type="body" idx="1"/>
-          </p:nvPr>
-        </p:nvSpPr>
-        <p:spPr/>
-        <p:txBody>
-          <a:bodyPr/>
-          <a:lstStyle/>
-          <a:p>
-            <a:r>
-              <a:rPr lang="en-US" dirty="0"/>
-              <a:t>Traffic incidents aren’t random. They cluster on certain roads, at certain times, and in certain parts of the city. My project uses City of Calgary open data to ask whether neighbourhood income and related conditions, like renting, low income and how people commute, line up with where incidents happen. The study area is the whole city, split into 113 community service areas. I use nine complete years, 2017 to 2025, and the result is an interactive Power BI dashboard.</a:t>
-            </a:r>
-          </a:p>
-        </p:txBody>
-      </p:sp>
-      <p:sp>
-        <p:nvSpPr>
-          <p:cNvPr id="4" name="Slide Number Placeholder 3"/>
-          <p:cNvSpPr>
-            <a:spLocks noGrp="1"/>
-          </p:cNvSpPr>
-          <p:nvPr>
-            <p:ph type="sldNum" sz="quarter" idx="10"/>
-          </p:nvPr>
-        </p:nvSpPr>
-        <p:spPr/>
-        <p:txBody>
-          <a:bodyPr/>
-          <a:lstStyle/>
-          <a:p>
-            <a:fld id="{F7021451-1387-4CA6-816F-3879F97B5CBC}" type="slidenum">
-              <a:rPr lang="en-US"/>
-              <a:t>2</a:t>
-            </a:fld>
-            <a:endParaRPr lang="en-US"/>
-          </a:p>
-        </p:txBody>
-      </p:sp>
-    </p:spTree>
-    <p:extLst>
-      <p:ext uri="{BB962C8B-B14F-4D97-AF65-F5344CB8AC3E}">
-        <p14:creationId xmlns:p14="http://schemas.microsoft.com/office/powerpoint/2010/main" val="1024086991"/>
-      </p:ext>
-    </p:extLst>
-  </p:cSld>
-  <p:clrMapOvr>
-    <a:masterClrMapping/>
-  </p:clrMapOvr>
-</p:notes>
-</file>
-
-<file path=ppt/notesSlides/notesSlide3.xml><?xml version="1.0" encoding="utf-8"?>
-<p:notes xmlns:a="http://schemas.openxmlformats.org/drawingml/2006/main" xmlns:r="http://schemas.openxmlformats.org/officeDocument/2006/relationships" xmlns:p="http://schemas.openxmlformats.org/presentationml/2006/main">
-  <p:cSld>
-    <p:spTree>
-      <p:nvGrpSpPr>
-        <p:cNvPr id="1" name=""/>
-        <p:cNvGrpSpPr/>
-        <p:nvPr/>
-      </p:nvGrpSpPr>
-      <p:grpSpPr>
-        <a:xfrm>
-          <a:off x="0" y="0"/>
-          <a:ext cx="0" cy="0"/>
-          <a:chOff x="0" y="0"/>
-          <a:chExt cx="0" cy="0"/>
-        </a:xfrm>
-      </p:grpSpPr>
-      <p:sp>
-        <p:nvSpPr>
-          <p:cNvPr id="2" name="Slide Image Placeholder 1"/>
-          <p:cNvSpPr>
-            <a:spLocks noGrp="1" noRot="1" noChangeAspect="1"/>
-          </p:cNvSpPr>
-          <p:nvPr>
-            <p:ph type="sldImg"/>
-          </p:nvPr>
-        </p:nvSpPr>
-        <p:spPr/>
-      </p:sp>
-      <p:sp>
-        <p:nvSpPr>
-          <p:cNvPr id="3" name="Notes Placeholder 2"/>
-          <p:cNvSpPr>
-            <a:spLocks noGrp="1"/>
-          </p:cNvSpPr>
-          <p:nvPr>
-            <p:ph type="body" idx="1"/>
-          </p:nvPr>
-        </p:nvSpPr>
-        <p:spPr/>
-        <p:txBody>
-          <a:bodyPr/>
-          <a:lstStyle/>
-          <a:p>
-            <a:r>
-              <a:rPr lang="en-US" dirty="0"/>
-              <a:t>I have three questions. First, where: once we account for how many people live in an area, where do incidents concentrate, and does that match neighbourhood income? Second, who: beyond income, which neighbourhood traits, like renting, low income or commuting by car, go along with higher incident rates? Third, when: what times of day, days of the week and months of the year see the most incidents? Each question maps to a part of the dashboard.</a:t>
-            </a:r>
-          </a:p>
-        </p:txBody>
-      </p:sp>
-      <p:sp>
-        <p:nvSpPr>
-          <p:cNvPr id="4" name="Slide Number Placeholder 3"/>
-          <p:cNvSpPr>
-            <a:spLocks noGrp="1"/>
-          </p:cNvSpPr>
-          <p:nvPr>
-            <p:ph type="sldNum" sz="quarter" idx="10"/>
-          </p:nvPr>
-        </p:nvSpPr>
-        <p:spPr/>
-        <p:txBody>
-          <a:bodyPr/>
-          <a:lstStyle/>
-          <a:p>
-            <a:fld id="{F7021451-1387-4CA6-816F-3879F97B5CBC}" type="slidenum">
-              <a:rPr lang="en-US"/>
-              <a:t>3</a:t>
-            </a:fld>
-            <a:endParaRPr lang="en-US"/>
-          </a:p>
-        </p:txBody>
-      </p:sp>
-    </p:spTree>
-    <p:extLst>
-      <p:ext uri="{BB962C8B-B14F-4D97-AF65-F5344CB8AC3E}">
-        <p14:creationId xmlns:p14="http://schemas.microsoft.com/office/powerpoint/2010/main" val="1024086991"/>
-      </p:ext>
-    </p:extLst>
-  </p:cSld>
-  <p:clrMapOvr>
-    <a:masterClrMapping/>
-  </p:clrMapOvr>
-</p:notes>
-</file>
-
-<file path=ppt/notesSlides/notesSlide4.xml><?xml version="1.0" encoding="utf-8"?>
-<p:notes xmlns:a="http://schemas.openxmlformats.org/drawingml/2006/main" xmlns:r="http://schemas.openxmlformats.org/officeDocument/2006/relationships" xmlns:p="http://schemas.openxmlformats.org/presentationml/2006/main">
-  <p:cSld>
-    <p:spTree>
-      <p:nvGrpSpPr>
-        <p:cNvPr id="1" name=""/>
-        <p:cNvGrpSpPr/>
-        <p:nvPr/>
-      </p:nvGrpSpPr>
-      <p:grpSpPr>
-        <a:xfrm>
-          <a:off x="0" y="0"/>
-          <a:ext cx="0" cy="0"/>
-          <a:chOff x="0" y="0"/>
-          <a:chExt cx="0" cy="0"/>
-        </a:xfrm>
-      </p:grpSpPr>
-      <p:sp>
-        <p:nvSpPr>
-          <p:cNvPr id="2" name="Slide Image Placeholder 1"/>
-          <p:cNvSpPr>
-            <a:spLocks noGrp="1" noRot="1" noChangeAspect="1"/>
-          </p:cNvSpPr>
-          <p:nvPr>
-            <p:ph type="sldImg"/>
-          </p:nvPr>
-        </p:nvSpPr>
-        <p:spPr/>
-      </p:sp>
-      <p:sp>
-        <p:nvSpPr>
-          <p:cNvPr id="3" name="Notes Placeholder 2"/>
-          <p:cNvSpPr>
-            <a:spLocks noGrp="1"/>
-          </p:cNvSpPr>
-          <p:nvPr>
-            <p:ph type="body" idx="1"/>
-          </p:nvPr>
-        </p:nvSpPr>
-        <p:spPr/>
-        <p:txBody>
-          <a:bodyPr/>
-          <a:lstStyle/>
-          <a:p>
-            <a:r>
-              <a:rPr lang="en-US" dirty="0"/>
-              <a:t>All three datasets come from the City of Calgary’s open data portal, and all are obtained. Traffic Incidents is the core: 65,138 records, each with a location, description and timestamp. The Equity Index file covers 113 community service areas with population, median income and 16 other census measures, plus their boundaries. Community District Boundaries adds 313 communities with their land-use class, which lets me separate residential areas from industrial ones.</a:t>
-            </a:r>
-          </a:p>
-        </p:txBody>
-      </p:sp>
-      <p:sp>
-        <p:nvSpPr>
-          <p:cNvPr id="4" name="Slide Number Placeholder 3"/>
-          <p:cNvSpPr>
-            <a:spLocks noGrp="1"/>
-          </p:cNvSpPr>
-          <p:nvPr>
-            <p:ph type="sldNum" sz="quarter" idx="10"/>
-          </p:nvPr>
-        </p:nvSpPr>
-        <p:spPr/>
-        <p:txBody>
-          <a:bodyPr/>
-          <a:lstStyle/>
-          <a:p>
-            <a:fld id="{F7021451-1387-4CA6-816F-3879F97B5CBC}" type="slidenum">
-              <a:rPr lang="en-US"/>
-              <a:t>4</a:t>
-            </a:fld>
-            <a:endParaRPr lang="en-US"/>
-          </a:p>
-        </p:txBody>
-      </p:sp>
-    </p:spTree>
-    <p:extLst>
-      <p:ext uri="{BB962C8B-B14F-4D97-AF65-F5344CB8AC3E}">
-        <p14:creationId xmlns:p14="http://schemas.microsoft.com/office/powerpoint/2010/main" val="1024086991"/>
-      </p:ext>
-    </p:extLst>
-  </p:cSld>
-  <p:clrMapOvr>
-    <a:masterClrMapping/>
-  </p:clrMapOvr>
-</p:notes>
-</file>
-
-<file path=ppt/notesSlides/notesSlide5.xml><?xml version="1.0" encoding="utf-8"?>
-<p:notes xmlns:a="http://schemas.openxmlformats.org/drawingml/2006/main" xmlns:r="http://schemas.openxmlformats.org/officeDocument/2006/relationships" xmlns:p="http://schemas.openxmlformats.org/presentationml/2006/main">
-  <p:cSld>
-    <p:spTree>
-      <p:nvGrpSpPr>
-        <p:cNvPr id="1" name=""/>
-        <p:cNvGrpSpPr/>
-        <p:nvPr/>
-      </p:nvGrpSpPr>
-      <p:grpSpPr>
-        <a:xfrm>
-          <a:off x="0" y="0"/>
-          <a:ext cx="0" cy="0"/>
-          <a:chOff x="0" y="0"/>
-          <a:chExt cx="0" cy="0"/>
-        </a:xfrm>
-      </p:grpSpPr>
-      <p:sp>
-        <p:nvSpPr>
-          <p:cNvPr id="2" name="Slide Image Placeholder 1"/>
-          <p:cNvSpPr>
-            <a:spLocks noGrp="1" noRot="1" noChangeAspect="1"/>
-          </p:cNvSpPr>
-          <p:nvPr>
-            <p:ph type="sldImg"/>
-          </p:nvPr>
-        </p:nvSpPr>
-        <p:spPr/>
-      </p:sp>
-      <p:sp>
-        <p:nvSpPr>
-          <p:cNvPr id="3" name="Notes Placeholder 2"/>
-          <p:cNvSpPr>
-            <a:spLocks noGrp="1"/>
-          </p:cNvSpPr>
-          <p:nvPr>
-            <p:ph type="body" idx="1"/>
-          </p:nvPr>
-        </p:nvSpPr>
-        <p:spPr/>
-        <p:txBody>
-          <a:bodyPr/>
-          <a:lstStyle/>
-          <a:p>
-            <a:r>
-              <a:rPr lang="en-US" dirty="0"/>
-              <a:t>Here’s how I prepared the data. First, each incident only had a map point, so I used Python to read every area’s boundary outline and check which outline contains each point. This is called a point-in-polygon test. 785 incidents fall outside every area and stay unassigned. Second, the census file had one row per measure, so I reshaped it to one row per area and cleaned up the number formats. Third, I set each incident’s type from keywords in its description and flagged highway incidents by street name. Fourth, I filtered to the nine complete years, which leaves 58,536 incidents. Fifth, to compare areas fairly, I divided each area’s incidents by its population and the nine years, using only local roads in residential communities. Finally, I wrote DAX measures that power the dashboard: each selection’s rate compared with the city average, the busiest hour, a monthly rate that adjusts for missing data, and the correlations between neighbourhood traits and incident rates.</a:t>
-            </a:r>
-          </a:p>
-        </p:txBody>
-      </p:sp>
-      <p:sp>
-        <p:nvSpPr>
-          <p:cNvPr id="4" name="Slide Number Placeholder 3"/>
-          <p:cNvSpPr>
-            <a:spLocks noGrp="1"/>
-          </p:cNvSpPr>
-          <p:nvPr>
-            <p:ph type="sldNum" sz="quarter" idx="10"/>
-          </p:nvPr>
-        </p:nvSpPr>
-        <p:spPr/>
-        <p:txBody>
-          <a:bodyPr/>
-          <a:lstStyle/>
-          <a:p>
-            <a:fld id="{F7021451-1387-4CA6-816F-3879F97B5CBC}" type="slidenum">
-              <a:rPr lang="en-US"/>
-              <a:t>5</a:t>
-            </a:fld>
-            <a:endParaRPr lang="en-US"/>
-          </a:p>
-        </p:txBody>
-      </p:sp>
-    </p:spTree>
-    <p:extLst>
-      <p:ext uri="{BB962C8B-B14F-4D97-AF65-F5344CB8AC3E}">
-        <p14:creationId xmlns:p14="http://schemas.microsoft.com/office/powerpoint/2010/main" val="1024086991"/>
-      </p:ext>
-    </p:extLst>
-  </p:cSld>
-  <p:clrMapOvr>
-    <a:masterClrMapping/>
-  </p:clrMapOvr>
-</p:notes>
-</file>
-
-<file path=ppt/notesSlides/notesSlide6.xml><?xml version="1.0" encoding="utf-8"?>
-<p:notes xmlns:a="http://schemas.openxmlformats.org/drawingml/2006/main" xmlns:r="http://schemas.openxmlformats.org/officeDocument/2006/relationships" xmlns:p="http://schemas.openxmlformats.org/presentationml/2006/main">
-  <p:cSld>
-    <p:spTree>
-      <p:nvGrpSpPr>
-        <p:cNvPr id="1" name=""/>
-        <p:cNvGrpSpPr/>
-        <p:nvPr/>
-      </p:nvGrpSpPr>
-      <p:grpSpPr>
-        <a:xfrm>
-          <a:off x="0" y="0"/>
-          <a:ext cx="0" cy="0"/>
-          <a:chOff x="0" y="0"/>
-          <a:chExt cx="0" cy="0"/>
-        </a:xfrm>
-      </p:grpSpPr>
-      <p:sp>
-        <p:nvSpPr>
-          <p:cNvPr id="2" name="Slide Image Placeholder 1"/>
-          <p:cNvSpPr>
-            <a:spLocks noGrp="1" noRot="1" noChangeAspect="1"/>
-          </p:cNvSpPr>
-          <p:nvPr>
-            <p:ph type="sldImg"/>
-          </p:nvPr>
-        </p:nvSpPr>
-        <p:spPr/>
-      </p:sp>
-      <p:sp>
-        <p:nvSpPr>
-          <p:cNvPr id="3" name="Notes Placeholder 2"/>
-          <p:cNvSpPr>
-            <a:spLocks noGrp="1"/>
-          </p:cNvSpPr>
-          <p:nvPr>
-            <p:ph type="body" idx="1"/>
-          </p:nvPr>
-        </p:nvSpPr>
-        <p:spPr/>
-        <p:txBody>
-          <a:bodyPr/>
-          <a:lstStyle/>
-          <a:p>
-            <a:r>
-              <a:rPr lang="en-US" dirty="0"/>
-              <a:t>Each card shows what the data looked like before and after one step. First, I kept only full years: the raw file has 65,138 incidents from December 2016 to 2026, and keeping 2017 to 2025 leaves 58,536. Second, each incident only had a map point, so I used GeoPandas in Python to check which area outline each point falls inside. 639 fall outside every area, and the same outlines became the Shape Map. Third, I turned the free-text description into five incident types using keywords, which powers the incident type filter, and flagged highways like Deerfoot and Glenmore by street name, so the map’s rates only count local roads. Fourth, the census file had one row for every area and trait, 2,091 rows, so I reshaped it to one row per area, 113 rows, with each trait as its own column. Fifth, every incident carries both its community and its area, which links the 307 communities to the 113 areas, and I then rated each area by incidents per 1,000 residents a year. Finally, DAX measures turn those rows into the numbers on the dashboard, like rate versus the city average and the busiest hour, and they update with every click.</a:t>
-            </a:r>
-          </a:p>
-        </p:txBody>
-      </p:sp>
-      <p:sp>
-        <p:nvSpPr>
-          <p:cNvPr id="4" name="Slide Number Placeholder 3"/>
-          <p:cNvSpPr>
-            <a:spLocks noGrp="1"/>
-          </p:cNvSpPr>
-          <p:nvPr>
-            <p:ph type="sldNum" sz="quarter" idx="10"/>
-          </p:nvPr>
-        </p:nvSpPr>
-        <p:spPr/>
-        <p:txBody>
-          <a:bodyPr/>
-          <a:lstStyle/>
-          <a:p>
-            <a:fld id="{F7021451-1387-4CA6-816F-3879F97B5CBC}" type="slidenum">
-              <a:rPr lang="en-US"/>
-              <a:t>6</a:t>
-            </a:fld>
-            <a:endParaRPr lang="en-US"/>
           </a:p>
         </p:txBody>
       </p:sp>
@@ -1181,7 +1092,7 @@
           <a:p>
             <a:r>
               <a:rPr lang="en-US" dirty="0"/>
-              <a:t>Backup for the live demo, about 2 minutes. Left: the default view, with all 113 areas coloured by income and incident rate, and every chart showing the whole city. Right: the same dashboard after one click on the legend square for lower-income, high incident-rate areas. The map highlights those 16 areas, mostly in the east. The details panel summarises the group: about 14% of Calgary’s population, a median income range of roughly $29,000 to $42,000, and a local incident rate about 2.5 times the city average. The KPIs, heatmap and month chart all filter to those areas, so you can see their busiest hour moves to 4 to 5 PM. If there’s time, open the live report from the link and click an individual area.</a:t>
+              <a:t>Here’s what the map itself shows. Each area is coloured by two things at once: its median income and its local incident rate. Two groups stand out, both with 16 areas each. Sixteen lower-income areas have high incident rates, shown in pink, and sixteen higher-income areas have low incident rates, shown in blue. They’re the two largest groups on the map, and mirror images of each other. Geographically, the pink areas line the east side of the city, while the blue areas fill the west and south. The exception is the city centre: 11 higher-income areas still have high rates, shown in dark purple, mostly downtown and in the inner city, where commuters and through-traffic add incidents that resident-based rates don’t account for.</a:t>
             </a:r>
           </a:p>
         </p:txBody>
@@ -1328,7 +1239,94 @@
           <a:p>
             <a:r>
               <a:rPr lang="en-US" dirty="0"/>
-              <a:t>Here’s what the map itself shows. Each area is coloured by two things at once: its median income and its local incident rate. Two groups stand out, both with 16 areas each. Sixteen lower-income areas have high incident rates, shown in pink, and sixteen higher-income areas have low incident rates, shown in blue. They’re the two largest groups on the map, and mirror images of each other. Geographically, the pink areas line the east side of the city, while the blue areas fill the west and south. The exception is the city centre: 11 higher-income areas still have high rates, shown in dark purple, mostly downtown and in the inner city, where commuters and through-traffic add incidents that resident-based rates don’t account for.</a:t>
+              <a:t>The time patterns are clear. The heatmap shows incidents concentrate on weekday afternoons: about a quarter of all incidents happen between 3 and 6 PM, and 5 to 6 PM is the single busiest hour, which lines up with the evening commute. Weekends are much quieter; Sunday has about half as many incidents as Wednesday. By month, the rate climbs through fall and peaks in November and December, at about 1.6 times April’s rate, which points to winter driving conditions and shorter daylight.</a:t>
+            </a:r>
+          </a:p>
+        </p:txBody>
+      </p:sp>
+      <p:sp>
+        <p:nvSpPr>
+          <p:cNvPr id="4" name="Slide Number Placeholder 3"/>
+          <p:cNvSpPr>
+            <a:spLocks noGrp="1"/>
+          </p:cNvSpPr>
+          <p:nvPr>
+            <p:ph type="sldNum" sz="quarter" idx="10"/>
+          </p:nvPr>
+        </p:nvSpPr>
+        <p:spPr/>
+        <p:txBody>
+          <a:bodyPr/>
+          <a:lstStyle/>
+          <a:p>
+            <a:fld id="{F7021451-1387-4CA6-816F-3879F97B5CBC}" type="slidenum">
+              <a:rPr lang="en-US"/>
+              <a:t>8</a:t>
+            </a:fld>
+            <a:endParaRPr lang="en-US"/>
+          </a:p>
+        </p:txBody>
+      </p:sp>
+    </p:spTree>
+    <p:extLst>
+      <p:ext uri="{BB962C8B-B14F-4D97-AF65-F5344CB8AC3E}">
+        <p14:creationId xmlns:p14="http://schemas.microsoft.com/office/powerpoint/2010/main" val="1024086991"/>
+      </p:ext>
+    </p:extLst>
+  </p:cSld>
+  <p:clrMapOvr>
+    <a:masterClrMapping/>
+  </p:clrMapOvr>
+</p:notes>
+</file>
+
+<file path=ppt/notesSlides/notesSlide9.xml><?xml version="1.0" encoding="utf-8"?>
+<p:notes xmlns:a="http://schemas.openxmlformats.org/drawingml/2006/main" xmlns:r="http://schemas.openxmlformats.org/officeDocument/2006/relationships" xmlns:p="http://schemas.openxmlformats.org/presentationml/2006/main">
+  <p:cSld>
+    <p:spTree>
+      <p:nvGrpSpPr>
+        <p:cNvPr id="1" name=""/>
+        <p:cNvGrpSpPr/>
+        <p:nvPr/>
+      </p:nvGrpSpPr>
+      <p:grpSpPr>
+        <a:xfrm>
+          <a:off x="0" y="0"/>
+          <a:ext cx="0" cy="0"/>
+          <a:chOff x="0" y="0"/>
+          <a:chExt cx="0" cy="0"/>
+        </a:xfrm>
+      </p:grpSpPr>
+      <p:sp>
+        <p:nvSpPr>
+          <p:cNvPr id="2" name="Slide Image Placeholder 1"/>
+          <p:cNvSpPr>
+            <a:spLocks noGrp="1" noRot="1" noChangeAspect="1"/>
+          </p:cNvSpPr>
+          <p:nvPr>
+            <p:ph type="sldImg"/>
+          </p:nvPr>
+        </p:nvSpPr>
+        <p:spPr/>
+      </p:sp>
+      <p:sp>
+        <p:nvSpPr>
+          <p:cNvPr id="3" name="Notes Placeholder 2"/>
+          <p:cNvSpPr>
+            <a:spLocks noGrp="1"/>
+          </p:cNvSpPr>
+          <p:nvPr>
+            <p:ph type="body" idx="1"/>
+          </p:nvPr>
+        </p:nvSpPr>
+        <p:spPr/>
+        <p:txBody>
+          <a:bodyPr/>
+          <a:lstStyle/>
+          <a:p>
+            <a:r>
+              <a:rPr lang="en-US" dirty="0"/>
+              <a:t>[9:45 – 10:00] Thanks for listening. I’m happy to take questions, or to go back into the dashboard to look at any area you’re curious about.</a:t>
             </a:r>
           </a:p>
         </p:txBody>
@@ -1397,7 +1395,7 @@
                 <a:tabLst/>
                 <a:defRPr/>
               </a:pPr>
-              <a:t>8</a:t>
+              <a:t>9</a:t>
             </a:fld>
             <a:endParaRPr kumimoji="0" lang="en-US" sz="1800" b="0" i="0" u="none" strike="noStrike" kern="1200" cap="none" spc="0" normalizeH="0" baseline="0" noProof="0">
               <a:ln>
@@ -1413,93 +1411,6 @@
               <a:ea typeface="+mn-ea"/>
               <a:cs typeface="+mn-cs"/>
             </a:endParaRPr>
-          </a:p>
-        </p:txBody>
-      </p:sp>
-    </p:spTree>
-    <p:extLst>
-      <p:ext uri="{BB962C8B-B14F-4D97-AF65-F5344CB8AC3E}">
-        <p14:creationId xmlns:p14="http://schemas.microsoft.com/office/powerpoint/2010/main" val="1024086991"/>
-      </p:ext>
-    </p:extLst>
-  </p:cSld>
-  <p:clrMapOvr>
-    <a:masterClrMapping/>
-  </p:clrMapOvr>
-</p:notes>
-</file>
-
-<file path=ppt/notesSlides/notesSlide9.xml><?xml version="1.0" encoding="utf-8"?>
-<p:notes xmlns:a="http://schemas.openxmlformats.org/drawingml/2006/main" xmlns:r="http://schemas.openxmlformats.org/officeDocument/2006/relationships" xmlns:p="http://schemas.openxmlformats.org/presentationml/2006/main">
-  <p:cSld>
-    <p:spTree>
-      <p:nvGrpSpPr>
-        <p:cNvPr id="1" name=""/>
-        <p:cNvGrpSpPr/>
-        <p:nvPr/>
-      </p:nvGrpSpPr>
-      <p:grpSpPr>
-        <a:xfrm>
-          <a:off x="0" y="0"/>
-          <a:ext cx="0" cy="0"/>
-          <a:chOff x="0" y="0"/>
-          <a:chExt cx="0" cy="0"/>
-        </a:xfrm>
-      </p:grpSpPr>
-      <p:sp>
-        <p:nvSpPr>
-          <p:cNvPr id="2" name="Slide Image Placeholder 1"/>
-          <p:cNvSpPr>
-            <a:spLocks noGrp="1" noRot="1" noChangeAspect="1"/>
-          </p:cNvSpPr>
-          <p:nvPr>
-            <p:ph type="sldImg"/>
-          </p:nvPr>
-        </p:nvSpPr>
-        <p:spPr/>
-      </p:sp>
-      <p:sp>
-        <p:nvSpPr>
-          <p:cNvPr id="3" name="Notes Placeholder 2"/>
-          <p:cNvSpPr>
-            <a:spLocks noGrp="1"/>
-          </p:cNvSpPr>
-          <p:nvPr>
-            <p:ph type="body" idx="1"/>
-          </p:nvPr>
-        </p:nvSpPr>
-        <p:spPr/>
-        <p:txBody>
-          <a:bodyPr/>
-          <a:lstStyle/>
-          <a:p>
-            <a:r>
-              <a:rPr lang="en-US" dirty="0"/>
-              <a:t>The time patterns are clear. The heatmap shows incidents concentrate on weekday afternoons: about a quarter of all incidents happen between 3 and 6 PM, and 5 to 6 PM is the single busiest hour, which lines up with the evening commute. Weekends are much quieter; Sunday has about half as many incidents as Wednesday. By month, the rate climbs through fall and peaks in November and December, at about 1.6 times April’s rate, which points to winter driving conditions and shorter daylight.</a:t>
-            </a:r>
-          </a:p>
-        </p:txBody>
-      </p:sp>
-      <p:sp>
-        <p:nvSpPr>
-          <p:cNvPr id="4" name="Slide Number Placeholder 3"/>
-          <p:cNvSpPr>
-            <a:spLocks noGrp="1"/>
-          </p:cNvSpPr>
-          <p:nvPr>
-            <p:ph type="sldNum" sz="quarter" idx="10"/>
-          </p:nvPr>
-        </p:nvSpPr>
-        <p:spPr/>
-        <p:txBody>
-          <a:bodyPr/>
-          <a:lstStyle/>
-          <a:p>
-            <a:fld id="{F7021451-1387-4CA6-816F-3879F97B5CBC}" type="slidenum">
-              <a:rPr lang="en-US"/>
-              <a:t>9</a:t>
-            </a:fld>
-            <a:endParaRPr lang="en-US"/>
           </a:p>
         </p:txBody>
       </p:sp>
@@ -3273,730 +3184,6 @@
               <a:t>, 2026</a:t>
             </a:r>
             <a:endParaRPr lang="en-US" sz="1400" dirty="0"/>
-          </a:p>
-        </p:txBody>
-      </p:sp>
-    </p:spTree>
-  </p:cSld>
-  <p:clrMapOvr>
-    <a:masterClrMapping/>
-  </p:clrMapOvr>
-</p:sld>
-</file>
-
-<file path=ppt/slides/slide10.xml><?xml version="1.0" encoding="utf-8"?>
-<p:sld xmlns:a="http://schemas.openxmlformats.org/drawingml/2006/main" xmlns:r="http://schemas.openxmlformats.org/officeDocument/2006/relationships" xmlns:p="http://schemas.openxmlformats.org/presentationml/2006/main">
-  <p:cSld>
-    <p:bg>
-      <p:bgPr>
-        <a:solidFill>
-          <a:srgbClr val="2B2B30"/>
-        </a:solidFill>
-        <a:effectLst/>
-      </p:bgPr>
-    </p:bg>
-    <p:spTree>
-      <p:nvGrpSpPr>
-        <p:cNvPr id="1" name=""/>
-        <p:cNvGrpSpPr/>
-        <p:nvPr/>
-      </p:nvGrpSpPr>
-      <p:grpSpPr>
-        <a:xfrm>
-          <a:off x="0" y="0"/>
-          <a:ext cx="0" cy="0"/>
-          <a:chOff x="0" y="0"/>
-          <a:chExt cx="0" cy="0"/>
-        </a:xfrm>
-      </p:grpSpPr>
-      <p:sp>
-        <p:nvSpPr>
-          <p:cNvPr id="2" name="Shape 0"/>
-          <p:cNvSpPr/>
-          <p:nvPr/>
-        </p:nvSpPr>
-        <p:spPr>
-          <a:xfrm>
-            <a:off x="8686800" y="1905000"/>
-            <a:ext cx="863600" cy="863600"/>
-          </a:xfrm>
-          <a:prstGeom prst="rect">
-            <a:avLst/>
-          </a:prstGeom>
-          <a:solidFill>
-            <a:srgbClr val="D47BA3"/>
-          </a:solidFill>
-          <a:ln/>
-        </p:spPr>
-        <p:txBody>
-          <a:bodyPr/>
-          <a:lstStyle/>
-          <a:p>
-            <a:pPr marL="0" marR="0" lvl="0" indent="0" algn="l" defTabSz="914400" rtl="0" eaLnBrk="1" fontAlgn="auto" latinLnBrk="0" hangingPunct="1">
-              <a:lnSpc>
-                <a:spcPct val="100000"/>
-              </a:lnSpc>
-              <a:spcBef>
-                <a:spcPts val="0"/>
-              </a:spcBef>
-              <a:spcAft>
-                <a:spcPts val="0"/>
-              </a:spcAft>
-              <a:buClrTx/>
-              <a:buSzTx/>
-              <a:buFontTx/>
-              <a:buNone/>
-              <a:tabLst/>
-              <a:defRPr/>
-            </a:pPr>
-            <a:endParaRPr kumimoji="0" lang="en-CA" sz="1800" b="0" i="0" u="none" strike="noStrike" kern="1200" cap="none" spc="0" normalizeH="0" baseline="0" noProof="0">
-              <a:ln>
-                <a:noFill/>
-              </a:ln>
-              <a:solidFill>
-                <a:srgbClr val="2B2B30"/>
-              </a:solidFill>
-              <a:effectLst/>
-              <a:uLnTx/>
-              <a:uFillTx/>
-              <a:latin typeface="Public Sans"/>
-              <a:ea typeface="+mn-ea"/>
-              <a:cs typeface="+mn-cs"/>
-            </a:endParaRPr>
-          </a:p>
-        </p:txBody>
-      </p:sp>
-      <p:sp>
-        <p:nvSpPr>
-          <p:cNvPr id="3" name="Shape 1"/>
-          <p:cNvSpPr/>
-          <p:nvPr/>
-        </p:nvSpPr>
-        <p:spPr>
-          <a:xfrm>
-            <a:off x="9601200" y="1905000"/>
-            <a:ext cx="863600" cy="863600"/>
-          </a:xfrm>
-          <a:prstGeom prst="rect">
-            <a:avLst/>
-          </a:prstGeom>
-          <a:solidFill>
-            <a:srgbClr val="9E6B92"/>
-          </a:solidFill>
-          <a:ln/>
-        </p:spPr>
-        <p:txBody>
-          <a:bodyPr/>
-          <a:lstStyle/>
-          <a:p>
-            <a:pPr marL="0" marR="0" lvl="0" indent="0" algn="l" defTabSz="914400" rtl="0" eaLnBrk="1" fontAlgn="auto" latinLnBrk="0" hangingPunct="1">
-              <a:lnSpc>
-                <a:spcPct val="100000"/>
-              </a:lnSpc>
-              <a:spcBef>
-                <a:spcPts val="0"/>
-              </a:spcBef>
-              <a:spcAft>
-                <a:spcPts val="0"/>
-              </a:spcAft>
-              <a:buClrTx/>
-              <a:buSzTx/>
-              <a:buFontTx/>
-              <a:buNone/>
-              <a:tabLst/>
-              <a:defRPr/>
-            </a:pPr>
-            <a:endParaRPr kumimoji="0" lang="en-CA" sz="1800" b="0" i="0" u="none" strike="noStrike" kern="1200" cap="none" spc="0" normalizeH="0" baseline="0" noProof="0">
-              <a:ln>
-                <a:noFill/>
-              </a:ln>
-              <a:solidFill>
-                <a:srgbClr val="2B2B30"/>
-              </a:solidFill>
-              <a:effectLst/>
-              <a:uLnTx/>
-              <a:uFillTx/>
-              <a:latin typeface="Public Sans"/>
-              <a:ea typeface="+mn-ea"/>
-              <a:cs typeface="+mn-cs"/>
-            </a:endParaRPr>
-          </a:p>
-        </p:txBody>
-      </p:sp>
-      <p:sp>
-        <p:nvSpPr>
-          <p:cNvPr id="4" name="Shape 2"/>
-          <p:cNvSpPr/>
-          <p:nvPr/>
-        </p:nvSpPr>
-        <p:spPr>
-          <a:xfrm>
-            <a:off x="10515600" y="1905000"/>
-            <a:ext cx="863600" cy="863600"/>
-          </a:xfrm>
-          <a:prstGeom prst="rect">
-            <a:avLst/>
-          </a:prstGeom>
-          <a:solidFill>
-            <a:srgbClr val="4A4A78"/>
-          </a:solidFill>
-          <a:ln/>
-        </p:spPr>
-        <p:txBody>
-          <a:bodyPr/>
-          <a:lstStyle/>
-          <a:p>
-            <a:pPr marL="0" marR="0" lvl="0" indent="0" algn="l" defTabSz="914400" rtl="0" eaLnBrk="1" fontAlgn="auto" latinLnBrk="0" hangingPunct="1">
-              <a:lnSpc>
-                <a:spcPct val="100000"/>
-              </a:lnSpc>
-              <a:spcBef>
-                <a:spcPts val="0"/>
-              </a:spcBef>
-              <a:spcAft>
-                <a:spcPts val="0"/>
-              </a:spcAft>
-              <a:buClrTx/>
-              <a:buSzTx/>
-              <a:buFontTx/>
-              <a:buNone/>
-              <a:tabLst/>
-              <a:defRPr/>
-            </a:pPr>
-            <a:endParaRPr kumimoji="0" lang="en-CA" sz="1800" b="0" i="0" u="none" strike="noStrike" kern="1200" cap="none" spc="0" normalizeH="0" baseline="0" noProof="0">
-              <a:ln>
-                <a:noFill/>
-              </a:ln>
-              <a:solidFill>
-                <a:srgbClr val="2B2B30"/>
-              </a:solidFill>
-              <a:effectLst/>
-              <a:uLnTx/>
-              <a:uFillTx/>
-              <a:latin typeface="Public Sans"/>
-              <a:ea typeface="+mn-ea"/>
-              <a:cs typeface="+mn-cs"/>
-            </a:endParaRPr>
-          </a:p>
-        </p:txBody>
-      </p:sp>
-      <p:sp>
-        <p:nvSpPr>
-          <p:cNvPr id="5" name="Shape 3"/>
-          <p:cNvSpPr/>
-          <p:nvPr/>
-        </p:nvSpPr>
-        <p:spPr>
-          <a:xfrm>
-            <a:off x="8686800" y="2819400"/>
-            <a:ext cx="863600" cy="863600"/>
-          </a:xfrm>
-          <a:prstGeom prst="rect">
-            <a:avLst/>
-          </a:prstGeom>
-          <a:solidFill>
-            <a:srgbClr val="DBB7CF"/>
-          </a:solidFill>
-          <a:ln/>
-        </p:spPr>
-        <p:txBody>
-          <a:bodyPr/>
-          <a:lstStyle/>
-          <a:p>
-            <a:pPr marL="0" marR="0" lvl="0" indent="0" algn="l" defTabSz="914400" rtl="0" eaLnBrk="1" fontAlgn="auto" latinLnBrk="0" hangingPunct="1">
-              <a:lnSpc>
-                <a:spcPct val="100000"/>
-              </a:lnSpc>
-              <a:spcBef>
-                <a:spcPts val="0"/>
-              </a:spcBef>
-              <a:spcAft>
-                <a:spcPts val="0"/>
-              </a:spcAft>
-              <a:buClrTx/>
-              <a:buSzTx/>
-              <a:buFontTx/>
-              <a:buNone/>
-              <a:tabLst/>
-              <a:defRPr/>
-            </a:pPr>
-            <a:endParaRPr kumimoji="0" lang="en-CA" sz="1800" b="0" i="0" u="none" strike="noStrike" kern="1200" cap="none" spc="0" normalizeH="0" baseline="0" noProof="0">
-              <a:ln>
-                <a:noFill/>
-              </a:ln>
-              <a:solidFill>
-                <a:srgbClr val="2B2B30"/>
-              </a:solidFill>
-              <a:effectLst/>
-              <a:uLnTx/>
-              <a:uFillTx/>
-              <a:latin typeface="Public Sans"/>
-              <a:ea typeface="+mn-ea"/>
-              <a:cs typeface="+mn-cs"/>
-            </a:endParaRPr>
-          </a:p>
-        </p:txBody>
-      </p:sp>
-      <p:sp>
-        <p:nvSpPr>
-          <p:cNvPr id="6" name="Shape 4"/>
-          <p:cNvSpPr/>
-          <p:nvPr/>
-        </p:nvSpPr>
-        <p:spPr>
-          <a:xfrm>
-            <a:off x="9601200" y="2819400"/>
-            <a:ext cx="863600" cy="863600"/>
-          </a:xfrm>
-          <a:prstGeom prst="rect">
-            <a:avLst/>
-          </a:prstGeom>
-          <a:solidFill>
-            <a:srgbClr val="A3A3C8"/>
-          </a:solidFill>
-          <a:ln/>
-        </p:spPr>
-        <p:txBody>
-          <a:bodyPr/>
-          <a:lstStyle/>
-          <a:p>
-            <a:pPr marL="0" marR="0" lvl="0" indent="0" algn="l" defTabSz="914400" rtl="0" eaLnBrk="1" fontAlgn="auto" latinLnBrk="0" hangingPunct="1">
-              <a:lnSpc>
-                <a:spcPct val="100000"/>
-              </a:lnSpc>
-              <a:spcBef>
-                <a:spcPts val="0"/>
-              </a:spcBef>
-              <a:spcAft>
-                <a:spcPts val="0"/>
-              </a:spcAft>
-              <a:buClrTx/>
-              <a:buSzTx/>
-              <a:buFontTx/>
-              <a:buNone/>
-              <a:tabLst/>
-              <a:defRPr/>
-            </a:pPr>
-            <a:endParaRPr kumimoji="0" lang="en-CA" sz="1800" b="0" i="0" u="none" strike="noStrike" kern="1200" cap="none" spc="0" normalizeH="0" baseline="0" noProof="0">
-              <a:ln>
-                <a:noFill/>
-              </a:ln>
-              <a:solidFill>
-                <a:srgbClr val="2B2B30"/>
-              </a:solidFill>
-              <a:effectLst/>
-              <a:uLnTx/>
-              <a:uFillTx/>
-              <a:latin typeface="Public Sans"/>
-              <a:ea typeface="+mn-ea"/>
-              <a:cs typeface="+mn-cs"/>
-            </a:endParaRPr>
-          </a:p>
-        </p:txBody>
-      </p:sp>
-      <p:sp>
-        <p:nvSpPr>
-          <p:cNvPr id="7" name="Shape 5"/>
-          <p:cNvSpPr/>
-          <p:nvPr/>
-        </p:nvSpPr>
-        <p:spPr>
-          <a:xfrm>
-            <a:off x="10515600" y="2819400"/>
-            <a:ext cx="863600" cy="863600"/>
-          </a:xfrm>
-          <a:prstGeom prst="rect">
-            <a:avLst/>
-          </a:prstGeom>
-          <a:solidFill>
-            <a:srgbClr val="56709E"/>
-          </a:solidFill>
-          <a:ln/>
-        </p:spPr>
-        <p:txBody>
-          <a:bodyPr/>
-          <a:lstStyle/>
-          <a:p>
-            <a:pPr marL="0" marR="0" lvl="0" indent="0" algn="l" defTabSz="914400" rtl="0" eaLnBrk="1" fontAlgn="auto" latinLnBrk="0" hangingPunct="1">
-              <a:lnSpc>
-                <a:spcPct val="100000"/>
-              </a:lnSpc>
-              <a:spcBef>
-                <a:spcPts val="0"/>
-              </a:spcBef>
-              <a:spcAft>
-                <a:spcPts val="0"/>
-              </a:spcAft>
-              <a:buClrTx/>
-              <a:buSzTx/>
-              <a:buFontTx/>
-              <a:buNone/>
-              <a:tabLst/>
-              <a:defRPr/>
-            </a:pPr>
-            <a:endParaRPr kumimoji="0" lang="en-CA" sz="1800" b="0" i="0" u="none" strike="noStrike" kern="1200" cap="none" spc="0" normalizeH="0" baseline="0" noProof="0">
-              <a:ln>
-                <a:noFill/>
-              </a:ln>
-              <a:solidFill>
-                <a:srgbClr val="2B2B30"/>
-              </a:solidFill>
-              <a:effectLst/>
-              <a:uLnTx/>
-              <a:uFillTx/>
-              <a:latin typeface="Public Sans"/>
-              <a:ea typeface="+mn-ea"/>
-              <a:cs typeface="+mn-cs"/>
-            </a:endParaRPr>
-          </a:p>
-        </p:txBody>
-      </p:sp>
-      <p:sp>
-        <p:nvSpPr>
-          <p:cNvPr id="8" name="Shape 6"/>
-          <p:cNvSpPr/>
-          <p:nvPr/>
-        </p:nvSpPr>
-        <p:spPr>
-          <a:xfrm>
-            <a:off x="8686800" y="3733800"/>
-            <a:ext cx="863600" cy="863600"/>
-          </a:xfrm>
-          <a:prstGeom prst="rect">
-            <a:avLst/>
-          </a:prstGeom>
-          <a:solidFill>
-            <a:srgbClr val="EAE1D2"/>
-          </a:solidFill>
-          <a:ln/>
-        </p:spPr>
-        <p:txBody>
-          <a:bodyPr/>
-          <a:lstStyle/>
-          <a:p>
-            <a:pPr marL="0" marR="0" lvl="0" indent="0" algn="l" defTabSz="914400" rtl="0" eaLnBrk="1" fontAlgn="auto" latinLnBrk="0" hangingPunct="1">
-              <a:lnSpc>
-                <a:spcPct val="100000"/>
-              </a:lnSpc>
-              <a:spcBef>
-                <a:spcPts val="0"/>
-              </a:spcBef>
-              <a:spcAft>
-                <a:spcPts val="0"/>
-              </a:spcAft>
-              <a:buClrTx/>
-              <a:buSzTx/>
-              <a:buFontTx/>
-              <a:buNone/>
-              <a:tabLst/>
-              <a:defRPr/>
-            </a:pPr>
-            <a:endParaRPr kumimoji="0" lang="en-CA" sz="1800" b="0" i="0" u="none" strike="noStrike" kern="1200" cap="none" spc="0" normalizeH="0" baseline="0" noProof="0">
-              <a:ln>
-                <a:noFill/>
-              </a:ln>
-              <a:solidFill>
-                <a:srgbClr val="2B2B30"/>
-              </a:solidFill>
-              <a:effectLst/>
-              <a:uLnTx/>
-              <a:uFillTx/>
-              <a:latin typeface="Public Sans"/>
-              <a:ea typeface="+mn-ea"/>
-              <a:cs typeface="+mn-cs"/>
-            </a:endParaRPr>
-          </a:p>
-        </p:txBody>
-      </p:sp>
-      <p:sp>
-        <p:nvSpPr>
-          <p:cNvPr id="9" name="Shape 7"/>
-          <p:cNvSpPr/>
-          <p:nvPr/>
-        </p:nvSpPr>
-        <p:spPr>
-          <a:xfrm>
-            <a:off x="9601200" y="3733800"/>
-            <a:ext cx="863600" cy="863600"/>
-          </a:xfrm>
-          <a:prstGeom prst="rect">
-            <a:avLst/>
-          </a:prstGeom>
-          <a:solidFill>
-            <a:srgbClr val="B5C0DA"/>
-          </a:solidFill>
-          <a:ln/>
-        </p:spPr>
-        <p:txBody>
-          <a:bodyPr/>
-          <a:lstStyle/>
-          <a:p>
-            <a:pPr marL="0" marR="0" lvl="0" indent="0" algn="l" defTabSz="914400" rtl="0" eaLnBrk="1" fontAlgn="auto" latinLnBrk="0" hangingPunct="1">
-              <a:lnSpc>
-                <a:spcPct val="100000"/>
-              </a:lnSpc>
-              <a:spcBef>
-                <a:spcPts val="0"/>
-              </a:spcBef>
-              <a:spcAft>
-                <a:spcPts val="0"/>
-              </a:spcAft>
-              <a:buClrTx/>
-              <a:buSzTx/>
-              <a:buFontTx/>
-              <a:buNone/>
-              <a:tabLst/>
-              <a:defRPr/>
-            </a:pPr>
-            <a:endParaRPr kumimoji="0" lang="en-CA" sz="1800" b="0" i="0" u="none" strike="noStrike" kern="1200" cap="none" spc="0" normalizeH="0" baseline="0" noProof="0">
-              <a:ln>
-                <a:noFill/>
-              </a:ln>
-              <a:solidFill>
-                <a:srgbClr val="2B2B30"/>
-              </a:solidFill>
-              <a:effectLst/>
-              <a:uLnTx/>
-              <a:uFillTx/>
-              <a:latin typeface="Public Sans"/>
-              <a:ea typeface="+mn-ea"/>
-              <a:cs typeface="+mn-cs"/>
-            </a:endParaRPr>
-          </a:p>
-        </p:txBody>
-      </p:sp>
-      <p:sp>
-        <p:nvSpPr>
-          <p:cNvPr id="10" name="Shape 8"/>
-          <p:cNvSpPr/>
-          <p:nvPr/>
-        </p:nvSpPr>
-        <p:spPr>
-          <a:xfrm>
-            <a:off x="10515600" y="3733800"/>
-            <a:ext cx="863600" cy="863600"/>
-          </a:xfrm>
-          <a:prstGeom prst="rect">
-            <a:avLst/>
-          </a:prstGeom>
-          <a:solidFill>
-            <a:srgbClr val="6C83B5"/>
-          </a:solidFill>
-          <a:ln/>
-        </p:spPr>
-        <p:txBody>
-          <a:bodyPr/>
-          <a:lstStyle/>
-          <a:p>
-            <a:pPr marL="0" marR="0" lvl="0" indent="0" algn="l" defTabSz="914400" rtl="0" eaLnBrk="1" fontAlgn="auto" latinLnBrk="0" hangingPunct="1">
-              <a:lnSpc>
-                <a:spcPct val="100000"/>
-              </a:lnSpc>
-              <a:spcBef>
-                <a:spcPts val="0"/>
-              </a:spcBef>
-              <a:spcAft>
-                <a:spcPts val="0"/>
-              </a:spcAft>
-              <a:buClrTx/>
-              <a:buSzTx/>
-              <a:buFontTx/>
-              <a:buNone/>
-              <a:tabLst/>
-              <a:defRPr/>
-            </a:pPr>
-            <a:endParaRPr kumimoji="0" lang="en-CA" sz="1800" b="0" i="0" u="none" strike="noStrike" kern="1200" cap="none" spc="0" normalizeH="0" baseline="0" noProof="0">
-              <a:ln>
-                <a:noFill/>
-              </a:ln>
-              <a:solidFill>
-                <a:srgbClr val="2B2B30"/>
-              </a:solidFill>
-              <a:effectLst/>
-              <a:uLnTx/>
-              <a:uFillTx/>
-              <a:latin typeface="Public Sans"/>
-              <a:ea typeface="+mn-ea"/>
-              <a:cs typeface="+mn-cs"/>
-            </a:endParaRPr>
-          </a:p>
-        </p:txBody>
-      </p:sp>
-      <p:sp>
-        <p:nvSpPr>
-          <p:cNvPr id="11" name="Text 9"/>
-          <p:cNvSpPr>
-            <a:spLocks noGrp="1"/>
-          </p:cNvSpPr>
-          <p:nvPr>
-            <p:ph type="title"/>
-          </p:nvPr>
-        </p:nvSpPr>
-        <p:spPr>
-          <a:xfrm>
-            <a:off x="812800" y="2771142"/>
-            <a:ext cx="7194550" cy="695960"/>
-          </a:xfrm>
-          <a:prstGeom prst="rect">
-            <a:avLst/>
-          </a:prstGeom>
-          <a:noFill/>
-          <a:ln/>
-        </p:spPr>
-        <p:txBody>
-          <a:bodyPr wrap="square" lIns="0" tIns="0" rIns="0" bIns="0" rtlCol="0" anchor="t">
-            <a:normAutofit/>
-          </a:bodyPr>
-          <a:lstStyle/>
-          <a:p>
-            <a:pPr marL="0" indent="0" algn="l">
-              <a:lnSpc>
-                <a:spcPts val="5280"/>
-              </a:lnSpc>
-              <a:buNone/>
-            </a:pPr>
-            <a:r>
-              <a:rPr lang="en-US" sz="4800" b="1" i="0" dirty="0">
-                <a:solidFill>
-                  <a:srgbClr val="F4EEE3"/>
-                </a:solidFill>
-                <a:latin typeface="Libre Baskerville" pitchFamily="18" charset="0"/>
-                <a:ea typeface="Libre Baskerville" pitchFamily="18" charset="-122"/>
-                <a:cs typeface="Libre Baskerville" pitchFamily="18" charset="-120"/>
-              </a:rPr>
-              <a:t>Thank you</a:t>
-            </a:r>
-            <a:endParaRPr lang="en-US" sz="4800" dirty="0"/>
-          </a:p>
-        </p:txBody>
-      </p:sp>
-      <p:sp>
-        <p:nvSpPr>
-          <p:cNvPr id="12" name="Text 10"/>
-          <p:cNvSpPr/>
-          <p:nvPr/>
-        </p:nvSpPr>
-        <p:spPr>
-          <a:xfrm>
-            <a:off x="812800" y="3695700"/>
-            <a:ext cx="7194550" cy="416560"/>
-          </a:xfrm>
-          <a:prstGeom prst="rect">
-            <a:avLst/>
-          </a:prstGeom>
-          <a:noFill/>
-          <a:ln/>
-        </p:spPr>
-        <p:txBody>
-          <a:bodyPr wrap="square" lIns="0" tIns="0" rIns="0" bIns="0" rtlCol="0" anchor="t">
-            <a:normAutofit/>
-          </a:bodyPr>
-          <a:lstStyle/>
-          <a:p>
-            <a:pPr marL="0" marR="0" lvl="0" indent="0" algn="l" defTabSz="914400" rtl="0" eaLnBrk="1" fontAlgn="auto" latinLnBrk="0" hangingPunct="1">
-              <a:lnSpc>
-                <a:spcPts val="3080"/>
-              </a:lnSpc>
-              <a:spcBef>
-                <a:spcPts val="0"/>
-              </a:spcBef>
-              <a:spcAft>
-                <a:spcPts val="0"/>
-              </a:spcAft>
-              <a:buClrTx/>
-              <a:buSzTx/>
-              <a:buFontTx/>
-              <a:buNone/>
-              <a:tabLst/>
-              <a:defRPr/>
-            </a:pPr>
-            <a:r>
-              <a:rPr kumimoji="0" lang="en-US" sz="2200" b="0" i="0" u="none" strike="noStrike" kern="1200" cap="none" spc="0" normalizeH="0" baseline="0" noProof="0" dirty="0">
-                <a:ln>
-                  <a:noFill/>
-                </a:ln>
-                <a:solidFill>
-                  <a:srgbClr val="E39BBE"/>
-                </a:solidFill>
-                <a:effectLst/>
-                <a:uLnTx/>
-                <a:uFillTx/>
-                <a:latin typeface="Public Sans" pitchFamily="34" charset="0"/>
-                <a:ea typeface="Public Sans" pitchFamily="34" charset="-122"/>
-                <a:cs typeface="Public Sans" pitchFamily="34" charset="-120"/>
-              </a:rPr>
-              <a:t>Questions?</a:t>
-            </a:r>
-            <a:endParaRPr kumimoji="0" lang="en-US" sz="2200" b="0" i="0" u="none" strike="noStrike" kern="1200" cap="none" spc="0" normalizeH="0" baseline="0" noProof="0" dirty="0">
-              <a:ln>
-                <a:noFill/>
-              </a:ln>
-              <a:solidFill>
-                <a:srgbClr val="2B2B30"/>
-              </a:solidFill>
-              <a:effectLst/>
-              <a:uLnTx/>
-              <a:uFillTx/>
-              <a:ea typeface="+mn-ea"/>
-              <a:cs typeface="+mn-cs"/>
-            </a:endParaRPr>
-          </a:p>
-        </p:txBody>
-      </p:sp>
-      <p:sp>
-        <p:nvSpPr>
-          <p:cNvPr id="13" name="Text 11"/>
-          <p:cNvSpPr/>
-          <p:nvPr/>
-        </p:nvSpPr>
-        <p:spPr>
-          <a:xfrm>
-            <a:off x="812800" y="5999479"/>
-            <a:ext cx="7194550" cy="274320"/>
-          </a:xfrm>
-          <a:prstGeom prst="rect">
-            <a:avLst/>
-          </a:prstGeom>
-          <a:noFill/>
-          <a:ln/>
-        </p:spPr>
-        <p:txBody>
-          <a:bodyPr wrap="square" lIns="0" tIns="0" rIns="0" bIns="0" rtlCol="0" anchor="t">
-            <a:normAutofit/>
-          </a:bodyPr>
-          <a:lstStyle/>
-          <a:p>
-            <a:pPr marL="0" marR="0" lvl="0" indent="0" algn="l" defTabSz="914400" rtl="0" eaLnBrk="1" fontAlgn="auto" latinLnBrk="0" hangingPunct="1">
-              <a:lnSpc>
-                <a:spcPts val="1960"/>
-              </a:lnSpc>
-              <a:spcBef>
-                <a:spcPts val="0"/>
-              </a:spcBef>
-              <a:spcAft>
-                <a:spcPts val="0"/>
-              </a:spcAft>
-              <a:buClrTx/>
-              <a:buSzTx/>
-              <a:buFontTx/>
-              <a:buNone/>
-              <a:tabLst/>
-              <a:defRPr/>
-            </a:pPr>
-            <a:endParaRPr kumimoji="0" lang="en-US" sz="1400" b="0" i="0" u="none" strike="noStrike" kern="1200" cap="none" spc="0" normalizeH="0" baseline="0" noProof="0" dirty="0">
-              <a:ln>
-                <a:noFill/>
-              </a:ln>
-              <a:solidFill>
-                <a:srgbClr val="2B2B30"/>
-              </a:solidFill>
-              <a:effectLst/>
-              <a:uLnTx/>
-              <a:uFillTx/>
-              <a:latin typeface="Public Sans"/>
-              <a:ea typeface="+mn-ea"/>
-              <a:cs typeface="+mn-cs"/>
-            </a:endParaRPr>
           </a:p>
         </p:txBody>
       </p:sp>
@@ -6210,1213 +5397,6 @@
             <a:spLocks noGrp="1"/>
           </p:cNvSpPr>
           <p:nvPr>
-            <p:ph type="title" idx="100" hasCustomPrompt="1"/>
-          </p:nvPr>
-        </p:nvSpPr>
-        <p:spPr>
-          <a:xfrm>
-            <a:off x="548640" y="411480"/>
-            <a:ext cx="11094415" cy="731520"/>
-          </a:xfrm>
-          <a:prstGeom prst="rect">
-            <a:avLst/>
-          </a:prstGeom>
-          <a:noFill/>
-          <a:ln/>
-        </p:spPr>
-        <p:txBody>
-          <a:bodyPr wrap="square" lIns="0" tIns="0" rIns="0" bIns="0" rtlCol="0" anchor="ctr"/>
-          <a:lstStyle/>
-          <a:p>
-            <a:pPr marL="0" indent="0" algn="l">
-              <a:buNone/>
-            </a:pPr>
-            <a:r>
-              <a:rPr lang="en-US" sz="3200" b="1" dirty="0">
-                <a:solidFill>
-                  <a:srgbClr val="2B2B30"/>
-                </a:solidFill>
-                <a:latin typeface="Libre Baskerville" pitchFamily="34" charset="0"/>
-                <a:ea typeface="Libre Baskerville" pitchFamily="34" charset="-122"/>
-                <a:cs typeface="Libre Baskerville" pitchFamily="34" charset="-120"/>
-              </a:rPr>
-              <a:t>Data wrangling and cleaning</a:t>
-            </a:r>
-            <a:endParaRPr lang="en-US" sz="3200" dirty="0"/>
-          </a:p>
-        </p:txBody>
-      </p:sp>
-      <p:sp>
-        <p:nvSpPr>
-          <p:cNvPr id="3" name="step_card_0"/>
-          <p:cNvSpPr/>
-          <p:nvPr/>
-        </p:nvSpPr>
-        <p:spPr>
-          <a:xfrm>
-            <a:off x="548640" y="1325880"/>
-            <a:ext cx="3511296" cy="2377440"/>
-          </a:xfrm>
-          <a:prstGeom prst="roundRect">
-            <a:avLst>
-              <a:gd name="adj" fmla="val 4615"/>
-            </a:avLst>
-          </a:prstGeom>
-          <a:solidFill>
-            <a:srgbClr val="FFFFFF"/>
-          </a:solidFill>
-          <a:ln w="12700">
-            <a:solidFill>
-              <a:srgbClr val="E2DDD6"/>
-            </a:solidFill>
-            <a:prstDash val="solid"/>
-          </a:ln>
-        </p:spPr>
-        <p:txBody>
-          <a:bodyPr/>
-          <a:lstStyle/>
-          <a:p>
-            <a:endParaRPr lang="en-CA"/>
-          </a:p>
-        </p:txBody>
-      </p:sp>
-      <p:sp>
-        <p:nvSpPr>
-          <p:cNvPr id="4" name="step_num_0"/>
-          <p:cNvSpPr/>
-          <p:nvPr/>
-        </p:nvSpPr>
-        <p:spPr>
-          <a:xfrm>
-            <a:off x="777240" y="1554480"/>
-            <a:ext cx="384048" cy="384048"/>
-          </a:xfrm>
-          <a:prstGeom prst="ellipse">
-            <a:avLst/>
-          </a:prstGeom>
-          <a:solidFill>
-            <a:srgbClr val="B4467E"/>
-          </a:solidFill>
-          <a:ln w="12700">
-            <a:solidFill>
-              <a:srgbClr val="B4467E"/>
-            </a:solidFill>
-            <a:prstDash val="solid"/>
-          </a:ln>
-        </p:spPr>
-        <p:txBody>
-          <a:bodyPr/>
-          <a:lstStyle/>
-          <a:p>
-            <a:endParaRPr lang="en-CA"/>
-          </a:p>
-        </p:txBody>
-      </p:sp>
-      <p:sp>
-        <p:nvSpPr>
-          <p:cNvPr id="5" name="Text 3"/>
-          <p:cNvSpPr txBox="1"/>
-          <p:nvPr/>
-        </p:nvSpPr>
-        <p:spPr>
-          <a:xfrm>
-            <a:off x="777240" y="1554480"/>
-            <a:ext cx="384048" cy="384048"/>
-          </a:xfrm>
-          <a:prstGeom prst="rect">
-            <a:avLst/>
-          </a:prstGeom>
-          <a:noFill/>
-          <a:ln/>
-        </p:spPr>
-        <p:txBody>
-          <a:bodyPr wrap="square" lIns="0" tIns="0" rIns="0" bIns="0" rtlCol="0" anchor="ctr"/>
-          <a:lstStyle/>
-          <a:p>
-            <a:pPr marL="0" indent="0" algn="ctr">
-              <a:buNone/>
-            </a:pPr>
-            <a:r>
-              <a:rPr lang="en-US" sz="1400" b="1" dirty="0">
-                <a:solidFill>
-                  <a:srgbClr val="FFFFFF"/>
-                </a:solidFill>
-                <a:latin typeface="Public Sans" pitchFamily="34" charset="0"/>
-                <a:ea typeface="Public Sans" pitchFamily="34" charset="-122"/>
-                <a:cs typeface="Public Sans" pitchFamily="34" charset="-120"/>
-              </a:rPr>
-              <a:t>1</a:t>
-            </a:r>
-            <a:endParaRPr lang="en-US" sz="1400" dirty="0"/>
-          </a:p>
-        </p:txBody>
-      </p:sp>
-      <p:sp>
-        <p:nvSpPr>
-          <p:cNvPr id="6" name="Text 4"/>
-          <p:cNvSpPr txBox="1"/>
-          <p:nvPr/>
-        </p:nvSpPr>
-        <p:spPr>
-          <a:xfrm>
-            <a:off x="1280160" y="1554480"/>
-            <a:ext cx="2606040" cy="384048"/>
-          </a:xfrm>
-          <a:prstGeom prst="rect">
-            <a:avLst/>
-          </a:prstGeom>
-          <a:noFill/>
-          <a:ln/>
-        </p:spPr>
-        <p:txBody>
-          <a:bodyPr wrap="square" lIns="0" tIns="0" rIns="0" bIns="0" rtlCol="0" anchor="ctr"/>
-          <a:lstStyle/>
-          <a:p>
-            <a:pPr marL="0" indent="0">
-              <a:buNone/>
-            </a:pPr>
-            <a:r>
-              <a:rPr lang="en-US" sz="1700" b="1" dirty="0">
-                <a:solidFill>
-                  <a:srgbClr val="2B2B30"/>
-                </a:solidFill>
-                <a:latin typeface="Public Sans" pitchFamily="34" charset="0"/>
-                <a:ea typeface="Public Sans" pitchFamily="34" charset="-122"/>
-                <a:cs typeface="Public Sans" pitchFamily="34" charset="-120"/>
-              </a:rPr>
-              <a:t>Located each incident</a:t>
-            </a:r>
-            <a:endParaRPr lang="en-US" sz="1700" dirty="0"/>
-          </a:p>
-        </p:txBody>
-      </p:sp>
-      <p:sp>
-        <p:nvSpPr>
-          <p:cNvPr id="7" name="Text 5"/>
-          <p:cNvSpPr txBox="1"/>
-          <p:nvPr/>
-        </p:nvSpPr>
-        <p:spPr>
-          <a:xfrm>
-            <a:off x="777240" y="2103120"/>
-            <a:ext cx="3054096" cy="1463040"/>
-          </a:xfrm>
-          <a:prstGeom prst="rect">
-            <a:avLst/>
-          </a:prstGeom>
-          <a:noFill/>
-          <a:ln/>
-        </p:spPr>
-        <p:txBody>
-          <a:bodyPr wrap="square" lIns="0" tIns="0" rIns="0" bIns="0" rtlCol="0" anchor="t"/>
-          <a:lstStyle/>
-          <a:p>
-            <a:r>
-              <a:rPr lang="en-CA" sz="1400" dirty="0">
-                <a:solidFill>
-                  <a:schemeClr val="tx1">
-                    <a:lumMod val="75000"/>
-                    <a:lumOff val="25000"/>
-                  </a:schemeClr>
-                </a:solidFill>
-              </a:rPr>
-              <a:t>Used </a:t>
-            </a:r>
-            <a:r>
-              <a:rPr lang="en-CA" sz="1400" dirty="0" err="1">
-                <a:solidFill>
-                  <a:schemeClr val="tx1">
-                    <a:lumMod val="75000"/>
-                    <a:lumOff val="25000"/>
-                  </a:schemeClr>
-                </a:solidFill>
-              </a:rPr>
-              <a:t>GeoPandas</a:t>
-            </a:r>
-            <a:r>
-              <a:rPr lang="en-CA" sz="1400" dirty="0">
-                <a:solidFill>
-                  <a:schemeClr val="tx1">
-                    <a:lumMod val="75000"/>
-                    <a:lumOff val="25000"/>
-                  </a:schemeClr>
-                </a:solidFill>
-              </a:rPr>
-              <a:t> in Python to read each area’s boundary outline and check which one contains each incident’s map point. 785 fall outside every area. The outlines also became the Shape Map.</a:t>
-            </a:r>
-            <a:endParaRPr lang="en-US" sz="1400" dirty="0">
-              <a:solidFill>
-                <a:schemeClr val="tx1">
-                  <a:lumMod val="75000"/>
-                  <a:lumOff val="25000"/>
-                </a:schemeClr>
-              </a:solidFill>
-            </a:endParaRPr>
-          </a:p>
-        </p:txBody>
-      </p:sp>
-      <p:sp>
-        <p:nvSpPr>
-          <p:cNvPr id="8" name="step_card_1"/>
-          <p:cNvSpPr/>
-          <p:nvPr/>
-        </p:nvSpPr>
-        <p:spPr>
-          <a:xfrm>
-            <a:off x="4338828" y="1325880"/>
-            <a:ext cx="3511296" cy="2377440"/>
-          </a:xfrm>
-          <a:prstGeom prst="roundRect">
-            <a:avLst>
-              <a:gd name="adj" fmla="val 4615"/>
-            </a:avLst>
-          </a:prstGeom>
-          <a:solidFill>
-            <a:srgbClr val="FFFFFF"/>
-          </a:solidFill>
-          <a:ln w="12700">
-            <a:solidFill>
-              <a:srgbClr val="E2DDD6"/>
-            </a:solidFill>
-            <a:prstDash val="solid"/>
-          </a:ln>
-        </p:spPr>
-        <p:txBody>
-          <a:bodyPr/>
-          <a:lstStyle/>
-          <a:p>
-            <a:endParaRPr lang="en-CA"/>
-          </a:p>
-        </p:txBody>
-      </p:sp>
-      <p:sp>
-        <p:nvSpPr>
-          <p:cNvPr id="9" name="step_num_1"/>
-          <p:cNvSpPr/>
-          <p:nvPr/>
-        </p:nvSpPr>
-        <p:spPr>
-          <a:xfrm>
-            <a:off x="4567428" y="1554480"/>
-            <a:ext cx="384048" cy="384048"/>
-          </a:xfrm>
-          <a:prstGeom prst="ellipse">
-            <a:avLst/>
-          </a:prstGeom>
-          <a:solidFill>
-            <a:srgbClr val="B4467E"/>
-          </a:solidFill>
-          <a:ln w="12700">
-            <a:solidFill>
-              <a:srgbClr val="B4467E"/>
-            </a:solidFill>
-            <a:prstDash val="solid"/>
-          </a:ln>
-        </p:spPr>
-        <p:txBody>
-          <a:bodyPr/>
-          <a:lstStyle/>
-          <a:p>
-            <a:endParaRPr lang="en-CA"/>
-          </a:p>
-        </p:txBody>
-      </p:sp>
-      <p:sp>
-        <p:nvSpPr>
-          <p:cNvPr id="10" name="Text 8"/>
-          <p:cNvSpPr txBox="1"/>
-          <p:nvPr/>
-        </p:nvSpPr>
-        <p:spPr>
-          <a:xfrm>
-            <a:off x="4567428" y="1554480"/>
-            <a:ext cx="384048" cy="384048"/>
-          </a:xfrm>
-          <a:prstGeom prst="rect">
-            <a:avLst/>
-          </a:prstGeom>
-          <a:noFill/>
-          <a:ln/>
-        </p:spPr>
-        <p:txBody>
-          <a:bodyPr wrap="square" lIns="0" tIns="0" rIns="0" bIns="0" rtlCol="0" anchor="ctr"/>
-          <a:lstStyle/>
-          <a:p>
-            <a:pPr marL="0" indent="0" algn="ctr">
-              <a:buNone/>
-            </a:pPr>
-            <a:r>
-              <a:rPr lang="en-US" sz="1400" b="1" dirty="0">
-                <a:solidFill>
-                  <a:srgbClr val="FFFFFF"/>
-                </a:solidFill>
-                <a:latin typeface="Public Sans" pitchFamily="34" charset="0"/>
-                <a:ea typeface="Public Sans" pitchFamily="34" charset="-122"/>
-                <a:cs typeface="Public Sans" pitchFamily="34" charset="-120"/>
-              </a:rPr>
-              <a:t>2</a:t>
-            </a:r>
-            <a:endParaRPr lang="en-US" sz="1400" dirty="0"/>
-          </a:p>
-        </p:txBody>
-      </p:sp>
-      <p:sp>
-        <p:nvSpPr>
-          <p:cNvPr id="11" name="Text 9"/>
-          <p:cNvSpPr txBox="1"/>
-          <p:nvPr/>
-        </p:nvSpPr>
-        <p:spPr>
-          <a:xfrm>
-            <a:off x="5070348" y="1554480"/>
-            <a:ext cx="2606040" cy="384048"/>
-          </a:xfrm>
-          <a:prstGeom prst="rect">
-            <a:avLst/>
-          </a:prstGeom>
-          <a:noFill/>
-          <a:ln/>
-        </p:spPr>
-        <p:txBody>
-          <a:bodyPr wrap="square" lIns="0" tIns="0" rIns="0" bIns="0" rtlCol="0" anchor="ctr"/>
-          <a:lstStyle/>
-          <a:p>
-            <a:pPr marL="0" indent="0">
-              <a:buNone/>
-            </a:pPr>
-            <a:r>
-              <a:rPr lang="en-US" sz="1700" b="1" dirty="0">
-                <a:solidFill>
-                  <a:srgbClr val="2B2B30"/>
-                </a:solidFill>
-                <a:latin typeface="Public Sans" pitchFamily="34" charset="0"/>
-                <a:ea typeface="Public Sans" pitchFamily="34" charset="-122"/>
-                <a:cs typeface="Public Sans" pitchFamily="34" charset="-120"/>
-              </a:rPr>
-              <a:t>Tidied the census data</a:t>
-            </a:r>
-            <a:endParaRPr lang="en-US" sz="1700" dirty="0"/>
-          </a:p>
-        </p:txBody>
-      </p:sp>
-      <p:sp>
-        <p:nvSpPr>
-          <p:cNvPr id="12" name="Text 10"/>
-          <p:cNvSpPr txBox="1"/>
-          <p:nvPr/>
-        </p:nvSpPr>
-        <p:spPr>
-          <a:xfrm>
-            <a:off x="4567428" y="2103120"/>
-            <a:ext cx="3054096" cy="1463040"/>
-          </a:xfrm>
-          <a:prstGeom prst="rect">
-            <a:avLst/>
-          </a:prstGeom>
-          <a:noFill/>
-          <a:ln/>
-        </p:spPr>
-        <p:txBody>
-          <a:bodyPr wrap="square" lIns="0" tIns="0" rIns="0" bIns="0" rtlCol="0" anchor="t"/>
-          <a:lstStyle/>
-          <a:p>
-            <a:pPr marL="0" indent="0">
-              <a:lnSpc>
-                <a:spcPct val="110000"/>
-              </a:lnSpc>
-              <a:buNone/>
-            </a:pPr>
-            <a:r>
-              <a:rPr lang="en-US" sz="1400" dirty="0">
-                <a:solidFill>
-                  <a:srgbClr val="4A4A52"/>
-                </a:solidFill>
-                <a:latin typeface="Public Sans" pitchFamily="34" charset="0"/>
-                <a:ea typeface="Public Sans" pitchFamily="34" charset="-122"/>
-                <a:cs typeface="Public Sans" pitchFamily="34" charset="-120"/>
-              </a:rPr>
-              <a:t>Reshaped the file from one row per measure into one row per area, removed commas from numbers and stored percentages as decimals.</a:t>
-            </a:r>
-            <a:endParaRPr lang="en-US" sz="1400" dirty="0"/>
-          </a:p>
-        </p:txBody>
-      </p:sp>
-      <p:sp>
-        <p:nvSpPr>
-          <p:cNvPr id="13" name="step_card_2"/>
-          <p:cNvSpPr/>
-          <p:nvPr/>
-        </p:nvSpPr>
-        <p:spPr>
-          <a:xfrm>
-            <a:off x="8129016" y="1325880"/>
-            <a:ext cx="3511296" cy="2377440"/>
-          </a:xfrm>
-          <a:prstGeom prst="roundRect">
-            <a:avLst>
-              <a:gd name="adj" fmla="val 4615"/>
-            </a:avLst>
-          </a:prstGeom>
-          <a:solidFill>
-            <a:srgbClr val="FFFFFF"/>
-          </a:solidFill>
-          <a:ln w="12700">
-            <a:solidFill>
-              <a:srgbClr val="E2DDD6"/>
-            </a:solidFill>
-            <a:prstDash val="solid"/>
-          </a:ln>
-        </p:spPr>
-        <p:txBody>
-          <a:bodyPr/>
-          <a:lstStyle/>
-          <a:p>
-            <a:endParaRPr lang="en-CA"/>
-          </a:p>
-        </p:txBody>
-      </p:sp>
-      <p:sp>
-        <p:nvSpPr>
-          <p:cNvPr id="14" name="step_num_2"/>
-          <p:cNvSpPr/>
-          <p:nvPr/>
-        </p:nvSpPr>
-        <p:spPr>
-          <a:xfrm>
-            <a:off x="8357616" y="1554480"/>
-            <a:ext cx="384048" cy="384048"/>
-          </a:xfrm>
-          <a:prstGeom prst="ellipse">
-            <a:avLst/>
-          </a:prstGeom>
-          <a:solidFill>
-            <a:srgbClr val="B4467E"/>
-          </a:solidFill>
-          <a:ln w="12700">
-            <a:solidFill>
-              <a:srgbClr val="B4467E"/>
-            </a:solidFill>
-            <a:prstDash val="solid"/>
-          </a:ln>
-        </p:spPr>
-        <p:txBody>
-          <a:bodyPr/>
-          <a:lstStyle/>
-          <a:p>
-            <a:endParaRPr lang="en-CA"/>
-          </a:p>
-        </p:txBody>
-      </p:sp>
-      <p:sp>
-        <p:nvSpPr>
-          <p:cNvPr id="15" name="Text 13"/>
-          <p:cNvSpPr txBox="1"/>
-          <p:nvPr/>
-        </p:nvSpPr>
-        <p:spPr>
-          <a:xfrm>
-            <a:off x="8357616" y="1554480"/>
-            <a:ext cx="384048" cy="384048"/>
-          </a:xfrm>
-          <a:prstGeom prst="rect">
-            <a:avLst/>
-          </a:prstGeom>
-          <a:noFill/>
-          <a:ln/>
-        </p:spPr>
-        <p:txBody>
-          <a:bodyPr wrap="square" lIns="0" tIns="0" rIns="0" bIns="0" rtlCol="0" anchor="ctr"/>
-          <a:lstStyle/>
-          <a:p>
-            <a:pPr marL="0" indent="0" algn="ctr">
-              <a:buNone/>
-            </a:pPr>
-            <a:r>
-              <a:rPr lang="en-US" sz="1400" b="1" dirty="0">
-                <a:solidFill>
-                  <a:srgbClr val="FFFFFF"/>
-                </a:solidFill>
-                <a:latin typeface="Public Sans" pitchFamily="34" charset="0"/>
-                <a:ea typeface="Public Sans" pitchFamily="34" charset="-122"/>
-                <a:cs typeface="Public Sans" pitchFamily="34" charset="-120"/>
-              </a:rPr>
-              <a:t>3</a:t>
-            </a:r>
-            <a:endParaRPr lang="en-US" sz="1400" dirty="0"/>
-          </a:p>
-        </p:txBody>
-      </p:sp>
-      <p:sp>
-        <p:nvSpPr>
-          <p:cNvPr id="16" name="Text 14"/>
-          <p:cNvSpPr txBox="1"/>
-          <p:nvPr/>
-        </p:nvSpPr>
-        <p:spPr>
-          <a:xfrm>
-            <a:off x="8860536" y="1554480"/>
-            <a:ext cx="2606040" cy="384048"/>
-          </a:xfrm>
-          <a:prstGeom prst="rect">
-            <a:avLst/>
-          </a:prstGeom>
-          <a:noFill/>
-          <a:ln/>
-        </p:spPr>
-        <p:txBody>
-          <a:bodyPr wrap="square" lIns="0" tIns="0" rIns="0" bIns="0" rtlCol="0" anchor="ctr"/>
-          <a:lstStyle/>
-          <a:p>
-            <a:pPr marL="0" indent="0">
-              <a:buNone/>
-            </a:pPr>
-            <a:r>
-              <a:rPr lang="en-US" sz="1700" b="1" dirty="0">
-                <a:solidFill>
-                  <a:srgbClr val="2B2B30"/>
-                </a:solidFill>
-                <a:latin typeface="Public Sans" pitchFamily="34" charset="0"/>
-                <a:ea typeface="Public Sans" pitchFamily="34" charset="-122"/>
-                <a:cs typeface="Public Sans" pitchFamily="34" charset="-120"/>
-              </a:rPr>
-              <a:t>Sorted incidents</a:t>
-            </a:r>
-            <a:endParaRPr lang="en-US" sz="1700" dirty="0"/>
-          </a:p>
-        </p:txBody>
-      </p:sp>
-      <p:sp>
-        <p:nvSpPr>
-          <p:cNvPr id="17" name="Text 15"/>
-          <p:cNvSpPr txBox="1"/>
-          <p:nvPr/>
-        </p:nvSpPr>
-        <p:spPr>
-          <a:xfrm>
-            <a:off x="8357616" y="2103120"/>
-            <a:ext cx="3054096" cy="1463040"/>
-          </a:xfrm>
-          <a:prstGeom prst="rect">
-            <a:avLst/>
-          </a:prstGeom>
-          <a:noFill/>
-          <a:ln/>
-        </p:spPr>
-        <p:txBody>
-          <a:bodyPr wrap="square" lIns="0" tIns="0" rIns="0" bIns="0" rtlCol="0" anchor="t"/>
-          <a:lstStyle/>
-          <a:p>
-            <a:pPr marL="0" indent="0">
-              <a:lnSpc>
-                <a:spcPct val="110000"/>
-              </a:lnSpc>
-              <a:buNone/>
-            </a:pPr>
-            <a:r>
-              <a:rPr lang="en-US" sz="1400" dirty="0">
-                <a:solidFill>
-                  <a:srgbClr val="4A4A52"/>
-                </a:solidFill>
-                <a:latin typeface="Public Sans" pitchFamily="34" charset="0"/>
-                <a:ea typeface="Public Sans" pitchFamily="34" charset="-122"/>
-                <a:cs typeface="Public Sans" pitchFamily="34" charset="-120"/>
-              </a:rPr>
-              <a:t>Set each incident’s type from keywords in its description, and flagged highway incidents by street name, such as Deerfoot and Glenmore.</a:t>
-            </a:r>
-            <a:endParaRPr lang="en-US" sz="1400" dirty="0"/>
-          </a:p>
-        </p:txBody>
-      </p:sp>
-      <p:sp>
-        <p:nvSpPr>
-          <p:cNvPr id="18" name="step_card_3"/>
-          <p:cNvSpPr/>
-          <p:nvPr/>
-        </p:nvSpPr>
-        <p:spPr>
-          <a:xfrm>
-            <a:off x="548640" y="3931920"/>
-            <a:ext cx="3511296" cy="2377440"/>
-          </a:xfrm>
-          <a:prstGeom prst="roundRect">
-            <a:avLst>
-              <a:gd name="adj" fmla="val 4615"/>
-            </a:avLst>
-          </a:prstGeom>
-          <a:solidFill>
-            <a:srgbClr val="FFFFFF"/>
-          </a:solidFill>
-          <a:ln w="12700">
-            <a:solidFill>
-              <a:srgbClr val="E2DDD6"/>
-            </a:solidFill>
-            <a:prstDash val="solid"/>
-          </a:ln>
-        </p:spPr>
-        <p:txBody>
-          <a:bodyPr/>
-          <a:lstStyle/>
-          <a:p>
-            <a:endParaRPr lang="en-CA"/>
-          </a:p>
-        </p:txBody>
-      </p:sp>
-      <p:sp>
-        <p:nvSpPr>
-          <p:cNvPr id="19" name="step_num_3"/>
-          <p:cNvSpPr/>
-          <p:nvPr/>
-        </p:nvSpPr>
-        <p:spPr>
-          <a:xfrm>
-            <a:off x="777240" y="4160520"/>
-            <a:ext cx="384048" cy="384048"/>
-          </a:xfrm>
-          <a:prstGeom prst="ellipse">
-            <a:avLst/>
-          </a:prstGeom>
-          <a:solidFill>
-            <a:srgbClr val="4E6596"/>
-          </a:solidFill>
-          <a:ln w="12700">
-            <a:solidFill>
-              <a:srgbClr val="4E6596"/>
-            </a:solidFill>
-            <a:prstDash val="solid"/>
-          </a:ln>
-        </p:spPr>
-        <p:txBody>
-          <a:bodyPr/>
-          <a:lstStyle/>
-          <a:p>
-            <a:endParaRPr lang="en-CA"/>
-          </a:p>
-        </p:txBody>
-      </p:sp>
-      <p:sp>
-        <p:nvSpPr>
-          <p:cNvPr id="20" name="Text 18"/>
-          <p:cNvSpPr txBox="1"/>
-          <p:nvPr/>
-        </p:nvSpPr>
-        <p:spPr>
-          <a:xfrm>
-            <a:off x="777240" y="4160520"/>
-            <a:ext cx="384048" cy="384048"/>
-          </a:xfrm>
-          <a:prstGeom prst="rect">
-            <a:avLst/>
-          </a:prstGeom>
-          <a:noFill/>
-          <a:ln/>
-        </p:spPr>
-        <p:txBody>
-          <a:bodyPr wrap="square" lIns="0" tIns="0" rIns="0" bIns="0" rtlCol="0" anchor="ctr"/>
-          <a:lstStyle/>
-          <a:p>
-            <a:pPr marL="0" indent="0" algn="ctr">
-              <a:buNone/>
-            </a:pPr>
-            <a:r>
-              <a:rPr lang="en-US" sz="1400" b="1" dirty="0">
-                <a:solidFill>
-                  <a:srgbClr val="FFFFFF"/>
-                </a:solidFill>
-                <a:latin typeface="Public Sans" pitchFamily="34" charset="0"/>
-                <a:ea typeface="Public Sans" pitchFamily="34" charset="-122"/>
-                <a:cs typeface="Public Sans" pitchFamily="34" charset="-120"/>
-              </a:rPr>
-              <a:t>4</a:t>
-            </a:r>
-            <a:endParaRPr lang="en-US" sz="1400" dirty="0"/>
-          </a:p>
-        </p:txBody>
-      </p:sp>
-      <p:sp>
-        <p:nvSpPr>
-          <p:cNvPr id="21" name="Text 19"/>
-          <p:cNvSpPr txBox="1"/>
-          <p:nvPr/>
-        </p:nvSpPr>
-        <p:spPr>
-          <a:xfrm>
-            <a:off x="1280160" y="4160520"/>
-            <a:ext cx="2606040" cy="384048"/>
-          </a:xfrm>
-          <a:prstGeom prst="rect">
-            <a:avLst/>
-          </a:prstGeom>
-          <a:noFill/>
-          <a:ln/>
-        </p:spPr>
-        <p:txBody>
-          <a:bodyPr wrap="square" lIns="0" tIns="0" rIns="0" bIns="0" rtlCol="0" anchor="ctr"/>
-          <a:lstStyle/>
-          <a:p>
-            <a:pPr marL="0" indent="0">
-              <a:buNone/>
-            </a:pPr>
-            <a:r>
-              <a:rPr lang="en-US" sz="1700" b="1" dirty="0">
-                <a:solidFill>
-                  <a:srgbClr val="2B2B30"/>
-                </a:solidFill>
-                <a:latin typeface="Public Sans" pitchFamily="34" charset="0"/>
-                <a:ea typeface="Public Sans" pitchFamily="34" charset="-122"/>
-                <a:cs typeface="Public Sans" pitchFamily="34" charset="-120"/>
-              </a:rPr>
-              <a:t>Kept full years</a:t>
-            </a:r>
-            <a:endParaRPr lang="en-US" sz="1700" dirty="0"/>
-          </a:p>
-        </p:txBody>
-      </p:sp>
-      <p:sp>
-        <p:nvSpPr>
-          <p:cNvPr id="22" name="Text 20"/>
-          <p:cNvSpPr txBox="1"/>
-          <p:nvPr/>
-        </p:nvSpPr>
-        <p:spPr>
-          <a:xfrm>
-            <a:off x="777240" y="4709160"/>
-            <a:ext cx="3054096" cy="1463040"/>
-          </a:xfrm>
-          <a:prstGeom prst="rect">
-            <a:avLst/>
-          </a:prstGeom>
-          <a:noFill/>
-          <a:ln/>
-        </p:spPr>
-        <p:txBody>
-          <a:bodyPr wrap="square" lIns="0" tIns="0" rIns="0" bIns="0" rtlCol="0" anchor="t"/>
-          <a:lstStyle/>
-          <a:p>
-            <a:pPr marL="0" indent="0">
-              <a:lnSpc>
-                <a:spcPct val="110000"/>
-              </a:lnSpc>
-              <a:buNone/>
-            </a:pPr>
-            <a:r>
-              <a:rPr lang="en-US" sz="1400" dirty="0">
-                <a:solidFill>
-                  <a:srgbClr val="4A4A52"/>
-                </a:solidFill>
-                <a:latin typeface="Public Sans" pitchFamily="34" charset="0"/>
-                <a:ea typeface="Public Sans" pitchFamily="34" charset="-122"/>
-                <a:cs typeface="Public Sans" pitchFamily="34" charset="-120"/>
-              </a:rPr>
-              <a:t>Filtered to 2017–2025 in Power Query, dropping partial 2016 and 2026 data. 58,536 incidents remain; months with missing records are noted.</a:t>
-            </a:r>
-            <a:endParaRPr lang="en-US" sz="1400" dirty="0"/>
-          </a:p>
-        </p:txBody>
-      </p:sp>
-      <p:sp>
-        <p:nvSpPr>
-          <p:cNvPr id="23" name="step_card_4"/>
-          <p:cNvSpPr/>
-          <p:nvPr/>
-        </p:nvSpPr>
-        <p:spPr>
-          <a:xfrm>
-            <a:off x="4338828" y="3931920"/>
-            <a:ext cx="3511296" cy="2377440"/>
-          </a:xfrm>
-          <a:prstGeom prst="roundRect">
-            <a:avLst>
-              <a:gd name="adj" fmla="val 4615"/>
-            </a:avLst>
-          </a:prstGeom>
-          <a:solidFill>
-            <a:srgbClr val="FFFFFF"/>
-          </a:solidFill>
-          <a:ln w="12700">
-            <a:solidFill>
-              <a:srgbClr val="E2DDD6"/>
-            </a:solidFill>
-            <a:prstDash val="solid"/>
-          </a:ln>
-        </p:spPr>
-        <p:txBody>
-          <a:bodyPr/>
-          <a:lstStyle/>
-          <a:p>
-            <a:endParaRPr lang="en-CA"/>
-          </a:p>
-        </p:txBody>
-      </p:sp>
-      <p:sp>
-        <p:nvSpPr>
-          <p:cNvPr id="24" name="step_num_4"/>
-          <p:cNvSpPr/>
-          <p:nvPr/>
-        </p:nvSpPr>
-        <p:spPr>
-          <a:xfrm>
-            <a:off x="4567428" y="4160520"/>
-            <a:ext cx="384048" cy="384048"/>
-          </a:xfrm>
-          <a:prstGeom prst="ellipse">
-            <a:avLst/>
-          </a:prstGeom>
-          <a:solidFill>
-            <a:srgbClr val="4E6596"/>
-          </a:solidFill>
-          <a:ln w="12700">
-            <a:solidFill>
-              <a:srgbClr val="4E6596"/>
-            </a:solidFill>
-            <a:prstDash val="solid"/>
-          </a:ln>
-        </p:spPr>
-        <p:txBody>
-          <a:bodyPr/>
-          <a:lstStyle/>
-          <a:p>
-            <a:endParaRPr lang="en-CA"/>
-          </a:p>
-        </p:txBody>
-      </p:sp>
-      <p:sp>
-        <p:nvSpPr>
-          <p:cNvPr id="25" name="Text 23"/>
-          <p:cNvSpPr txBox="1"/>
-          <p:nvPr/>
-        </p:nvSpPr>
-        <p:spPr>
-          <a:xfrm>
-            <a:off x="4567428" y="4160520"/>
-            <a:ext cx="384048" cy="384048"/>
-          </a:xfrm>
-          <a:prstGeom prst="rect">
-            <a:avLst/>
-          </a:prstGeom>
-          <a:noFill/>
-          <a:ln/>
-        </p:spPr>
-        <p:txBody>
-          <a:bodyPr wrap="square" lIns="0" tIns="0" rIns="0" bIns="0" rtlCol="0" anchor="ctr"/>
-          <a:lstStyle/>
-          <a:p>
-            <a:pPr marL="0" indent="0" algn="ctr">
-              <a:buNone/>
-            </a:pPr>
-            <a:r>
-              <a:rPr lang="en-US" sz="1400" b="1" dirty="0">
-                <a:solidFill>
-                  <a:srgbClr val="FFFFFF"/>
-                </a:solidFill>
-                <a:latin typeface="Public Sans" pitchFamily="34" charset="0"/>
-                <a:ea typeface="Public Sans" pitchFamily="34" charset="-122"/>
-                <a:cs typeface="Public Sans" pitchFamily="34" charset="-120"/>
-              </a:rPr>
-              <a:t>5</a:t>
-            </a:r>
-            <a:endParaRPr lang="en-US" sz="1400" dirty="0"/>
-          </a:p>
-        </p:txBody>
-      </p:sp>
-      <p:sp>
-        <p:nvSpPr>
-          <p:cNvPr id="26" name="Text 24"/>
-          <p:cNvSpPr txBox="1"/>
-          <p:nvPr/>
-        </p:nvSpPr>
-        <p:spPr>
-          <a:xfrm>
-            <a:off x="5070348" y="4160520"/>
-            <a:ext cx="2606040" cy="384048"/>
-          </a:xfrm>
-          <a:prstGeom prst="rect">
-            <a:avLst/>
-          </a:prstGeom>
-          <a:noFill/>
-          <a:ln/>
-        </p:spPr>
-        <p:txBody>
-          <a:bodyPr wrap="square" lIns="0" tIns="0" rIns="0" bIns="0" rtlCol="0" anchor="ctr"/>
-          <a:lstStyle/>
-          <a:p>
-            <a:pPr marL="0" indent="0">
-              <a:buNone/>
-            </a:pPr>
-            <a:r>
-              <a:rPr lang="en-US" sz="1700" b="1" dirty="0">
-                <a:solidFill>
-                  <a:srgbClr val="2B2B30"/>
-                </a:solidFill>
-                <a:latin typeface="Public Sans" pitchFamily="34" charset="0"/>
-                <a:ea typeface="Public Sans" pitchFamily="34" charset="-122"/>
-                <a:cs typeface="Public Sans" pitchFamily="34" charset="-120"/>
-              </a:rPr>
-              <a:t>Made areas comparable</a:t>
-            </a:r>
-            <a:endParaRPr lang="en-US" sz="1700" dirty="0"/>
-          </a:p>
-        </p:txBody>
-      </p:sp>
-      <p:sp>
-        <p:nvSpPr>
-          <p:cNvPr id="27" name="Text 25"/>
-          <p:cNvSpPr txBox="1"/>
-          <p:nvPr/>
-        </p:nvSpPr>
-        <p:spPr>
-          <a:xfrm>
-            <a:off x="4567428" y="4709160"/>
-            <a:ext cx="3054096" cy="1463040"/>
-          </a:xfrm>
-          <a:prstGeom prst="rect">
-            <a:avLst/>
-          </a:prstGeom>
-          <a:noFill/>
-          <a:ln/>
-        </p:spPr>
-        <p:txBody>
-          <a:bodyPr wrap="square" lIns="0" tIns="0" rIns="0" bIns="0" rtlCol="0" anchor="t"/>
-          <a:lstStyle/>
-          <a:p>
-            <a:pPr marL="0" indent="0">
-              <a:lnSpc>
-                <a:spcPct val="110000"/>
-              </a:lnSpc>
-              <a:buNone/>
-            </a:pPr>
-            <a:r>
-              <a:rPr lang="en-US" sz="1400" dirty="0">
-                <a:solidFill>
-                  <a:srgbClr val="4A4A52"/>
-                </a:solidFill>
-                <a:latin typeface="Public Sans" pitchFamily="34" charset="0"/>
-                <a:ea typeface="Public Sans" pitchFamily="34" charset="-122"/>
-                <a:cs typeface="Public Sans" pitchFamily="34" charset="-120"/>
-              </a:rPr>
-              <a:t>Divided each area’s incidents by its 2021 population and nine years, counting only local roads in residential communities.</a:t>
-            </a:r>
-            <a:endParaRPr lang="en-US" sz="1400" dirty="0"/>
-          </a:p>
-        </p:txBody>
-      </p:sp>
-      <p:sp>
-        <p:nvSpPr>
-          <p:cNvPr id="28" name="step_card_5"/>
-          <p:cNvSpPr/>
-          <p:nvPr/>
-        </p:nvSpPr>
-        <p:spPr>
-          <a:xfrm>
-            <a:off x="8129016" y="3931920"/>
-            <a:ext cx="3511296" cy="2377440"/>
-          </a:xfrm>
-          <a:prstGeom prst="roundRect">
-            <a:avLst>
-              <a:gd name="adj" fmla="val 4615"/>
-            </a:avLst>
-          </a:prstGeom>
-          <a:solidFill>
-            <a:srgbClr val="FFFFFF"/>
-          </a:solidFill>
-          <a:ln w="12700">
-            <a:solidFill>
-              <a:srgbClr val="E2DDD6"/>
-            </a:solidFill>
-            <a:prstDash val="solid"/>
-          </a:ln>
-        </p:spPr>
-        <p:txBody>
-          <a:bodyPr/>
-          <a:lstStyle/>
-          <a:p>
-            <a:endParaRPr lang="en-CA"/>
-          </a:p>
-        </p:txBody>
-      </p:sp>
-      <p:sp>
-        <p:nvSpPr>
-          <p:cNvPr id="29" name="step_num_5"/>
-          <p:cNvSpPr/>
-          <p:nvPr/>
-        </p:nvSpPr>
-        <p:spPr>
-          <a:xfrm>
-            <a:off x="8357616" y="4160520"/>
-            <a:ext cx="384048" cy="384048"/>
-          </a:xfrm>
-          <a:prstGeom prst="ellipse">
-            <a:avLst/>
-          </a:prstGeom>
-          <a:solidFill>
-            <a:srgbClr val="4E6596"/>
-          </a:solidFill>
-          <a:ln w="12700">
-            <a:solidFill>
-              <a:srgbClr val="4E6596"/>
-            </a:solidFill>
-            <a:prstDash val="solid"/>
-          </a:ln>
-        </p:spPr>
-        <p:txBody>
-          <a:bodyPr/>
-          <a:lstStyle/>
-          <a:p>
-            <a:endParaRPr lang="en-CA"/>
-          </a:p>
-        </p:txBody>
-      </p:sp>
-      <p:sp>
-        <p:nvSpPr>
-          <p:cNvPr id="30" name="Text 28"/>
-          <p:cNvSpPr txBox="1"/>
-          <p:nvPr/>
-        </p:nvSpPr>
-        <p:spPr>
-          <a:xfrm>
-            <a:off x="8357616" y="4160520"/>
-            <a:ext cx="384048" cy="384048"/>
-          </a:xfrm>
-          <a:prstGeom prst="rect">
-            <a:avLst/>
-          </a:prstGeom>
-          <a:noFill/>
-          <a:ln/>
-        </p:spPr>
-        <p:txBody>
-          <a:bodyPr wrap="square" lIns="0" tIns="0" rIns="0" bIns="0" rtlCol="0" anchor="ctr"/>
-          <a:lstStyle/>
-          <a:p>
-            <a:pPr marL="0" indent="0" algn="ctr">
-              <a:buNone/>
-            </a:pPr>
-            <a:r>
-              <a:rPr lang="en-US" sz="1400" b="1" dirty="0">
-                <a:solidFill>
-                  <a:srgbClr val="FFFFFF"/>
-                </a:solidFill>
-                <a:latin typeface="Public Sans" pitchFamily="34" charset="0"/>
-                <a:ea typeface="Public Sans" pitchFamily="34" charset="-122"/>
-                <a:cs typeface="Public Sans" pitchFamily="34" charset="-120"/>
-              </a:rPr>
-              <a:t>6</a:t>
-            </a:r>
-            <a:endParaRPr lang="en-US" sz="1400" dirty="0"/>
-          </a:p>
-        </p:txBody>
-      </p:sp>
-      <p:sp>
-        <p:nvSpPr>
-          <p:cNvPr id="31" name="Text 29"/>
-          <p:cNvSpPr txBox="1"/>
-          <p:nvPr/>
-        </p:nvSpPr>
-        <p:spPr>
-          <a:xfrm>
-            <a:off x="8860536" y="4160520"/>
-            <a:ext cx="2606040" cy="384048"/>
-          </a:xfrm>
-          <a:prstGeom prst="rect">
-            <a:avLst/>
-          </a:prstGeom>
-          <a:noFill/>
-          <a:ln/>
-        </p:spPr>
-        <p:txBody>
-          <a:bodyPr wrap="square" lIns="0" tIns="0" rIns="0" bIns="0" rtlCol="0" anchor="ctr"/>
-          <a:lstStyle/>
-          <a:p>
-            <a:pPr marL="0" indent="0">
-              <a:buNone/>
-            </a:pPr>
-            <a:r>
-              <a:rPr lang="en-US" sz="1700" b="1" dirty="0">
-                <a:solidFill>
-                  <a:srgbClr val="2B2B30"/>
-                </a:solidFill>
-                <a:latin typeface="Public Sans" pitchFamily="34" charset="0"/>
-                <a:ea typeface="Public Sans" pitchFamily="34" charset="-122"/>
-                <a:cs typeface="Public Sans" pitchFamily="34" charset="-120"/>
-              </a:rPr>
-              <a:t>Key measures in DAX</a:t>
-            </a:r>
-            <a:endParaRPr lang="en-US" sz="1700" dirty="0"/>
-          </a:p>
-        </p:txBody>
-      </p:sp>
-      <p:sp>
-        <p:nvSpPr>
-          <p:cNvPr id="32" name="Text 30"/>
-          <p:cNvSpPr txBox="1"/>
-          <p:nvPr/>
-        </p:nvSpPr>
-        <p:spPr>
-          <a:xfrm>
-            <a:off x="8357616" y="4709160"/>
-            <a:ext cx="3054096" cy="1463040"/>
-          </a:xfrm>
-          <a:prstGeom prst="rect">
-            <a:avLst/>
-          </a:prstGeom>
-          <a:noFill/>
-          <a:ln/>
-        </p:spPr>
-        <p:txBody>
-          <a:bodyPr wrap="square" lIns="0" tIns="0" rIns="0" bIns="0" rtlCol="0" anchor="t"/>
-          <a:lstStyle/>
-          <a:p>
-            <a:pPr marL="0" indent="0">
-              <a:lnSpc>
-                <a:spcPct val="110000"/>
-              </a:lnSpc>
-              <a:buNone/>
-            </a:pPr>
-            <a:r>
-              <a:rPr lang="en-US" sz="1400" dirty="0">
-                <a:solidFill>
-                  <a:srgbClr val="4A4A52"/>
-                </a:solidFill>
-                <a:latin typeface="Public Sans" pitchFamily="34" charset="0"/>
-                <a:ea typeface="Public Sans" pitchFamily="34" charset="-122"/>
-                <a:cs typeface="Public Sans" pitchFamily="34" charset="-120"/>
-              </a:rPr>
-              <a:t>Wrote Key measures in DAX, such as rate vs. city average, busiest hour, monthly rate and how each neighbourhood trait tracks incident rates.</a:t>
-            </a:r>
-            <a:endParaRPr lang="en-US" sz="1400" dirty="0"/>
-          </a:p>
-        </p:txBody>
-      </p:sp>
-    </p:spTree>
-  </p:cSld>
-  <p:clrMapOvr>
-    <a:masterClrMapping/>
-  </p:clrMapOvr>
-</p:sld>
-</file>
-
-<file path=ppt/slides/slide6.xml><?xml version="1.0" encoding="utf-8"?>
-<p:sld xmlns:a="http://schemas.openxmlformats.org/drawingml/2006/main" xmlns:r="http://schemas.openxmlformats.org/officeDocument/2006/relationships" xmlns:p="http://schemas.openxmlformats.org/presentationml/2006/main">
-  <p:cSld>
-    <p:spTree>
-      <p:nvGrpSpPr>
-        <p:cNvPr id="1" name=""/>
-        <p:cNvGrpSpPr/>
-        <p:nvPr/>
-      </p:nvGrpSpPr>
-      <p:grpSpPr>
-        <a:xfrm>
-          <a:off x="0" y="0"/>
-          <a:ext cx="0" cy="0"/>
-          <a:chOff x="0" y="0"/>
-          <a:chExt cx="0" cy="0"/>
-        </a:xfrm>
-      </p:grpSpPr>
-      <p:sp>
-        <p:nvSpPr>
-          <p:cNvPr id="2" name="Text 0"/>
-          <p:cNvSpPr>
-            <a:spLocks noGrp="1"/>
-          </p:cNvSpPr>
-          <p:nvPr>
             <p:ph type="title"/>
           </p:nvPr>
         </p:nvSpPr>
@@ -8761,7 +6741,7 @@
 </p:sld>
 </file>
 
-<file path=ppt/slides/slide7.xml><?xml version="1.0" encoding="utf-8"?>
+<file path=ppt/slides/slide6.xml><?xml version="1.0" encoding="utf-8"?>
 <p:sld xmlns:a="http://schemas.openxmlformats.org/drawingml/2006/main" xmlns:r="http://schemas.openxmlformats.org/officeDocument/2006/relationships" xmlns:p="http://schemas.openxmlformats.org/presentationml/2006/main">
   <p:cSld>
     <p:bg>
@@ -9228,7 +7208,7 @@
 </p:sld>
 </file>
 
-<file path=ppt/slides/slide8.xml><?xml version="1.0" encoding="utf-8"?>
+<file path=ppt/slides/slide7.xml><?xml version="1.0" encoding="utf-8"?>
 <p:sld xmlns:a="http://schemas.openxmlformats.org/drawingml/2006/main" xmlns:r="http://schemas.openxmlformats.org/officeDocument/2006/relationships" xmlns:p="http://schemas.openxmlformats.org/presentationml/2006/main">
   <p:cSld>
     <p:spTree>
@@ -9983,7 +7963,7 @@
 </p:sld>
 </file>
 
-<file path=ppt/slides/slide9.xml><?xml version="1.0" encoding="utf-8"?>
+<file path=ppt/slides/slide8.xml><?xml version="1.0" encoding="utf-8"?>
 <p:sld xmlns:a="http://schemas.openxmlformats.org/drawingml/2006/main" xmlns:r="http://schemas.openxmlformats.org/officeDocument/2006/relationships" xmlns:p="http://schemas.openxmlformats.org/presentationml/2006/main">
   <p:cSld name="Slide 8">
     <p:spTree>
@@ -10188,6 +8168,730 @@
               <a:t> (55.5 vs. 35.0 per 100,000 residents a month). Fall and winter sit above average.</a:t>
             </a:r>
             <a:endParaRPr lang="en-US" sz="1700" dirty="0"/>
+          </a:p>
+        </p:txBody>
+      </p:sp>
+    </p:spTree>
+  </p:cSld>
+  <p:clrMapOvr>
+    <a:masterClrMapping/>
+  </p:clrMapOvr>
+</p:sld>
+</file>
+
+<file path=ppt/slides/slide9.xml><?xml version="1.0" encoding="utf-8"?>
+<p:sld xmlns:a="http://schemas.openxmlformats.org/drawingml/2006/main" xmlns:r="http://schemas.openxmlformats.org/officeDocument/2006/relationships" xmlns:p="http://schemas.openxmlformats.org/presentationml/2006/main">
+  <p:cSld>
+    <p:bg>
+      <p:bgPr>
+        <a:solidFill>
+          <a:srgbClr val="2B2B30"/>
+        </a:solidFill>
+        <a:effectLst/>
+      </p:bgPr>
+    </p:bg>
+    <p:spTree>
+      <p:nvGrpSpPr>
+        <p:cNvPr id="1" name=""/>
+        <p:cNvGrpSpPr/>
+        <p:nvPr/>
+      </p:nvGrpSpPr>
+      <p:grpSpPr>
+        <a:xfrm>
+          <a:off x="0" y="0"/>
+          <a:ext cx="0" cy="0"/>
+          <a:chOff x="0" y="0"/>
+          <a:chExt cx="0" cy="0"/>
+        </a:xfrm>
+      </p:grpSpPr>
+      <p:sp>
+        <p:nvSpPr>
+          <p:cNvPr id="2" name="Shape 0"/>
+          <p:cNvSpPr/>
+          <p:nvPr/>
+        </p:nvSpPr>
+        <p:spPr>
+          <a:xfrm>
+            <a:off x="8686800" y="1905000"/>
+            <a:ext cx="863600" cy="863600"/>
+          </a:xfrm>
+          <a:prstGeom prst="rect">
+            <a:avLst/>
+          </a:prstGeom>
+          <a:solidFill>
+            <a:srgbClr val="D47BA3"/>
+          </a:solidFill>
+          <a:ln/>
+        </p:spPr>
+        <p:txBody>
+          <a:bodyPr/>
+          <a:lstStyle/>
+          <a:p>
+            <a:pPr marL="0" marR="0" lvl="0" indent="0" algn="l" defTabSz="914400" rtl="0" eaLnBrk="1" fontAlgn="auto" latinLnBrk="0" hangingPunct="1">
+              <a:lnSpc>
+                <a:spcPct val="100000"/>
+              </a:lnSpc>
+              <a:spcBef>
+                <a:spcPts val="0"/>
+              </a:spcBef>
+              <a:spcAft>
+                <a:spcPts val="0"/>
+              </a:spcAft>
+              <a:buClrTx/>
+              <a:buSzTx/>
+              <a:buFontTx/>
+              <a:buNone/>
+              <a:tabLst/>
+              <a:defRPr/>
+            </a:pPr>
+            <a:endParaRPr kumimoji="0" lang="en-CA" sz="1800" b="0" i="0" u="none" strike="noStrike" kern="1200" cap="none" spc="0" normalizeH="0" baseline="0" noProof="0">
+              <a:ln>
+                <a:noFill/>
+              </a:ln>
+              <a:solidFill>
+                <a:srgbClr val="2B2B30"/>
+              </a:solidFill>
+              <a:effectLst/>
+              <a:uLnTx/>
+              <a:uFillTx/>
+              <a:latin typeface="Public Sans"/>
+              <a:ea typeface="+mn-ea"/>
+              <a:cs typeface="+mn-cs"/>
+            </a:endParaRPr>
+          </a:p>
+        </p:txBody>
+      </p:sp>
+      <p:sp>
+        <p:nvSpPr>
+          <p:cNvPr id="3" name="Shape 1"/>
+          <p:cNvSpPr/>
+          <p:nvPr/>
+        </p:nvSpPr>
+        <p:spPr>
+          <a:xfrm>
+            <a:off x="9601200" y="1905000"/>
+            <a:ext cx="863600" cy="863600"/>
+          </a:xfrm>
+          <a:prstGeom prst="rect">
+            <a:avLst/>
+          </a:prstGeom>
+          <a:solidFill>
+            <a:srgbClr val="9E6B92"/>
+          </a:solidFill>
+          <a:ln/>
+        </p:spPr>
+        <p:txBody>
+          <a:bodyPr/>
+          <a:lstStyle/>
+          <a:p>
+            <a:pPr marL="0" marR="0" lvl="0" indent="0" algn="l" defTabSz="914400" rtl="0" eaLnBrk="1" fontAlgn="auto" latinLnBrk="0" hangingPunct="1">
+              <a:lnSpc>
+                <a:spcPct val="100000"/>
+              </a:lnSpc>
+              <a:spcBef>
+                <a:spcPts val="0"/>
+              </a:spcBef>
+              <a:spcAft>
+                <a:spcPts val="0"/>
+              </a:spcAft>
+              <a:buClrTx/>
+              <a:buSzTx/>
+              <a:buFontTx/>
+              <a:buNone/>
+              <a:tabLst/>
+              <a:defRPr/>
+            </a:pPr>
+            <a:endParaRPr kumimoji="0" lang="en-CA" sz="1800" b="0" i="0" u="none" strike="noStrike" kern="1200" cap="none" spc="0" normalizeH="0" baseline="0" noProof="0">
+              <a:ln>
+                <a:noFill/>
+              </a:ln>
+              <a:solidFill>
+                <a:srgbClr val="2B2B30"/>
+              </a:solidFill>
+              <a:effectLst/>
+              <a:uLnTx/>
+              <a:uFillTx/>
+              <a:latin typeface="Public Sans"/>
+              <a:ea typeface="+mn-ea"/>
+              <a:cs typeface="+mn-cs"/>
+            </a:endParaRPr>
+          </a:p>
+        </p:txBody>
+      </p:sp>
+      <p:sp>
+        <p:nvSpPr>
+          <p:cNvPr id="4" name="Shape 2"/>
+          <p:cNvSpPr/>
+          <p:nvPr/>
+        </p:nvSpPr>
+        <p:spPr>
+          <a:xfrm>
+            <a:off x="10515600" y="1905000"/>
+            <a:ext cx="863600" cy="863600"/>
+          </a:xfrm>
+          <a:prstGeom prst="rect">
+            <a:avLst/>
+          </a:prstGeom>
+          <a:solidFill>
+            <a:srgbClr val="4A4A78"/>
+          </a:solidFill>
+          <a:ln/>
+        </p:spPr>
+        <p:txBody>
+          <a:bodyPr/>
+          <a:lstStyle/>
+          <a:p>
+            <a:pPr marL="0" marR="0" lvl="0" indent="0" algn="l" defTabSz="914400" rtl="0" eaLnBrk="1" fontAlgn="auto" latinLnBrk="0" hangingPunct="1">
+              <a:lnSpc>
+                <a:spcPct val="100000"/>
+              </a:lnSpc>
+              <a:spcBef>
+                <a:spcPts val="0"/>
+              </a:spcBef>
+              <a:spcAft>
+                <a:spcPts val="0"/>
+              </a:spcAft>
+              <a:buClrTx/>
+              <a:buSzTx/>
+              <a:buFontTx/>
+              <a:buNone/>
+              <a:tabLst/>
+              <a:defRPr/>
+            </a:pPr>
+            <a:endParaRPr kumimoji="0" lang="en-CA" sz="1800" b="0" i="0" u="none" strike="noStrike" kern="1200" cap="none" spc="0" normalizeH="0" baseline="0" noProof="0">
+              <a:ln>
+                <a:noFill/>
+              </a:ln>
+              <a:solidFill>
+                <a:srgbClr val="2B2B30"/>
+              </a:solidFill>
+              <a:effectLst/>
+              <a:uLnTx/>
+              <a:uFillTx/>
+              <a:latin typeface="Public Sans"/>
+              <a:ea typeface="+mn-ea"/>
+              <a:cs typeface="+mn-cs"/>
+            </a:endParaRPr>
+          </a:p>
+        </p:txBody>
+      </p:sp>
+      <p:sp>
+        <p:nvSpPr>
+          <p:cNvPr id="5" name="Shape 3"/>
+          <p:cNvSpPr/>
+          <p:nvPr/>
+        </p:nvSpPr>
+        <p:spPr>
+          <a:xfrm>
+            <a:off x="8686800" y="2819400"/>
+            <a:ext cx="863600" cy="863600"/>
+          </a:xfrm>
+          <a:prstGeom prst="rect">
+            <a:avLst/>
+          </a:prstGeom>
+          <a:solidFill>
+            <a:srgbClr val="DBB7CF"/>
+          </a:solidFill>
+          <a:ln/>
+        </p:spPr>
+        <p:txBody>
+          <a:bodyPr/>
+          <a:lstStyle/>
+          <a:p>
+            <a:pPr marL="0" marR="0" lvl="0" indent="0" algn="l" defTabSz="914400" rtl="0" eaLnBrk="1" fontAlgn="auto" latinLnBrk="0" hangingPunct="1">
+              <a:lnSpc>
+                <a:spcPct val="100000"/>
+              </a:lnSpc>
+              <a:spcBef>
+                <a:spcPts val="0"/>
+              </a:spcBef>
+              <a:spcAft>
+                <a:spcPts val="0"/>
+              </a:spcAft>
+              <a:buClrTx/>
+              <a:buSzTx/>
+              <a:buFontTx/>
+              <a:buNone/>
+              <a:tabLst/>
+              <a:defRPr/>
+            </a:pPr>
+            <a:endParaRPr kumimoji="0" lang="en-CA" sz="1800" b="0" i="0" u="none" strike="noStrike" kern="1200" cap="none" spc="0" normalizeH="0" baseline="0" noProof="0">
+              <a:ln>
+                <a:noFill/>
+              </a:ln>
+              <a:solidFill>
+                <a:srgbClr val="2B2B30"/>
+              </a:solidFill>
+              <a:effectLst/>
+              <a:uLnTx/>
+              <a:uFillTx/>
+              <a:latin typeface="Public Sans"/>
+              <a:ea typeface="+mn-ea"/>
+              <a:cs typeface="+mn-cs"/>
+            </a:endParaRPr>
+          </a:p>
+        </p:txBody>
+      </p:sp>
+      <p:sp>
+        <p:nvSpPr>
+          <p:cNvPr id="6" name="Shape 4"/>
+          <p:cNvSpPr/>
+          <p:nvPr/>
+        </p:nvSpPr>
+        <p:spPr>
+          <a:xfrm>
+            <a:off x="9601200" y="2819400"/>
+            <a:ext cx="863600" cy="863600"/>
+          </a:xfrm>
+          <a:prstGeom prst="rect">
+            <a:avLst/>
+          </a:prstGeom>
+          <a:solidFill>
+            <a:srgbClr val="A3A3C8"/>
+          </a:solidFill>
+          <a:ln/>
+        </p:spPr>
+        <p:txBody>
+          <a:bodyPr/>
+          <a:lstStyle/>
+          <a:p>
+            <a:pPr marL="0" marR="0" lvl="0" indent="0" algn="l" defTabSz="914400" rtl="0" eaLnBrk="1" fontAlgn="auto" latinLnBrk="0" hangingPunct="1">
+              <a:lnSpc>
+                <a:spcPct val="100000"/>
+              </a:lnSpc>
+              <a:spcBef>
+                <a:spcPts val="0"/>
+              </a:spcBef>
+              <a:spcAft>
+                <a:spcPts val="0"/>
+              </a:spcAft>
+              <a:buClrTx/>
+              <a:buSzTx/>
+              <a:buFontTx/>
+              <a:buNone/>
+              <a:tabLst/>
+              <a:defRPr/>
+            </a:pPr>
+            <a:endParaRPr kumimoji="0" lang="en-CA" sz="1800" b="0" i="0" u="none" strike="noStrike" kern="1200" cap="none" spc="0" normalizeH="0" baseline="0" noProof="0">
+              <a:ln>
+                <a:noFill/>
+              </a:ln>
+              <a:solidFill>
+                <a:srgbClr val="2B2B30"/>
+              </a:solidFill>
+              <a:effectLst/>
+              <a:uLnTx/>
+              <a:uFillTx/>
+              <a:latin typeface="Public Sans"/>
+              <a:ea typeface="+mn-ea"/>
+              <a:cs typeface="+mn-cs"/>
+            </a:endParaRPr>
+          </a:p>
+        </p:txBody>
+      </p:sp>
+      <p:sp>
+        <p:nvSpPr>
+          <p:cNvPr id="7" name="Shape 5"/>
+          <p:cNvSpPr/>
+          <p:nvPr/>
+        </p:nvSpPr>
+        <p:spPr>
+          <a:xfrm>
+            <a:off x="10515600" y="2819400"/>
+            <a:ext cx="863600" cy="863600"/>
+          </a:xfrm>
+          <a:prstGeom prst="rect">
+            <a:avLst/>
+          </a:prstGeom>
+          <a:solidFill>
+            <a:srgbClr val="56709E"/>
+          </a:solidFill>
+          <a:ln/>
+        </p:spPr>
+        <p:txBody>
+          <a:bodyPr/>
+          <a:lstStyle/>
+          <a:p>
+            <a:pPr marL="0" marR="0" lvl="0" indent="0" algn="l" defTabSz="914400" rtl="0" eaLnBrk="1" fontAlgn="auto" latinLnBrk="0" hangingPunct="1">
+              <a:lnSpc>
+                <a:spcPct val="100000"/>
+              </a:lnSpc>
+              <a:spcBef>
+                <a:spcPts val="0"/>
+              </a:spcBef>
+              <a:spcAft>
+                <a:spcPts val="0"/>
+              </a:spcAft>
+              <a:buClrTx/>
+              <a:buSzTx/>
+              <a:buFontTx/>
+              <a:buNone/>
+              <a:tabLst/>
+              <a:defRPr/>
+            </a:pPr>
+            <a:endParaRPr kumimoji="0" lang="en-CA" sz="1800" b="0" i="0" u="none" strike="noStrike" kern="1200" cap="none" spc="0" normalizeH="0" baseline="0" noProof="0">
+              <a:ln>
+                <a:noFill/>
+              </a:ln>
+              <a:solidFill>
+                <a:srgbClr val="2B2B30"/>
+              </a:solidFill>
+              <a:effectLst/>
+              <a:uLnTx/>
+              <a:uFillTx/>
+              <a:latin typeface="Public Sans"/>
+              <a:ea typeface="+mn-ea"/>
+              <a:cs typeface="+mn-cs"/>
+            </a:endParaRPr>
+          </a:p>
+        </p:txBody>
+      </p:sp>
+      <p:sp>
+        <p:nvSpPr>
+          <p:cNvPr id="8" name="Shape 6"/>
+          <p:cNvSpPr/>
+          <p:nvPr/>
+        </p:nvSpPr>
+        <p:spPr>
+          <a:xfrm>
+            <a:off x="8686800" y="3733800"/>
+            <a:ext cx="863600" cy="863600"/>
+          </a:xfrm>
+          <a:prstGeom prst="rect">
+            <a:avLst/>
+          </a:prstGeom>
+          <a:solidFill>
+            <a:srgbClr val="EAE1D2"/>
+          </a:solidFill>
+          <a:ln/>
+        </p:spPr>
+        <p:txBody>
+          <a:bodyPr/>
+          <a:lstStyle/>
+          <a:p>
+            <a:pPr marL="0" marR="0" lvl="0" indent="0" algn="l" defTabSz="914400" rtl="0" eaLnBrk="1" fontAlgn="auto" latinLnBrk="0" hangingPunct="1">
+              <a:lnSpc>
+                <a:spcPct val="100000"/>
+              </a:lnSpc>
+              <a:spcBef>
+                <a:spcPts val="0"/>
+              </a:spcBef>
+              <a:spcAft>
+                <a:spcPts val="0"/>
+              </a:spcAft>
+              <a:buClrTx/>
+              <a:buSzTx/>
+              <a:buFontTx/>
+              <a:buNone/>
+              <a:tabLst/>
+              <a:defRPr/>
+            </a:pPr>
+            <a:endParaRPr kumimoji="0" lang="en-CA" sz="1800" b="0" i="0" u="none" strike="noStrike" kern="1200" cap="none" spc="0" normalizeH="0" baseline="0" noProof="0">
+              <a:ln>
+                <a:noFill/>
+              </a:ln>
+              <a:solidFill>
+                <a:srgbClr val="2B2B30"/>
+              </a:solidFill>
+              <a:effectLst/>
+              <a:uLnTx/>
+              <a:uFillTx/>
+              <a:latin typeface="Public Sans"/>
+              <a:ea typeface="+mn-ea"/>
+              <a:cs typeface="+mn-cs"/>
+            </a:endParaRPr>
+          </a:p>
+        </p:txBody>
+      </p:sp>
+      <p:sp>
+        <p:nvSpPr>
+          <p:cNvPr id="9" name="Shape 7"/>
+          <p:cNvSpPr/>
+          <p:nvPr/>
+        </p:nvSpPr>
+        <p:spPr>
+          <a:xfrm>
+            <a:off x="9601200" y="3733800"/>
+            <a:ext cx="863600" cy="863600"/>
+          </a:xfrm>
+          <a:prstGeom prst="rect">
+            <a:avLst/>
+          </a:prstGeom>
+          <a:solidFill>
+            <a:srgbClr val="B5C0DA"/>
+          </a:solidFill>
+          <a:ln/>
+        </p:spPr>
+        <p:txBody>
+          <a:bodyPr/>
+          <a:lstStyle/>
+          <a:p>
+            <a:pPr marL="0" marR="0" lvl="0" indent="0" algn="l" defTabSz="914400" rtl="0" eaLnBrk="1" fontAlgn="auto" latinLnBrk="0" hangingPunct="1">
+              <a:lnSpc>
+                <a:spcPct val="100000"/>
+              </a:lnSpc>
+              <a:spcBef>
+                <a:spcPts val="0"/>
+              </a:spcBef>
+              <a:spcAft>
+                <a:spcPts val="0"/>
+              </a:spcAft>
+              <a:buClrTx/>
+              <a:buSzTx/>
+              <a:buFontTx/>
+              <a:buNone/>
+              <a:tabLst/>
+              <a:defRPr/>
+            </a:pPr>
+            <a:endParaRPr kumimoji="0" lang="en-CA" sz="1800" b="0" i="0" u="none" strike="noStrike" kern="1200" cap="none" spc="0" normalizeH="0" baseline="0" noProof="0">
+              <a:ln>
+                <a:noFill/>
+              </a:ln>
+              <a:solidFill>
+                <a:srgbClr val="2B2B30"/>
+              </a:solidFill>
+              <a:effectLst/>
+              <a:uLnTx/>
+              <a:uFillTx/>
+              <a:latin typeface="Public Sans"/>
+              <a:ea typeface="+mn-ea"/>
+              <a:cs typeface="+mn-cs"/>
+            </a:endParaRPr>
+          </a:p>
+        </p:txBody>
+      </p:sp>
+      <p:sp>
+        <p:nvSpPr>
+          <p:cNvPr id="10" name="Shape 8"/>
+          <p:cNvSpPr/>
+          <p:nvPr/>
+        </p:nvSpPr>
+        <p:spPr>
+          <a:xfrm>
+            <a:off x="10515600" y="3733800"/>
+            <a:ext cx="863600" cy="863600"/>
+          </a:xfrm>
+          <a:prstGeom prst="rect">
+            <a:avLst/>
+          </a:prstGeom>
+          <a:solidFill>
+            <a:srgbClr val="6C83B5"/>
+          </a:solidFill>
+          <a:ln/>
+        </p:spPr>
+        <p:txBody>
+          <a:bodyPr/>
+          <a:lstStyle/>
+          <a:p>
+            <a:pPr marL="0" marR="0" lvl="0" indent="0" algn="l" defTabSz="914400" rtl="0" eaLnBrk="1" fontAlgn="auto" latinLnBrk="0" hangingPunct="1">
+              <a:lnSpc>
+                <a:spcPct val="100000"/>
+              </a:lnSpc>
+              <a:spcBef>
+                <a:spcPts val="0"/>
+              </a:spcBef>
+              <a:spcAft>
+                <a:spcPts val="0"/>
+              </a:spcAft>
+              <a:buClrTx/>
+              <a:buSzTx/>
+              <a:buFontTx/>
+              <a:buNone/>
+              <a:tabLst/>
+              <a:defRPr/>
+            </a:pPr>
+            <a:endParaRPr kumimoji="0" lang="en-CA" sz="1800" b="0" i="0" u="none" strike="noStrike" kern="1200" cap="none" spc="0" normalizeH="0" baseline="0" noProof="0">
+              <a:ln>
+                <a:noFill/>
+              </a:ln>
+              <a:solidFill>
+                <a:srgbClr val="2B2B30"/>
+              </a:solidFill>
+              <a:effectLst/>
+              <a:uLnTx/>
+              <a:uFillTx/>
+              <a:latin typeface="Public Sans"/>
+              <a:ea typeface="+mn-ea"/>
+              <a:cs typeface="+mn-cs"/>
+            </a:endParaRPr>
+          </a:p>
+        </p:txBody>
+      </p:sp>
+      <p:sp>
+        <p:nvSpPr>
+          <p:cNvPr id="11" name="Text 9"/>
+          <p:cNvSpPr>
+            <a:spLocks noGrp="1"/>
+          </p:cNvSpPr>
+          <p:nvPr>
+            <p:ph type="title"/>
+          </p:nvPr>
+        </p:nvSpPr>
+        <p:spPr>
+          <a:xfrm>
+            <a:off x="812800" y="2771142"/>
+            <a:ext cx="7194550" cy="695960"/>
+          </a:xfrm>
+          <a:prstGeom prst="rect">
+            <a:avLst/>
+          </a:prstGeom>
+          <a:noFill/>
+          <a:ln/>
+        </p:spPr>
+        <p:txBody>
+          <a:bodyPr wrap="square" lIns="0" tIns="0" rIns="0" bIns="0" rtlCol="0" anchor="t">
+            <a:normAutofit/>
+          </a:bodyPr>
+          <a:lstStyle/>
+          <a:p>
+            <a:pPr marL="0" indent="0" algn="l">
+              <a:lnSpc>
+                <a:spcPts val="5280"/>
+              </a:lnSpc>
+              <a:buNone/>
+            </a:pPr>
+            <a:r>
+              <a:rPr lang="en-US" sz="4800" b="1" i="0" dirty="0">
+                <a:solidFill>
+                  <a:srgbClr val="F4EEE3"/>
+                </a:solidFill>
+                <a:latin typeface="Libre Baskerville" pitchFamily="18" charset="0"/>
+                <a:ea typeface="Libre Baskerville" pitchFamily="18" charset="-122"/>
+                <a:cs typeface="Libre Baskerville" pitchFamily="18" charset="-120"/>
+              </a:rPr>
+              <a:t>Thank you</a:t>
+            </a:r>
+            <a:endParaRPr lang="en-US" sz="4800" dirty="0"/>
+          </a:p>
+        </p:txBody>
+      </p:sp>
+      <p:sp>
+        <p:nvSpPr>
+          <p:cNvPr id="12" name="Text 10"/>
+          <p:cNvSpPr/>
+          <p:nvPr/>
+        </p:nvSpPr>
+        <p:spPr>
+          <a:xfrm>
+            <a:off x="812800" y="3695700"/>
+            <a:ext cx="7194550" cy="416560"/>
+          </a:xfrm>
+          <a:prstGeom prst="rect">
+            <a:avLst/>
+          </a:prstGeom>
+          <a:noFill/>
+          <a:ln/>
+        </p:spPr>
+        <p:txBody>
+          <a:bodyPr wrap="square" lIns="0" tIns="0" rIns="0" bIns="0" rtlCol="0" anchor="t">
+            <a:normAutofit/>
+          </a:bodyPr>
+          <a:lstStyle/>
+          <a:p>
+            <a:pPr marL="0" marR="0" lvl="0" indent="0" algn="l" defTabSz="914400" rtl="0" eaLnBrk="1" fontAlgn="auto" latinLnBrk="0" hangingPunct="1">
+              <a:lnSpc>
+                <a:spcPts val="3080"/>
+              </a:lnSpc>
+              <a:spcBef>
+                <a:spcPts val="0"/>
+              </a:spcBef>
+              <a:spcAft>
+                <a:spcPts val="0"/>
+              </a:spcAft>
+              <a:buClrTx/>
+              <a:buSzTx/>
+              <a:buFontTx/>
+              <a:buNone/>
+              <a:tabLst/>
+              <a:defRPr/>
+            </a:pPr>
+            <a:r>
+              <a:rPr kumimoji="0" lang="en-US" sz="2200" b="0" i="0" u="none" strike="noStrike" kern="1200" cap="none" spc="0" normalizeH="0" baseline="0" noProof="0" dirty="0">
+                <a:ln>
+                  <a:noFill/>
+                </a:ln>
+                <a:solidFill>
+                  <a:srgbClr val="E39BBE"/>
+                </a:solidFill>
+                <a:effectLst/>
+                <a:uLnTx/>
+                <a:uFillTx/>
+                <a:latin typeface="Public Sans" pitchFamily="34" charset="0"/>
+                <a:ea typeface="Public Sans" pitchFamily="34" charset="-122"/>
+                <a:cs typeface="Public Sans" pitchFamily="34" charset="-120"/>
+              </a:rPr>
+              <a:t>Questions?</a:t>
+            </a:r>
+            <a:endParaRPr kumimoji="0" lang="en-US" sz="2200" b="0" i="0" u="none" strike="noStrike" kern="1200" cap="none" spc="0" normalizeH="0" baseline="0" noProof="0" dirty="0">
+              <a:ln>
+                <a:noFill/>
+              </a:ln>
+              <a:solidFill>
+                <a:srgbClr val="2B2B30"/>
+              </a:solidFill>
+              <a:effectLst/>
+              <a:uLnTx/>
+              <a:uFillTx/>
+              <a:ea typeface="+mn-ea"/>
+              <a:cs typeface="+mn-cs"/>
+            </a:endParaRPr>
+          </a:p>
+        </p:txBody>
+      </p:sp>
+      <p:sp>
+        <p:nvSpPr>
+          <p:cNvPr id="13" name="Text 11"/>
+          <p:cNvSpPr/>
+          <p:nvPr/>
+        </p:nvSpPr>
+        <p:spPr>
+          <a:xfrm>
+            <a:off x="812800" y="5999479"/>
+            <a:ext cx="7194550" cy="274320"/>
+          </a:xfrm>
+          <a:prstGeom prst="rect">
+            <a:avLst/>
+          </a:prstGeom>
+          <a:noFill/>
+          <a:ln/>
+        </p:spPr>
+        <p:txBody>
+          <a:bodyPr wrap="square" lIns="0" tIns="0" rIns="0" bIns="0" rtlCol="0" anchor="t">
+            <a:normAutofit/>
+          </a:bodyPr>
+          <a:lstStyle/>
+          <a:p>
+            <a:pPr marL="0" marR="0" lvl="0" indent="0" algn="l" defTabSz="914400" rtl="0" eaLnBrk="1" fontAlgn="auto" latinLnBrk="0" hangingPunct="1">
+              <a:lnSpc>
+                <a:spcPts val="1960"/>
+              </a:lnSpc>
+              <a:spcBef>
+                <a:spcPts val="0"/>
+              </a:spcBef>
+              <a:spcAft>
+                <a:spcPts val="0"/>
+              </a:spcAft>
+              <a:buClrTx/>
+              <a:buSzTx/>
+              <a:buFontTx/>
+              <a:buNone/>
+              <a:tabLst/>
+              <a:defRPr/>
+            </a:pPr>
+            <a:endParaRPr kumimoji="0" lang="en-US" sz="1400" b="0" i="0" u="none" strike="noStrike" kern="1200" cap="none" spc="0" normalizeH="0" baseline="0" noProof="0" dirty="0">
+              <a:ln>
+                <a:noFill/>
+              </a:ln>
+              <a:solidFill>
+                <a:srgbClr val="2B2B30"/>
+              </a:solidFill>
+              <a:effectLst/>
+              <a:uLnTx/>
+              <a:uFillTx/>
+              <a:latin typeface="Public Sans"/>
+              <a:ea typeface="+mn-ea"/>
+              <a:cs typeface="+mn-cs"/>
+            </a:endParaRPr>
           </a:p>
         </p:txBody>
       </p:sp>

--- a/Calgary_Traffic_Midpoint.pptx
+++ b/Calgary_Traffic_Midpoint.pptx
@@ -6727,7 +6727,7 @@
                 <a:ea typeface="Public Sans" pitchFamily="34" charset="-122"/>
                 <a:cs typeface="Public Sans" pitchFamily="34" charset="-120"/>
               </a:rPr>
-              <a:t>DAX turns raw rows into numbers that update with every click, like rate vs. city average and the busiest hour.</a:t>
+              <a:t>DAX turns rows into numbers that update with every click, like rate vs. city average and the busiest hour.</a:t>
             </a:r>
             <a:endParaRPr lang="en-US" sz="1200" dirty="0"/>
           </a:p>
